--- a/docs/deck/final-demo.pptx
+++ b/docs/deck/final-demo.pptx
@@ -13,11 +13,6 @@
     <p:sldId id="261" r:id="rId13"/>
     <p:sldId id="262" r:id="rId14"/>
     <p:sldId id="263" r:id="rId15"/>
-    <p:sldId id="264" r:id="rId16"/>
-    <p:sldId id="265" r:id="rId17"/>
-    <p:sldId id="266" r:id="rId18"/>
-    <p:sldId id="267" r:id="rId19"/>
-    <p:sldId id="268" r:id="rId20"/>
   </p:sldIdLst>
   <p:sldSz cx="12191695" cy="6858000" type="screen4x3"/>
   <p:notesSz cx="6858000" cy="9144000"/>
@@ -539,286 +534,6 @@
 </p:notes>
 </file>
 
-<file path=ppt/notesSlides/notesSlide10.xml><?xml version="1.0" encoding="utf-8"?>
-<p:notes xmlns:a="http://schemas.openxmlformats.org/drawingml/2006/main" xmlns:p="http://schemas.openxmlformats.org/presentationml/2006/main" xmlns:r="http://schemas.openxmlformats.org/officeDocument/2006/relationships">
-  <p:cSld>
-    <p:spTree>
-      <p:nvGrpSpPr>
-        <p:cNvPr id="1" name=""/>
-        <p:cNvGrpSpPr/>
-        <p:nvPr/>
-      </p:nvGrpSpPr>
-      <p:grpSpPr>
-        <a:xfrm>
-          <a:off x="0" y="0"/>
-          <a:ext cx="0" cy="0"/>
-          <a:chOff x="0" y="0"/>
-          <a:chExt cx="0" cy="0"/>
-        </a:xfrm>
-      </p:grpSpPr>
-      <p:sp>
-        <p:nvSpPr>
-          <p:cNvPr id="2" name="Slide Image Placeholder 1"/>
-          <p:cNvSpPr>
-            <a:spLocks noGrp="1"/>
-          </p:cNvSpPr>
-          <p:nvPr>
-            <p:ph type="sldImg" idx="2"/>
-          </p:nvPr>
-        </p:nvSpPr>
-        <p:spPr/>
-      </p:sp>
-      <p:sp>
-        <p:nvSpPr>
-          <p:cNvPr id="3" name="Notes Placeholder 2"/>
-          <p:cNvSpPr>
-            <a:spLocks noGrp="1"/>
-          </p:cNvSpPr>
-          <p:nvPr>
-            <p:ph type="body" idx="3" sz="quarter"/>
-          </p:nvPr>
-        </p:nvSpPr>
-        <p:spPr/>
-        <p:txBody>
-          <a:bodyPr/>
-          <a:lstStyle/>
-          <a:p>
-            <a:r>
-              <a:t>You can only show that something scales when it is the thing that is constrained. Step 10 got this wrong — it varied parallelism while Flink already had every core it could use, and the answer came back flat.</a:t>
-            </a:r>
-          </a:p>
-        </p:txBody>
-      </p:sp>
-      <p:sp>
-        <p:nvSpPr>
-          <p:cNvPr id="4" name="Slide Number Placeholder 3"/>
-          <p:cNvSpPr>
-            <a:spLocks noGrp="1"/>
-          </p:cNvSpPr>
-          <p:nvPr>
-            <p:ph type="sldNum" idx="5" sz="quarter"/>
-          </p:nvPr>
-        </p:nvSpPr>
-        <p:spPr/>
-      </p:sp>
-    </p:spTree>
-  </p:cSld>
-  <p:clrMapOvr>
-    <a:masterClrMapping/>
-  </p:clrMapOvr>
-</p:notes>
-</file>
-
-<file path=ppt/notesSlides/notesSlide11.xml><?xml version="1.0" encoding="utf-8"?>
-<p:notes xmlns:a="http://schemas.openxmlformats.org/drawingml/2006/main" xmlns:p="http://schemas.openxmlformats.org/presentationml/2006/main" xmlns:r="http://schemas.openxmlformats.org/officeDocument/2006/relationships">
-  <p:cSld>
-    <p:spTree>
-      <p:nvGrpSpPr>
-        <p:cNvPr id="1" name=""/>
-        <p:cNvGrpSpPr/>
-        <p:nvPr/>
-      </p:nvGrpSpPr>
-      <p:grpSpPr>
-        <a:xfrm>
-          <a:off x="0" y="0"/>
-          <a:ext cx="0" cy="0"/>
-          <a:chOff x="0" y="0"/>
-          <a:chExt cx="0" cy="0"/>
-        </a:xfrm>
-      </p:grpSpPr>
-      <p:sp>
-        <p:nvSpPr>
-          <p:cNvPr id="2" name="Slide Image Placeholder 1"/>
-          <p:cNvSpPr>
-            <a:spLocks noGrp="1"/>
-          </p:cNvSpPr>
-          <p:nvPr>
-            <p:ph type="sldImg" idx="2"/>
-          </p:nvPr>
-        </p:nvSpPr>
-        <p:spPr/>
-      </p:sp>
-      <p:sp>
-        <p:nvSpPr>
-          <p:cNvPr id="3" name="Notes Placeholder 2"/>
-          <p:cNvSpPr>
-            <a:spLocks noGrp="1"/>
-          </p:cNvSpPr>
-          <p:nvPr>
-            <p:ph type="body" idx="3" sz="quarter"/>
-          </p:nvPr>
-        </p:nvSpPr>
-        <p:spPr/>
-        <p:txBody>
-          <a:bodyPr/>
-          <a:lstStyle/>
-          <a:p>
-            <a:r>
-              <a:t>Only show this if asked where it stops. The demo pair is 2 and 4.</a:t>
-            </a:r>
-          </a:p>
-        </p:txBody>
-      </p:sp>
-      <p:sp>
-        <p:nvSpPr>
-          <p:cNvPr id="4" name="Slide Number Placeholder 3"/>
-          <p:cNvSpPr>
-            <a:spLocks noGrp="1"/>
-          </p:cNvSpPr>
-          <p:nvPr>
-            <p:ph type="sldNum" idx="5" sz="quarter"/>
-          </p:nvPr>
-        </p:nvSpPr>
-        <p:spPr/>
-      </p:sp>
-    </p:spTree>
-  </p:cSld>
-  <p:clrMapOvr>
-    <a:masterClrMapping/>
-  </p:clrMapOvr>
-</p:notes>
-</file>
-
-<file path=ppt/notesSlides/notesSlide12.xml><?xml version="1.0" encoding="utf-8"?>
-<p:notes xmlns:a="http://schemas.openxmlformats.org/drawingml/2006/main" xmlns:p="http://schemas.openxmlformats.org/presentationml/2006/main" xmlns:r="http://schemas.openxmlformats.org/officeDocument/2006/relationships">
-  <p:cSld>
-    <p:spTree>
-      <p:nvGrpSpPr>
-        <p:cNvPr id="1" name=""/>
-        <p:cNvGrpSpPr/>
-        <p:nvPr/>
-      </p:nvGrpSpPr>
-      <p:grpSpPr>
-        <a:xfrm>
-          <a:off x="0" y="0"/>
-          <a:ext cx="0" cy="0"/>
-          <a:chOff x="0" y="0"/>
-          <a:chExt cx="0" cy="0"/>
-        </a:xfrm>
-      </p:grpSpPr>
-      <p:sp>
-        <p:nvSpPr>
-          <p:cNvPr id="2" name="Slide Image Placeholder 1"/>
-          <p:cNvSpPr>
-            <a:spLocks noGrp="1"/>
-          </p:cNvSpPr>
-          <p:nvPr>
-            <p:ph type="sldImg" idx="2"/>
-          </p:nvPr>
-        </p:nvSpPr>
-        <p:spPr/>
-      </p:sp>
-      <p:sp>
-        <p:nvSpPr>
-          <p:cNvPr id="3" name="Notes Placeholder 2"/>
-          <p:cNvSpPr>
-            <a:spLocks noGrp="1"/>
-          </p:cNvSpPr>
-          <p:nvPr>
-            <p:ph type="body" idx="3" sz="quarter"/>
-          </p:nvPr>
-        </p:nvSpPr>
-        <p:spPr/>
-        <p:txBody>
-          <a:bodyPr/>
-          <a:lstStyle/>
-          <a:p>
-            <a:r>
-              <a:t>Do not volunteer this. It is an answer to one question, not a slide in the flow.</a:t>
-            </a:r>
-          </a:p>
-        </p:txBody>
-      </p:sp>
-      <p:sp>
-        <p:nvSpPr>
-          <p:cNvPr id="4" name="Slide Number Placeholder 3"/>
-          <p:cNvSpPr>
-            <a:spLocks noGrp="1"/>
-          </p:cNvSpPr>
-          <p:nvPr>
-            <p:ph type="sldNum" idx="5" sz="quarter"/>
-          </p:nvPr>
-        </p:nvSpPr>
-        <p:spPr/>
-      </p:sp>
-    </p:spTree>
-  </p:cSld>
-  <p:clrMapOvr>
-    <a:masterClrMapping/>
-  </p:clrMapOvr>
-</p:notes>
-</file>
-
-<file path=ppt/notesSlides/notesSlide13.xml><?xml version="1.0" encoding="utf-8"?>
-<p:notes xmlns:a="http://schemas.openxmlformats.org/drawingml/2006/main" xmlns:p="http://schemas.openxmlformats.org/presentationml/2006/main" xmlns:r="http://schemas.openxmlformats.org/officeDocument/2006/relationships">
-  <p:cSld>
-    <p:spTree>
-      <p:nvGrpSpPr>
-        <p:cNvPr id="1" name=""/>
-        <p:cNvGrpSpPr/>
-        <p:nvPr/>
-      </p:nvGrpSpPr>
-      <p:grpSpPr>
-        <a:xfrm>
-          <a:off x="0" y="0"/>
-          <a:ext cx="0" cy="0"/>
-          <a:chOff x="0" y="0"/>
-          <a:chExt cx="0" cy="0"/>
-        </a:xfrm>
-      </p:grpSpPr>
-      <p:sp>
-        <p:nvSpPr>
-          <p:cNvPr id="2" name="Slide Image Placeholder 1"/>
-          <p:cNvSpPr>
-            <a:spLocks noGrp="1"/>
-          </p:cNvSpPr>
-          <p:nvPr>
-            <p:ph type="sldImg" idx="2"/>
-          </p:nvPr>
-        </p:nvSpPr>
-        <p:spPr/>
-      </p:sp>
-      <p:sp>
-        <p:nvSpPr>
-          <p:cNvPr id="3" name="Notes Placeholder 2"/>
-          <p:cNvSpPr>
-            <a:spLocks noGrp="1"/>
-          </p:cNvSpPr>
-          <p:nvPr>
-            <p:ph type="body" idx="3" sz="quarter"/>
-          </p:nvPr>
-        </p:nvSpPr>
-        <p:spPr/>
-        <p:txBody>
-          <a:bodyPr/>
-          <a:lstStyle/>
-          <a:p>
-            <a:r>
-              <a:t>The journal records what drove each step, what was decided, and what its review changed. docs/reviews/ has the exchanges verbatim.</a:t>
-            </a:r>
-          </a:p>
-        </p:txBody>
-      </p:sp>
-      <p:sp>
-        <p:nvSpPr>
-          <p:cNvPr id="4" name="Slide Number Placeholder 3"/>
-          <p:cNvSpPr>
-            <a:spLocks noGrp="1"/>
-          </p:cNvSpPr>
-          <p:nvPr>
-            <p:ph type="sldNum" idx="5" sz="quarter"/>
-          </p:nvPr>
-        </p:nvSpPr>
-        <p:spPr/>
-      </p:sp>
-    </p:spTree>
-  </p:cSld>
-  <p:clrMapOvr>
-    <a:masterClrMapping/>
-  </p:clrMapOvr>
-</p:notes>
-</file>
-
 <file path=ppt/notesSlides/notesSlide2.xml><?xml version="1.0" encoding="utf-8"?>
 <p:notes xmlns:a="http://schemas.openxmlformats.org/drawingml/2006/main" xmlns:p="http://schemas.openxmlformats.org/presentationml/2006/main" xmlns:r="http://schemas.openxmlformats.org/officeDocument/2006/relationships">
   <p:cSld>
@@ -1214,7 +929,7 @@
           <a:lstStyle/>
           <a:p>
             <a:r>
-              <a:t>The cost of this guarantee is the latency on the next slide. Don't let anyone read the 518ms as slowness — it is the commit interval, and it is a dial.</a:t>
+              <a:t>Case 2 is the one that settles the broadcast-prices question.</a:t>
             </a:r>
           </a:p>
         </p:txBody>
@@ -1284,77 +999,7 @@
           <a:lstStyle/>
           <a:p>
             <a:r>
-              <a:t>Market value latency is measured from the window close, not the trade — the window is the specification, not a delay to account for.</a:t>
-            </a:r>
-          </a:p>
-        </p:txBody>
-      </p:sp>
-      <p:sp>
-        <p:nvSpPr>
-          <p:cNvPr id="4" name="Slide Number Placeholder 3"/>
-          <p:cNvSpPr>
-            <a:spLocks noGrp="1"/>
-          </p:cNvSpPr>
-          <p:nvPr>
-            <p:ph type="sldNum" idx="5" sz="quarter"/>
-          </p:nvPr>
-        </p:nvSpPr>
-        <p:spPr/>
-      </p:sp>
-    </p:spTree>
-  </p:cSld>
-  <p:clrMapOvr>
-    <a:masterClrMapping/>
-  </p:clrMapOvr>
-</p:notes>
-</file>
-
-<file path=ppt/notesSlides/notesSlide9.xml><?xml version="1.0" encoding="utf-8"?>
-<p:notes xmlns:a="http://schemas.openxmlformats.org/drawingml/2006/main" xmlns:p="http://schemas.openxmlformats.org/presentationml/2006/main" xmlns:r="http://schemas.openxmlformats.org/officeDocument/2006/relationships">
-  <p:cSld>
-    <p:spTree>
-      <p:nvGrpSpPr>
-        <p:cNvPr id="1" name=""/>
-        <p:cNvGrpSpPr/>
-        <p:nvPr/>
-      </p:nvGrpSpPr>
-      <p:grpSpPr>
-        <a:xfrm>
-          <a:off x="0" y="0"/>
-          <a:ext cx="0" cy="0"/>
-          <a:chOff x="0" y="0"/>
-          <a:chExt cx="0" cy="0"/>
-        </a:xfrm>
-      </p:grpSpPr>
-      <p:sp>
-        <p:nvSpPr>
-          <p:cNvPr id="2" name="Slide Image Placeholder 1"/>
-          <p:cNvSpPr>
-            <a:spLocks noGrp="1"/>
-          </p:cNvSpPr>
-          <p:nvPr>
-            <p:ph type="sldImg" idx="2"/>
-          </p:nvPr>
-        </p:nvSpPr>
-        <p:spPr/>
-      </p:sp>
-      <p:sp>
-        <p:nvSpPr>
-          <p:cNvPr id="3" name="Notes Placeholder 2"/>
-          <p:cNvSpPr>
-            <a:spLocks noGrp="1"/>
-          </p:cNvSpPr>
-          <p:nvPr>
-            <p:ph type="body" idx="3" sz="quarter"/>
-          </p:nvPr>
-        </p:nvSpPr>
-        <p:spPr/>
-        <p:txBody>
-          <a:bodyPr/>
-          <a:lstStyle/>
-          <a:p>
-            <a:r>
-              <a:t>Case 2 is the one that settles the broadcast-prices question.</a:t>
+              <a:t>You can only show that something scales when it is the thing that is constrained. Step 10 got this wrong — it varied parallelism while Flink already had every core it could use, and the answer came back flat.</a:t>
             </a:r>
           </a:p>
         </p:txBody>
@@ -4794,7 +4439,7 @@
 </p:sld>
 </file>
 
-<file path=ppt/slides/slide10.xml><?xml version="1.0" encoding="utf-8"?>
+<file path=ppt/slides/slide2.xml><?xml version="1.0" encoding="utf-8"?>
 <p:sld xmlns:a="http://schemas.openxmlformats.org/drawingml/2006/main" xmlns:p="http://schemas.openxmlformats.org/presentationml/2006/main" xmlns:r="http://schemas.openxmlformats.org/officeDocument/2006/relationships">
   <p:cSld>
     <p:spTree>
@@ -4834,7 +4479,7 @@
                 </a:solidFill>
                 <a:latin typeface="Segoe UI"/>
               </a:rPr>
-              <a:t>SCALING</a:t>
+              <a:t>THE PROBLEM</a:t>
             </a:r>
           </a:p>
         </p:txBody>
@@ -4869,7 +4514,7 @@
                 </a:solidFill>
                 <a:latin typeface="Segoe UI"/>
               </a:rPr>
-              <a:t>Double the units, double the throughput</a:t>
+              <a:t>One order becomes four allocations</a:t>
             </a:r>
           </a:p>
         </p:txBody>
@@ -4918,466 +4563,16 @@
           </a:p>
         </p:txBody>
       </p:sp>
-      <p:graphicFrame>
-        <p:nvGraphicFramePr>
-          <p:cNvPr id="5" name="Table 4"/>
-          <p:cNvGraphicFramePr>
-            <a:graphicFrameLocks noGrp="1"/>
-          </p:cNvGraphicFramePr>
-          <p:nvPr/>
-        </p:nvGraphicFramePr>
-        <p:xfrm>
-          <a:off x="685800" y="1746504"/>
-          <a:ext cx="10607040" cy="1133856"/>
-        </p:xfrm>
-        <a:graphic>
-          <a:graphicData uri="http://schemas.openxmlformats.org/drawingml/2006/table">
-            <a:tbl>
-              <a:tblPr bandRow="1">
-                <a:tableStyleId>{5C22544A-7EE6-4342-B048-85BDC9FD1C3A}</a:tableStyleId>
-              </a:tblPr>
-              <a:tblGrid>
-                <a:gridCol w="1188720"/>
-                <a:gridCol w="1828800"/>
-                <a:gridCol w="1828800"/>
-                <a:gridCol w="1920240"/>
-                <a:gridCol w="1828800"/>
-                <a:gridCol w="2011680"/>
-              </a:tblGrid>
-              <a:tr h="402336">
-                <a:tc>
-                  <a:txBody>
-                    <a:bodyPr wrap="square"/>
-                    <a:lstStyle/>
-                    <a:p>
-                      <a:pPr algn="l"/>
-                      <a:r>
-                        <a:rPr sz="1400" b="1" i="0">
-                          <a:solidFill>
-                            <a:srgbClr val="FFFFFF"/>
-                          </a:solidFill>
-                          <a:latin typeface="Segoe UI"/>
-                        </a:rPr>
-                        <a:t>units</a:t>
-                      </a:r>
-                    </a:p>
-                  </a:txBody>
-                  <a:tcPr marL="109728" marR="109728" anchor="ctr">
-                    <a:solidFill>
-                      <a:srgbClr val="14222E"/>
-                    </a:solidFill>
-                  </a:tcPr>
-                </a:tc>
-                <a:tc>
-                  <a:txBody>
-                    <a:bodyPr wrap="square"/>
-                    <a:lstStyle/>
-                    <a:p>
-                      <a:pPr algn="r"/>
-                      <a:r>
-                        <a:rPr sz="1400" b="1" i="0">
-                          <a:solidFill>
-                            <a:srgbClr val="FFFFFF"/>
-                          </a:solidFill>
-                          <a:latin typeface="Segoe UI"/>
-                        </a:rPr>
-                        <a:t>orders/sec</a:t>
-                      </a:r>
-                    </a:p>
-                  </a:txBody>
-                  <a:tcPr marL="109728" marR="109728" anchor="ctr">
-                    <a:solidFill>
-                      <a:srgbClr val="14222E"/>
-                    </a:solidFill>
-                  </a:tcPr>
-                </a:tc>
-                <a:tc>
-                  <a:txBody>
-                    <a:bodyPr wrap="square"/>
-                    <a:lstStyle/>
-                    <a:p>
-                      <a:pPr algn="r"/>
-                      <a:r>
-                        <a:rPr sz="1400" b="1" i="0">
-                          <a:solidFill>
-                            <a:srgbClr val="FFFFFF"/>
-                          </a:solidFill>
-                          <a:latin typeface="Segoe UI"/>
-                        </a:rPr>
-                        <a:t>vs previous</a:t>
-                      </a:r>
-                    </a:p>
-                  </a:txBody>
-                  <a:tcPr marL="109728" marR="109728" anchor="ctr">
-                    <a:solidFill>
-                      <a:srgbClr val="14222E"/>
-                    </a:solidFill>
-                  </a:tcPr>
-                </a:tc>
-                <a:tc>
-                  <a:txBody>
-                    <a:bodyPr wrap="square"/>
-                    <a:lstStyle/>
-                    <a:p>
-                      <a:pPr algn="r"/>
-                      <a:r>
-                        <a:rPr sz="1400" b="1" i="0">
-                          <a:solidFill>
-                            <a:srgbClr val="FFFFFF"/>
-                          </a:solidFill>
-                          <a:latin typeface="Segoe UI"/>
-                        </a:rPr>
-                        <a:t>Flink cores</a:t>
-                      </a:r>
-                    </a:p>
-                  </a:txBody>
-                  <a:tcPr marL="109728" marR="109728" anchor="ctr">
-                    <a:solidFill>
-                      <a:srgbClr val="14222E"/>
-                    </a:solidFill>
-                  </a:tcPr>
-                </a:tc>
-                <a:tc>
-                  <a:txBody>
-                    <a:bodyPr wrap="square"/>
-                    <a:lstStyle/>
-                    <a:p>
-                      <a:pPr algn="r"/>
-                      <a:r>
-                        <a:rPr sz="1400" b="1" i="0">
-                          <a:solidFill>
-                            <a:srgbClr val="FFFFFF"/>
-                          </a:solidFill>
-                          <a:latin typeface="Segoe UI"/>
-                        </a:rPr>
-                        <a:t>broker cores</a:t>
-                      </a:r>
-                    </a:p>
-                  </a:txBody>
-                  <a:tcPr marL="109728" marR="109728" anchor="ctr">
-                    <a:solidFill>
-                      <a:srgbClr val="14222E"/>
-                    </a:solidFill>
-                  </a:tcPr>
-                </a:tc>
-                <a:tc>
-                  <a:txBody>
-                    <a:bodyPr wrap="square"/>
-                    <a:lstStyle/>
-                    <a:p>
-                      <a:pPr algn="r"/>
-                      <a:r>
-                        <a:rPr sz="1400" b="1" i="0">
-                          <a:solidFill>
-                            <a:srgbClr val="FFFFFF"/>
-                          </a:solidFill>
-                          <a:latin typeface="Segoe UI"/>
-                        </a:rPr>
-                        <a:t>back-pressure</a:t>
-                      </a:r>
-                    </a:p>
-                  </a:txBody>
-                  <a:tcPr marL="109728" marR="109728" anchor="ctr">
-                    <a:solidFill>
-                      <a:srgbClr val="14222E"/>
-                    </a:solidFill>
-                  </a:tcPr>
-                </a:tc>
-              </a:tr>
-              <a:tr h="365760">
-                <a:tc>
-                  <a:txBody>
-                    <a:bodyPr wrap="square"/>
-                    <a:lstStyle/>
-                    <a:p>
-                      <a:pPr algn="l"/>
-                      <a:r>
-                        <a:rPr sz="1400" b="0" i="0">
-                          <a:solidFill>
-                            <a:srgbClr val="2E3D4A"/>
-                          </a:solidFill>
-                          <a:latin typeface="Segoe UI"/>
-                        </a:rPr>
-                        <a:t>2</a:t>
-                      </a:r>
-                    </a:p>
-                  </a:txBody>
-                  <a:tcPr marL="109728" marR="109728" anchor="ctr">
-                    <a:solidFill>
-                      <a:srgbClr val="FFFFFF"/>
-                    </a:solidFill>
-                  </a:tcPr>
-                </a:tc>
-                <a:tc>
-                  <a:txBody>
-                    <a:bodyPr wrap="square"/>
-                    <a:lstStyle/>
-                    <a:p>
-                      <a:pPr algn="r"/>
-                      <a:r>
-                        <a:rPr sz="1400" b="0" i="0">
-                          <a:solidFill>
-                            <a:srgbClr val="2E3D4A"/>
-                          </a:solidFill>
-                          <a:latin typeface="Consolas"/>
-                        </a:rPr>
-                        <a:t>65 721</a:t>
-                      </a:r>
-                    </a:p>
-                  </a:txBody>
-                  <a:tcPr marL="109728" marR="109728" anchor="ctr">
-                    <a:solidFill>
-                      <a:srgbClr val="FFFFFF"/>
-                    </a:solidFill>
-                  </a:tcPr>
-                </a:tc>
-                <a:tc>
-                  <a:txBody>
-                    <a:bodyPr wrap="square"/>
-                    <a:lstStyle/>
-                    <a:p>
-                      <a:pPr algn="r"/>
-                      <a:r>
-                        <a:rPr sz="1400" b="0" i="0">
-                          <a:solidFill>
-                            <a:srgbClr val="2E3D4A"/>
-                          </a:solidFill>
-                          <a:latin typeface="Consolas"/>
-                        </a:rPr>
-                        <a:t>—</a:t>
-                      </a:r>
-                    </a:p>
-                  </a:txBody>
-                  <a:tcPr marL="109728" marR="109728" anchor="ctr">
-                    <a:solidFill>
-                      <a:srgbClr val="FFFFFF"/>
-                    </a:solidFill>
-                  </a:tcPr>
-                </a:tc>
-                <a:tc>
-                  <a:txBody>
-                    <a:bodyPr wrap="square"/>
-                    <a:lstStyle/>
-                    <a:p>
-                      <a:pPr algn="r"/>
-                      <a:r>
-                        <a:rPr sz="1400" b="0" i="0">
-                          <a:solidFill>
-                            <a:srgbClr val="2E3D4A"/>
-                          </a:solidFill>
-                          <a:latin typeface="Consolas"/>
-                        </a:rPr>
-                        <a:t>2.00 of 2</a:t>
-                      </a:r>
-                    </a:p>
-                  </a:txBody>
-                  <a:tcPr marL="109728" marR="109728" anchor="ctr">
-                    <a:solidFill>
-                      <a:srgbClr val="FFFFFF"/>
-                    </a:solidFill>
-                  </a:tcPr>
-                </a:tc>
-                <a:tc>
-                  <a:txBody>
-                    <a:bodyPr wrap="square"/>
-                    <a:lstStyle/>
-                    <a:p>
-                      <a:pPr algn="r"/>
-                      <a:r>
-                        <a:rPr sz="1400" b="0" i="0">
-                          <a:solidFill>
-                            <a:srgbClr val="2E3D4A"/>
-                          </a:solidFill>
-                          <a:latin typeface="Consolas"/>
-                        </a:rPr>
-                        <a:t>0.25</a:t>
-                      </a:r>
-                    </a:p>
-                  </a:txBody>
-                  <a:tcPr marL="109728" marR="109728" anchor="ctr">
-                    <a:solidFill>
-                      <a:srgbClr val="FFFFFF"/>
-                    </a:solidFill>
-                  </a:tcPr>
-                </a:tc>
-                <a:tc>
-                  <a:txBody>
-                    <a:bodyPr wrap="square"/>
-                    <a:lstStyle/>
-                    <a:p>
-                      <a:pPr algn="r"/>
-                      <a:r>
-                        <a:rPr sz="1400" b="0" i="0">
-                          <a:solidFill>
-                            <a:srgbClr val="2E3D4A"/>
-                          </a:solidFill>
-                          <a:latin typeface="Consolas"/>
-                        </a:rPr>
-                        <a:t>28.5%</a:t>
-                      </a:r>
-                    </a:p>
-                  </a:txBody>
-                  <a:tcPr marL="109728" marR="109728" anchor="ctr">
-                    <a:solidFill>
-                      <a:srgbClr val="FFFFFF"/>
-                    </a:solidFill>
-                  </a:tcPr>
-                </a:tc>
-              </a:tr>
-              <a:tr h="365760">
-                <a:tc>
-                  <a:txBody>
-                    <a:bodyPr wrap="square"/>
-                    <a:lstStyle/>
-                    <a:p>
-                      <a:pPr algn="l"/>
-                      <a:r>
-                        <a:rPr sz="1400" b="1" i="0">
-                          <a:solidFill>
-                            <a:srgbClr val="14222E"/>
-                          </a:solidFill>
-                          <a:latin typeface="Segoe UI"/>
-                        </a:rPr>
-                        <a:t>4</a:t>
-                      </a:r>
-                    </a:p>
-                  </a:txBody>
-                  <a:tcPr marL="109728" marR="109728" anchor="ctr">
-                    <a:solidFill>
-                      <a:srgbClr val="F2F5F7"/>
-                    </a:solidFill>
-                  </a:tcPr>
-                </a:tc>
-                <a:tc>
-                  <a:txBody>
-                    <a:bodyPr wrap="square"/>
-                    <a:lstStyle/>
-                    <a:p>
-                      <a:pPr algn="r"/>
-                      <a:r>
-                        <a:rPr sz="1400" b="1" i="0">
-                          <a:solidFill>
-                            <a:srgbClr val="14222E"/>
-                          </a:solidFill>
-                          <a:latin typeface="Consolas"/>
-                        </a:rPr>
-                        <a:t>129 056</a:t>
-                      </a:r>
-                    </a:p>
-                  </a:txBody>
-                  <a:tcPr marL="109728" marR="109728" anchor="ctr">
-                    <a:solidFill>
-                      <a:srgbClr val="F2F5F7"/>
-                    </a:solidFill>
-                  </a:tcPr>
-                </a:tc>
-                <a:tc>
-                  <a:txBody>
-                    <a:bodyPr wrap="square"/>
-                    <a:lstStyle/>
-                    <a:p>
-                      <a:pPr algn="r"/>
-                      <a:r>
-                        <a:rPr sz="1400" b="1" i="0">
-                          <a:solidFill>
-                            <a:srgbClr val="14222E"/>
-                          </a:solidFill>
-                          <a:latin typeface="Consolas"/>
-                        </a:rPr>
-                        <a:t>1.96×</a:t>
-                      </a:r>
-                    </a:p>
-                  </a:txBody>
-                  <a:tcPr marL="109728" marR="109728" anchor="ctr">
-                    <a:solidFill>
-                      <a:srgbClr val="F2F5F7"/>
-                    </a:solidFill>
-                  </a:tcPr>
-                </a:tc>
-                <a:tc>
-                  <a:txBody>
-                    <a:bodyPr wrap="square"/>
-                    <a:lstStyle/>
-                    <a:p>
-                      <a:pPr algn="r"/>
-                      <a:r>
-                        <a:rPr sz="1400" b="1" i="0">
-                          <a:solidFill>
-                            <a:srgbClr val="14222E"/>
-                          </a:solidFill>
-                          <a:latin typeface="Consolas"/>
-                        </a:rPr>
-                        <a:t>3.94 of 4</a:t>
-                      </a:r>
-                    </a:p>
-                  </a:txBody>
-                  <a:tcPr marL="109728" marR="109728" anchor="ctr">
-                    <a:solidFill>
-                      <a:srgbClr val="F2F5F7"/>
-                    </a:solidFill>
-                  </a:tcPr>
-                </a:tc>
-                <a:tc>
-                  <a:txBody>
-                    <a:bodyPr wrap="square"/>
-                    <a:lstStyle/>
-                    <a:p>
-                      <a:pPr algn="r"/>
-                      <a:r>
-                        <a:rPr sz="1400" b="1" i="0">
-                          <a:solidFill>
-                            <a:srgbClr val="14222E"/>
-                          </a:solidFill>
-                          <a:latin typeface="Consolas"/>
-                        </a:rPr>
-                        <a:t>0.39</a:t>
-                      </a:r>
-                    </a:p>
-                  </a:txBody>
-                  <a:tcPr marL="109728" marR="109728" anchor="ctr">
-                    <a:solidFill>
-                      <a:srgbClr val="F2F5F7"/>
-                    </a:solidFill>
-                  </a:tcPr>
-                </a:tc>
-                <a:tc>
-                  <a:txBody>
-                    <a:bodyPr wrap="square"/>
-                    <a:lstStyle/>
-                    <a:p>
-                      <a:pPr algn="r"/>
-                      <a:r>
-                        <a:rPr sz="1400" b="1" i="0">
-                          <a:solidFill>
-                            <a:srgbClr val="14222E"/>
-                          </a:solidFill>
-                          <a:latin typeface="Consolas"/>
-                        </a:rPr>
-                        <a:t>51.6%</a:t>
-                      </a:r>
-                    </a:p>
-                  </a:txBody>
-                  <a:tcPr marL="109728" marR="109728" anchor="ctr">
-                    <a:solidFill>
-                      <a:srgbClr val="F2F5F7"/>
-                    </a:solidFill>
-                  </a:tcPr>
-                </a:tc>
-              </a:tr>
-            </a:tbl>
-          </a:graphicData>
-        </a:graphic>
-      </p:graphicFrame>
-      <p:sp>
-        <p:nvSpPr>
-          <p:cNvPr id="6" name="TextBox 5"/>
+      <p:sp>
+        <p:nvSpPr>
+          <p:cNvPr id="5" name="TextBox 4"/>
           <p:cNvSpPr txBox="1"/>
           <p:nvPr/>
         </p:nvSpPr>
         <p:spPr>
           <a:xfrm>
-            <a:off x="685800" y="3438144"/>
-            <a:ext cx="10881360" cy="822960"/>
+            <a:off x="685800" y="1746504"/>
+            <a:ext cx="10881360" cy="3840480"/>
           </a:xfrm>
           <a:prstGeom prst="rect">
             <a:avLst/>
@@ -5390,15 +4585,105 @@
           </a:bodyPr>
           <a:lstStyle/>
           <a:p>
-            <a:pPr algn="l"/>
-            <a:r>
-              <a:rPr sz="1600" b="0" i="0">
+            <a:pPr algn="l">
+              <a:spcAft>
+                <a:spcPts val="1400"/>
+              </a:spcAft>
+            </a:pPr>
+            <a:r>
+              <a:rPr sz="1700" b="1" i="0">
+                <a:solidFill>
+                  <a:srgbClr val="1B6B8A"/>
+                </a:solidFill>
+                <a:latin typeface="Segoe UI"/>
+              </a:rPr>
+              <a:t>▸   </a:t>
+            </a:r>
+            <a:r>
+              <a:rPr sz="1700" b="1" i="0">
                 <a:solidFill>
                   <a:srgbClr val="14222E"/>
                 </a:solidFill>
                 <a:latin typeface="Segoe UI"/>
               </a:rPr>
-              <a:t>A unit is one core and one degree of parallelism, bought together — a KPU.  Flink used every core it was given; the broker stayed under half a core.</a:t>
+              <a:t>A block trade is one order split across several accounts.  </a:t>
+            </a:r>
+            <a:r>
+              <a:rPr sz="1700" b="0" i="0">
+                <a:solidFill>
+                  <a:srgbClr val="2E3D4A"/>
+                </a:solidFill>
+                <a:latin typeface="Segoe UI"/>
+              </a:rPr>
+              <a:t>A trade of 400 shares allocated to 4 accounts becomes 4 allocations of 100.</a:t>
+            </a:r>
+          </a:p>
+          <a:p>
+            <a:pPr>
+              <a:spcAft>
+                <a:spcPts val="1400"/>
+              </a:spcAft>
+            </a:pPr>
+            <a:r>
+              <a:rPr sz="1700" b="1" i="0">
+                <a:solidFill>
+                  <a:srgbClr val="1B6B8A"/>
+                </a:solidFill>
+                <a:latin typeface="Segoe UI"/>
+              </a:rPr>
+              <a:t>▸   </a:t>
+            </a:r>
+            <a:r>
+              <a:rPr sz="1700" b="1" i="0">
+                <a:solidFill>
+                  <a:srgbClr val="14222E"/>
+                </a:solidFill>
+                <a:latin typeface="Segoe UI"/>
+              </a:rPr>
+              <a:t>Publish positions two ways, in parallel.  </a:t>
+            </a:r>
+            <a:r>
+              <a:rPr sz="1700" b="0" i="0">
+                <a:solidFill>
+                  <a:srgbClr val="2E3D4A"/>
+                </a:solidFill>
+                <a:latin typeface="Segoe UI"/>
+              </a:rPr>
+              <a:t>By symbol, and by account / sub-account / symbol.</a:t>
+            </a:r>
+          </a:p>
+          <a:p>
+            <a:pPr>
+              <a:spcAft>
+                <a:spcPts val="1400"/>
+              </a:spcAft>
+            </a:pPr>
+            <a:r>
+              <a:rPr sz="1700" b="1" i="0">
+                <a:solidFill>
+                  <a:srgbClr val="1B6B8A"/>
+                </a:solidFill>
+                <a:latin typeface="Segoe UI"/>
+              </a:rPr>
+              <a:t>▸   </a:t>
+            </a:r>
+            <a:r>
+              <a:rPr sz="1700" b="1" i="0">
+                <a:solidFill>
+                  <a:srgbClr val="14222E"/>
+                </a:solidFill>
+                <a:latin typeface="Segoe UI"/>
+              </a:rPr>
+              <a:t>Then join prices to those positions  </a:t>
+            </a:r>
+            <a:r>
+              <a:rPr sz="1700" b="0" i="0">
+                <a:solidFill>
+                  <a:srgbClr val="2E3D4A"/>
+                </a:solidFill>
+                <a:latin typeface="Segoe UI"/>
+              </a:rPr>
+              <a:t>and publish market value the same two ways, once per key per window.</a:t>
             </a:r>
           </a:p>
         </p:txBody>
@@ -5411,7 +4696,7 @@
 </p:sld>
 </file>
 
-<file path=ppt/slides/slide11.xml><?xml version="1.0" encoding="utf-8"?>
+<file path=ppt/slides/slide3.xml><?xml version="1.0" encoding="utf-8"?>
 <p:sld xmlns:a="http://schemas.openxmlformats.org/drawingml/2006/main" xmlns:p="http://schemas.openxmlformats.org/presentationml/2006/main" xmlns:r="http://schemas.openxmlformats.org/officeDocument/2006/relationships">
   <p:cSld>
     <p:spTree>
@@ -5451,7 +4736,7 @@
                 </a:solidFill>
                 <a:latin typeface="Segoe UI"/>
               </a:rPr>
-              <a:t>BACKUP — THE WHOLE CURVE</a:t>
+              <a:t>THE DESIGN</a:t>
             </a:r>
           </a:p>
         </p:txBody>
@@ -5486,7 +4771,7 @@
                 </a:solidFill>
                 <a:latin typeface="Segoe UI"/>
               </a:rPr>
-              <a:t>Where it stops, and why the broker looks idle</a:t>
+              <a:t>Six numbered elements, end to end</a:t>
             </a:r>
           </a:p>
         </p:txBody>
@@ -5535,736 +4820,30 @@
           </a:p>
         </p:txBody>
       </p:sp>
-      <p:graphicFrame>
-        <p:nvGraphicFramePr>
-          <p:cNvPr id="5" name="Table 4"/>
-          <p:cNvGraphicFramePr>
-            <a:graphicFrameLocks noGrp="1"/>
-          </p:cNvGraphicFramePr>
+      <p:pic>
+        <p:nvPicPr>
+          <p:cNvPr id="5" name="Picture 4" descr="pipeline.png"/>
+          <p:cNvPicPr>
+            <a:picLocks noChangeAspect="1"/>
+          </p:cNvPicPr>
           <p:nvPr/>
-        </p:nvGraphicFramePr>
-        <p:xfrm>
-          <a:off x="685800" y="1746504"/>
-          <a:ext cx="10607040" cy="1865376"/>
-        </p:xfrm>
-        <a:graphic>
-          <a:graphicData uri="http://schemas.openxmlformats.org/drawingml/2006/table">
-            <a:tbl>
-              <a:tblPr bandRow="1">
-                <a:tableStyleId>{5C22544A-7EE6-4342-B048-85BDC9FD1C3A}</a:tableStyleId>
-              </a:tblPr>
-              <a:tblGrid>
-                <a:gridCol w="1188720"/>
-                <a:gridCol w="1828800"/>
-                <a:gridCol w="1828800"/>
-                <a:gridCol w="1920240"/>
-                <a:gridCol w="1828800"/>
-                <a:gridCol w="2011680"/>
-              </a:tblGrid>
-              <a:tr h="402336">
-                <a:tc>
-                  <a:txBody>
-                    <a:bodyPr wrap="square"/>
-                    <a:lstStyle/>
-                    <a:p>
-                      <a:pPr algn="l"/>
-                      <a:r>
-                        <a:rPr sz="1400" b="1" i="0">
-                          <a:solidFill>
-                            <a:srgbClr val="FFFFFF"/>
-                          </a:solidFill>
-                          <a:latin typeface="Segoe UI"/>
-                        </a:rPr>
-                        <a:t>units</a:t>
-                      </a:r>
-                    </a:p>
-                  </a:txBody>
-                  <a:tcPr marL="109728" marR="109728" anchor="ctr">
-                    <a:solidFill>
-                      <a:srgbClr val="14222E"/>
-                    </a:solidFill>
-                  </a:tcPr>
-                </a:tc>
-                <a:tc>
-                  <a:txBody>
-                    <a:bodyPr wrap="square"/>
-                    <a:lstStyle/>
-                    <a:p>
-                      <a:pPr algn="r"/>
-                      <a:r>
-                        <a:rPr sz="1400" b="1" i="0">
-                          <a:solidFill>
-                            <a:srgbClr val="FFFFFF"/>
-                          </a:solidFill>
-                          <a:latin typeface="Segoe UI"/>
-                        </a:rPr>
-                        <a:t>orders/sec</a:t>
-                      </a:r>
-                    </a:p>
-                  </a:txBody>
-                  <a:tcPr marL="109728" marR="109728" anchor="ctr">
-                    <a:solidFill>
-                      <a:srgbClr val="14222E"/>
-                    </a:solidFill>
-                  </a:tcPr>
-                </a:tc>
-                <a:tc>
-                  <a:txBody>
-                    <a:bodyPr wrap="square"/>
-                    <a:lstStyle/>
-                    <a:p>
-                      <a:pPr algn="r"/>
-                      <a:r>
-                        <a:rPr sz="1400" b="1" i="0">
-                          <a:solidFill>
-                            <a:srgbClr val="FFFFFF"/>
-                          </a:solidFill>
-                          <a:latin typeface="Segoe UI"/>
-                        </a:rPr>
-                        <a:t>vs previous</a:t>
-                      </a:r>
-                    </a:p>
-                  </a:txBody>
-                  <a:tcPr marL="109728" marR="109728" anchor="ctr">
-                    <a:solidFill>
-                      <a:srgbClr val="14222E"/>
-                    </a:solidFill>
-                  </a:tcPr>
-                </a:tc>
-                <a:tc>
-                  <a:txBody>
-                    <a:bodyPr wrap="square"/>
-                    <a:lstStyle/>
-                    <a:p>
-                      <a:pPr algn="r"/>
-                      <a:r>
-                        <a:rPr sz="1400" b="1" i="0">
-                          <a:solidFill>
-                            <a:srgbClr val="FFFFFF"/>
-                          </a:solidFill>
-                          <a:latin typeface="Segoe UI"/>
-                        </a:rPr>
-                        <a:t>Flink cores</a:t>
-                      </a:r>
-                    </a:p>
-                  </a:txBody>
-                  <a:tcPr marL="109728" marR="109728" anchor="ctr">
-                    <a:solidFill>
-                      <a:srgbClr val="14222E"/>
-                    </a:solidFill>
-                  </a:tcPr>
-                </a:tc>
-                <a:tc>
-                  <a:txBody>
-                    <a:bodyPr wrap="square"/>
-                    <a:lstStyle/>
-                    <a:p>
-                      <a:pPr algn="r"/>
-                      <a:r>
-                        <a:rPr sz="1400" b="1" i="0">
-                          <a:solidFill>
-                            <a:srgbClr val="FFFFFF"/>
-                          </a:solidFill>
-                          <a:latin typeface="Segoe UI"/>
-                        </a:rPr>
-                        <a:t>broker cores</a:t>
-                      </a:r>
-                    </a:p>
-                  </a:txBody>
-                  <a:tcPr marL="109728" marR="109728" anchor="ctr">
-                    <a:solidFill>
-                      <a:srgbClr val="14222E"/>
-                    </a:solidFill>
-                  </a:tcPr>
-                </a:tc>
-                <a:tc>
-                  <a:txBody>
-                    <a:bodyPr wrap="square"/>
-                    <a:lstStyle/>
-                    <a:p>
-                      <a:pPr algn="r"/>
-                      <a:r>
-                        <a:rPr sz="1400" b="1" i="0">
-                          <a:solidFill>
-                            <a:srgbClr val="FFFFFF"/>
-                          </a:solidFill>
-                          <a:latin typeface="Segoe UI"/>
-                        </a:rPr>
-                        <a:t>back-pressure</a:t>
-                      </a:r>
-                    </a:p>
-                  </a:txBody>
-                  <a:tcPr marL="109728" marR="109728" anchor="ctr">
-                    <a:solidFill>
-                      <a:srgbClr val="14222E"/>
-                    </a:solidFill>
-                  </a:tcPr>
-                </a:tc>
-              </a:tr>
-              <a:tr h="365760">
-                <a:tc>
-                  <a:txBody>
-                    <a:bodyPr wrap="square"/>
-                    <a:lstStyle/>
-                    <a:p>
-                      <a:pPr algn="l"/>
-                      <a:r>
-                        <a:rPr sz="1400" b="0" i="0">
-                          <a:solidFill>
-                            <a:srgbClr val="2E3D4A"/>
-                          </a:solidFill>
-                          <a:latin typeface="Segoe UI"/>
-                        </a:rPr>
-                        <a:t>1</a:t>
-                      </a:r>
-                    </a:p>
-                  </a:txBody>
-                  <a:tcPr marL="109728" marR="109728" anchor="ctr">
-                    <a:solidFill>
-                      <a:srgbClr val="FFFFFF"/>
-                    </a:solidFill>
-                  </a:tcPr>
-                </a:tc>
-                <a:tc>
-                  <a:txBody>
-                    <a:bodyPr wrap="square"/>
-                    <a:lstStyle/>
-                    <a:p>
-                      <a:pPr algn="r"/>
-                      <a:r>
-                        <a:rPr sz="1400" b="0" i="0">
-                          <a:solidFill>
-                            <a:srgbClr val="2E3D4A"/>
-                          </a:solidFill>
-                          <a:latin typeface="Consolas"/>
-                        </a:rPr>
-                        <a:t>30 505</a:t>
-                      </a:r>
-                    </a:p>
-                  </a:txBody>
-                  <a:tcPr marL="109728" marR="109728" anchor="ctr">
-                    <a:solidFill>
-                      <a:srgbClr val="FFFFFF"/>
-                    </a:solidFill>
-                  </a:tcPr>
-                </a:tc>
-                <a:tc>
-                  <a:txBody>
-                    <a:bodyPr wrap="square"/>
-                    <a:lstStyle/>
-                    <a:p>
-                      <a:pPr algn="r"/>
-                      <a:r>
-                        <a:rPr sz="1400" b="0" i="0">
-                          <a:solidFill>
-                            <a:srgbClr val="2E3D4A"/>
-                          </a:solidFill>
-                          <a:latin typeface="Consolas"/>
-                        </a:rPr>
-                        <a:t>—</a:t>
-                      </a:r>
-                    </a:p>
-                  </a:txBody>
-                  <a:tcPr marL="109728" marR="109728" anchor="ctr">
-                    <a:solidFill>
-                      <a:srgbClr val="FFFFFF"/>
-                    </a:solidFill>
-                  </a:tcPr>
-                </a:tc>
-                <a:tc>
-                  <a:txBody>
-                    <a:bodyPr wrap="square"/>
-                    <a:lstStyle/>
-                    <a:p>
-                      <a:pPr algn="r"/>
-                      <a:r>
-                        <a:rPr sz="1400" b="0" i="0">
-                          <a:solidFill>
-                            <a:srgbClr val="2E3D4A"/>
-                          </a:solidFill>
-                          <a:latin typeface="Consolas"/>
-                        </a:rPr>
-                        <a:t>1.00 of 1</a:t>
-                      </a:r>
-                    </a:p>
-                  </a:txBody>
-                  <a:tcPr marL="109728" marR="109728" anchor="ctr">
-                    <a:solidFill>
-                      <a:srgbClr val="FFFFFF"/>
-                    </a:solidFill>
-                  </a:tcPr>
-                </a:tc>
-                <a:tc>
-                  <a:txBody>
-                    <a:bodyPr wrap="square"/>
-                    <a:lstStyle/>
-                    <a:p>
-                      <a:pPr algn="r"/>
-                      <a:r>
-                        <a:rPr sz="1400" b="0" i="0">
-                          <a:solidFill>
-                            <a:srgbClr val="2E3D4A"/>
-                          </a:solidFill>
-                          <a:latin typeface="Consolas"/>
-                        </a:rPr>
-                        <a:t>0.10</a:t>
-                      </a:r>
-                    </a:p>
-                  </a:txBody>
-                  <a:tcPr marL="109728" marR="109728" anchor="ctr">
-                    <a:solidFill>
-                      <a:srgbClr val="FFFFFF"/>
-                    </a:solidFill>
-                  </a:tcPr>
-                </a:tc>
-                <a:tc>
-                  <a:txBody>
-                    <a:bodyPr wrap="square"/>
-                    <a:lstStyle/>
-                    <a:p>
-                      <a:pPr algn="r"/>
-                      <a:r>
-                        <a:rPr sz="1400" b="0" i="0">
-                          <a:solidFill>
-                            <a:srgbClr val="2E3D4A"/>
-                          </a:solidFill>
-                          <a:latin typeface="Consolas"/>
-                        </a:rPr>
-                        <a:t>24.1%</a:t>
-                      </a:r>
-                    </a:p>
-                  </a:txBody>
-                  <a:tcPr marL="109728" marR="109728" anchor="ctr">
-                    <a:solidFill>
-                      <a:srgbClr val="FFFFFF"/>
-                    </a:solidFill>
-                  </a:tcPr>
-                </a:tc>
-              </a:tr>
-              <a:tr h="365760">
-                <a:tc>
-                  <a:txBody>
-                    <a:bodyPr wrap="square"/>
-                    <a:lstStyle/>
-                    <a:p>
-                      <a:pPr algn="l"/>
-                      <a:r>
-                        <a:rPr sz="1400" b="0" i="0">
-                          <a:solidFill>
-                            <a:srgbClr val="2E3D4A"/>
-                          </a:solidFill>
-                          <a:latin typeface="Segoe UI"/>
-                        </a:rPr>
-                        <a:t>2</a:t>
-                      </a:r>
-                    </a:p>
-                  </a:txBody>
-                  <a:tcPr marL="109728" marR="109728" anchor="ctr">
-                    <a:solidFill>
-                      <a:srgbClr val="FFFFFF"/>
-                    </a:solidFill>
-                  </a:tcPr>
-                </a:tc>
-                <a:tc>
-                  <a:txBody>
-                    <a:bodyPr wrap="square"/>
-                    <a:lstStyle/>
-                    <a:p>
-                      <a:pPr algn="r"/>
-                      <a:r>
-                        <a:rPr sz="1400" b="0" i="0">
-                          <a:solidFill>
-                            <a:srgbClr val="2E3D4A"/>
-                          </a:solidFill>
-                          <a:latin typeface="Consolas"/>
-                        </a:rPr>
-                        <a:t>65 721</a:t>
-                      </a:r>
-                    </a:p>
-                  </a:txBody>
-                  <a:tcPr marL="109728" marR="109728" anchor="ctr">
-                    <a:solidFill>
-                      <a:srgbClr val="FFFFFF"/>
-                    </a:solidFill>
-                  </a:tcPr>
-                </a:tc>
-                <a:tc>
-                  <a:txBody>
-                    <a:bodyPr wrap="square"/>
-                    <a:lstStyle/>
-                    <a:p>
-                      <a:pPr algn="r"/>
-                      <a:r>
-                        <a:rPr sz="1400" b="0" i="0">
-                          <a:solidFill>
-                            <a:srgbClr val="2E3D4A"/>
-                          </a:solidFill>
-                          <a:latin typeface="Consolas"/>
-                        </a:rPr>
-                        <a:t>2.15×</a:t>
-                      </a:r>
-                    </a:p>
-                  </a:txBody>
-                  <a:tcPr marL="109728" marR="109728" anchor="ctr">
-                    <a:solidFill>
-                      <a:srgbClr val="FFFFFF"/>
-                    </a:solidFill>
-                  </a:tcPr>
-                </a:tc>
-                <a:tc>
-                  <a:txBody>
-                    <a:bodyPr wrap="square"/>
-                    <a:lstStyle/>
-                    <a:p>
-                      <a:pPr algn="r"/>
-                      <a:r>
-                        <a:rPr sz="1400" b="0" i="0">
-                          <a:solidFill>
-                            <a:srgbClr val="2E3D4A"/>
-                          </a:solidFill>
-                          <a:latin typeface="Consolas"/>
-                        </a:rPr>
-                        <a:t>2.00 of 2</a:t>
-                      </a:r>
-                    </a:p>
-                  </a:txBody>
-                  <a:tcPr marL="109728" marR="109728" anchor="ctr">
-                    <a:solidFill>
-                      <a:srgbClr val="FFFFFF"/>
-                    </a:solidFill>
-                  </a:tcPr>
-                </a:tc>
-                <a:tc>
-                  <a:txBody>
-                    <a:bodyPr wrap="square"/>
-                    <a:lstStyle/>
-                    <a:p>
-                      <a:pPr algn="r"/>
-                      <a:r>
-                        <a:rPr sz="1400" b="0" i="0">
-                          <a:solidFill>
-                            <a:srgbClr val="2E3D4A"/>
-                          </a:solidFill>
-                          <a:latin typeface="Consolas"/>
-                        </a:rPr>
-                        <a:t>0.25</a:t>
-                      </a:r>
-                    </a:p>
-                  </a:txBody>
-                  <a:tcPr marL="109728" marR="109728" anchor="ctr">
-                    <a:solidFill>
-                      <a:srgbClr val="FFFFFF"/>
-                    </a:solidFill>
-                  </a:tcPr>
-                </a:tc>
-                <a:tc>
-                  <a:txBody>
-                    <a:bodyPr wrap="square"/>
-                    <a:lstStyle/>
-                    <a:p>
-                      <a:pPr algn="r"/>
-                      <a:r>
-                        <a:rPr sz="1400" b="0" i="0">
-                          <a:solidFill>
-                            <a:srgbClr val="2E3D4A"/>
-                          </a:solidFill>
-                          <a:latin typeface="Consolas"/>
-                        </a:rPr>
-                        <a:t>28.5%</a:t>
-                      </a:r>
-                    </a:p>
-                  </a:txBody>
-                  <a:tcPr marL="109728" marR="109728" anchor="ctr">
-                    <a:solidFill>
-                      <a:srgbClr val="FFFFFF"/>
-                    </a:solidFill>
-                  </a:tcPr>
-                </a:tc>
-              </a:tr>
-              <a:tr h="365760">
-                <a:tc>
-                  <a:txBody>
-                    <a:bodyPr wrap="square"/>
-                    <a:lstStyle/>
-                    <a:p>
-                      <a:pPr algn="l"/>
-                      <a:r>
-                        <a:rPr sz="1400" b="0" i="0">
-                          <a:solidFill>
-                            <a:srgbClr val="2E3D4A"/>
-                          </a:solidFill>
-                          <a:latin typeface="Segoe UI"/>
-                        </a:rPr>
-                        <a:t>4</a:t>
-                      </a:r>
-                    </a:p>
-                  </a:txBody>
-                  <a:tcPr marL="109728" marR="109728" anchor="ctr">
-                    <a:solidFill>
-                      <a:srgbClr val="FFFFFF"/>
-                    </a:solidFill>
-                  </a:tcPr>
-                </a:tc>
-                <a:tc>
-                  <a:txBody>
-                    <a:bodyPr wrap="square"/>
-                    <a:lstStyle/>
-                    <a:p>
-                      <a:pPr algn="r"/>
-                      <a:r>
-                        <a:rPr sz="1400" b="0" i="0">
-                          <a:solidFill>
-                            <a:srgbClr val="2E3D4A"/>
-                          </a:solidFill>
-                          <a:latin typeface="Consolas"/>
-                        </a:rPr>
-                        <a:t>129 056</a:t>
-                      </a:r>
-                    </a:p>
-                  </a:txBody>
-                  <a:tcPr marL="109728" marR="109728" anchor="ctr">
-                    <a:solidFill>
-                      <a:srgbClr val="FFFFFF"/>
-                    </a:solidFill>
-                  </a:tcPr>
-                </a:tc>
-                <a:tc>
-                  <a:txBody>
-                    <a:bodyPr wrap="square"/>
-                    <a:lstStyle/>
-                    <a:p>
-                      <a:pPr algn="r"/>
-                      <a:r>
-                        <a:rPr sz="1400" b="0" i="0">
-                          <a:solidFill>
-                            <a:srgbClr val="2E3D4A"/>
-                          </a:solidFill>
-                          <a:latin typeface="Consolas"/>
-                        </a:rPr>
-                        <a:t>1.96×</a:t>
-                      </a:r>
-                    </a:p>
-                  </a:txBody>
-                  <a:tcPr marL="109728" marR="109728" anchor="ctr">
-                    <a:solidFill>
-                      <a:srgbClr val="FFFFFF"/>
-                    </a:solidFill>
-                  </a:tcPr>
-                </a:tc>
-                <a:tc>
-                  <a:txBody>
-                    <a:bodyPr wrap="square"/>
-                    <a:lstStyle/>
-                    <a:p>
-                      <a:pPr algn="r"/>
-                      <a:r>
-                        <a:rPr sz="1400" b="0" i="0">
-                          <a:solidFill>
-                            <a:srgbClr val="2E3D4A"/>
-                          </a:solidFill>
-                          <a:latin typeface="Consolas"/>
-                        </a:rPr>
-                        <a:t>3.94 of 4</a:t>
-                      </a:r>
-                    </a:p>
-                  </a:txBody>
-                  <a:tcPr marL="109728" marR="109728" anchor="ctr">
-                    <a:solidFill>
-                      <a:srgbClr val="FFFFFF"/>
-                    </a:solidFill>
-                  </a:tcPr>
-                </a:tc>
-                <a:tc>
-                  <a:txBody>
-                    <a:bodyPr wrap="square"/>
-                    <a:lstStyle/>
-                    <a:p>
-                      <a:pPr algn="r"/>
-                      <a:r>
-                        <a:rPr sz="1400" b="0" i="0">
-                          <a:solidFill>
-                            <a:srgbClr val="2E3D4A"/>
-                          </a:solidFill>
-                          <a:latin typeface="Consolas"/>
-                        </a:rPr>
-                        <a:t>0.39</a:t>
-                      </a:r>
-                    </a:p>
-                  </a:txBody>
-                  <a:tcPr marL="109728" marR="109728" anchor="ctr">
-                    <a:solidFill>
-                      <a:srgbClr val="FFFFFF"/>
-                    </a:solidFill>
-                  </a:tcPr>
-                </a:tc>
-                <a:tc>
-                  <a:txBody>
-                    <a:bodyPr wrap="square"/>
-                    <a:lstStyle/>
-                    <a:p>
-                      <a:pPr algn="r"/>
-                      <a:r>
-                        <a:rPr sz="1400" b="0" i="0">
-                          <a:solidFill>
-                            <a:srgbClr val="2E3D4A"/>
-                          </a:solidFill>
-                          <a:latin typeface="Consolas"/>
-                        </a:rPr>
-                        <a:t>51.6%</a:t>
-                      </a:r>
-                    </a:p>
-                  </a:txBody>
-                  <a:tcPr marL="109728" marR="109728" anchor="ctr">
-                    <a:solidFill>
-                      <a:srgbClr val="FFFFFF"/>
-                    </a:solidFill>
-                  </a:tcPr>
-                </a:tc>
-              </a:tr>
-              <a:tr h="365760">
-                <a:tc>
-                  <a:txBody>
-                    <a:bodyPr wrap="square"/>
-                    <a:lstStyle/>
-                    <a:p>
-                      <a:pPr algn="l"/>
-                      <a:r>
-                        <a:rPr sz="1400" b="1" i="0">
-                          <a:solidFill>
-                            <a:srgbClr val="14222E"/>
-                          </a:solidFill>
-                          <a:latin typeface="Segoe UI"/>
-                        </a:rPr>
-                        <a:t>8</a:t>
-                      </a:r>
-                    </a:p>
-                  </a:txBody>
-                  <a:tcPr marL="109728" marR="109728" anchor="ctr">
-                    <a:solidFill>
-                      <a:srgbClr val="F2F5F7"/>
-                    </a:solidFill>
-                  </a:tcPr>
-                </a:tc>
-                <a:tc>
-                  <a:txBody>
-                    <a:bodyPr wrap="square"/>
-                    <a:lstStyle/>
-                    <a:p>
-                      <a:pPr algn="r"/>
-                      <a:r>
-                        <a:rPr sz="1400" b="1" i="0">
-                          <a:solidFill>
-                            <a:srgbClr val="14222E"/>
-                          </a:solidFill>
-                          <a:latin typeface="Consolas"/>
-                        </a:rPr>
-                        <a:t>151 969</a:t>
-                      </a:r>
-                    </a:p>
-                  </a:txBody>
-                  <a:tcPr marL="109728" marR="109728" anchor="ctr">
-                    <a:solidFill>
-                      <a:srgbClr val="F2F5F7"/>
-                    </a:solidFill>
-                  </a:tcPr>
-                </a:tc>
-                <a:tc>
-                  <a:txBody>
-                    <a:bodyPr wrap="square"/>
-                    <a:lstStyle/>
-                    <a:p>
-                      <a:pPr algn="r"/>
-                      <a:r>
-                        <a:rPr sz="1400" b="1" i="0">
-                          <a:solidFill>
-                            <a:srgbClr val="14222E"/>
-                          </a:solidFill>
-                          <a:latin typeface="Consolas"/>
-                        </a:rPr>
-                        <a:t>1.18×</a:t>
-                      </a:r>
-                    </a:p>
-                  </a:txBody>
-                  <a:tcPr marL="109728" marR="109728" anchor="ctr">
-                    <a:solidFill>
-                      <a:srgbClr val="F2F5F7"/>
-                    </a:solidFill>
-                  </a:tcPr>
-                </a:tc>
-                <a:tc>
-                  <a:txBody>
-                    <a:bodyPr wrap="square"/>
-                    <a:lstStyle/>
-                    <a:p>
-                      <a:pPr algn="r"/>
-                      <a:r>
-                        <a:rPr sz="1400" b="1" i="0">
-                          <a:solidFill>
-                            <a:srgbClr val="14222E"/>
-                          </a:solidFill>
-                          <a:latin typeface="Consolas"/>
-                        </a:rPr>
-                        <a:t>4.98 of 8</a:t>
-                      </a:r>
-                    </a:p>
-                  </a:txBody>
-                  <a:tcPr marL="109728" marR="109728" anchor="ctr">
-                    <a:solidFill>
-                      <a:srgbClr val="F2F5F7"/>
-                    </a:solidFill>
-                  </a:tcPr>
-                </a:tc>
-                <a:tc>
-                  <a:txBody>
-                    <a:bodyPr wrap="square"/>
-                    <a:lstStyle/>
-                    <a:p>
-                      <a:pPr algn="r"/>
-                      <a:r>
-                        <a:rPr sz="1400" b="1" i="0">
-                          <a:solidFill>
-                            <a:srgbClr val="14222E"/>
-                          </a:solidFill>
-                          <a:latin typeface="Consolas"/>
-                        </a:rPr>
-                        <a:t>0.48</a:t>
-                      </a:r>
-                    </a:p>
-                  </a:txBody>
-                  <a:tcPr marL="109728" marR="109728" anchor="ctr">
-                    <a:solidFill>
-                      <a:srgbClr val="F2F5F7"/>
-                    </a:solidFill>
-                  </a:tcPr>
-                </a:tc>
-                <a:tc>
-                  <a:txBody>
-                    <a:bodyPr wrap="square"/>
-                    <a:lstStyle/>
-                    <a:p>
-                      <a:pPr algn="r"/>
-                      <a:r>
-                        <a:rPr sz="1400" b="1" i="0">
-                          <a:solidFill>
-                            <a:srgbClr val="14222E"/>
-                          </a:solidFill>
-                          <a:latin typeface="Consolas"/>
-                        </a:rPr>
-                        <a:t>72.7%</a:t>
-                      </a:r>
-                    </a:p>
-                  </a:txBody>
-                  <a:tcPr marL="109728" marR="109728" anchor="ctr">
-                    <a:solidFill>
-                      <a:srgbClr val="F2F5F7"/>
-                    </a:solidFill>
-                  </a:tcPr>
-                </a:tc>
-              </a:tr>
-            </a:tbl>
-          </a:graphicData>
-        </a:graphic>
-      </p:graphicFrame>
+        </p:nvPicPr>
+        <p:blipFill>
+          <a:blip r:embed="rId2"/>
+          <a:stretch>
+            <a:fillRect/>
+          </a:stretch>
+        </p:blipFill>
+        <p:spPr>
+          <a:xfrm>
+            <a:off x="521207" y="2002536"/>
+            <a:ext cx="11155680" cy="4172586"/>
+          </a:xfrm>
+          <a:prstGeom prst="rect">
+            <a:avLst/>
+          </a:prstGeom>
+        </p:spPr>
+      </p:pic>
       <p:sp>
         <p:nvSpPr>
           <p:cNvPr id="6" name="TextBox 5"/>
@@ -6273,8 +4852,8 @@
         </p:nvSpPr>
         <p:spPr>
           <a:xfrm>
-            <a:off x="685800" y="4169664"/>
-            <a:ext cx="10881360" cy="1645920"/>
+            <a:off x="685800" y="6303138"/>
+            <a:ext cx="10881360" cy="822960"/>
           </a:xfrm>
           <a:prstGeom prst="rect">
             <a:avLst/>
@@ -6289,22 +4868,13 @@
           <a:p>
             <a:pPr algn="l"/>
             <a:r>
-              <a:rPr sz="1600" b="1" i="0">
+              <a:rPr sz="1350" b="0" i="1">
                 <a:solidFill>
-                  <a:srgbClr val="A84B2A"/>
+                  <a:srgbClr val="6B7A87"/>
                 </a:solidFill>
                 <a:latin typeface="Segoe UI"/>
               </a:rPr>
-              <a:t>The broker is at 0.48 cores while being the thing in the way.  </a:t>
-            </a:r>
-            <a:r>
-              <a:rPr sz="1600" b="0" i="0">
-                <a:solidFill>
-                  <a:srgbClr val="2E3D4A"/>
-                </a:solidFill>
-                <a:latin typeface="Segoe UI"/>
-              </a:rPr>
-              <a:t>It has run out of write throughput, not CPU: 151 969 orders/sec is 759 845 records/sec, against the ~750 000 one broker accepts — because each order becomes five records.</a:t>
+              <a:t>Every edge carries its partition key and value. The diagram states the specified one-minute window; the demo overrides it to ten seconds, and the calculation is identical either way.</a:t>
             </a:r>
           </a:p>
         </p:txBody>
@@ -6317,7 +4887,7 @@
 </p:sld>
 </file>
 
-<file path=ppt/slides/slide12.xml><?xml version="1.0" encoding="utf-8"?>
+<file path=ppt/slides/slide4.xml><?xml version="1.0" encoding="utf-8"?>
 <p:sld xmlns:a="http://schemas.openxmlformats.org/drawingml/2006/main" xmlns:p="http://schemas.openxmlformats.org/presentationml/2006/main" xmlns:r="http://schemas.openxmlformats.org/officeDocument/2006/relationships">
   <p:cSld>
     <p:spTree>
@@ -6357,7 +4927,7 @@
                 </a:solidFill>
                 <a:latin typeface="Segoe UI"/>
               </a:rPr>
-              <a:t>BACKUP — SAME SCRIPT, BIGGER KAFKA</a:t>
+              <a:t>EXPECTED OUTPUT</a:t>
             </a:r>
           </a:p>
         </p:txBody>
@@ -6392,7 +4962,7 @@
                 </a:solidFill>
                 <a:latin typeface="Segoe UI"/>
               </a:rPr>
-              <a:t>Is that Flink's ceiling, or the laptop's?</a:t>
+              <a:t>What the numbers should be, before we run anything</a:t>
             </a:r>
           </a:p>
         </p:txBody>
@@ -6451,1199 +5021,7 @@
         </p:nvGraphicFramePr>
         <p:xfrm>
           <a:off x="685800" y="1746504"/>
-          <a:ext cx="8412480" cy="1499616"/>
-        </p:xfrm>
-        <a:graphic>
-          <a:graphicData uri="http://schemas.openxmlformats.org/drawingml/2006/table">
-            <a:tbl>
-              <a:tblPr bandRow="1">
-                <a:tableStyleId>{5C22544A-7EE6-4342-B048-85BDC9FD1C3A}</a:tableStyleId>
-              </a:tblPr>
-              <a:tblGrid>
-                <a:gridCol w="4023360"/>
-                <a:gridCol w="2194560"/>
-                <a:gridCol w="2194560"/>
-              </a:tblGrid>
-              <a:tr h="402336">
-                <a:tc>
-                  <a:txBody>
-                    <a:bodyPr wrap="square"/>
-                    <a:lstStyle/>
-                    <a:p>
-                      <a:pPr algn="l"/>
-                      <a:r>
-                        <a:rPr sz="1500" b="1" i="0">
-                          <a:solidFill>
-                            <a:srgbClr val="FFFFFF"/>
-                          </a:solidFill>
-                          <a:latin typeface="Segoe UI"/>
-                        </a:rPr>
-                        <a:t/>
-                      </a:r>
-                    </a:p>
-                  </a:txBody>
-                  <a:tcPr marL="109728" marR="109728" anchor="ctr">
-                    <a:solidFill>
-                      <a:srgbClr val="14222E"/>
-                    </a:solidFill>
-                  </a:tcPr>
-                </a:tc>
-                <a:tc>
-                  <a:txBody>
-                    <a:bodyPr wrap="square"/>
-                    <a:lstStyle/>
-                    <a:p>
-                      <a:pPr algn="r"/>
-                      <a:r>
-                        <a:rPr sz="1500" b="1" i="0">
-                          <a:solidFill>
-                            <a:srgbClr val="FFFFFF"/>
-                          </a:solidFill>
-                          <a:latin typeface="Segoe UI"/>
-                        </a:rPr>
-                        <a:t>laptop</a:t>
-                      </a:r>
-                    </a:p>
-                  </a:txBody>
-                  <a:tcPr marL="109728" marR="109728" anchor="ctr">
-                    <a:solidFill>
-                      <a:srgbClr val="14222E"/>
-                    </a:solidFill>
-                  </a:tcPr>
-                </a:tc>
-                <a:tc>
-                  <a:txBody>
-                    <a:bodyPr wrap="square"/>
-                    <a:lstStyle/>
-                    <a:p>
-                      <a:pPr algn="r"/>
-                      <a:r>
-                        <a:rPr sz="1500" b="1" i="0">
-                          <a:solidFill>
-                            <a:srgbClr val="FFFFFF"/>
-                          </a:solidFill>
-                          <a:latin typeface="Segoe UI"/>
-                        </a:rPr>
-                        <a:t>AWS</a:t>
-                      </a:r>
-                    </a:p>
-                  </a:txBody>
-                  <a:tcPr marL="109728" marR="109728" anchor="ctr">
-                    <a:solidFill>
-                      <a:srgbClr val="14222E"/>
-                    </a:solidFill>
-                  </a:tcPr>
-                </a:tc>
-              </a:tr>
-              <a:tr h="365760">
-                <a:tc>
-                  <a:txBody>
-                    <a:bodyPr wrap="square"/>
-                    <a:lstStyle/>
-                    <a:p>
-                      <a:pPr algn="l"/>
-                      <a:r>
-                        <a:rPr sz="1500" b="1" i="0">
-                          <a:solidFill>
-                            <a:srgbClr val="14222E"/>
-                          </a:solidFill>
-                          <a:latin typeface="Segoe UI"/>
-                        </a:rPr>
-                        <a:t>4 → 8 units</a:t>
-                      </a:r>
-                    </a:p>
-                  </a:txBody>
-                  <a:tcPr marL="109728" marR="109728" anchor="ctr">
-                    <a:solidFill>
-                      <a:srgbClr val="F2F5F7"/>
-                    </a:solidFill>
-                  </a:tcPr>
-                </a:tc>
-                <a:tc>
-                  <a:txBody>
-                    <a:bodyPr wrap="square"/>
-                    <a:lstStyle/>
-                    <a:p>
-                      <a:pPr algn="r"/>
-                      <a:r>
-                        <a:rPr sz="1500" b="1" i="0">
-                          <a:solidFill>
-                            <a:srgbClr val="14222E"/>
-                          </a:solidFill>
-                          <a:latin typeface="Consolas"/>
-                        </a:rPr>
-                        <a:t>1.18×</a:t>
-                      </a:r>
-                    </a:p>
-                  </a:txBody>
-                  <a:tcPr marL="109728" marR="109728" anchor="ctr">
-                    <a:solidFill>
-                      <a:srgbClr val="F2F5F7"/>
-                    </a:solidFill>
-                  </a:tcPr>
-                </a:tc>
-                <a:tc>
-                  <a:txBody>
-                    <a:bodyPr wrap="square"/>
-                    <a:lstStyle/>
-                    <a:p>
-                      <a:pPr algn="r"/>
-                      <a:r>
-                        <a:rPr sz="1500" b="1" i="0">
-                          <a:solidFill>
-                            <a:srgbClr val="14222E"/>
-                          </a:solidFill>
-                          <a:latin typeface="Consolas"/>
-                        </a:rPr>
-                        <a:t>1.73×</a:t>
-                      </a:r>
-                    </a:p>
-                  </a:txBody>
-                  <a:tcPr marL="109728" marR="109728" anchor="ctr">
-                    <a:solidFill>
-                      <a:srgbClr val="F2F5F7"/>
-                    </a:solidFill>
-                  </a:tcPr>
-                </a:tc>
-              </a:tr>
-              <a:tr h="365760">
-                <a:tc>
-                  <a:txBody>
-                    <a:bodyPr wrap="square"/>
-                    <a:lstStyle/>
-                    <a:p>
-                      <a:pPr algn="l"/>
-                      <a:r>
-                        <a:rPr sz="1500" b="1" i="0">
-                          <a:solidFill>
-                            <a:srgbClr val="14222E"/>
-                          </a:solidFill>
-                          <a:latin typeface="Segoe UI"/>
-                        </a:rPr>
-                        <a:t>Flink cores at 8 units</a:t>
-                      </a:r>
-                    </a:p>
-                  </a:txBody>
-                  <a:tcPr marL="109728" marR="109728" anchor="ctr">
-                    <a:solidFill>
-                      <a:srgbClr val="F2F5F7"/>
-                    </a:solidFill>
-                  </a:tcPr>
-                </a:tc>
-                <a:tc>
-                  <a:txBody>
-                    <a:bodyPr wrap="square"/>
-                    <a:lstStyle/>
-                    <a:p>
-                      <a:pPr algn="r"/>
-                      <a:r>
-                        <a:rPr sz="1500" b="1" i="0">
-                          <a:solidFill>
-                            <a:srgbClr val="14222E"/>
-                          </a:solidFill>
-                          <a:latin typeface="Consolas"/>
-                        </a:rPr>
-                        <a:t>4.98 of 8</a:t>
-                      </a:r>
-                    </a:p>
-                  </a:txBody>
-                  <a:tcPr marL="109728" marR="109728" anchor="ctr">
-                    <a:solidFill>
-                      <a:srgbClr val="F2F5F7"/>
-                    </a:solidFill>
-                  </a:tcPr>
-                </a:tc>
-                <a:tc>
-                  <a:txBody>
-                    <a:bodyPr wrap="square"/>
-                    <a:lstStyle/>
-                    <a:p>
-                      <a:pPr algn="r"/>
-                      <a:r>
-                        <a:rPr sz="1500" b="1" i="0">
-                          <a:solidFill>
-                            <a:srgbClr val="14222E"/>
-                          </a:solidFill>
-                          <a:latin typeface="Consolas"/>
-                        </a:rPr>
-                        <a:t>7.99 of 8</a:t>
-                      </a:r>
-                    </a:p>
-                  </a:txBody>
-                  <a:tcPr marL="109728" marR="109728" anchor="ctr">
-                    <a:solidFill>
-                      <a:srgbClr val="F2F5F7"/>
-                    </a:solidFill>
-                  </a:tcPr>
-                </a:tc>
-              </a:tr>
-              <a:tr h="365760">
-                <a:tc>
-                  <a:txBody>
-                    <a:bodyPr wrap="square"/>
-                    <a:lstStyle/>
-                    <a:p>
-                      <a:pPr algn="l"/>
-                      <a:r>
-                        <a:rPr sz="1500" b="0" i="0">
-                          <a:solidFill>
-                            <a:srgbClr val="2E3D4A"/>
-                          </a:solidFill>
-                          <a:latin typeface="Segoe UI"/>
-                        </a:rPr>
-                        <a:t>broker cores at 8 units</a:t>
-                      </a:r>
-                    </a:p>
-                  </a:txBody>
-                  <a:tcPr marL="109728" marR="109728" anchor="ctr">
-                    <a:solidFill>
-                      <a:srgbClr val="FFFFFF"/>
-                    </a:solidFill>
-                  </a:tcPr>
-                </a:tc>
-                <a:tc>
-                  <a:txBody>
-                    <a:bodyPr wrap="square"/>
-                    <a:lstStyle/>
-                    <a:p>
-                      <a:pPr algn="r"/>
-                      <a:r>
-                        <a:rPr sz="1500" b="0" i="0">
-                          <a:solidFill>
-                            <a:srgbClr val="2E3D4A"/>
-                          </a:solidFill>
-                          <a:latin typeface="Consolas"/>
-                        </a:rPr>
-                        <a:t>0.48</a:t>
-                      </a:r>
-                    </a:p>
-                  </a:txBody>
-                  <a:tcPr marL="109728" marR="109728" anchor="ctr">
-                    <a:solidFill>
-                      <a:srgbClr val="FFFFFF"/>
-                    </a:solidFill>
-                  </a:tcPr>
-                </a:tc>
-                <a:tc>
-                  <a:txBody>
-                    <a:bodyPr wrap="square"/>
-                    <a:lstStyle/>
-                    <a:p>
-                      <a:pPr algn="r"/>
-                      <a:r>
-                        <a:rPr sz="1500" b="0" i="0">
-                          <a:solidFill>
-                            <a:srgbClr val="2E3D4A"/>
-                          </a:solidFill>
-                          <a:latin typeface="Consolas"/>
-                        </a:rPr>
-                        <a:t>0.62</a:t>
-                      </a:r>
-                    </a:p>
-                  </a:txBody>
-                  <a:tcPr marL="109728" marR="109728" anchor="ctr">
-                    <a:solidFill>
-                      <a:srgbClr val="FFFFFF"/>
-                    </a:solidFill>
-                  </a:tcPr>
-                </a:tc>
-              </a:tr>
-            </a:tbl>
-          </a:graphicData>
-        </a:graphic>
-      </p:graphicFrame>
-      <p:sp>
-        <p:nvSpPr>
-          <p:cNvPr id="6" name="TextBox 5"/>
-          <p:cNvSpPr txBox="1"/>
-          <p:nvPr/>
-        </p:nvSpPr>
-        <p:spPr>
-          <a:xfrm>
-            <a:off x="685800" y="3803904"/>
-            <a:ext cx="10881360" cy="1828800"/>
-          </a:xfrm>
-          <a:prstGeom prst="rect">
-            <a:avLst/>
-          </a:prstGeom>
-          <a:noFill/>
-        </p:spPr>
-        <p:txBody>
-          <a:bodyPr wrap="square">
-            <a:spAutoFit/>
-          </a:bodyPr>
-          <a:lstStyle/>
-          <a:p>
-            <a:pPr algn="l"/>
-            <a:r>
-              <a:rPr sz="1700" b="1" i="0">
-                <a:solidFill>
-                  <a:srgbClr val="2C6E49"/>
-                </a:solidFill>
-                <a:latin typeface="Segoe UI"/>
-              </a:rPr>
-              <a:t>The laptop's.  </a:t>
-            </a:r>
-            <a:r>
-              <a:rPr sz="1700" b="0" i="0">
-                <a:solidFill>
-                  <a:srgbClr val="2E3D4A"/>
-                </a:solidFill>
-                <a:latin typeface="Segoe UI"/>
-              </a:rPr>
-              <a:t>The same script, unchanged, against a two-broker MSK cluster. With the broker no longer in the way, Flink uses everything it is given and the flattening disappears. Nothing about the job changed.</a:t>
-            </a:r>
-          </a:p>
-        </p:txBody>
-      </p:sp>
-    </p:spTree>
-  </p:cSld>
-  <p:clrMapOvr>
-    <a:masterClrMapping/>
-  </p:clrMapOvr>
-</p:sld>
-</file>
-
-<file path=ppt/slides/slide13.xml><?xml version="1.0" encoding="utf-8"?>
-<p:sld xmlns:a="http://schemas.openxmlformats.org/drawingml/2006/main" xmlns:p="http://schemas.openxmlformats.org/presentationml/2006/main" xmlns:r="http://schemas.openxmlformats.org/officeDocument/2006/relationships">
-  <p:cSld>
-    <p:spTree>
-      <p:nvGrpSpPr>
-        <p:cNvPr id="1" name=""/>
-        <p:cNvGrpSpPr/>
-        <p:nvPr/>
-      </p:nvGrpSpPr>
-      <p:grpSpPr/>
-      <p:sp>
-        <p:nvSpPr>
-          <p:cNvPr id="2" name="TextBox 1"/>
-          <p:cNvSpPr txBox="1"/>
-          <p:nvPr/>
-        </p:nvSpPr>
-        <p:spPr>
-          <a:xfrm>
-            <a:off x="640080" y="475488"/>
-            <a:ext cx="10972800" cy="274320"/>
-          </a:xfrm>
-          <a:prstGeom prst="rect">
-            <a:avLst/>
-          </a:prstGeom>
-          <a:noFill/>
-        </p:spPr>
-        <p:txBody>
-          <a:bodyPr wrap="square">
-            <a:spAutoFit/>
-          </a:bodyPr>
-          <a:lstStyle/>
-          <a:p>
-            <a:pPr algn="l"/>
-            <a:r>
-              <a:rPr sz="1150" b="1" i="0" spc="120">
-                <a:solidFill>
-                  <a:srgbClr val="1B6B8A"/>
-                </a:solidFill>
-                <a:latin typeface="Segoe UI"/>
-              </a:rPr>
-              <a:t>BACKUP — HOW IT WAS BUILT</a:t>
-            </a:r>
-          </a:p>
-        </p:txBody>
-      </p:sp>
-      <p:sp>
-        <p:nvSpPr>
-          <p:cNvPr id="3" name="TextBox 2"/>
-          <p:cNvSpPr txBox="1"/>
-          <p:nvPr/>
-        </p:nvSpPr>
-        <p:spPr>
-          <a:xfrm>
-            <a:off x="640080" y="786384"/>
-            <a:ext cx="10972800" cy="731520"/>
-          </a:xfrm>
-          <a:prstGeom prst="rect">
-            <a:avLst/>
-          </a:prstGeom>
-          <a:noFill/>
-        </p:spPr>
-        <p:txBody>
-          <a:bodyPr wrap="square">
-            <a:spAutoFit/>
-          </a:bodyPr>
-          <a:lstStyle/>
-          <a:p>
-            <a:pPr algn="l"/>
-            <a:r>
-              <a:rPr sz="3000" b="1" i="0">
-                <a:solidFill>
-                  <a:srgbClr val="14222E"/>
-                </a:solidFill>
-                <a:latin typeface="Segoe UI"/>
-              </a:rPr>
-              <a:t>Thirteen steps, each reviewed before the next</a:t>
-            </a:r>
-          </a:p>
-        </p:txBody>
-      </p:sp>
-      <p:sp>
-        <p:nvSpPr>
-          <p:cNvPr id="4" name="Rectangle 3"/>
-          <p:cNvSpPr/>
-          <p:nvPr/>
-        </p:nvSpPr>
-        <p:spPr>
-          <a:xfrm>
-            <a:off x="640080" y="1444752"/>
-            <a:ext cx="10908792" cy="12700"/>
-          </a:xfrm>
-          <a:prstGeom prst="rect">
-            <a:avLst/>
-          </a:prstGeom>
-          <a:solidFill>
-            <a:srgbClr val="D8DFE4"/>
-          </a:solidFill>
-          <a:ln>
-            <a:noFill/>
-          </a:ln>
-          <a:effectLst/>
-        </p:spPr>
-        <p:style>
-          <a:lnRef idx="1">
-            <a:schemeClr val="accent1"/>
-          </a:lnRef>
-          <a:fillRef idx="3">
-            <a:schemeClr val="accent1"/>
-          </a:fillRef>
-          <a:effectRef idx="2">
-            <a:schemeClr val="accent1"/>
-          </a:effectRef>
-          <a:fontRef idx="minor">
-            <a:schemeClr val="lt1"/>
-          </a:fontRef>
-        </p:style>
-        <p:txBody>
-          <a:bodyPr rtlCol="0" anchor="ctr"/>
-          <a:lstStyle/>
-          <a:p>
-            <a:pPr algn="ctr"/>
-          </a:p>
-        </p:txBody>
-      </p:sp>
-      <p:sp>
-        <p:nvSpPr>
-          <p:cNvPr id="5" name="TextBox 4"/>
-          <p:cNvSpPr txBox="1"/>
-          <p:nvPr/>
-        </p:nvSpPr>
-        <p:spPr>
-          <a:xfrm>
-            <a:off x="685800" y="1746504"/>
-            <a:ext cx="10881360" cy="3840480"/>
-          </a:xfrm>
-          <a:prstGeom prst="rect">
-            <a:avLst/>
-          </a:prstGeom>
-          <a:noFill/>
-        </p:spPr>
-        <p:txBody>
-          <a:bodyPr wrap="square">
-            <a:spAutoFit/>
-          </a:bodyPr>
-          <a:lstStyle/>
-          <a:p>
-            <a:pPr algn="l">
-              <a:spcAft>
-                <a:spcPts val="1400"/>
-              </a:spcAft>
-            </a:pPr>
-            <a:r>
-              <a:rPr sz="1600" b="1" i="0">
-                <a:solidFill>
-                  <a:srgbClr val="1B6B8A"/>
-                </a:solidFill>
-                <a:latin typeface="Segoe UI"/>
-              </a:rPr>
-              <a:t>▸   </a:t>
-            </a:r>
-            <a:r>
-              <a:rPr sz="1600" b="1" i="0">
-                <a:solidFill>
-                  <a:srgbClr val="14222E"/>
-                </a:solidFill>
-                <a:latin typeface="Segoe UI"/>
-              </a:rPr>
-              <a:t>One branch per step, squash-merged.  </a:t>
-            </a:r>
-            <a:r>
-              <a:rPr sz="1600" b="0" i="0">
-                <a:solidFill>
-                  <a:srgbClr val="2E3D4A"/>
-                </a:solidFill>
-                <a:latin typeface="Segoe UI"/>
-              </a:rPr>
-              <a:t>Linear history, one commit and one tag per step, branches kept so the working history stays inspectable.</a:t>
-            </a:r>
-          </a:p>
-          <a:p>
-            <a:pPr>
-              <a:spcAft>
-                <a:spcPts val="1400"/>
-              </a:spcAft>
-            </a:pPr>
-            <a:r>
-              <a:rPr sz="1600" b="1" i="0">
-                <a:solidFill>
-                  <a:srgbClr val="1B6B8A"/>
-                </a:solidFill>
-                <a:latin typeface="Segoe UI"/>
-              </a:rPr>
-              <a:t>▸   </a:t>
-            </a:r>
-            <a:r>
-              <a:rPr sz="1600" b="1" i="0">
-                <a:solidFill>
-                  <a:srgbClr val="14222E"/>
-                </a:solidFill>
-                <a:latin typeface="Segoe UI"/>
-              </a:rPr>
-              <a:t>CI on every push.  </a:t>
-            </a:r>
-            <a:r>
-              <a:rPr sz="1600" b="0" i="0">
-                <a:solidFill>
-                  <a:srgbClr val="2E3D4A"/>
-                </a:solidFill>
-                <a:latin typeface="Segoe UI"/>
-              </a:rPr>
-              <a:t>Build and unit tests, shellcheck, a cold-start run of the whole stack, and a job that verifies the expected numbers against real topics.</a:t>
-            </a:r>
-          </a:p>
-          <a:p>
-            <a:pPr>
-              <a:spcAft>
-                <a:spcPts val="1400"/>
-              </a:spcAft>
-            </a:pPr>
-            <a:r>
-              <a:rPr sz="1600" b="1" i="0">
-                <a:solidFill>
-                  <a:srgbClr val="1B6B8A"/>
-                </a:solidFill>
-                <a:latin typeface="Segoe UI"/>
-              </a:rPr>
-              <a:t>▸   </a:t>
-            </a:r>
-            <a:r>
-              <a:rPr sz="1600" b="1" i="0">
-                <a:solidFill>
-                  <a:srgbClr val="14222E"/>
-                </a:solidFill>
-                <a:latin typeface="Segoe UI"/>
-              </a:rPr>
-              <a:t>Everything is scripted.  </a:t>
-            </a:r>
-            <a:r>
-              <a:rPr sz="1600" b="0" i="0">
-                <a:solidFill>
-                  <a:srgbClr val="2E3D4A"/>
-                </a:solidFill>
-                <a:latin typeface="Segoe UI"/>
-              </a:rPr>
-              <a:t>The demo, the chaos test, the latency measurement, the scaling run — and this deck.</a:t>
-            </a:r>
-          </a:p>
-        </p:txBody>
-      </p:sp>
-    </p:spTree>
-  </p:cSld>
-  <p:clrMapOvr>
-    <a:masterClrMapping/>
-  </p:clrMapOvr>
-</p:sld>
-</file>
-
-<file path=ppt/slides/slide2.xml><?xml version="1.0" encoding="utf-8"?>
-<p:sld xmlns:a="http://schemas.openxmlformats.org/drawingml/2006/main" xmlns:p="http://schemas.openxmlformats.org/presentationml/2006/main" xmlns:r="http://schemas.openxmlformats.org/officeDocument/2006/relationships">
-  <p:cSld>
-    <p:spTree>
-      <p:nvGrpSpPr>
-        <p:cNvPr id="1" name=""/>
-        <p:cNvGrpSpPr/>
-        <p:nvPr/>
-      </p:nvGrpSpPr>
-      <p:grpSpPr/>
-      <p:sp>
-        <p:nvSpPr>
-          <p:cNvPr id="2" name="TextBox 1"/>
-          <p:cNvSpPr txBox="1"/>
-          <p:nvPr/>
-        </p:nvSpPr>
-        <p:spPr>
-          <a:xfrm>
-            <a:off x="640080" y="475488"/>
-            <a:ext cx="10972800" cy="274320"/>
-          </a:xfrm>
-          <a:prstGeom prst="rect">
-            <a:avLst/>
-          </a:prstGeom>
-          <a:noFill/>
-        </p:spPr>
-        <p:txBody>
-          <a:bodyPr wrap="square">
-            <a:spAutoFit/>
-          </a:bodyPr>
-          <a:lstStyle/>
-          <a:p>
-            <a:pPr algn="l"/>
-            <a:r>
-              <a:rPr sz="1150" b="1" i="0" spc="120">
-                <a:solidFill>
-                  <a:srgbClr val="1B6B8A"/>
-                </a:solidFill>
-                <a:latin typeface="Segoe UI"/>
-              </a:rPr>
-              <a:t>THE PROBLEM</a:t>
-            </a:r>
-          </a:p>
-        </p:txBody>
-      </p:sp>
-      <p:sp>
-        <p:nvSpPr>
-          <p:cNvPr id="3" name="TextBox 2"/>
-          <p:cNvSpPr txBox="1"/>
-          <p:nvPr/>
-        </p:nvSpPr>
-        <p:spPr>
-          <a:xfrm>
-            <a:off x="640080" y="786384"/>
-            <a:ext cx="10972800" cy="731520"/>
-          </a:xfrm>
-          <a:prstGeom prst="rect">
-            <a:avLst/>
-          </a:prstGeom>
-          <a:noFill/>
-        </p:spPr>
-        <p:txBody>
-          <a:bodyPr wrap="square">
-            <a:spAutoFit/>
-          </a:bodyPr>
-          <a:lstStyle/>
-          <a:p>
-            <a:pPr algn="l"/>
-            <a:r>
-              <a:rPr sz="3000" b="1" i="0">
-                <a:solidFill>
-                  <a:srgbClr val="14222E"/>
-                </a:solidFill>
-                <a:latin typeface="Segoe UI"/>
-              </a:rPr>
-              <a:t>One order becomes four allocations</a:t>
-            </a:r>
-          </a:p>
-        </p:txBody>
-      </p:sp>
-      <p:sp>
-        <p:nvSpPr>
-          <p:cNvPr id="4" name="Rectangle 3"/>
-          <p:cNvSpPr/>
-          <p:nvPr/>
-        </p:nvSpPr>
-        <p:spPr>
-          <a:xfrm>
-            <a:off x="640080" y="1444752"/>
-            <a:ext cx="10908792" cy="12700"/>
-          </a:xfrm>
-          <a:prstGeom prst="rect">
-            <a:avLst/>
-          </a:prstGeom>
-          <a:solidFill>
-            <a:srgbClr val="D8DFE4"/>
-          </a:solidFill>
-          <a:ln>
-            <a:noFill/>
-          </a:ln>
-          <a:effectLst/>
-        </p:spPr>
-        <p:style>
-          <a:lnRef idx="1">
-            <a:schemeClr val="accent1"/>
-          </a:lnRef>
-          <a:fillRef idx="3">
-            <a:schemeClr val="accent1"/>
-          </a:fillRef>
-          <a:effectRef idx="2">
-            <a:schemeClr val="accent1"/>
-          </a:effectRef>
-          <a:fontRef idx="minor">
-            <a:schemeClr val="lt1"/>
-          </a:fontRef>
-        </p:style>
-        <p:txBody>
-          <a:bodyPr rtlCol="0" anchor="ctr"/>
-          <a:lstStyle/>
-          <a:p>
-            <a:pPr algn="ctr"/>
-          </a:p>
-        </p:txBody>
-      </p:sp>
-      <p:sp>
-        <p:nvSpPr>
-          <p:cNvPr id="5" name="TextBox 4"/>
-          <p:cNvSpPr txBox="1"/>
-          <p:nvPr/>
-        </p:nvSpPr>
-        <p:spPr>
-          <a:xfrm>
-            <a:off x="685800" y="1746504"/>
-            <a:ext cx="10881360" cy="3840480"/>
-          </a:xfrm>
-          <a:prstGeom prst="rect">
-            <a:avLst/>
-          </a:prstGeom>
-          <a:noFill/>
-        </p:spPr>
-        <p:txBody>
-          <a:bodyPr wrap="square">
-            <a:spAutoFit/>
-          </a:bodyPr>
-          <a:lstStyle/>
-          <a:p>
-            <a:pPr algn="l">
-              <a:spcAft>
-                <a:spcPts val="1400"/>
-              </a:spcAft>
-            </a:pPr>
-            <a:r>
-              <a:rPr sz="1700" b="1" i="0">
-                <a:solidFill>
-                  <a:srgbClr val="1B6B8A"/>
-                </a:solidFill>
-                <a:latin typeface="Segoe UI"/>
-              </a:rPr>
-              <a:t>▸   </a:t>
-            </a:r>
-            <a:r>
-              <a:rPr sz="1700" b="1" i="0">
-                <a:solidFill>
-                  <a:srgbClr val="14222E"/>
-                </a:solidFill>
-                <a:latin typeface="Segoe UI"/>
-              </a:rPr>
-              <a:t>A block trade is one order split across several accounts.  </a:t>
-            </a:r>
-            <a:r>
-              <a:rPr sz="1700" b="0" i="0">
-                <a:solidFill>
-                  <a:srgbClr val="2E3D4A"/>
-                </a:solidFill>
-                <a:latin typeface="Segoe UI"/>
-              </a:rPr>
-              <a:t>A trade of 400 shares allocated to 4 accounts becomes 4 allocations of 100.</a:t>
-            </a:r>
-          </a:p>
-          <a:p>
-            <a:pPr>
-              <a:spcAft>
-                <a:spcPts val="1400"/>
-              </a:spcAft>
-            </a:pPr>
-            <a:r>
-              <a:rPr sz="1700" b="1" i="0">
-                <a:solidFill>
-                  <a:srgbClr val="1B6B8A"/>
-                </a:solidFill>
-                <a:latin typeface="Segoe UI"/>
-              </a:rPr>
-              <a:t>▸   </a:t>
-            </a:r>
-            <a:r>
-              <a:rPr sz="1700" b="1" i="0">
-                <a:solidFill>
-                  <a:srgbClr val="14222E"/>
-                </a:solidFill>
-                <a:latin typeface="Segoe UI"/>
-              </a:rPr>
-              <a:t>Publish positions two ways, in parallel.  </a:t>
-            </a:r>
-            <a:r>
-              <a:rPr sz="1700" b="0" i="0">
-                <a:solidFill>
-                  <a:srgbClr val="2E3D4A"/>
-                </a:solidFill>
-                <a:latin typeface="Segoe UI"/>
-              </a:rPr>
-              <a:t>By symbol, and by account / sub-account / symbol.</a:t>
-            </a:r>
-          </a:p>
-          <a:p>
-            <a:pPr>
-              <a:spcAft>
-                <a:spcPts val="1400"/>
-              </a:spcAft>
-            </a:pPr>
-            <a:r>
-              <a:rPr sz="1700" b="1" i="0">
-                <a:solidFill>
-                  <a:srgbClr val="1B6B8A"/>
-                </a:solidFill>
-                <a:latin typeface="Segoe UI"/>
-              </a:rPr>
-              <a:t>▸   </a:t>
-            </a:r>
-            <a:r>
-              <a:rPr sz="1700" b="1" i="0">
-                <a:solidFill>
-                  <a:srgbClr val="14222E"/>
-                </a:solidFill>
-                <a:latin typeface="Segoe UI"/>
-              </a:rPr>
-              <a:t>Then join prices to those positions  </a:t>
-            </a:r>
-            <a:r>
-              <a:rPr sz="1700" b="0" i="0">
-                <a:solidFill>
-                  <a:srgbClr val="2E3D4A"/>
-                </a:solidFill>
-                <a:latin typeface="Segoe UI"/>
-              </a:rPr>
-              <a:t>and publish market value the same two ways, once per key per window.</a:t>
-            </a:r>
-          </a:p>
-        </p:txBody>
-      </p:sp>
-    </p:spTree>
-  </p:cSld>
-  <p:clrMapOvr>
-    <a:masterClrMapping/>
-  </p:clrMapOvr>
-</p:sld>
-</file>
-
-<file path=ppt/slides/slide3.xml><?xml version="1.0" encoding="utf-8"?>
-<p:sld xmlns:a="http://schemas.openxmlformats.org/drawingml/2006/main" xmlns:p="http://schemas.openxmlformats.org/presentationml/2006/main" xmlns:r="http://schemas.openxmlformats.org/officeDocument/2006/relationships">
-  <p:cSld>
-    <p:spTree>
-      <p:nvGrpSpPr>
-        <p:cNvPr id="1" name=""/>
-        <p:cNvGrpSpPr/>
-        <p:nvPr/>
-      </p:nvGrpSpPr>
-      <p:grpSpPr/>
-      <p:sp>
-        <p:nvSpPr>
-          <p:cNvPr id="2" name="TextBox 1"/>
-          <p:cNvSpPr txBox="1"/>
-          <p:nvPr/>
-        </p:nvSpPr>
-        <p:spPr>
-          <a:xfrm>
-            <a:off x="640080" y="475488"/>
-            <a:ext cx="10972800" cy="274320"/>
-          </a:xfrm>
-          <a:prstGeom prst="rect">
-            <a:avLst/>
-          </a:prstGeom>
-          <a:noFill/>
-        </p:spPr>
-        <p:txBody>
-          <a:bodyPr wrap="square">
-            <a:spAutoFit/>
-          </a:bodyPr>
-          <a:lstStyle/>
-          <a:p>
-            <a:pPr algn="l"/>
-            <a:r>
-              <a:rPr sz="1150" b="1" i="0" spc="120">
-                <a:solidFill>
-                  <a:srgbClr val="1B6B8A"/>
-                </a:solidFill>
-                <a:latin typeface="Segoe UI"/>
-              </a:rPr>
-              <a:t>THE DESIGN</a:t>
-            </a:r>
-          </a:p>
-        </p:txBody>
-      </p:sp>
-      <p:sp>
-        <p:nvSpPr>
-          <p:cNvPr id="3" name="TextBox 2"/>
-          <p:cNvSpPr txBox="1"/>
-          <p:nvPr/>
-        </p:nvSpPr>
-        <p:spPr>
-          <a:xfrm>
-            <a:off x="640080" y="786384"/>
-            <a:ext cx="10972800" cy="731520"/>
-          </a:xfrm>
-          <a:prstGeom prst="rect">
-            <a:avLst/>
-          </a:prstGeom>
-          <a:noFill/>
-        </p:spPr>
-        <p:txBody>
-          <a:bodyPr wrap="square">
-            <a:spAutoFit/>
-          </a:bodyPr>
-          <a:lstStyle/>
-          <a:p>
-            <a:pPr algn="l"/>
-            <a:r>
-              <a:rPr sz="3000" b="1" i="0">
-                <a:solidFill>
-                  <a:srgbClr val="14222E"/>
-                </a:solidFill>
-                <a:latin typeface="Segoe UI"/>
-              </a:rPr>
-              <a:t>Six numbered elements, end to end</a:t>
-            </a:r>
-          </a:p>
-        </p:txBody>
-      </p:sp>
-      <p:sp>
-        <p:nvSpPr>
-          <p:cNvPr id="4" name="Rectangle 3"/>
-          <p:cNvSpPr/>
-          <p:nvPr/>
-        </p:nvSpPr>
-        <p:spPr>
-          <a:xfrm>
-            <a:off x="640080" y="1444752"/>
-            <a:ext cx="10908792" cy="12700"/>
-          </a:xfrm>
-          <a:prstGeom prst="rect">
-            <a:avLst/>
-          </a:prstGeom>
-          <a:solidFill>
-            <a:srgbClr val="D8DFE4"/>
-          </a:solidFill>
-          <a:ln>
-            <a:noFill/>
-          </a:ln>
-          <a:effectLst/>
-        </p:spPr>
-        <p:style>
-          <a:lnRef idx="1">
-            <a:schemeClr val="accent1"/>
-          </a:lnRef>
-          <a:fillRef idx="3">
-            <a:schemeClr val="accent1"/>
-          </a:fillRef>
-          <a:effectRef idx="2">
-            <a:schemeClr val="accent1"/>
-          </a:effectRef>
-          <a:fontRef idx="minor">
-            <a:schemeClr val="lt1"/>
-          </a:fontRef>
-        </p:style>
-        <p:txBody>
-          <a:bodyPr rtlCol="0" anchor="ctr"/>
-          <a:lstStyle/>
-          <a:p>
-            <a:pPr algn="ctr"/>
-          </a:p>
-        </p:txBody>
-      </p:sp>
-      <p:pic>
-        <p:nvPicPr>
-          <p:cNvPr id="5" name="Picture 4" descr="pipeline.png"/>
-          <p:cNvPicPr>
-            <a:picLocks noChangeAspect="1"/>
-          </p:cNvPicPr>
-          <p:nvPr/>
-        </p:nvPicPr>
-        <p:blipFill>
-          <a:blip r:embed="rId2"/>
-          <a:stretch>
-            <a:fillRect/>
-          </a:stretch>
-        </p:blipFill>
-        <p:spPr>
-          <a:xfrm>
-            <a:off x="521207" y="2002536"/>
-            <a:ext cx="11155680" cy="4172586"/>
-          </a:xfrm>
-          <a:prstGeom prst="rect">
-            <a:avLst/>
-          </a:prstGeom>
-        </p:spPr>
-      </p:pic>
-      <p:sp>
-        <p:nvSpPr>
-          <p:cNvPr id="6" name="TextBox 5"/>
-          <p:cNvSpPr txBox="1"/>
-          <p:nvPr/>
-        </p:nvSpPr>
-        <p:spPr>
-          <a:xfrm>
-            <a:off x="685800" y="6303138"/>
-            <a:ext cx="10881360" cy="822960"/>
-          </a:xfrm>
-          <a:prstGeom prst="rect">
-            <a:avLst/>
-          </a:prstGeom>
-          <a:noFill/>
-        </p:spPr>
-        <p:txBody>
-          <a:bodyPr wrap="square">
-            <a:spAutoFit/>
-          </a:bodyPr>
-          <a:lstStyle/>
-          <a:p>
-            <a:pPr algn="l"/>
-            <a:r>
-              <a:rPr sz="1350" b="0" i="1">
-                <a:solidFill>
-                  <a:srgbClr val="6B7A87"/>
-                </a:solidFill>
-                <a:latin typeface="Segoe UI"/>
-              </a:rPr>
-              <a:t>Every edge carries its partition key and value. The diagram states the specified one-minute window; the demo overrides it to ten seconds, and the calculation is identical either way.</a:t>
-            </a:r>
-          </a:p>
-        </p:txBody>
-      </p:sp>
-    </p:spTree>
-  </p:cSld>
-  <p:clrMapOvr>
-    <a:masterClrMapping/>
-  </p:clrMapOvr>
-</p:sld>
-</file>
-
-<file path=ppt/slides/slide4.xml><?xml version="1.0" encoding="utf-8"?>
-<p:sld xmlns:a="http://schemas.openxmlformats.org/drawingml/2006/main" xmlns:p="http://schemas.openxmlformats.org/presentationml/2006/main" xmlns:r="http://schemas.openxmlformats.org/officeDocument/2006/relationships">
-  <p:cSld>
-    <p:spTree>
-      <p:nvGrpSpPr>
-        <p:cNvPr id="1" name=""/>
-        <p:cNvGrpSpPr/>
-        <p:nvPr/>
-      </p:nvGrpSpPr>
-      <p:grpSpPr/>
-      <p:sp>
-        <p:nvSpPr>
-          <p:cNvPr id="2" name="TextBox 1"/>
-          <p:cNvSpPr txBox="1"/>
-          <p:nvPr/>
-        </p:nvSpPr>
-        <p:spPr>
-          <a:xfrm>
-            <a:off x="640080" y="475488"/>
-            <a:ext cx="10972800" cy="274320"/>
-          </a:xfrm>
-          <a:prstGeom prst="rect">
-            <a:avLst/>
-          </a:prstGeom>
-          <a:noFill/>
-        </p:spPr>
-        <p:txBody>
-          <a:bodyPr wrap="square">
-            <a:spAutoFit/>
-          </a:bodyPr>
-          <a:lstStyle/>
-          <a:p>
-            <a:pPr algn="l"/>
-            <a:r>
-              <a:rPr sz="1150" b="1" i="0" spc="120">
-                <a:solidFill>
-                  <a:srgbClr val="1B6B8A"/>
-                </a:solidFill>
-                <a:latin typeface="Segoe UI"/>
-              </a:rPr>
-              <a:t>EXPECTED OUTPUT</a:t>
-            </a:r>
-          </a:p>
-        </p:txBody>
-      </p:sp>
-      <p:sp>
-        <p:nvSpPr>
-          <p:cNvPr id="3" name="TextBox 2"/>
-          <p:cNvSpPr txBox="1"/>
-          <p:nvPr/>
-        </p:nvSpPr>
-        <p:spPr>
-          <a:xfrm>
-            <a:off x="640080" y="786384"/>
-            <a:ext cx="10972800" cy="731520"/>
-          </a:xfrm>
-          <a:prstGeom prst="rect">
-            <a:avLst/>
-          </a:prstGeom>
-          <a:noFill/>
-        </p:spPr>
-        <p:txBody>
-          <a:bodyPr wrap="square">
-            <a:spAutoFit/>
-          </a:bodyPr>
-          <a:lstStyle/>
-          <a:p>
-            <a:pPr algn="l"/>
-            <a:r>
-              <a:rPr sz="3000" b="1" i="0">
-                <a:solidFill>
-                  <a:srgbClr val="14222E"/>
-                </a:solidFill>
-                <a:latin typeface="Segoe UI"/>
-              </a:rPr>
-              <a:t>What the numbers should be, before we run anything</a:t>
-            </a:r>
-          </a:p>
-        </p:txBody>
-      </p:sp>
-      <p:sp>
-        <p:nvSpPr>
-          <p:cNvPr id="4" name="Rectangle 3"/>
-          <p:cNvSpPr/>
-          <p:nvPr/>
-        </p:nvSpPr>
-        <p:spPr>
-          <a:xfrm>
-            <a:off x="640080" y="1444752"/>
-            <a:ext cx="10908792" cy="12700"/>
-          </a:xfrm>
-          <a:prstGeom prst="rect">
-            <a:avLst/>
-          </a:prstGeom>
-          <a:solidFill>
-            <a:srgbClr val="D8DFE4"/>
-          </a:solidFill>
-          <a:ln>
-            <a:noFill/>
-          </a:ln>
-          <a:effectLst/>
-        </p:spPr>
-        <p:style>
-          <a:lnRef idx="1">
-            <a:schemeClr val="accent1"/>
-          </a:lnRef>
-          <a:fillRef idx="3">
-            <a:schemeClr val="accent1"/>
-          </a:fillRef>
-          <a:effectRef idx="2">
-            <a:schemeClr val="accent1"/>
-          </a:effectRef>
-          <a:fontRef idx="minor">
-            <a:schemeClr val="lt1"/>
-          </a:fontRef>
-        </p:style>
-        <p:txBody>
-          <a:bodyPr rtlCol="0" anchor="ctr"/>
-          <a:lstStyle/>
-          <a:p>
-            <a:pPr algn="ctr"/>
-          </a:p>
-        </p:txBody>
-      </p:sp>
-      <p:graphicFrame>
-        <p:nvGraphicFramePr>
-          <p:cNvPr id="5" name="Table 4"/>
-          <p:cNvGraphicFramePr>
-            <a:graphicFrameLocks noGrp="1"/>
-          </p:cNvGraphicFramePr>
-          <p:nvPr/>
-        </p:nvGraphicFramePr>
-        <p:xfrm>
-          <a:off x="685800" y="1746504"/>
-          <a:ext cx="4937760" cy="2962656"/>
+          <a:ext cx="4937760" cy="2231136"/>
         </p:xfrm>
         <a:graphic>
           <a:graphicData uri="http://schemas.openxmlformats.org/drawingml/2006/table">
@@ -7669,7 +5047,7 @@
                           </a:solidFill>
                           <a:latin typeface="Segoe UI"/>
                         </a:rPr>
-                        <a:t>Input / setting</a:t>
+                        <a:t>Input</a:t>
                       </a:r>
                     </a:p>
                   </a:txBody>
@@ -7692,7 +5070,7 @@
                           </a:solidFill>
                           <a:latin typeface="Segoe UI"/>
                         </a:rPr>
-                        <a:t>Demo value</a:t>
+                        <a:t>Rate</a:t>
                       </a:r>
                     </a:p>
                   </a:txBody>
@@ -7939,102 +5317,6 @@
                   <a:tcPr marL="109728" marR="109728" anchor="ctr">
                     <a:solidFill>
                       <a:srgbClr val="FFFFFF"/>
-                    </a:solidFill>
-                  </a:tcPr>
-                </a:tc>
-              </a:tr>
-              <a:tr h="365760">
-                <a:tc>
-                  <a:txBody>
-                    <a:bodyPr wrap="square"/>
-                    <a:lstStyle/>
-                    <a:p>
-                      <a:pPr algn="l"/>
-                      <a:r>
-                        <a:rPr sz="1350" b="1" i="0">
-                          <a:solidFill>
-                            <a:srgbClr val="14222E"/>
-                          </a:solidFill>
-                          <a:latin typeface="Segoe UI"/>
-                        </a:rPr>
-                        <a:t>Window</a:t>
-                      </a:r>
-                    </a:p>
-                  </a:txBody>
-                  <a:tcPr marL="109728" marR="109728" anchor="ctr">
-                    <a:solidFill>
-                      <a:srgbClr val="F2F5F7"/>
-                    </a:solidFill>
-                  </a:tcPr>
-                </a:tc>
-                <a:tc>
-                  <a:txBody>
-                    <a:bodyPr wrap="square"/>
-                    <a:lstStyle/>
-                    <a:p>
-                      <a:pPr algn="r"/>
-                      <a:r>
-                        <a:rPr sz="1350" b="1" i="0">
-                          <a:solidFill>
-                            <a:srgbClr val="14222E"/>
-                          </a:solidFill>
-                          <a:latin typeface="Consolas"/>
-                        </a:rPr>
-                        <a:t>10 s  (spec: 1 min)</a:t>
-                      </a:r>
-                    </a:p>
-                  </a:txBody>
-                  <a:tcPr marL="109728" marR="109728" anchor="ctr">
-                    <a:solidFill>
-                      <a:srgbClr val="F2F5F7"/>
-                    </a:solidFill>
-                  </a:tcPr>
-                </a:tc>
-              </a:tr>
-              <a:tr h="365760">
-                <a:tc>
-                  <a:txBody>
-                    <a:bodyPr wrap="square"/>
-                    <a:lstStyle/>
-                    <a:p>
-                      <a:pPr algn="l"/>
-                      <a:r>
-                        <a:rPr sz="1350" b="1" i="0">
-                          <a:solidFill>
-                            <a:srgbClr val="14222E"/>
-                          </a:solidFill>
-                          <a:latin typeface="Segoe UI"/>
-                        </a:rPr>
-                        <a:t>Checkpoint interval</a:t>
-                      </a:r>
-                    </a:p>
-                  </a:txBody>
-                  <a:tcPr marL="109728" marR="109728" anchor="ctr">
-                    <a:solidFill>
-                      <a:srgbClr val="F2F5F7"/>
-                    </a:solidFill>
-                  </a:tcPr>
-                </a:tc>
-                <a:tc>
-                  <a:txBody>
-                    <a:bodyPr wrap="square"/>
-                    <a:lstStyle/>
-                    <a:p>
-                      <a:pPr algn="r"/>
-                      <a:r>
-                        <a:rPr sz="1350" b="1" i="0">
-                          <a:solidFill>
-                            <a:srgbClr val="14222E"/>
-                          </a:solidFill>
-                          <a:latin typeface="Consolas"/>
-                        </a:rPr>
-                        <a:t>1 s</a:t>
-                      </a:r>
-                    </a:p>
-                  </a:txBody>
-                  <a:tcPr marL="109728" marR="109728" anchor="ctr">
-                    <a:solidFill>
-                      <a:srgbClr val="F2F5F7"/>
                     </a:solidFill>
                   </a:tcPr>
                 </a:tc>
@@ -8543,13 +5825,122 @@
       </p:graphicFrame>
       <p:sp>
         <p:nvSpPr>
-          <p:cNvPr id="7" name="TextBox 6"/>
+          <p:cNvPr id="7" name="Rounded Rectangle 6"/>
+          <p:cNvSpPr/>
+          <p:nvPr/>
+        </p:nvSpPr>
+        <p:spPr>
+          <a:xfrm>
+            <a:off x="685800" y="4233672"/>
+            <a:ext cx="10881360" cy="713232"/>
+          </a:xfrm>
+          <a:prstGeom prst="roundRect">
+            <a:avLst/>
+          </a:prstGeom>
+          <a:solidFill>
+            <a:srgbClr val="F2F5F7"/>
+          </a:solidFill>
+          <a:ln w="12700">
+            <a:solidFill>
+              <a:srgbClr val="D8DFE4"/>
+            </a:solidFill>
+          </a:ln>
+          <a:effectLst/>
+        </p:spPr>
+        <p:style>
+          <a:lnRef idx="1">
+            <a:schemeClr val="accent1"/>
+          </a:lnRef>
+          <a:fillRef idx="3">
+            <a:schemeClr val="accent1"/>
+          </a:fillRef>
+          <a:effectRef idx="2">
+            <a:schemeClr val="accent1"/>
+          </a:effectRef>
+          <a:fontRef idx="minor">
+            <a:schemeClr val="lt1"/>
+          </a:fontRef>
+        </p:style>
+        <p:txBody>
+          <a:bodyPr rtlCol="0" anchor="ctr" lIns="256032" wrap="square"/>
+          <a:lstStyle/>
+          <a:p>
+            <a:pPr algn="l"/>
+            <a:r>
+              <a:rPr sz="1400" b="1" i="0">
+                <a:solidFill>
+                  <a:srgbClr val="6B7A87"/>
+                </a:solidFill>
+                <a:latin typeface="Segoe UI"/>
+              </a:rPr>
+              <a:t>Set for the demo:   </a:t>
+            </a:r>
+            <a:r>
+              <a:rPr sz="1500" b="0" i="0">
+                <a:solidFill>
+                  <a:srgbClr val="2E3D4A"/>
+                </a:solidFill>
+                <a:latin typeface="Segoe UI"/>
+              </a:rPr>
+              <a:t>window </a:t>
+            </a:r>
+            <a:r>
+              <a:rPr sz="1500" b="1" i="0">
+                <a:solidFill>
+                  <a:srgbClr val="14222E"/>
+                </a:solidFill>
+                <a:latin typeface="Consolas"/>
+              </a:rPr>
+              <a:t>10 s</a:t>
+            </a:r>
+            <a:r>
+              <a:rPr sz="1500" b="0" i="0">
+                <a:solidFill>
+                  <a:srgbClr val="2E3D4A"/>
+                </a:solidFill>
+                <a:latin typeface="Segoe UI"/>
+              </a:rPr>
+              <a:t>  (specified: 1 min)     checkpoint interval </a:t>
+            </a:r>
+            <a:r>
+              <a:rPr sz="1500" b="1" i="0">
+                <a:solidFill>
+                  <a:srgbClr val="14222E"/>
+                </a:solidFill>
+                <a:latin typeface="Consolas"/>
+              </a:rPr>
+              <a:t>1 s</a:t>
+            </a:r>
+            <a:r>
+              <a:rPr sz="1500" b="0" i="0">
+                <a:solidFill>
+                  <a:srgbClr val="2E3D4A"/>
+                </a:solidFill>
+                <a:latin typeface="Segoe UI"/>
+              </a:rPr>
+              <a:t>     partitions </a:t>
+            </a:r>
+            <a:r>
+              <a:rPr sz="1500" b="1" i="0">
+                <a:solidFill>
+                  <a:srgbClr val="14222E"/>
+                </a:solidFill>
+                <a:latin typeface="Consolas"/>
+              </a:rPr>
+              <a:t>8</a:t>
+            </a:r>
+          </a:p>
+        </p:txBody>
+      </p:sp>
+      <p:sp>
+        <p:nvSpPr>
+          <p:cNvPr id="8" name="TextBox 7"/>
           <p:cNvSpPr txBox="1"/>
           <p:nvPr/>
         </p:nvSpPr>
         <p:spPr>
           <a:xfrm>
-            <a:off x="685800" y="5394960"/>
+            <a:off x="685800" y="5166360"/>
             <a:ext cx="10881360" cy="822960"/>
           </a:xfrm>
           <a:prstGeom prst="rect">
@@ -8571,7 +5962,7 @@
                 </a:solidFill>
                 <a:latin typeface="Segoe UI"/>
               </a:rPr>
-              <a:t>The window is 10 s for the demo so the market value sinks say something without a minute of waiting — the job defaults to the specified minute, and the calculation is identical either way. Committing to these numbers before the run is what makes the demo a verification rather than a tour; scripts/verify-topics.sh checks every one of them against the real topics, on every push.</a:t>
+              <a:t>The window is 10 s so the market value sinks say something without a minute of waiting — the job defaults to the specified minute, and the calculation is identical either way. Committing to these numbers before the run is what makes the demo a verification rather than a tour; scripts/verify-topics.sh checks every one of them against the real topics, on every push.</a:t>
             </a:r>
           </a:p>
         </p:txBody>
@@ -8966,910 +6357,6 @@
 </file>
 
 <file path=ppt/slides/slide7.xml><?xml version="1.0" encoding="utf-8"?>
-<p:sld xmlns:a="http://schemas.openxmlformats.org/drawingml/2006/main" xmlns:p="http://schemas.openxmlformats.org/presentationml/2006/main" xmlns:r="http://schemas.openxmlformats.org/officeDocument/2006/relationships">
-  <p:cSld>
-    <p:spTree>
-      <p:nvGrpSpPr>
-        <p:cNvPr id="1" name=""/>
-        <p:cNvGrpSpPr/>
-        <p:nvPr/>
-      </p:nvGrpSpPr>
-      <p:grpSpPr/>
-      <p:sp>
-        <p:nvSpPr>
-          <p:cNvPr id="2" name="TextBox 1"/>
-          <p:cNvSpPr txBox="1"/>
-          <p:nvPr/>
-        </p:nvSpPr>
-        <p:spPr>
-          <a:xfrm>
-            <a:off x="640080" y="475488"/>
-            <a:ext cx="10972800" cy="274320"/>
-          </a:xfrm>
-          <a:prstGeom prst="rect">
-            <a:avLst/>
-          </a:prstGeom>
-          <a:noFill/>
-        </p:spPr>
-        <p:txBody>
-          <a:bodyPr wrap="square">
-            <a:spAutoFit/>
-          </a:bodyPr>
-          <a:lstStyle/>
-          <a:p>
-            <a:pPr algn="l"/>
-            <a:r>
-              <a:rPr sz="1150" b="1" i="0" spc="120">
-                <a:solidFill>
-                  <a:srgbClr val="1B6B8A"/>
-                </a:solidFill>
-                <a:latin typeface="Segoe UI"/>
-              </a:rPr>
-              <a:t>CORRECTNESS UNDER FAILURE</a:t>
-            </a:r>
-          </a:p>
-        </p:txBody>
-      </p:sp>
-      <p:sp>
-        <p:nvSpPr>
-          <p:cNvPr id="3" name="TextBox 2"/>
-          <p:cNvSpPr txBox="1"/>
-          <p:nvPr/>
-        </p:nvSpPr>
-        <p:spPr>
-          <a:xfrm>
-            <a:off x="640080" y="786384"/>
-            <a:ext cx="10972800" cy="731520"/>
-          </a:xfrm>
-          <a:prstGeom prst="rect">
-            <a:avLst/>
-          </a:prstGeom>
-          <a:noFill/>
-        </p:spPr>
-        <p:txBody>
-          <a:bodyPr wrap="square">
-            <a:spAutoFit/>
-          </a:bodyPr>
-          <a:lstStyle/>
-          <a:p>
-            <a:pPr algn="l"/>
-            <a:r>
-              <a:rPr sz="3000" b="1" i="0">
-                <a:solidFill>
-                  <a:srgbClr val="14222E"/>
-                </a:solidFill>
-                <a:latin typeface="Segoe UI"/>
-              </a:rPr>
-              <a:t>A replayed record is a wrong number, not a duplicate</a:t>
-            </a:r>
-          </a:p>
-        </p:txBody>
-      </p:sp>
-      <p:sp>
-        <p:nvSpPr>
-          <p:cNvPr id="4" name="Rectangle 3"/>
-          <p:cNvSpPr/>
-          <p:nvPr/>
-        </p:nvSpPr>
-        <p:spPr>
-          <a:xfrm>
-            <a:off x="640080" y="1444752"/>
-            <a:ext cx="10908792" cy="12700"/>
-          </a:xfrm>
-          <a:prstGeom prst="rect">
-            <a:avLst/>
-          </a:prstGeom>
-          <a:solidFill>
-            <a:srgbClr val="D8DFE4"/>
-          </a:solidFill>
-          <a:ln>
-            <a:noFill/>
-          </a:ln>
-          <a:effectLst/>
-        </p:spPr>
-        <p:style>
-          <a:lnRef idx="1">
-            <a:schemeClr val="accent1"/>
-          </a:lnRef>
-          <a:fillRef idx="3">
-            <a:schemeClr val="accent1"/>
-          </a:fillRef>
-          <a:effectRef idx="2">
-            <a:schemeClr val="accent1"/>
-          </a:effectRef>
-          <a:fontRef idx="minor">
-            <a:schemeClr val="lt1"/>
-          </a:fontRef>
-        </p:style>
-        <p:txBody>
-          <a:bodyPr rtlCol="0" anchor="ctr"/>
-          <a:lstStyle/>
-          <a:p>
-            <a:pPr algn="ctr"/>
-          </a:p>
-        </p:txBody>
-      </p:sp>
-      <p:sp>
-        <p:nvSpPr>
-          <p:cNvPr id="5" name="TextBox 4"/>
-          <p:cNvSpPr txBox="1"/>
-          <p:nvPr/>
-        </p:nvSpPr>
-        <p:spPr>
-          <a:xfrm>
-            <a:off x="685800" y="1746504"/>
-            <a:ext cx="10881360" cy="3840480"/>
-          </a:xfrm>
-          <a:prstGeom prst="rect">
-            <a:avLst/>
-          </a:prstGeom>
-          <a:noFill/>
-        </p:spPr>
-        <p:txBody>
-          <a:bodyPr wrap="square">
-            <a:spAutoFit/>
-          </a:bodyPr>
-          <a:lstStyle/>
-          <a:p>
-            <a:pPr algn="l">
-              <a:spcAft>
-                <a:spcPts val="1400"/>
-              </a:spcAft>
-            </a:pPr>
-            <a:r>
-              <a:rPr sz="1700" b="1" i="0">
-                <a:solidFill>
-                  <a:srgbClr val="1B6B8A"/>
-                </a:solidFill>
-                <a:latin typeface="Segoe UI"/>
-              </a:rPr>
-              <a:t>▸   </a:t>
-            </a:r>
-            <a:r>
-              <a:rPr sz="1700" b="1" i="0">
-                <a:solidFill>
-                  <a:srgbClr val="14222E"/>
-                </a:solidFill>
-                <a:latin typeface="Segoe UI"/>
-              </a:rPr>
-              <a:t>A position is a running sum.  </a:t>
-            </a:r>
-            <a:r>
-              <a:rPr sz="1700" b="0" i="0">
-                <a:solidFill>
-                  <a:srgbClr val="2E3D4A"/>
-                </a:solidFill>
-                <a:latin typeface="Segoe UI"/>
-              </a:rPr>
-              <a:t>At-least-once would silently corrupt it — and a wrong number is harder to spot than a missing one.</a:t>
-            </a:r>
-          </a:p>
-          <a:p>
-            <a:pPr>
-              <a:spcAft>
-                <a:spcPts val="1400"/>
-              </a:spcAft>
-            </a:pPr>
-            <a:r>
-              <a:rPr sz="1700" b="1" i="0">
-                <a:solidFill>
-                  <a:srgbClr val="1B6B8A"/>
-                </a:solidFill>
-                <a:latin typeface="Segoe UI"/>
-              </a:rPr>
-              <a:t>▸   </a:t>
-            </a:r>
-            <a:r>
-              <a:rPr sz="1700" b="1" i="0">
-                <a:solidFill>
-                  <a:srgbClr val="14222E"/>
-                </a:solidFill>
-                <a:latin typeface="Segoe UI"/>
-              </a:rPr>
-              <a:t>EXACTLY_ONCE, one transactional id prefix per sink.  </a:t>
-            </a:r>
-            <a:r>
-              <a:rPr sz="1700" b="0" i="0">
-                <a:solidFill>
-                  <a:srgbClr val="2E3D4A"/>
-                </a:solidFill>
-                <a:latin typeface="Segoe UI"/>
-              </a:rPr>
-              <a:t>Every reader in the verification path uses read_committed.</a:t>
-            </a:r>
-          </a:p>
-          <a:p>
-            <a:pPr>
-              <a:spcAft>
-                <a:spcPts val="1400"/>
-              </a:spcAft>
-            </a:pPr>
-            <a:r>
-              <a:rPr sz="1700" b="1" i="0">
-                <a:solidFill>
-                  <a:srgbClr val="1B6B8A"/>
-                </a:solidFill>
-                <a:latin typeface="Segoe UI"/>
-              </a:rPr>
-              <a:t>▸   </a:t>
-            </a:r>
-            <a:r>
-              <a:rPr sz="1700" b="1" i="0">
-                <a:solidFill>
-                  <a:srgbClr val="14222E"/>
-                </a:solidFill>
-                <a:latin typeface="Segoe UI"/>
-              </a:rPr>
-              <a:t>Proved by breaking it.  </a:t>
-            </a:r>
-            <a:r>
-              <a:rPr sz="1700" b="0" i="0">
-                <a:solidFill>
-                  <a:srgbClr val="2E3D4A"/>
-                </a:solidFill>
-                <a:latin typeface="Segoe UI"/>
-              </a:rPr>
-              <a:t>scripts/chaos-exactly-once.sh kills a task manager mid-run; the job recovers from checkpoint and the totals still reconcile.</a:t>
-            </a:r>
-          </a:p>
-        </p:txBody>
-      </p:sp>
-    </p:spTree>
-  </p:cSld>
-  <p:clrMapOvr>
-    <a:masterClrMapping/>
-  </p:clrMapOvr>
-</p:sld>
-</file>
-
-<file path=ppt/slides/slide8.xml><?xml version="1.0" encoding="utf-8"?>
-<p:sld xmlns:a="http://schemas.openxmlformats.org/drawingml/2006/main" xmlns:p="http://schemas.openxmlformats.org/presentationml/2006/main" xmlns:r="http://schemas.openxmlformats.org/officeDocument/2006/relationships">
-  <p:cSld>
-    <p:spTree>
-      <p:nvGrpSpPr>
-        <p:cNvPr id="1" name=""/>
-        <p:cNvGrpSpPr/>
-        <p:nvPr/>
-      </p:nvGrpSpPr>
-      <p:grpSpPr/>
-      <p:sp>
-        <p:nvSpPr>
-          <p:cNvPr id="2" name="TextBox 1"/>
-          <p:cNvSpPr txBox="1"/>
-          <p:nvPr/>
-        </p:nvSpPr>
-        <p:spPr>
-          <a:xfrm>
-            <a:off x="640080" y="475488"/>
-            <a:ext cx="10972800" cy="274320"/>
-          </a:xfrm>
-          <a:prstGeom prst="rect">
-            <a:avLst/>
-          </a:prstGeom>
-          <a:noFill/>
-        </p:spPr>
-        <p:txBody>
-          <a:bodyPr wrap="square">
-            <a:spAutoFit/>
-          </a:bodyPr>
-          <a:lstStyle/>
-          <a:p>
-            <a:pPr algn="l"/>
-            <a:r>
-              <a:rPr sz="1150" b="1" i="0" spc="120">
-                <a:solidFill>
-                  <a:srgbClr val="1B6B8A"/>
-                </a:solidFill>
-                <a:latin typeface="Segoe UI"/>
-              </a:rPr>
-              <a:t>LATENCY</a:t>
-            </a:r>
-          </a:p>
-        </p:txBody>
-      </p:sp>
-      <p:sp>
-        <p:nvSpPr>
-          <p:cNvPr id="3" name="TextBox 2"/>
-          <p:cNvSpPr txBox="1"/>
-          <p:nvPr/>
-        </p:nvSpPr>
-        <p:spPr>
-          <a:xfrm>
-            <a:off x="640080" y="786384"/>
-            <a:ext cx="10972800" cy="731520"/>
-          </a:xfrm>
-          <a:prstGeom prst="rect">
-            <a:avLst/>
-          </a:prstGeom>
-          <a:noFill/>
-        </p:spPr>
-        <p:txBody>
-          <a:bodyPr wrap="square">
-            <a:spAutoFit/>
-          </a:bodyPr>
-          <a:lstStyle/>
-          <a:p>
-            <a:pPr algn="l"/>
-            <a:r>
-              <a:rPr sz="3000" b="1" i="0">
-                <a:solidFill>
-                  <a:srgbClr val="14222E"/>
-                </a:solidFill>
-                <a:latin typeface="Segoe UI"/>
-              </a:rPr>
-              <a:t>Two numbers, and they are not the same</a:t>
-            </a:r>
-          </a:p>
-        </p:txBody>
-      </p:sp>
-      <p:sp>
-        <p:nvSpPr>
-          <p:cNvPr id="4" name="Rectangle 3"/>
-          <p:cNvSpPr/>
-          <p:nvPr/>
-        </p:nvSpPr>
-        <p:spPr>
-          <a:xfrm>
-            <a:off x="640080" y="1444752"/>
-            <a:ext cx="10908792" cy="12700"/>
-          </a:xfrm>
-          <a:prstGeom prst="rect">
-            <a:avLst/>
-          </a:prstGeom>
-          <a:solidFill>
-            <a:srgbClr val="D8DFE4"/>
-          </a:solidFill>
-          <a:ln>
-            <a:noFill/>
-          </a:ln>
-          <a:effectLst/>
-        </p:spPr>
-        <p:style>
-          <a:lnRef idx="1">
-            <a:schemeClr val="accent1"/>
-          </a:lnRef>
-          <a:fillRef idx="3">
-            <a:schemeClr val="accent1"/>
-          </a:fillRef>
-          <a:effectRef idx="2">
-            <a:schemeClr val="accent1"/>
-          </a:effectRef>
-          <a:fontRef idx="minor">
-            <a:schemeClr val="lt1"/>
-          </a:fontRef>
-        </p:style>
-        <p:txBody>
-          <a:bodyPr rtlCol="0" anchor="ctr"/>
-          <a:lstStyle/>
-          <a:p>
-            <a:pPr algn="ctr"/>
-          </a:p>
-        </p:txBody>
-      </p:sp>
-      <p:graphicFrame>
-        <p:nvGraphicFramePr>
-          <p:cNvPr id="5" name="Table 4"/>
-          <p:cNvGraphicFramePr>
-            <a:graphicFrameLocks noGrp="1"/>
-          </p:cNvGraphicFramePr>
-          <p:nvPr/>
-        </p:nvGraphicFramePr>
-        <p:xfrm>
-          <a:off x="685800" y="1746504"/>
-          <a:ext cx="5760720" cy="1133856"/>
-        </p:xfrm>
-        <a:graphic>
-          <a:graphicData uri="http://schemas.openxmlformats.org/drawingml/2006/table">
-            <a:tbl>
-              <a:tblPr bandRow="1">
-                <a:tableStyleId>{5C22544A-7EE6-4342-B048-85BDC9FD1C3A}</a:tableStyleId>
-              </a:tblPr>
-              <a:tblGrid>
-                <a:gridCol w="3291840"/>
-                <a:gridCol w="1234440"/>
-                <a:gridCol w="1234440"/>
-              </a:tblGrid>
-              <a:tr h="402336">
-                <a:tc>
-                  <a:txBody>
-                    <a:bodyPr wrap="square"/>
-                    <a:lstStyle/>
-                    <a:p>
-                      <a:pPr algn="l"/>
-                      <a:r>
-                        <a:rPr sz="1400" b="1" i="0">
-                          <a:solidFill>
-                            <a:srgbClr val="FFFFFF"/>
-                          </a:solidFill>
-                          <a:latin typeface="Segoe UI"/>
-                        </a:rPr>
-                        <a:t/>
-                      </a:r>
-                    </a:p>
-                  </a:txBody>
-                  <a:tcPr marL="109728" marR="109728" anchor="ctr">
-                    <a:solidFill>
-                      <a:srgbClr val="14222E"/>
-                    </a:solidFill>
-                  </a:tcPr>
-                </a:tc>
-                <a:tc>
-                  <a:txBody>
-                    <a:bodyPr wrap="square"/>
-                    <a:lstStyle/>
-                    <a:p>
-                      <a:pPr algn="r"/>
-                      <a:r>
-                        <a:rPr sz="1400" b="1" i="0">
-                          <a:solidFill>
-                            <a:srgbClr val="FFFFFF"/>
-                          </a:solidFill>
-                          <a:latin typeface="Segoe UI"/>
-                        </a:rPr>
-                        <a:t>p50</a:t>
-                      </a:r>
-                    </a:p>
-                  </a:txBody>
-                  <a:tcPr marL="109728" marR="109728" anchor="ctr">
-                    <a:solidFill>
-                      <a:srgbClr val="14222E"/>
-                    </a:solidFill>
-                  </a:tcPr>
-                </a:tc>
-                <a:tc>
-                  <a:txBody>
-                    <a:bodyPr wrap="square"/>
-                    <a:lstStyle/>
-                    <a:p>
-                      <a:pPr algn="r"/>
-                      <a:r>
-                        <a:rPr sz="1400" b="1" i="0">
-                          <a:solidFill>
-                            <a:srgbClr val="FFFFFF"/>
-                          </a:solidFill>
-                          <a:latin typeface="Segoe UI"/>
-                        </a:rPr>
-                        <a:t>max</a:t>
-                      </a:r>
-                    </a:p>
-                  </a:txBody>
-                  <a:tcPr marL="109728" marR="109728" anchor="ctr">
-                    <a:solidFill>
-                      <a:srgbClr val="14222E"/>
-                    </a:solidFill>
-                  </a:tcPr>
-                </a:tc>
-              </a:tr>
-              <a:tr h="365760">
-                <a:tc>
-                  <a:txBody>
-                    <a:bodyPr wrap="square"/>
-                    <a:lstStyle/>
-                    <a:p>
-                      <a:pPr algn="l"/>
-                      <a:r>
-                        <a:rPr sz="1400" b="0" i="0">
-                          <a:solidFill>
-                            <a:srgbClr val="2E3D4A"/>
-                          </a:solidFill>
-                          <a:latin typeface="Segoe UI"/>
-                        </a:rPr>
-                        <a:t>What the pipeline takes</a:t>
-                      </a:r>
-                    </a:p>
-                  </a:txBody>
-                  <a:tcPr marL="109728" marR="109728" anchor="ctr">
-                    <a:solidFill>
-                      <a:srgbClr val="FFFFFF"/>
-                    </a:solidFill>
-                  </a:tcPr>
-                </a:tc>
-                <a:tc>
-                  <a:txBody>
-                    <a:bodyPr wrap="square"/>
-                    <a:lstStyle/>
-                    <a:p>
-                      <a:pPr algn="r"/>
-                      <a:r>
-                        <a:rPr sz="1400" b="0" i="0">
-                          <a:solidFill>
-                            <a:srgbClr val="2E3D4A"/>
-                          </a:solidFill>
-                          <a:latin typeface="Consolas"/>
-                        </a:rPr>
-                        <a:t>59 ms</a:t>
-                      </a:r>
-                    </a:p>
-                  </a:txBody>
-                  <a:tcPr marL="109728" marR="109728" anchor="ctr">
-                    <a:solidFill>
-                      <a:srgbClr val="FFFFFF"/>
-                    </a:solidFill>
-                  </a:tcPr>
-                </a:tc>
-                <a:tc>
-                  <a:txBody>
-                    <a:bodyPr wrap="square"/>
-                    <a:lstStyle/>
-                    <a:p>
-                      <a:pPr algn="r"/>
-                      <a:r>
-                        <a:rPr sz="1400" b="0" i="0">
-                          <a:solidFill>
-                            <a:srgbClr val="2E3D4A"/>
-                          </a:solidFill>
-                          <a:latin typeface="Consolas"/>
-                        </a:rPr>
-                        <a:t>110 ms  (p99)</a:t>
-                      </a:r>
-                    </a:p>
-                  </a:txBody>
-                  <a:tcPr marL="109728" marR="109728" anchor="ctr">
-                    <a:solidFill>
-                      <a:srgbClr val="FFFFFF"/>
-                    </a:solidFill>
-                  </a:tcPr>
-                </a:tc>
-              </a:tr>
-              <a:tr h="365760">
-                <a:tc>
-                  <a:txBody>
-                    <a:bodyPr wrap="square"/>
-                    <a:lstStyle/>
-                    <a:p>
-                      <a:pPr algn="l"/>
-                      <a:r>
-                        <a:rPr sz="1400" b="1" i="0">
-                          <a:solidFill>
-                            <a:srgbClr val="14222E"/>
-                          </a:solidFill>
-                          <a:latin typeface="Segoe UI"/>
-                        </a:rPr>
-                        <a:t>What a consumer waits for</a:t>
-                      </a:r>
-                    </a:p>
-                  </a:txBody>
-                  <a:tcPr marL="109728" marR="109728" anchor="ctr">
-                    <a:solidFill>
-                      <a:srgbClr val="F2F5F7"/>
-                    </a:solidFill>
-                  </a:tcPr>
-                </a:tc>
-                <a:tc>
-                  <a:txBody>
-                    <a:bodyPr wrap="square"/>
-                    <a:lstStyle/>
-                    <a:p>
-                      <a:pPr algn="r"/>
-                      <a:r>
-                        <a:rPr sz="1400" b="1" i="0">
-                          <a:solidFill>
-                            <a:srgbClr val="14222E"/>
-                          </a:solidFill>
-                          <a:latin typeface="Consolas"/>
-                        </a:rPr>
-                        <a:t>518 ms</a:t>
-                      </a:r>
-                    </a:p>
-                  </a:txBody>
-                  <a:tcPr marL="109728" marR="109728" anchor="ctr">
-                    <a:solidFill>
-                      <a:srgbClr val="F2F5F7"/>
-                    </a:solidFill>
-                  </a:tcPr>
-                </a:tc>
-                <a:tc>
-                  <a:txBody>
-                    <a:bodyPr wrap="square"/>
-                    <a:lstStyle/>
-                    <a:p>
-                      <a:pPr algn="r"/>
-                      <a:r>
-                        <a:rPr sz="1400" b="1" i="0">
-                          <a:solidFill>
-                            <a:srgbClr val="14222E"/>
-                          </a:solidFill>
-                          <a:latin typeface="Consolas"/>
-                        </a:rPr>
-                        <a:t>1 025 ms</a:t>
-                      </a:r>
-                    </a:p>
-                  </a:txBody>
-                  <a:tcPr marL="109728" marR="109728" anchor="ctr">
-                    <a:solidFill>
-                      <a:srgbClr val="F2F5F7"/>
-                    </a:solidFill>
-                  </a:tcPr>
-                </a:tc>
-              </a:tr>
-            </a:tbl>
-          </a:graphicData>
-        </a:graphic>
-      </p:graphicFrame>
-      <p:graphicFrame>
-        <p:nvGraphicFramePr>
-          <p:cNvPr id="6" name="Table 5"/>
-          <p:cNvGraphicFramePr>
-            <a:graphicFrameLocks noGrp="1"/>
-          </p:cNvGraphicFramePr>
-          <p:nvPr/>
-        </p:nvGraphicFramePr>
-        <p:xfrm>
-          <a:off x="6766560" y="1746504"/>
-          <a:ext cx="5120640" cy="1133856"/>
-        </p:xfrm>
-        <a:graphic>
-          <a:graphicData uri="http://schemas.openxmlformats.org/drawingml/2006/table">
-            <a:tbl>
-              <a:tblPr bandRow="1">
-                <a:tableStyleId>{5C22544A-7EE6-4342-B048-85BDC9FD1C3A}</a:tableStyleId>
-              </a:tblPr>
-              <a:tblGrid>
-                <a:gridCol w="2651760"/>
-                <a:gridCol w="1234440"/>
-                <a:gridCol w="1234440"/>
-              </a:tblGrid>
-              <a:tr h="402336">
-                <a:tc>
-                  <a:txBody>
-                    <a:bodyPr wrap="square"/>
-                    <a:lstStyle/>
-                    <a:p>
-                      <a:pPr algn="l"/>
-                      <a:r>
-                        <a:rPr sz="1400" b="1" i="0">
-                          <a:solidFill>
-                            <a:srgbClr val="FFFFFF"/>
-                          </a:solidFill>
-                          <a:latin typeface="Segoe UI"/>
-                        </a:rPr>
-                        <a:t>Checkpoint interval</a:t>
-                      </a:r>
-                    </a:p>
-                  </a:txBody>
-                  <a:tcPr marL="109728" marR="109728" anchor="ctr">
-                    <a:solidFill>
-                      <a:srgbClr val="14222E"/>
-                    </a:solidFill>
-                  </a:tcPr>
-                </a:tc>
-                <a:tc>
-                  <a:txBody>
-                    <a:bodyPr wrap="square"/>
-                    <a:lstStyle/>
-                    <a:p>
-                      <a:pPr algn="r"/>
-                      <a:r>
-                        <a:rPr sz="1400" b="1" i="0">
-                          <a:solidFill>
-                            <a:srgbClr val="FFFFFF"/>
-                          </a:solidFill>
-                          <a:latin typeface="Segoe UI"/>
-                        </a:rPr>
-                        <a:t>p50</a:t>
-                      </a:r>
-                    </a:p>
-                  </a:txBody>
-                  <a:tcPr marL="109728" marR="109728" anchor="ctr">
-                    <a:solidFill>
-                      <a:srgbClr val="14222E"/>
-                    </a:solidFill>
-                  </a:tcPr>
-                </a:tc>
-                <a:tc>
-                  <a:txBody>
-                    <a:bodyPr wrap="square"/>
-                    <a:lstStyle/>
-                    <a:p>
-                      <a:pPr algn="r"/>
-                      <a:r>
-                        <a:rPr sz="1400" b="1" i="0">
-                          <a:solidFill>
-                            <a:srgbClr val="FFFFFF"/>
-                          </a:solidFill>
-                          <a:latin typeface="Segoe UI"/>
-                        </a:rPr>
-                        <a:t>max</a:t>
-                      </a:r>
-                    </a:p>
-                  </a:txBody>
-                  <a:tcPr marL="109728" marR="109728" anchor="ctr">
-                    <a:solidFill>
-                      <a:srgbClr val="14222E"/>
-                    </a:solidFill>
-                  </a:tcPr>
-                </a:tc>
-              </a:tr>
-              <a:tr h="365760">
-                <a:tc>
-                  <a:txBody>
-                    <a:bodyPr wrap="square"/>
-                    <a:lstStyle/>
-                    <a:p>
-                      <a:pPr algn="l"/>
-                      <a:r>
-                        <a:rPr sz="1400" b="0" i="0">
-                          <a:solidFill>
-                            <a:srgbClr val="2E3D4A"/>
-                          </a:solidFill>
-                          <a:latin typeface="Segoe UI"/>
-                        </a:rPr>
-                        <a:t>5 s</a:t>
-                      </a:r>
-                    </a:p>
-                  </a:txBody>
-                  <a:tcPr marL="109728" marR="109728" anchor="ctr">
-                    <a:solidFill>
-                      <a:srgbClr val="FFFFFF"/>
-                    </a:solidFill>
-                  </a:tcPr>
-                </a:tc>
-                <a:tc>
-                  <a:txBody>
-                    <a:bodyPr wrap="square"/>
-                    <a:lstStyle/>
-                    <a:p>
-                      <a:pPr algn="r"/>
-                      <a:r>
-                        <a:rPr sz="1400" b="0" i="0">
-                          <a:solidFill>
-                            <a:srgbClr val="2E3D4A"/>
-                          </a:solidFill>
-                          <a:latin typeface="Consolas"/>
-                        </a:rPr>
-                        <a:t>2 488 ms</a:t>
-                      </a:r>
-                    </a:p>
-                  </a:txBody>
-                  <a:tcPr marL="109728" marR="109728" anchor="ctr">
-                    <a:solidFill>
-                      <a:srgbClr val="FFFFFF"/>
-                    </a:solidFill>
-                  </a:tcPr>
-                </a:tc>
-                <a:tc>
-                  <a:txBody>
-                    <a:bodyPr wrap="square"/>
-                    <a:lstStyle/>
-                    <a:p>
-                      <a:pPr algn="r"/>
-                      <a:r>
-                        <a:rPr sz="1400" b="0" i="0">
-                          <a:solidFill>
-                            <a:srgbClr val="2E3D4A"/>
-                          </a:solidFill>
-                          <a:latin typeface="Consolas"/>
-                        </a:rPr>
-                        <a:t>4 988 ms</a:t>
-                      </a:r>
-                    </a:p>
-                  </a:txBody>
-                  <a:tcPr marL="109728" marR="109728" anchor="ctr">
-                    <a:solidFill>
-                      <a:srgbClr val="FFFFFF"/>
-                    </a:solidFill>
-                  </a:tcPr>
-                </a:tc>
-              </a:tr>
-              <a:tr h="365760">
-                <a:tc>
-                  <a:txBody>
-                    <a:bodyPr wrap="square"/>
-                    <a:lstStyle/>
-                    <a:p>
-                      <a:pPr algn="l"/>
-                      <a:r>
-                        <a:rPr sz="1400" b="1" i="0">
-                          <a:solidFill>
-                            <a:srgbClr val="14222E"/>
-                          </a:solidFill>
-                          <a:latin typeface="Segoe UI"/>
-                        </a:rPr>
-                        <a:t>1 s  (the default)</a:t>
-                      </a:r>
-                    </a:p>
-                  </a:txBody>
-                  <a:tcPr marL="109728" marR="109728" anchor="ctr">
-                    <a:solidFill>
-                      <a:srgbClr val="F2F5F7"/>
-                    </a:solidFill>
-                  </a:tcPr>
-                </a:tc>
-                <a:tc>
-                  <a:txBody>
-                    <a:bodyPr wrap="square"/>
-                    <a:lstStyle/>
-                    <a:p>
-                      <a:pPr algn="r"/>
-                      <a:r>
-                        <a:rPr sz="1400" b="1" i="0">
-                          <a:solidFill>
-                            <a:srgbClr val="14222E"/>
-                          </a:solidFill>
-                          <a:latin typeface="Consolas"/>
-                        </a:rPr>
-                        <a:t>518 ms</a:t>
-                      </a:r>
-                    </a:p>
-                  </a:txBody>
-                  <a:tcPr marL="109728" marR="109728" anchor="ctr">
-                    <a:solidFill>
-                      <a:srgbClr val="F2F5F7"/>
-                    </a:solidFill>
-                  </a:tcPr>
-                </a:tc>
-                <a:tc>
-                  <a:txBody>
-                    <a:bodyPr wrap="square"/>
-                    <a:lstStyle/>
-                    <a:p>
-                      <a:pPr algn="r"/>
-                      <a:r>
-                        <a:rPr sz="1400" b="1" i="0">
-                          <a:solidFill>
-                            <a:srgbClr val="14222E"/>
-                          </a:solidFill>
-                          <a:latin typeface="Consolas"/>
-                        </a:rPr>
-                        <a:t>1 025 ms</a:t>
-                      </a:r>
-                    </a:p>
-                  </a:txBody>
-                  <a:tcPr marL="109728" marR="109728" anchor="ctr">
-                    <a:solidFill>
-                      <a:srgbClr val="F2F5F7"/>
-                    </a:solidFill>
-                  </a:tcPr>
-                </a:tc>
-              </a:tr>
-            </a:tbl>
-          </a:graphicData>
-        </a:graphic>
-      </p:graphicFrame>
-      <p:sp>
-        <p:nvSpPr>
-          <p:cNvPr id="7" name="TextBox 6"/>
-          <p:cNvSpPr txBox="1"/>
-          <p:nvPr/>
-        </p:nvSpPr>
-        <p:spPr>
-          <a:xfrm>
-            <a:off x="685800" y="3575304"/>
-            <a:ext cx="10881360" cy="822960"/>
-          </a:xfrm>
-          <a:prstGeom prst="rect">
-            <a:avLst/>
-          </a:prstGeom>
-          <a:noFill/>
-        </p:spPr>
-        <p:txBody>
-          <a:bodyPr wrap="square">
-            <a:spAutoFit/>
-          </a:bodyPr>
-          <a:lstStyle/>
-          <a:p>
-            <a:pPr algn="l"/>
-            <a:r>
-              <a:rPr sz="1600" b="0" i="0">
-                <a:solidFill>
-                  <a:srgbClr val="14222E"/>
-                </a:solidFill>
-                <a:latin typeface="Segoe UI"/>
-              </a:rPr>
-              <a:t>The gap is the guarantee, not the work. Shorten the interval fivefold, the latency falls fivefold. A checkpoint itself takes 13 ms.</a:t>
-            </a:r>
-          </a:p>
-        </p:txBody>
-      </p:sp>
-    </p:spTree>
-  </p:cSld>
-  <p:clrMapOvr>
-    <a:masterClrMapping/>
-  </p:clrMapOvr>
-</p:sld>
-</file>
-
-<file path=ppt/slides/slide9.xml><?xml version="1.0" encoding="utf-8"?>
 <p:sld xmlns:a="http://schemas.openxmlformats.org/drawingml/2006/main" xmlns:p="http://schemas.openxmlformats.org/presentationml/2006/main" xmlns:r="http://schemas.openxmlformats.org/officeDocument/2006/relationships">
   <p:cSld>
     <p:spTree>
@@ -10614,6 +7101,623 @@
                 <a:latin typeface="Segoe UI"/>
               </a:rPr>
               <a:t>A hundredfold on orders, twentyfold on prices — order latency unmoved in both.</a:t>
+            </a:r>
+          </a:p>
+        </p:txBody>
+      </p:sp>
+    </p:spTree>
+  </p:cSld>
+  <p:clrMapOvr>
+    <a:masterClrMapping/>
+  </p:clrMapOvr>
+</p:sld>
+</file>
+
+<file path=ppt/slides/slide8.xml><?xml version="1.0" encoding="utf-8"?>
+<p:sld xmlns:a="http://schemas.openxmlformats.org/drawingml/2006/main" xmlns:p="http://schemas.openxmlformats.org/presentationml/2006/main" xmlns:r="http://schemas.openxmlformats.org/officeDocument/2006/relationships">
+  <p:cSld>
+    <p:spTree>
+      <p:nvGrpSpPr>
+        <p:cNvPr id="1" name=""/>
+        <p:cNvGrpSpPr/>
+        <p:nvPr/>
+      </p:nvGrpSpPr>
+      <p:grpSpPr/>
+      <p:sp>
+        <p:nvSpPr>
+          <p:cNvPr id="2" name="TextBox 1"/>
+          <p:cNvSpPr txBox="1"/>
+          <p:nvPr/>
+        </p:nvSpPr>
+        <p:spPr>
+          <a:xfrm>
+            <a:off x="640080" y="475488"/>
+            <a:ext cx="10972800" cy="274320"/>
+          </a:xfrm>
+          <a:prstGeom prst="rect">
+            <a:avLst/>
+          </a:prstGeom>
+          <a:noFill/>
+        </p:spPr>
+        <p:txBody>
+          <a:bodyPr wrap="square">
+            <a:spAutoFit/>
+          </a:bodyPr>
+          <a:lstStyle/>
+          <a:p>
+            <a:pPr algn="l"/>
+            <a:r>
+              <a:rPr sz="1150" b="1" i="0" spc="120">
+                <a:solidFill>
+                  <a:srgbClr val="1B6B8A"/>
+                </a:solidFill>
+                <a:latin typeface="Segoe UI"/>
+              </a:rPr>
+              <a:t>SCALING</a:t>
+            </a:r>
+          </a:p>
+        </p:txBody>
+      </p:sp>
+      <p:sp>
+        <p:nvSpPr>
+          <p:cNvPr id="3" name="TextBox 2"/>
+          <p:cNvSpPr txBox="1"/>
+          <p:nvPr/>
+        </p:nvSpPr>
+        <p:spPr>
+          <a:xfrm>
+            <a:off x="640080" y="786384"/>
+            <a:ext cx="10972800" cy="731520"/>
+          </a:xfrm>
+          <a:prstGeom prst="rect">
+            <a:avLst/>
+          </a:prstGeom>
+          <a:noFill/>
+        </p:spPr>
+        <p:txBody>
+          <a:bodyPr wrap="square">
+            <a:spAutoFit/>
+          </a:bodyPr>
+          <a:lstStyle/>
+          <a:p>
+            <a:pPr algn="l"/>
+            <a:r>
+              <a:rPr sz="3000" b="1" i="0">
+                <a:solidFill>
+                  <a:srgbClr val="14222E"/>
+                </a:solidFill>
+                <a:latin typeface="Segoe UI"/>
+              </a:rPr>
+              <a:t>Double the units, double the throughput</a:t>
+            </a:r>
+          </a:p>
+        </p:txBody>
+      </p:sp>
+      <p:sp>
+        <p:nvSpPr>
+          <p:cNvPr id="4" name="Rectangle 3"/>
+          <p:cNvSpPr/>
+          <p:nvPr/>
+        </p:nvSpPr>
+        <p:spPr>
+          <a:xfrm>
+            <a:off x="640080" y="1444752"/>
+            <a:ext cx="10908792" cy="12700"/>
+          </a:xfrm>
+          <a:prstGeom prst="rect">
+            <a:avLst/>
+          </a:prstGeom>
+          <a:solidFill>
+            <a:srgbClr val="D8DFE4"/>
+          </a:solidFill>
+          <a:ln>
+            <a:noFill/>
+          </a:ln>
+          <a:effectLst/>
+        </p:spPr>
+        <p:style>
+          <a:lnRef idx="1">
+            <a:schemeClr val="accent1"/>
+          </a:lnRef>
+          <a:fillRef idx="3">
+            <a:schemeClr val="accent1"/>
+          </a:fillRef>
+          <a:effectRef idx="2">
+            <a:schemeClr val="accent1"/>
+          </a:effectRef>
+          <a:fontRef idx="minor">
+            <a:schemeClr val="lt1"/>
+          </a:fontRef>
+        </p:style>
+        <p:txBody>
+          <a:bodyPr rtlCol="0" anchor="ctr"/>
+          <a:lstStyle/>
+          <a:p>
+            <a:pPr algn="ctr"/>
+          </a:p>
+        </p:txBody>
+      </p:sp>
+      <p:graphicFrame>
+        <p:nvGraphicFramePr>
+          <p:cNvPr id="5" name="Table 4"/>
+          <p:cNvGraphicFramePr>
+            <a:graphicFrameLocks noGrp="1"/>
+          </p:cNvGraphicFramePr>
+          <p:nvPr/>
+        </p:nvGraphicFramePr>
+        <p:xfrm>
+          <a:off x="685800" y="1746504"/>
+          <a:ext cx="10607040" cy="1133856"/>
+        </p:xfrm>
+        <a:graphic>
+          <a:graphicData uri="http://schemas.openxmlformats.org/drawingml/2006/table">
+            <a:tbl>
+              <a:tblPr bandRow="1">
+                <a:tableStyleId>{5C22544A-7EE6-4342-B048-85BDC9FD1C3A}</a:tableStyleId>
+              </a:tblPr>
+              <a:tblGrid>
+                <a:gridCol w="1188720"/>
+                <a:gridCol w="1828800"/>
+                <a:gridCol w="1828800"/>
+                <a:gridCol w="1920240"/>
+                <a:gridCol w="1828800"/>
+                <a:gridCol w="2011680"/>
+              </a:tblGrid>
+              <a:tr h="402336">
+                <a:tc>
+                  <a:txBody>
+                    <a:bodyPr wrap="square"/>
+                    <a:lstStyle/>
+                    <a:p>
+                      <a:pPr algn="l"/>
+                      <a:r>
+                        <a:rPr sz="1400" b="1" i="0">
+                          <a:solidFill>
+                            <a:srgbClr val="FFFFFF"/>
+                          </a:solidFill>
+                          <a:latin typeface="Segoe UI"/>
+                        </a:rPr>
+                        <a:t>units</a:t>
+                      </a:r>
+                    </a:p>
+                  </a:txBody>
+                  <a:tcPr marL="109728" marR="109728" anchor="ctr">
+                    <a:solidFill>
+                      <a:srgbClr val="14222E"/>
+                    </a:solidFill>
+                  </a:tcPr>
+                </a:tc>
+                <a:tc>
+                  <a:txBody>
+                    <a:bodyPr wrap="square"/>
+                    <a:lstStyle/>
+                    <a:p>
+                      <a:pPr algn="r"/>
+                      <a:r>
+                        <a:rPr sz="1400" b="1" i="0">
+                          <a:solidFill>
+                            <a:srgbClr val="FFFFFF"/>
+                          </a:solidFill>
+                          <a:latin typeface="Segoe UI"/>
+                        </a:rPr>
+                        <a:t>orders/sec</a:t>
+                      </a:r>
+                    </a:p>
+                  </a:txBody>
+                  <a:tcPr marL="109728" marR="109728" anchor="ctr">
+                    <a:solidFill>
+                      <a:srgbClr val="14222E"/>
+                    </a:solidFill>
+                  </a:tcPr>
+                </a:tc>
+                <a:tc>
+                  <a:txBody>
+                    <a:bodyPr wrap="square"/>
+                    <a:lstStyle/>
+                    <a:p>
+                      <a:pPr algn="r"/>
+                      <a:r>
+                        <a:rPr sz="1400" b="1" i="0">
+                          <a:solidFill>
+                            <a:srgbClr val="FFFFFF"/>
+                          </a:solidFill>
+                          <a:latin typeface="Segoe UI"/>
+                        </a:rPr>
+                        <a:t>vs previous</a:t>
+                      </a:r>
+                    </a:p>
+                  </a:txBody>
+                  <a:tcPr marL="109728" marR="109728" anchor="ctr">
+                    <a:solidFill>
+                      <a:srgbClr val="14222E"/>
+                    </a:solidFill>
+                  </a:tcPr>
+                </a:tc>
+                <a:tc>
+                  <a:txBody>
+                    <a:bodyPr wrap="square"/>
+                    <a:lstStyle/>
+                    <a:p>
+                      <a:pPr algn="r"/>
+                      <a:r>
+                        <a:rPr sz="1400" b="1" i="0">
+                          <a:solidFill>
+                            <a:srgbClr val="FFFFFF"/>
+                          </a:solidFill>
+                          <a:latin typeface="Segoe UI"/>
+                        </a:rPr>
+                        <a:t>Flink cores</a:t>
+                      </a:r>
+                    </a:p>
+                  </a:txBody>
+                  <a:tcPr marL="109728" marR="109728" anchor="ctr">
+                    <a:solidFill>
+                      <a:srgbClr val="14222E"/>
+                    </a:solidFill>
+                  </a:tcPr>
+                </a:tc>
+                <a:tc>
+                  <a:txBody>
+                    <a:bodyPr wrap="square"/>
+                    <a:lstStyle/>
+                    <a:p>
+                      <a:pPr algn="r"/>
+                      <a:r>
+                        <a:rPr sz="1400" b="1" i="0">
+                          <a:solidFill>
+                            <a:srgbClr val="FFFFFF"/>
+                          </a:solidFill>
+                          <a:latin typeface="Segoe UI"/>
+                        </a:rPr>
+                        <a:t>broker cores</a:t>
+                      </a:r>
+                    </a:p>
+                  </a:txBody>
+                  <a:tcPr marL="109728" marR="109728" anchor="ctr">
+                    <a:solidFill>
+                      <a:srgbClr val="14222E"/>
+                    </a:solidFill>
+                  </a:tcPr>
+                </a:tc>
+                <a:tc>
+                  <a:txBody>
+                    <a:bodyPr wrap="square"/>
+                    <a:lstStyle/>
+                    <a:p>
+                      <a:pPr algn="r"/>
+                      <a:r>
+                        <a:rPr sz="1400" b="1" i="0">
+                          <a:solidFill>
+                            <a:srgbClr val="FFFFFF"/>
+                          </a:solidFill>
+                          <a:latin typeface="Segoe UI"/>
+                        </a:rPr>
+                        <a:t>back-pressure</a:t>
+                      </a:r>
+                    </a:p>
+                  </a:txBody>
+                  <a:tcPr marL="109728" marR="109728" anchor="ctr">
+                    <a:solidFill>
+                      <a:srgbClr val="14222E"/>
+                    </a:solidFill>
+                  </a:tcPr>
+                </a:tc>
+              </a:tr>
+              <a:tr h="365760">
+                <a:tc>
+                  <a:txBody>
+                    <a:bodyPr wrap="square"/>
+                    <a:lstStyle/>
+                    <a:p>
+                      <a:pPr algn="l"/>
+                      <a:r>
+                        <a:rPr sz="1400" b="0" i="0">
+                          <a:solidFill>
+                            <a:srgbClr val="2E3D4A"/>
+                          </a:solidFill>
+                          <a:latin typeface="Segoe UI"/>
+                        </a:rPr>
+                        <a:t>2</a:t>
+                      </a:r>
+                    </a:p>
+                  </a:txBody>
+                  <a:tcPr marL="109728" marR="109728" anchor="ctr">
+                    <a:solidFill>
+                      <a:srgbClr val="FFFFFF"/>
+                    </a:solidFill>
+                  </a:tcPr>
+                </a:tc>
+                <a:tc>
+                  <a:txBody>
+                    <a:bodyPr wrap="square"/>
+                    <a:lstStyle/>
+                    <a:p>
+                      <a:pPr algn="r"/>
+                      <a:r>
+                        <a:rPr sz="1400" b="0" i="0">
+                          <a:solidFill>
+                            <a:srgbClr val="2E3D4A"/>
+                          </a:solidFill>
+                          <a:latin typeface="Consolas"/>
+                        </a:rPr>
+                        <a:t>65 721</a:t>
+                      </a:r>
+                    </a:p>
+                  </a:txBody>
+                  <a:tcPr marL="109728" marR="109728" anchor="ctr">
+                    <a:solidFill>
+                      <a:srgbClr val="FFFFFF"/>
+                    </a:solidFill>
+                  </a:tcPr>
+                </a:tc>
+                <a:tc>
+                  <a:txBody>
+                    <a:bodyPr wrap="square"/>
+                    <a:lstStyle/>
+                    <a:p>
+                      <a:pPr algn="r"/>
+                      <a:r>
+                        <a:rPr sz="1400" b="0" i="0">
+                          <a:solidFill>
+                            <a:srgbClr val="2E3D4A"/>
+                          </a:solidFill>
+                          <a:latin typeface="Consolas"/>
+                        </a:rPr>
+                        <a:t>—</a:t>
+                      </a:r>
+                    </a:p>
+                  </a:txBody>
+                  <a:tcPr marL="109728" marR="109728" anchor="ctr">
+                    <a:solidFill>
+                      <a:srgbClr val="FFFFFF"/>
+                    </a:solidFill>
+                  </a:tcPr>
+                </a:tc>
+                <a:tc>
+                  <a:txBody>
+                    <a:bodyPr wrap="square"/>
+                    <a:lstStyle/>
+                    <a:p>
+                      <a:pPr algn="r"/>
+                      <a:r>
+                        <a:rPr sz="1400" b="0" i="0">
+                          <a:solidFill>
+                            <a:srgbClr val="2E3D4A"/>
+                          </a:solidFill>
+                          <a:latin typeface="Consolas"/>
+                        </a:rPr>
+                        <a:t>2.00 of 2</a:t>
+                      </a:r>
+                    </a:p>
+                  </a:txBody>
+                  <a:tcPr marL="109728" marR="109728" anchor="ctr">
+                    <a:solidFill>
+                      <a:srgbClr val="FFFFFF"/>
+                    </a:solidFill>
+                  </a:tcPr>
+                </a:tc>
+                <a:tc>
+                  <a:txBody>
+                    <a:bodyPr wrap="square"/>
+                    <a:lstStyle/>
+                    <a:p>
+                      <a:pPr algn="r"/>
+                      <a:r>
+                        <a:rPr sz="1400" b="0" i="0">
+                          <a:solidFill>
+                            <a:srgbClr val="2E3D4A"/>
+                          </a:solidFill>
+                          <a:latin typeface="Consolas"/>
+                        </a:rPr>
+                        <a:t>0.25</a:t>
+                      </a:r>
+                    </a:p>
+                  </a:txBody>
+                  <a:tcPr marL="109728" marR="109728" anchor="ctr">
+                    <a:solidFill>
+                      <a:srgbClr val="FFFFFF"/>
+                    </a:solidFill>
+                  </a:tcPr>
+                </a:tc>
+                <a:tc>
+                  <a:txBody>
+                    <a:bodyPr wrap="square"/>
+                    <a:lstStyle/>
+                    <a:p>
+                      <a:pPr algn="r"/>
+                      <a:r>
+                        <a:rPr sz="1400" b="0" i="0">
+                          <a:solidFill>
+                            <a:srgbClr val="2E3D4A"/>
+                          </a:solidFill>
+                          <a:latin typeface="Consolas"/>
+                        </a:rPr>
+                        <a:t>28.5%</a:t>
+                      </a:r>
+                    </a:p>
+                  </a:txBody>
+                  <a:tcPr marL="109728" marR="109728" anchor="ctr">
+                    <a:solidFill>
+                      <a:srgbClr val="FFFFFF"/>
+                    </a:solidFill>
+                  </a:tcPr>
+                </a:tc>
+              </a:tr>
+              <a:tr h="365760">
+                <a:tc>
+                  <a:txBody>
+                    <a:bodyPr wrap="square"/>
+                    <a:lstStyle/>
+                    <a:p>
+                      <a:pPr algn="l"/>
+                      <a:r>
+                        <a:rPr sz="1400" b="1" i="0">
+                          <a:solidFill>
+                            <a:srgbClr val="14222E"/>
+                          </a:solidFill>
+                          <a:latin typeface="Segoe UI"/>
+                        </a:rPr>
+                        <a:t>4</a:t>
+                      </a:r>
+                    </a:p>
+                  </a:txBody>
+                  <a:tcPr marL="109728" marR="109728" anchor="ctr">
+                    <a:solidFill>
+                      <a:srgbClr val="F2F5F7"/>
+                    </a:solidFill>
+                  </a:tcPr>
+                </a:tc>
+                <a:tc>
+                  <a:txBody>
+                    <a:bodyPr wrap="square"/>
+                    <a:lstStyle/>
+                    <a:p>
+                      <a:pPr algn="r"/>
+                      <a:r>
+                        <a:rPr sz="1400" b="1" i="0">
+                          <a:solidFill>
+                            <a:srgbClr val="14222E"/>
+                          </a:solidFill>
+                          <a:latin typeface="Consolas"/>
+                        </a:rPr>
+                        <a:t>129 056</a:t>
+                      </a:r>
+                    </a:p>
+                  </a:txBody>
+                  <a:tcPr marL="109728" marR="109728" anchor="ctr">
+                    <a:solidFill>
+                      <a:srgbClr val="F2F5F7"/>
+                    </a:solidFill>
+                  </a:tcPr>
+                </a:tc>
+                <a:tc>
+                  <a:txBody>
+                    <a:bodyPr wrap="square"/>
+                    <a:lstStyle/>
+                    <a:p>
+                      <a:pPr algn="r"/>
+                      <a:r>
+                        <a:rPr sz="1400" b="1" i="0">
+                          <a:solidFill>
+                            <a:srgbClr val="14222E"/>
+                          </a:solidFill>
+                          <a:latin typeface="Consolas"/>
+                        </a:rPr>
+                        <a:t>1.96×</a:t>
+                      </a:r>
+                    </a:p>
+                  </a:txBody>
+                  <a:tcPr marL="109728" marR="109728" anchor="ctr">
+                    <a:solidFill>
+                      <a:srgbClr val="F2F5F7"/>
+                    </a:solidFill>
+                  </a:tcPr>
+                </a:tc>
+                <a:tc>
+                  <a:txBody>
+                    <a:bodyPr wrap="square"/>
+                    <a:lstStyle/>
+                    <a:p>
+                      <a:pPr algn="r"/>
+                      <a:r>
+                        <a:rPr sz="1400" b="1" i="0">
+                          <a:solidFill>
+                            <a:srgbClr val="14222E"/>
+                          </a:solidFill>
+                          <a:latin typeface="Consolas"/>
+                        </a:rPr>
+                        <a:t>3.94 of 4</a:t>
+                      </a:r>
+                    </a:p>
+                  </a:txBody>
+                  <a:tcPr marL="109728" marR="109728" anchor="ctr">
+                    <a:solidFill>
+                      <a:srgbClr val="F2F5F7"/>
+                    </a:solidFill>
+                  </a:tcPr>
+                </a:tc>
+                <a:tc>
+                  <a:txBody>
+                    <a:bodyPr wrap="square"/>
+                    <a:lstStyle/>
+                    <a:p>
+                      <a:pPr algn="r"/>
+                      <a:r>
+                        <a:rPr sz="1400" b="1" i="0">
+                          <a:solidFill>
+                            <a:srgbClr val="14222E"/>
+                          </a:solidFill>
+                          <a:latin typeface="Consolas"/>
+                        </a:rPr>
+                        <a:t>0.39</a:t>
+                      </a:r>
+                    </a:p>
+                  </a:txBody>
+                  <a:tcPr marL="109728" marR="109728" anchor="ctr">
+                    <a:solidFill>
+                      <a:srgbClr val="F2F5F7"/>
+                    </a:solidFill>
+                  </a:tcPr>
+                </a:tc>
+                <a:tc>
+                  <a:txBody>
+                    <a:bodyPr wrap="square"/>
+                    <a:lstStyle/>
+                    <a:p>
+                      <a:pPr algn="r"/>
+                      <a:r>
+                        <a:rPr sz="1400" b="1" i="0">
+                          <a:solidFill>
+                            <a:srgbClr val="14222E"/>
+                          </a:solidFill>
+                          <a:latin typeface="Consolas"/>
+                        </a:rPr>
+                        <a:t>51.6%</a:t>
+                      </a:r>
+                    </a:p>
+                  </a:txBody>
+                  <a:tcPr marL="109728" marR="109728" anchor="ctr">
+                    <a:solidFill>
+                      <a:srgbClr val="F2F5F7"/>
+                    </a:solidFill>
+                  </a:tcPr>
+                </a:tc>
+              </a:tr>
+            </a:tbl>
+          </a:graphicData>
+        </a:graphic>
+      </p:graphicFrame>
+      <p:sp>
+        <p:nvSpPr>
+          <p:cNvPr id="6" name="TextBox 5"/>
+          <p:cNvSpPr txBox="1"/>
+          <p:nvPr/>
+        </p:nvSpPr>
+        <p:spPr>
+          <a:xfrm>
+            <a:off x="685800" y="3438144"/>
+            <a:ext cx="10881360" cy="822960"/>
+          </a:xfrm>
+          <a:prstGeom prst="rect">
+            <a:avLst/>
+          </a:prstGeom>
+          <a:noFill/>
+        </p:spPr>
+        <p:txBody>
+          <a:bodyPr wrap="square">
+            <a:spAutoFit/>
+          </a:bodyPr>
+          <a:lstStyle/>
+          <a:p>
+            <a:pPr algn="l"/>
+            <a:r>
+              <a:rPr sz="1600" b="0" i="0">
+                <a:solidFill>
+                  <a:srgbClr val="14222E"/>
+                </a:solidFill>
+                <a:latin typeface="Segoe UI"/>
+              </a:rPr>
+              <a:t>A unit is one core and one degree of parallelism, bought together — a KPU.  Flink used every core it was given; the broker stayed under half a core.</a:t>
             </a:r>
           </a:p>
         </p:txBody>

--- a/docs/deck/final-demo.pptx
+++ b/docs/deck/final-demo.pptx
@@ -13,6 +13,7 @@
     <p:sldId id="261" r:id="rId13"/>
     <p:sldId id="262" r:id="rId14"/>
     <p:sldId id="263" r:id="rId15"/>
+    <p:sldId id="264" r:id="rId16"/>
   </p:sldIdLst>
   <p:sldSz cx="12191695" cy="6858000" type="screen4x3"/>
   <p:notesSz cx="6858000" cy="9144000"/>
@@ -579,7 +580,7 @@
           <a:lstStyle/>
           <a:p>
             <a:r>
-              <a:t>Sink 4 updates 4x as often as sink 3. Quantities reconcile — the four accounts sum to the block. The update counts differ by design.</a:t>
+              <a:t>Numbered left to right, in the order the demo talks through them. Point at 1 and 2 as the inputs, 3-6 as the outputs to verify. If anyone reads '1 min' off the diagram, that is the specification -- the demo runs a 10s window.</a:t>
             </a:r>
           </a:p>
         </p:txBody>
@@ -649,7 +650,7 @@
           <a:lstStyle/>
           <a:p>
             <a:r>
-              <a:t>Numbered left to right, in the order the demo talks through them. Point at 1 and 2 as the inputs, 3-6 as the outputs to verify. If anyone reads '1 min' off the diagram, that is the specification -- the demo runs a 10s window.</a:t>
+              <a:t>Sink 4 updates 4x as often as sink 3. Quantities reconcile — the four accounts sum to the block. The update counts differ by design.</a:t>
             </a:r>
           </a:p>
         </p:txBody>
@@ -859,7 +860,7 @@
           <a:lstStyle/>
           <a:p>
             <a:r>
-              <a:t>If you cannot answer something, say so and take it as an action item to change the logging. That is the instruction in the requirements, and it beats an explanation invented on the spot.</a:t>
+              <a:t>You can only show that something scales when it is the thing that is constrained. Step 10 got this wrong — it varied parallelism while Flink already had every core it could use, and the answer came back flat.</a:t>
             </a:r>
           </a:p>
         </p:txBody>
@@ -929,7 +930,7 @@
           <a:lstStyle/>
           <a:p>
             <a:r>
-              <a:t>Case 2 is the one that settles the broadcast-prices question.</a:t>
+              <a:t>The dashed line is exactly 2x the first bar. The whole claim is whether the second bar reaches it -- 129,056 against 131,442, which is 98%. Step 10 got this wrong by varying parallelism while Flink already had every core it could use, and the answer came back flat.</a:t>
             </a:r>
           </a:p>
         </p:txBody>
@@ -999,7 +1000,77 @@
           <a:lstStyle/>
           <a:p>
             <a:r>
-              <a:t>You can only show that something scales when it is the thing that is constrained. Step 10 got this wrong — it varied parallelism while Flink already had every core it could use, and the answer came back flat.</a:t>
+              <a:t>If you cannot answer something, say so and take it as an action item to change the logging. That is the instruction in the requirements, and it beats an explanation invented on the spot.</a:t>
+            </a:r>
+          </a:p>
+        </p:txBody>
+      </p:sp>
+      <p:sp>
+        <p:nvSpPr>
+          <p:cNvPr id="4" name="Slide Number Placeholder 3"/>
+          <p:cNvSpPr>
+            <a:spLocks noGrp="1"/>
+          </p:cNvSpPr>
+          <p:nvPr>
+            <p:ph type="sldNum" idx="5" sz="quarter"/>
+          </p:nvPr>
+        </p:nvSpPr>
+        <p:spPr/>
+      </p:sp>
+    </p:spTree>
+  </p:cSld>
+  <p:clrMapOvr>
+    <a:masterClrMapping/>
+  </p:clrMapOvr>
+</p:notes>
+</file>
+
+<file path=ppt/notesSlides/notesSlide9.xml><?xml version="1.0" encoding="utf-8"?>
+<p:notes xmlns:a="http://schemas.openxmlformats.org/drawingml/2006/main" xmlns:p="http://schemas.openxmlformats.org/presentationml/2006/main" xmlns:r="http://schemas.openxmlformats.org/officeDocument/2006/relationships">
+  <p:cSld>
+    <p:spTree>
+      <p:nvGrpSpPr>
+        <p:cNvPr id="1" name=""/>
+        <p:cNvGrpSpPr/>
+        <p:nvPr/>
+      </p:nvGrpSpPr>
+      <p:grpSpPr>
+        <a:xfrm>
+          <a:off x="0" y="0"/>
+          <a:ext cx="0" cy="0"/>
+          <a:chOff x="0" y="0"/>
+          <a:chExt cx="0" cy="0"/>
+        </a:xfrm>
+      </p:grpSpPr>
+      <p:sp>
+        <p:nvSpPr>
+          <p:cNvPr id="2" name="Slide Image Placeholder 1"/>
+          <p:cNvSpPr>
+            <a:spLocks noGrp="1"/>
+          </p:cNvSpPr>
+          <p:nvPr>
+            <p:ph type="sldImg" idx="2"/>
+          </p:nvPr>
+        </p:nvSpPr>
+        <p:spPr/>
+      </p:sp>
+      <p:sp>
+        <p:nvSpPr>
+          <p:cNvPr id="3" name="Notes Placeholder 2"/>
+          <p:cNvSpPr>
+            <a:spLocks noGrp="1"/>
+          </p:cNvSpPr>
+          <p:nvPr>
+            <p:ph type="body" idx="3" sz="quarter"/>
+          </p:nvPr>
+        </p:nvSpPr>
+        <p:spPr/>
+        <p:txBody>
+          <a:bodyPr/>
+          <a:lstStyle/>
+          <a:p>
+            <a:r>
+              <a:t>Case 2 is the one that settles the broadcast-prices question.</a:t>
             </a:r>
           </a:p>
         </p:txBody>
@@ -4479,263 +4550,6 @@
                 </a:solidFill>
                 <a:latin typeface="Segoe UI"/>
               </a:rPr>
-              <a:t>THE PROBLEM</a:t>
-            </a:r>
-          </a:p>
-        </p:txBody>
-      </p:sp>
-      <p:sp>
-        <p:nvSpPr>
-          <p:cNvPr id="3" name="TextBox 2"/>
-          <p:cNvSpPr txBox="1"/>
-          <p:nvPr/>
-        </p:nvSpPr>
-        <p:spPr>
-          <a:xfrm>
-            <a:off x="640080" y="786384"/>
-            <a:ext cx="10972800" cy="731520"/>
-          </a:xfrm>
-          <a:prstGeom prst="rect">
-            <a:avLst/>
-          </a:prstGeom>
-          <a:noFill/>
-        </p:spPr>
-        <p:txBody>
-          <a:bodyPr wrap="square">
-            <a:spAutoFit/>
-          </a:bodyPr>
-          <a:lstStyle/>
-          <a:p>
-            <a:pPr algn="l"/>
-            <a:r>
-              <a:rPr sz="3000" b="1" i="0">
-                <a:solidFill>
-                  <a:srgbClr val="14222E"/>
-                </a:solidFill>
-                <a:latin typeface="Segoe UI"/>
-              </a:rPr>
-              <a:t>One order becomes four allocations</a:t>
-            </a:r>
-          </a:p>
-        </p:txBody>
-      </p:sp>
-      <p:sp>
-        <p:nvSpPr>
-          <p:cNvPr id="4" name="Rectangle 3"/>
-          <p:cNvSpPr/>
-          <p:nvPr/>
-        </p:nvSpPr>
-        <p:spPr>
-          <a:xfrm>
-            <a:off x="640080" y="1444752"/>
-            <a:ext cx="10908792" cy="12700"/>
-          </a:xfrm>
-          <a:prstGeom prst="rect">
-            <a:avLst/>
-          </a:prstGeom>
-          <a:solidFill>
-            <a:srgbClr val="D8DFE4"/>
-          </a:solidFill>
-          <a:ln>
-            <a:noFill/>
-          </a:ln>
-          <a:effectLst/>
-        </p:spPr>
-        <p:style>
-          <a:lnRef idx="1">
-            <a:schemeClr val="accent1"/>
-          </a:lnRef>
-          <a:fillRef idx="3">
-            <a:schemeClr val="accent1"/>
-          </a:fillRef>
-          <a:effectRef idx="2">
-            <a:schemeClr val="accent1"/>
-          </a:effectRef>
-          <a:fontRef idx="minor">
-            <a:schemeClr val="lt1"/>
-          </a:fontRef>
-        </p:style>
-        <p:txBody>
-          <a:bodyPr rtlCol="0" anchor="ctr"/>
-          <a:lstStyle/>
-          <a:p>
-            <a:pPr algn="ctr"/>
-          </a:p>
-        </p:txBody>
-      </p:sp>
-      <p:sp>
-        <p:nvSpPr>
-          <p:cNvPr id="5" name="TextBox 4"/>
-          <p:cNvSpPr txBox="1"/>
-          <p:nvPr/>
-        </p:nvSpPr>
-        <p:spPr>
-          <a:xfrm>
-            <a:off x="685800" y="1746504"/>
-            <a:ext cx="10881360" cy="3840480"/>
-          </a:xfrm>
-          <a:prstGeom prst="rect">
-            <a:avLst/>
-          </a:prstGeom>
-          <a:noFill/>
-        </p:spPr>
-        <p:txBody>
-          <a:bodyPr wrap="square">
-            <a:spAutoFit/>
-          </a:bodyPr>
-          <a:lstStyle/>
-          <a:p>
-            <a:pPr algn="l">
-              <a:spcAft>
-                <a:spcPts val="1400"/>
-              </a:spcAft>
-            </a:pPr>
-            <a:r>
-              <a:rPr sz="1700" b="1" i="0">
-                <a:solidFill>
-                  <a:srgbClr val="1B6B8A"/>
-                </a:solidFill>
-                <a:latin typeface="Segoe UI"/>
-              </a:rPr>
-              <a:t>▸   </a:t>
-            </a:r>
-            <a:r>
-              <a:rPr sz="1700" b="1" i="0">
-                <a:solidFill>
-                  <a:srgbClr val="14222E"/>
-                </a:solidFill>
-                <a:latin typeface="Segoe UI"/>
-              </a:rPr>
-              <a:t>A block trade is one order split across several accounts.  </a:t>
-            </a:r>
-            <a:r>
-              <a:rPr sz="1700" b="0" i="0">
-                <a:solidFill>
-                  <a:srgbClr val="2E3D4A"/>
-                </a:solidFill>
-                <a:latin typeface="Segoe UI"/>
-              </a:rPr>
-              <a:t>A trade of 400 shares allocated to 4 accounts becomes 4 allocations of 100.</a:t>
-            </a:r>
-          </a:p>
-          <a:p>
-            <a:pPr>
-              <a:spcAft>
-                <a:spcPts val="1400"/>
-              </a:spcAft>
-            </a:pPr>
-            <a:r>
-              <a:rPr sz="1700" b="1" i="0">
-                <a:solidFill>
-                  <a:srgbClr val="1B6B8A"/>
-                </a:solidFill>
-                <a:latin typeface="Segoe UI"/>
-              </a:rPr>
-              <a:t>▸   </a:t>
-            </a:r>
-            <a:r>
-              <a:rPr sz="1700" b="1" i="0">
-                <a:solidFill>
-                  <a:srgbClr val="14222E"/>
-                </a:solidFill>
-                <a:latin typeface="Segoe UI"/>
-              </a:rPr>
-              <a:t>Publish positions two ways, in parallel.  </a:t>
-            </a:r>
-            <a:r>
-              <a:rPr sz="1700" b="0" i="0">
-                <a:solidFill>
-                  <a:srgbClr val="2E3D4A"/>
-                </a:solidFill>
-                <a:latin typeface="Segoe UI"/>
-              </a:rPr>
-              <a:t>By symbol, and by account / sub-account / symbol.</a:t>
-            </a:r>
-          </a:p>
-          <a:p>
-            <a:pPr>
-              <a:spcAft>
-                <a:spcPts val="1400"/>
-              </a:spcAft>
-            </a:pPr>
-            <a:r>
-              <a:rPr sz="1700" b="1" i="0">
-                <a:solidFill>
-                  <a:srgbClr val="1B6B8A"/>
-                </a:solidFill>
-                <a:latin typeface="Segoe UI"/>
-              </a:rPr>
-              <a:t>▸   </a:t>
-            </a:r>
-            <a:r>
-              <a:rPr sz="1700" b="1" i="0">
-                <a:solidFill>
-                  <a:srgbClr val="14222E"/>
-                </a:solidFill>
-                <a:latin typeface="Segoe UI"/>
-              </a:rPr>
-              <a:t>Then join prices to those positions  </a:t>
-            </a:r>
-            <a:r>
-              <a:rPr sz="1700" b="0" i="0">
-                <a:solidFill>
-                  <a:srgbClr val="2E3D4A"/>
-                </a:solidFill>
-                <a:latin typeface="Segoe UI"/>
-              </a:rPr>
-              <a:t>and publish market value the same two ways, once per key per window.</a:t>
-            </a:r>
-          </a:p>
-        </p:txBody>
-      </p:sp>
-    </p:spTree>
-  </p:cSld>
-  <p:clrMapOvr>
-    <a:masterClrMapping/>
-  </p:clrMapOvr>
-</p:sld>
-</file>
-
-<file path=ppt/slides/slide3.xml><?xml version="1.0" encoding="utf-8"?>
-<p:sld xmlns:a="http://schemas.openxmlformats.org/drawingml/2006/main" xmlns:p="http://schemas.openxmlformats.org/presentationml/2006/main" xmlns:r="http://schemas.openxmlformats.org/officeDocument/2006/relationships">
-  <p:cSld>
-    <p:spTree>
-      <p:nvGrpSpPr>
-        <p:cNvPr id="1" name=""/>
-        <p:cNvGrpSpPr/>
-        <p:nvPr/>
-      </p:nvGrpSpPr>
-      <p:grpSpPr/>
-      <p:sp>
-        <p:nvSpPr>
-          <p:cNvPr id="2" name="TextBox 1"/>
-          <p:cNvSpPr txBox="1"/>
-          <p:nvPr/>
-        </p:nvSpPr>
-        <p:spPr>
-          <a:xfrm>
-            <a:off x="640080" y="475488"/>
-            <a:ext cx="10972800" cy="274320"/>
-          </a:xfrm>
-          <a:prstGeom prst="rect">
-            <a:avLst/>
-          </a:prstGeom>
-          <a:noFill/>
-        </p:spPr>
-        <p:txBody>
-          <a:bodyPr wrap="square">
-            <a:spAutoFit/>
-          </a:bodyPr>
-          <a:lstStyle/>
-          <a:p>
-            <a:pPr algn="l"/>
-            <a:r>
-              <a:rPr sz="1150" b="1" i="0" spc="120">
-                <a:solidFill>
-                  <a:srgbClr val="1B6B8A"/>
-                </a:solidFill>
-                <a:latin typeface="Segoe UI"/>
-              </a:rPr>
               <a:t>THE DESIGN</a:t>
             </a:r>
           </a:p>
@@ -4875,6 +4689,263 @@
                 <a:latin typeface="Segoe UI"/>
               </a:rPr>
               <a:t>Every edge carries its partition key and value. The diagram states the specified one-minute window; the demo overrides it to ten seconds, and the calculation is identical either way.</a:t>
+            </a:r>
+          </a:p>
+        </p:txBody>
+      </p:sp>
+    </p:spTree>
+  </p:cSld>
+  <p:clrMapOvr>
+    <a:masterClrMapping/>
+  </p:clrMapOvr>
+</p:sld>
+</file>
+
+<file path=ppt/slides/slide3.xml><?xml version="1.0" encoding="utf-8"?>
+<p:sld xmlns:a="http://schemas.openxmlformats.org/drawingml/2006/main" xmlns:p="http://schemas.openxmlformats.org/presentationml/2006/main" xmlns:r="http://schemas.openxmlformats.org/officeDocument/2006/relationships">
+  <p:cSld>
+    <p:spTree>
+      <p:nvGrpSpPr>
+        <p:cNvPr id="1" name=""/>
+        <p:cNvGrpSpPr/>
+        <p:nvPr/>
+      </p:nvGrpSpPr>
+      <p:grpSpPr/>
+      <p:sp>
+        <p:nvSpPr>
+          <p:cNvPr id="2" name="TextBox 1"/>
+          <p:cNvSpPr txBox="1"/>
+          <p:nvPr/>
+        </p:nvSpPr>
+        <p:spPr>
+          <a:xfrm>
+            <a:off x="640080" y="475488"/>
+            <a:ext cx="10972800" cy="274320"/>
+          </a:xfrm>
+          <a:prstGeom prst="rect">
+            <a:avLst/>
+          </a:prstGeom>
+          <a:noFill/>
+        </p:spPr>
+        <p:txBody>
+          <a:bodyPr wrap="square">
+            <a:spAutoFit/>
+          </a:bodyPr>
+          <a:lstStyle/>
+          <a:p>
+            <a:pPr algn="l"/>
+            <a:r>
+              <a:rPr sz="1150" b="1" i="0" spc="120">
+                <a:solidFill>
+                  <a:srgbClr val="1B6B8A"/>
+                </a:solidFill>
+                <a:latin typeface="Segoe UI"/>
+              </a:rPr>
+              <a:t>THE PROBLEM</a:t>
+            </a:r>
+          </a:p>
+        </p:txBody>
+      </p:sp>
+      <p:sp>
+        <p:nvSpPr>
+          <p:cNvPr id="3" name="TextBox 2"/>
+          <p:cNvSpPr txBox="1"/>
+          <p:nvPr/>
+        </p:nvSpPr>
+        <p:spPr>
+          <a:xfrm>
+            <a:off x="640080" y="786384"/>
+            <a:ext cx="10972800" cy="731520"/>
+          </a:xfrm>
+          <a:prstGeom prst="rect">
+            <a:avLst/>
+          </a:prstGeom>
+          <a:noFill/>
+        </p:spPr>
+        <p:txBody>
+          <a:bodyPr wrap="square">
+            <a:spAutoFit/>
+          </a:bodyPr>
+          <a:lstStyle/>
+          <a:p>
+            <a:pPr algn="l"/>
+            <a:r>
+              <a:rPr sz="3000" b="1" i="0">
+                <a:solidFill>
+                  <a:srgbClr val="14222E"/>
+                </a:solidFill>
+                <a:latin typeface="Segoe UI"/>
+              </a:rPr>
+              <a:t>One order becomes four allocations</a:t>
+            </a:r>
+          </a:p>
+        </p:txBody>
+      </p:sp>
+      <p:sp>
+        <p:nvSpPr>
+          <p:cNvPr id="4" name="Rectangle 3"/>
+          <p:cNvSpPr/>
+          <p:nvPr/>
+        </p:nvSpPr>
+        <p:spPr>
+          <a:xfrm>
+            <a:off x="640080" y="1444752"/>
+            <a:ext cx="10908792" cy="12700"/>
+          </a:xfrm>
+          <a:prstGeom prst="rect">
+            <a:avLst/>
+          </a:prstGeom>
+          <a:solidFill>
+            <a:srgbClr val="D8DFE4"/>
+          </a:solidFill>
+          <a:ln>
+            <a:noFill/>
+          </a:ln>
+          <a:effectLst/>
+        </p:spPr>
+        <p:style>
+          <a:lnRef idx="1">
+            <a:schemeClr val="accent1"/>
+          </a:lnRef>
+          <a:fillRef idx="3">
+            <a:schemeClr val="accent1"/>
+          </a:fillRef>
+          <a:effectRef idx="2">
+            <a:schemeClr val="accent1"/>
+          </a:effectRef>
+          <a:fontRef idx="minor">
+            <a:schemeClr val="lt1"/>
+          </a:fontRef>
+        </p:style>
+        <p:txBody>
+          <a:bodyPr rtlCol="0" anchor="ctr"/>
+          <a:lstStyle/>
+          <a:p>
+            <a:pPr algn="ctr"/>
+          </a:p>
+        </p:txBody>
+      </p:sp>
+      <p:sp>
+        <p:nvSpPr>
+          <p:cNvPr id="5" name="TextBox 4"/>
+          <p:cNvSpPr txBox="1"/>
+          <p:nvPr/>
+        </p:nvSpPr>
+        <p:spPr>
+          <a:xfrm>
+            <a:off x="685800" y="1746504"/>
+            <a:ext cx="10881360" cy="3840480"/>
+          </a:xfrm>
+          <a:prstGeom prst="rect">
+            <a:avLst/>
+          </a:prstGeom>
+          <a:noFill/>
+        </p:spPr>
+        <p:txBody>
+          <a:bodyPr wrap="square">
+            <a:spAutoFit/>
+          </a:bodyPr>
+          <a:lstStyle/>
+          <a:p>
+            <a:pPr algn="l">
+              <a:spcAft>
+                <a:spcPts val="1400"/>
+              </a:spcAft>
+            </a:pPr>
+            <a:r>
+              <a:rPr sz="1700" b="1" i="0">
+                <a:solidFill>
+                  <a:srgbClr val="1B6B8A"/>
+                </a:solidFill>
+                <a:latin typeface="Segoe UI"/>
+              </a:rPr>
+              <a:t>▸   </a:t>
+            </a:r>
+            <a:r>
+              <a:rPr sz="1700" b="1" i="0">
+                <a:solidFill>
+                  <a:srgbClr val="14222E"/>
+                </a:solidFill>
+                <a:latin typeface="Segoe UI"/>
+              </a:rPr>
+              <a:t>A block trade is one order split across several accounts.  </a:t>
+            </a:r>
+            <a:r>
+              <a:rPr sz="1700" b="0" i="0">
+                <a:solidFill>
+                  <a:srgbClr val="2E3D4A"/>
+                </a:solidFill>
+                <a:latin typeface="Segoe UI"/>
+              </a:rPr>
+              <a:t>A trade of 400 shares allocated to 4 accounts becomes 4 allocations of 100.</a:t>
+            </a:r>
+          </a:p>
+          <a:p>
+            <a:pPr>
+              <a:spcAft>
+                <a:spcPts val="1400"/>
+              </a:spcAft>
+            </a:pPr>
+            <a:r>
+              <a:rPr sz="1700" b="1" i="0">
+                <a:solidFill>
+                  <a:srgbClr val="1B6B8A"/>
+                </a:solidFill>
+                <a:latin typeface="Segoe UI"/>
+              </a:rPr>
+              <a:t>▸   </a:t>
+            </a:r>
+            <a:r>
+              <a:rPr sz="1700" b="1" i="0">
+                <a:solidFill>
+                  <a:srgbClr val="14222E"/>
+                </a:solidFill>
+                <a:latin typeface="Segoe UI"/>
+              </a:rPr>
+              <a:t>Publish positions two ways, in parallel.  </a:t>
+            </a:r>
+            <a:r>
+              <a:rPr sz="1700" b="0" i="0">
+                <a:solidFill>
+                  <a:srgbClr val="2E3D4A"/>
+                </a:solidFill>
+                <a:latin typeface="Segoe UI"/>
+              </a:rPr>
+              <a:t>By symbol, and by account / sub-account / symbol.</a:t>
+            </a:r>
+          </a:p>
+          <a:p>
+            <a:pPr>
+              <a:spcAft>
+                <a:spcPts val="1400"/>
+              </a:spcAft>
+            </a:pPr>
+            <a:r>
+              <a:rPr sz="1700" b="1" i="0">
+                <a:solidFill>
+                  <a:srgbClr val="1B6B8A"/>
+                </a:solidFill>
+                <a:latin typeface="Segoe UI"/>
+              </a:rPr>
+              <a:t>▸   </a:t>
+            </a:r>
+            <a:r>
+              <a:rPr sz="1700" b="1" i="0">
+                <a:solidFill>
+                  <a:srgbClr val="14222E"/>
+                </a:solidFill>
+                <a:latin typeface="Segoe UI"/>
+              </a:rPr>
+              <a:t>Then join prices to those positions  </a:t>
+            </a:r>
+            <a:r>
+              <a:rPr sz="1700" b="0" i="0">
+                <a:solidFill>
+                  <a:srgbClr val="2E3D4A"/>
+                </a:solidFill>
+                <a:latin typeface="Segoe UI"/>
+              </a:rPr>
+              <a:t>and publish market value the same two ways, once per key per window.</a:t>
             </a:r>
           </a:p>
         </p:txBody>
@@ -6139,7 +6210,7 @@
                 </a:solidFill>
                 <a:latin typeface="Segoe UI"/>
               </a:rPr>
-              <a:t>EXPLAIN IT</a:t>
+              <a:t>SCALING</a:t>
             </a:r>
           </a:p>
         </p:txBody>
@@ -6174,7 +6245,7 @@
                 </a:solidFill>
                 <a:latin typeface="Segoe UI"/>
               </a:rPr>
-              <a:t>Every number on the screen has an answer</a:t>
+              <a:t>Double the units, double the throughput</a:t>
             </a:r>
           </a:p>
         </p:txBody>
@@ -6223,6 +6294,2226 @@
           </a:p>
         </p:txBody>
       </p:sp>
+      <p:graphicFrame>
+        <p:nvGraphicFramePr>
+          <p:cNvPr id="5" name="Table 4"/>
+          <p:cNvGraphicFramePr>
+            <a:graphicFrameLocks noGrp="1"/>
+          </p:cNvGraphicFramePr>
+          <p:nvPr/>
+        </p:nvGraphicFramePr>
+        <p:xfrm>
+          <a:off x="685800" y="1746504"/>
+          <a:ext cx="10607040" cy="1133856"/>
+        </p:xfrm>
+        <a:graphic>
+          <a:graphicData uri="http://schemas.openxmlformats.org/drawingml/2006/table">
+            <a:tbl>
+              <a:tblPr bandRow="1">
+                <a:tableStyleId>{5C22544A-7EE6-4342-B048-85BDC9FD1C3A}</a:tableStyleId>
+              </a:tblPr>
+              <a:tblGrid>
+                <a:gridCol w="1188720"/>
+                <a:gridCol w="1828800"/>
+                <a:gridCol w="1828800"/>
+                <a:gridCol w="1920240"/>
+                <a:gridCol w="1828800"/>
+                <a:gridCol w="2011680"/>
+              </a:tblGrid>
+              <a:tr h="402336">
+                <a:tc>
+                  <a:txBody>
+                    <a:bodyPr wrap="square"/>
+                    <a:lstStyle/>
+                    <a:p>
+                      <a:pPr algn="l"/>
+                      <a:r>
+                        <a:rPr sz="1400" b="1" i="0">
+                          <a:solidFill>
+                            <a:srgbClr val="FFFFFF"/>
+                          </a:solidFill>
+                          <a:latin typeface="Segoe UI"/>
+                        </a:rPr>
+                        <a:t>units</a:t>
+                      </a:r>
+                    </a:p>
+                  </a:txBody>
+                  <a:tcPr marL="109728" marR="109728" anchor="ctr">
+                    <a:solidFill>
+                      <a:srgbClr val="14222E"/>
+                    </a:solidFill>
+                  </a:tcPr>
+                </a:tc>
+                <a:tc>
+                  <a:txBody>
+                    <a:bodyPr wrap="square"/>
+                    <a:lstStyle/>
+                    <a:p>
+                      <a:pPr algn="r"/>
+                      <a:r>
+                        <a:rPr sz="1400" b="1" i="0">
+                          <a:solidFill>
+                            <a:srgbClr val="FFFFFF"/>
+                          </a:solidFill>
+                          <a:latin typeface="Segoe UI"/>
+                        </a:rPr>
+                        <a:t>orders/sec</a:t>
+                      </a:r>
+                    </a:p>
+                  </a:txBody>
+                  <a:tcPr marL="109728" marR="109728" anchor="ctr">
+                    <a:solidFill>
+                      <a:srgbClr val="14222E"/>
+                    </a:solidFill>
+                  </a:tcPr>
+                </a:tc>
+                <a:tc>
+                  <a:txBody>
+                    <a:bodyPr wrap="square"/>
+                    <a:lstStyle/>
+                    <a:p>
+                      <a:pPr algn="r"/>
+                      <a:r>
+                        <a:rPr sz="1400" b="1" i="0">
+                          <a:solidFill>
+                            <a:srgbClr val="FFFFFF"/>
+                          </a:solidFill>
+                          <a:latin typeface="Segoe UI"/>
+                        </a:rPr>
+                        <a:t>vs previous</a:t>
+                      </a:r>
+                    </a:p>
+                  </a:txBody>
+                  <a:tcPr marL="109728" marR="109728" anchor="ctr">
+                    <a:solidFill>
+                      <a:srgbClr val="14222E"/>
+                    </a:solidFill>
+                  </a:tcPr>
+                </a:tc>
+                <a:tc>
+                  <a:txBody>
+                    <a:bodyPr wrap="square"/>
+                    <a:lstStyle/>
+                    <a:p>
+                      <a:pPr algn="r"/>
+                      <a:r>
+                        <a:rPr sz="1400" b="1" i="0">
+                          <a:solidFill>
+                            <a:srgbClr val="FFFFFF"/>
+                          </a:solidFill>
+                          <a:latin typeface="Segoe UI"/>
+                        </a:rPr>
+                        <a:t>Flink cores</a:t>
+                      </a:r>
+                    </a:p>
+                  </a:txBody>
+                  <a:tcPr marL="109728" marR="109728" anchor="ctr">
+                    <a:solidFill>
+                      <a:srgbClr val="14222E"/>
+                    </a:solidFill>
+                  </a:tcPr>
+                </a:tc>
+                <a:tc>
+                  <a:txBody>
+                    <a:bodyPr wrap="square"/>
+                    <a:lstStyle/>
+                    <a:p>
+                      <a:pPr algn="r"/>
+                      <a:r>
+                        <a:rPr sz="1400" b="1" i="0">
+                          <a:solidFill>
+                            <a:srgbClr val="FFFFFF"/>
+                          </a:solidFill>
+                          <a:latin typeface="Segoe UI"/>
+                        </a:rPr>
+                        <a:t>broker cores</a:t>
+                      </a:r>
+                    </a:p>
+                  </a:txBody>
+                  <a:tcPr marL="109728" marR="109728" anchor="ctr">
+                    <a:solidFill>
+                      <a:srgbClr val="14222E"/>
+                    </a:solidFill>
+                  </a:tcPr>
+                </a:tc>
+                <a:tc>
+                  <a:txBody>
+                    <a:bodyPr wrap="square"/>
+                    <a:lstStyle/>
+                    <a:p>
+                      <a:pPr algn="r"/>
+                      <a:r>
+                        <a:rPr sz="1400" b="1" i="0">
+                          <a:solidFill>
+                            <a:srgbClr val="FFFFFF"/>
+                          </a:solidFill>
+                          <a:latin typeface="Segoe UI"/>
+                        </a:rPr>
+                        <a:t>back-pressure</a:t>
+                      </a:r>
+                    </a:p>
+                  </a:txBody>
+                  <a:tcPr marL="109728" marR="109728" anchor="ctr">
+                    <a:solidFill>
+                      <a:srgbClr val="14222E"/>
+                    </a:solidFill>
+                  </a:tcPr>
+                </a:tc>
+              </a:tr>
+              <a:tr h="365760">
+                <a:tc>
+                  <a:txBody>
+                    <a:bodyPr wrap="square"/>
+                    <a:lstStyle/>
+                    <a:p>
+                      <a:pPr algn="l"/>
+                      <a:r>
+                        <a:rPr sz="1400" b="0" i="0">
+                          <a:solidFill>
+                            <a:srgbClr val="2E3D4A"/>
+                          </a:solidFill>
+                          <a:latin typeface="Segoe UI"/>
+                        </a:rPr>
+                        <a:t>2</a:t>
+                      </a:r>
+                    </a:p>
+                  </a:txBody>
+                  <a:tcPr marL="109728" marR="109728" anchor="ctr">
+                    <a:solidFill>
+                      <a:srgbClr val="FFFFFF"/>
+                    </a:solidFill>
+                  </a:tcPr>
+                </a:tc>
+                <a:tc>
+                  <a:txBody>
+                    <a:bodyPr wrap="square"/>
+                    <a:lstStyle/>
+                    <a:p>
+                      <a:pPr algn="r"/>
+                      <a:r>
+                        <a:rPr sz="1400" b="0" i="0">
+                          <a:solidFill>
+                            <a:srgbClr val="2E3D4A"/>
+                          </a:solidFill>
+                          <a:latin typeface="Consolas"/>
+                        </a:rPr>
+                        <a:t>65 721</a:t>
+                      </a:r>
+                    </a:p>
+                  </a:txBody>
+                  <a:tcPr marL="109728" marR="109728" anchor="ctr">
+                    <a:solidFill>
+                      <a:srgbClr val="FFFFFF"/>
+                    </a:solidFill>
+                  </a:tcPr>
+                </a:tc>
+                <a:tc>
+                  <a:txBody>
+                    <a:bodyPr wrap="square"/>
+                    <a:lstStyle/>
+                    <a:p>
+                      <a:pPr algn="r"/>
+                      <a:r>
+                        <a:rPr sz="1400" b="0" i="0">
+                          <a:solidFill>
+                            <a:srgbClr val="2E3D4A"/>
+                          </a:solidFill>
+                          <a:latin typeface="Consolas"/>
+                        </a:rPr>
+                        <a:t>—</a:t>
+                      </a:r>
+                    </a:p>
+                  </a:txBody>
+                  <a:tcPr marL="109728" marR="109728" anchor="ctr">
+                    <a:solidFill>
+                      <a:srgbClr val="FFFFFF"/>
+                    </a:solidFill>
+                  </a:tcPr>
+                </a:tc>
+                <a:tc>
+                  <a:txBody>
+                    <a:bodyPr wrap="square"/>
+                    <a:lstStyle/>
+                    <a:p>
+                      <a:pPr algn="r"/>
+                      <a:r>
+                        <a:rPr sz="1400" b="0" i="0">
+                          <a:solidFill>
+                            <a:srgbClr val="2E3D4A"/>
+                          </a:solidFill>
+                          <a:latin typeface="Consolas"/>
+                        </a:rPr>
+                        <a:t>2.00 of 2</a:t>
+                      </a:r>
+                    </a:p>
+                  </a:txBody>
+                  <a:tcPr marL="109728" marR="109728" anchor="ctr">
+                    <a:solidFill>
+                      <a:srgbClr val="FFFFFF"/>
+                    </a:solidFill>
+                  </a:tcPr>
+                </a:tc>
+                <a:tc>
+                  <a:txBody>
+                    <a:bodyPr wrap="square"/>
+                    <a:lstStyle/>
+                    <a:p>
+                      <a:pPr algn="r"/>
+                      <a:r>
+                        <a:rPr sz="1400" b="0" i="0">
+                          <a:solidFill>
+                            <a:srgbClr val="2E3D4A"/>
+                          </a:solidFill>
+                          <a:latin typeface="Consolas"/>
+                        </a:rPr>
+                        <a:t>0.25</a:t>
+                      </a:r>
+                    </a:p>
+                  </a:txBody>
+                  <a:tcPr marL="109728" marR="109728" anchor="ctr">
+                    <a:solidFill>
+                      <a:srgbClr val="FFFFFF"/>
+                    </a:solidFill>
+                  </a:tcPr>
+                </a:tc>
+                <a:tc>
+                  <a:txBody>
+                    <a:bodyPr wrap="square"/>
+                    <a:lstStyle/>
+                    <a:p>
+                      <a:pPr algn="r"/>
+                      <a:r>
+                        <a:rPr sz="1400" b="0" i="0">
+                          <a:solidFill>
+                            <a:srgbClr val="2E3D4A"/>
+                          </a:solidFill>
+                          <a:latin typeface="Consolas"/>
+                        </a:rPr>
+                        <a:t>28.5%</a:t>
+                      </a:r>
+                    </a:p>
+                  </a:txBody>
+                  <a:tcPr marL="109728" marR="109728" anchor="ctr">
+                    <a:solidFill>
+                      <a:srgbClr val="FFFFFF"/>
+                    </a:solidFill>
+                  </a:tcPr>
+                </a:tc>
+              </a:tr>
+              <a:tr h="365760">
+                <a:tc>
+                  <a:txBody>
+                    <a:bodyPr wrap="square"/>
+                    <a:lstStyle/>
+                    <a:p>
+                      <a:pPr algn="l"/>
+                      <a:r>
+                        <a:rPr sz="1400" b="1" i="0">
+                          <a:solidFill>
+                            <a:srgbClr val="14222E"/>
+                          </a:solidFill>
+                          <a:latin typeface="Segoe UI"/>
+                        </a:rPr>
+                        <a:t>4</a:t>
+                      </a:r>
+                    </a:p>
+                  </a:txBody>
+                  <a:tcPr marL="109728" marR="109728" anchor="ctr">
+                    <a:solidFill>
+                      <a:srgbClr val="F2F5F7"/>
+                    </a:solidFill>
+                  </a:tcPr>
+                </a:tc>
+                <a:tc>
+                  <a:txBody>
+                    <a:bodyPr wrap="square"/>
+                    <a:lstStyle/>
+                    <a:p>
+                      <a:pPr algn="r"/>
+                      <a:r>
+                        <a:rPr sz="1400" b="1" i="0">
+                          <a:solidFill>
+                            <a:srgbClr val="14222E"/>
+                          </a:solidFill>
+                          <a:latin typeface="Consolas"/>
+                        </a:rPr>
+                        <a:t>129 056</a:t>
+                      </a:r>
+                    </a:p>
+                  </a:txBody>
+                  <a:tcPr marL="109728" marR="109728" anchor="ctr">
+                    <a:solidFill>
+                      <a:srgbClr val="F2F5F7"/>
+                    </a:solidFill>
+                  </a:tcPr>
+                </a:tc>
+                <a:tc>
+                  <a:txBody>
+                    <a:bodyPr wrap="square"/>
+                    <a:lstStyle/>
+                    <a:p>
+                      <a:pPr algn="r"/>
+                      <a:r>
+                        <a:rPr sz="1400" b="1" i="0">
+                          <a:solidFill>
+                            <a:srgbClr val="14222E"/>
+                          </a:solidFill>
+                          <a:latin typeface="Consolas"/>
+                        </a:rPr>
+                        <a:t>1.96×</a:t>
+                      </a:r>
+                    </a:p>
+                  </a:txBody>
+                  <a:tcPr marL="109728" marR="109728" anchor="ctr">
+                    <a:solidFill>
+                      <a:srgbClr val="F2F5F7"/>
+                    </a:solidFill>
+                  </a:tcPr>
+                </a:tc>
+                <a:tc>
+                  <a:txBody>
+                    <a:bodyPr wrap="square"/>
+                    <a:lstStyle/>
+                    <a:p>
+                      <a:pPr algn="r"/>
+                      <a:r>
+                        <a:rPr sz="1400" b="1" i="0">
+                          <a:solidFill>
+                            <a:srgbClr val="14222E"/>
+                          </a:solidFill>
+                          <a:latin typeface="Consolas"/>
+                        </a:rPr>
+                        <a:t>3.94 of 4</a:t>
+                      </a:r>
+                    </a:p>
+                  </a:txBody>
+                  <a:tcPr marL="109728" marR="109728" anchor="ctr">
+                    <a:solidFill>
+                      <a:srgbClr val="F2F5F7"/>
+                    </a:solidFill>
+                  </a:tcPr>
+                </a:tc>
+                <a:tc>
+                  <a:txBody>
+                    <a:bodyPr wrap="square"/>
+                    <a:lstStyle/>
+                    <a:p>
+                      <a:pPr algn="r"/>
+                      <a:r>
+                        <a:rPr sz="1400" b="1" i="0">
+                          <a:solidFill>
+                            <a:srgbClr val="14222E"/>
+                          </a:solidFill>
+                          <a:latin typeface="Consolas"/>
+                        </a:rPr>
+                        <a:t>0.39</a:t>
+                      </a:r>
+                    </a:p>
+                  </a:txBody>
+                  <a:tcPr marL="109728" marR="109728" anchor="ctr">
+                    <a:solidFill>
+                      <a:srgbClr val="F2F5F7"/>
+                    </a:solidFill>
+                  </a:tcPr>
+                </a:tc>
+                <a:tc>
+                  <a:txBody>
+                    <a:bodyPr wrap="square"/>
+                    <a:lstStyle/>
+                    <a:p>
+                      <a:pPr algn="r"/>
+                      <a:r>
+                        <a:rPr sz="1400" b="1" i="0">
+                          <a:solidFill>
+                            <a:srgbClr val="14222E"/>
+                          </a:solidFill>
+                          <a:latin typeface="Consolas"/>
+                        </a:rPr>
+                        <a:t>51.6%</a:t>
+                      </a:r>
+                    </a:p>
+                  </a:txBody>
+                  <a:tcPr marL="109728" marR="109728" anchor="ctr">
+                    <a:solidFill>
+                      <a:srgbClr val="F2F5F7"/>
+                    </a:solidFill>
+                  </a:tcPr>
+                </a:tc>
+              </a:tr>
+            </a:tbl>
+          </a:graphicData>
+        </a:graphic>
+      </p:graphicFrame>
+      <p:sp>
+        <p:nvSpPr>
+          <p:cNvPr id="6" name="TextBox 5"/>
+          <p:cNvSpPr txBox="1"/>
+          <p:nvPr/>
+        </p:nvSpPr>
+        <p:spPr>
+          <a:xfrm>
+            <a:off x="685800" y="3438144"/>
+            <a:ext cx="10881360" cy="822960"/>
+          </a:xfrm>
+          <a:prstGeom prst="rect">
+            <a:avLst/>
+          </a:prstGeom>
+          <a:noFill/>
+        </p:spPr>
+        <p:txBody>
+          <a:bodyPr wrap="square">
+            <a:spAutoFit/>
+          </a:bodyPr>
+          <a:lstStyle/>
+          <a:p>
+            <a:pPr algn="l"/>
+            <a:r>
+              <a:rPr sz="1600" b="0" i="0">
+                <a:solidFill>
+                  <a:srgbClr val="14222E"/>
+                </a:solidFill>
+                <a:latin typeface="Segoe UI"/>
+              </a:rPr>
+              <a:t>A unit is one core and one degree of parallelism, bought together — a KPU.  Flink used every core it was given; the broker stayed under half a core.</a:t>
+            </a:r>
+          </a:p>
+        </p:txBody>
+      </p:sp>
+    </p:spTree>
+  </p:cSld>
+  <p:clrMapOvr>
+    <a:masterClrMapping/>
+  </p:clrMapOvr>
+</p:sld>
+</file>
+
+<file path=ppt/slides/slide7.xml><?xml version="1.0" encoding="utf-8"?>
+<p:sld xmlns:a="http://schemas.openxmlformats.org/drawingml/2006/main" xmlns:p="http://schemas.openxmlformats.org/presentationml/2006/main" xmlns:r="http://schemas.openxmlformats.org/officeDocument/2006/relationships">
+  <p:cSld>
+    <p:spTree>
+      <p:nvGrpSpPr>
+        <p:cNvPr id="1" name=""/>
+        <p:cNvGrpSpPr/>
+        <p:nvPr/>
+      </p:nvGrpSpPr>
+      <p:grpSpPr/>
+      <p:sp>
+        <p:nvSpPr>
+          <p:cNvPr id="2" name="TextBox 1"/>
+          <p:cNvSpPr txBox="1"/>
+          <p:nvPr/>
+        </p:nvSpPr>
+        <p:spPr>
+          <a:xfrm>
+            <a:off x="640080" y="475488"/>
+            <a:ext cx="10972800" cy="274320"/>
+          </a:xfrm>
+          <a:prstGeom prst="rect">
+            <a:avLst/>
+          </a:prstGeom>
+          <a:noFill/>
+        </p:spPr>
+        <p:txBody>
+          <a:bodyPr wrap="square">
+            <a:spAutoFit/>
+          </a:bodyPr>
+          <a:lstStyle/>
+          <a:p>
+            <a:pPr algn="l"/>
+            <a:r>
+              <a:rPr sz="1150" b="1" i="0" spc="120">
+                <a:solidFill>
+                  <a:srgbClr val="1B6B8A"/>
+                </a:solidFill>
+                <a:latin typeface="Segoe UI"/>
+              </a:rPr>
+              <a:t>SCALING</a:t>
+            </a:r>
+          </a:p>
+        </p:txBody>
+      </p:sp>
+      <p:sp>
+        <p:nvSpPr>
+          <p:cNvPr id="3" name="TextBox 2"/>
+          <p:cNvSpPr txBox="1"/>
+          <p:nvPr/>
+        </p:nvSpPr>
+        <p:spPr>
+          <a:xfrm>
+            <a:off x="640080" y="786384"/>
+            <a:ext cx="10972800" cy="731520"/>
+          </a:xfrm>
+          <a:prstGeom prst="rect">
+            <a:avLst/>
+          </a:prstGeom>
+          <a:noFill/>
+        </p:spPr>
+        <p:txBody>
+          <a:bodyPr wrap="square">
+            <a:spAutoFit/>
+          </a:bodyPr>
+          <a:lstStyle/>
+          <a:p>
+            <a:pPr algn="l"/>
+            <a:r>
+              <a:rPr sz="3000" b="1" i="0">
+                <a:solidFill>
+                  <a:srgbClr val="14222E"/>
+                </a:solidFill>
+                <a:latin typeface="Segoe UI"/>
+              </a:rPr>
+              <a:t>Two units, then four — against a perfect 2x</a:t>
+            </a:r>
+          </a:p>
+        </p:txBody>
+      </p:sp>
+      <p:sp>
+        <p:nvSpPr>
+          <p:cNvPr id="4" name="Rectangle 3"/>
+          <p:cNvSpPr/>
+          <p:nvPr/>
+        </p:nvSpPr>
+        <p:spPr>
+          <a:xfrm>
+            <a:off x="640080" y="1444752"/>
+            <a:ext cx="10908792" cy="12700"/>
+          </a:xfrm>
+          <a:prstGeom prst="rect">
+            <a:avLst/>
+          </a:prstGeom>
+          <a:solidFill>
+            <a:srgbClr val="D8DFE4"/>
+          </a:solidFill>
+          <a:ln>
+            <a:noFill/>
+          </a:ln>
+          <a:effectLst/>
+        </p:spPr>
+        <p:style>
+          <a:lnRef idx="1">
+            <a:schemeClr val="accent1"/>
+          </a:lnRef>
+          <a:fillRef idx="3">
+            <a:schemeClr val="accent1"/>
+          </a:fillRef>
+          <a:effectRef idx="2">
+            <a:schemeClr val="accent1"/>
+          </a:effectRef>
+          <a:fontRef idx="minor">
+            <a:schemeClr val="lt1"/>
+          </a:fontRef>
+        </p:style>
+        <p:txBody>
+          <a:bodyPr rtlCol="0" anchor="ctr"/>
+          <a:lstStyle/>
+          <a:p>
+            <a:pPr algn="ctr"/>
+          </a:p>
+        </p:txBody>
+      </p:sp>
+      <p:sp>
+        <p:nvSpPr>
+          <p:cNvPr id="5" name="Rectangle 4"/>
+          <p:cNvSpPr/>
+          <p:nvPr/>
+        </p:nvSpPr>
+        <p:spPr>
+          <a:xfrm>
+            <a:off x="1051560" y="5138928"/>
+            <a:ext cx="5394960" cy="15875"/>
+          </a:xfrm>
+          <a:prstGeom prst="rect">
+            <a:avLst/>
+          </a:prstGeom>
+          <a:solidFill>
+            <a:srgbClr val="D8DFE4"/>
+          </a:solidFill>
+          <a:ln>
+            <a:noFill/>
+          </a:ln>
+          <a:effectLst/>
+        </p:spPr>
+        <p:style>
+          <a:lnRef idx="1">
+            <a:schemeClr val="accent1"/>
+          </a:lnRef>
+          <a:fillRef idx="3">
+            <a:schemeClr val="accent1"/>
+          </a:fillRef>
+          <a:effectRef idx="2">
+            <a:schemeClr val="accent1"/>
+          </a:effectRef>
+          <a:fontRef idx="minor">
+            <a:schemeClr val="lt1"/>
+          </a:fontRef>
+        </p:style>
+        <p:txBody>
+          <a:bodyPr rtlCol="0" anchor="ctr"/>
+          <a:lstStyle/>
+          <a:p>
+            <a:pPr algn="ctr"/>
+          </a:p>
+        </p:txBody>
+      </p:sp>
+      <p:sp>
+        <p:nvSpPr>
+          <p:cNvPr id="6" name="Rectangle 5"/>
+          <p:cNvSpPr/>
+          <p:nvPr/>
+        </p:nvSpPr>
+        <p:spPr>
+          <a:xfrm>
+            <a:off x="1188720" y="2202845"/>
+            <a:ext cx="128016" cy="20320"/>
+          </a:xfrm>
+          <a:prstGeom prst="rect">
+            <a:avLst/>
+          </a:prstGeom>
+          <a:solidFill>
+            <a:srgbClr val="A84B2A"/>
+          </a:solidFill>
+          <a:ln>
+            <a:noFill/>
+          </a:ln>
+          <a:effectLst/>
+        </p:spPr>
+        <p:style>
+          <a:lnRef idx="1">
+            <a:schemeClr val="accent1"/>
+          </a:lnRef>
+          <a:fillRef idx="3">
+            <a:schemeClr val="accent1"/>
+          </a:fillRef>
+          <a:effectRef idx="2">
+            <a:schemeClr val="accent1"/>
+          </a:effectRef>
+          <a:fontRef idx="minor">
+            <a:schemeClr val="lt1"/>
+          </a:fontRef>
+        </p:style>
+        <p:txBody>
+          <a:bodyPr rtlCol="0" anchor="ctr"/>
+          <a:lstStyle/>
+          <a:p>
+            <a:pPr algn="ctr"/>
+          </a:p>
+        </p:txBody>
+      </p:sp>
+      <p:sp>
+        <p:nvSpPr>
+          <p:cNvPr id="7" name="Rectangle 6"/>
+          <p:cNvSpPr/>
+          <p:nvPr/>
+        </p:nvSpPr>
+        <p:spPr>
+          <a:xfrm>
+            <a:off x="1426464" y="2202845"/>
+            <a:ext cx="128016" cy="20320"/>
+          </a:xfrm>
+          <a:prstGeom prst="rect">
+            <a:avLst/>
+          </a:prstGeom>
+          <a:solidFill>
+            <a:srgbClr val="A84B2A"/>
+          </a:solidFill>
+          <a:ln>
+            <a:noFill/>
+          </a:ln>
+          <a:effectLst/>
+        </p:spPr>
+        <p:style>
+          <a:lnRef idx="1">
+            <a:schemeClr val="accent1"/>
+          </a:lnRef>
+          <a:fillRef idx="3">
+            <a:schemeClr val="accent1"/>
+          </a:fillRef>
+          <a:effectRef idx="2">
+            <a:schemeClr val="accent1"/>
+          </a:effectRef>
+          <a:fontRef idx="minor">
+            <a:schemeClr val="lt1"/>
+          </a:fontRef>
+        </p:style>
+        <p:txBody>
+          <a:bodyPr rtlCol="0" anchor="ctr"/>
+          <a:lstStyle/>
+          <a:p>
+            <a:pPr algn="ctr"/>
+          </a:p>
+        </p:txBody>
+      </p:sp>
+      <p:sp>
+        <p:nvSpPr>
+          <p:cNvPr id="8" name="Rectangle 7"/>
+          <p:cNvSpPr/>
+          <p:nvPr/>
+        </p:nvSpPr>
+        <p:spPr>
+          <a:xfrm>
+            <a:off x="1664208" y="2202845"/>
+            <a:ext cx="128016" cy="20320"/>
+          </a:xfrm>
+          <a:prstGeom prst="rect">
+            <a:avLst/>
+          </a:prstGeom>
+          <a:solidFill>
+            <a:srgbClr val="A84B2A"/>
+          </a:solidFill>
+          <a:ln>
+            <a:noFill/>
+          </a:ln>
+          <a:effectLst/>
+        </p:spPr>
+        <p:style>
+          <a:lnRef idx="1">
+            <a:schemeClr val="accent1"/>
+          </a:lnRef>
+          <a:fillRef idx="3">
+            <a:schemeClr val="accent1"/>
+          </a:fillRef>
+          <a:effectRef idx="2">
+            <a:schemeClr val="accent1"/>
+          </a:effectRef>
+          <a:fontRef idx="minor">
+            <a:schemeClr val="lt1"/>
+          </a:fontRef>
+        </p:style>
+        <p:txBody>
+          <a:bodyPr rtlCol="0" anchor="ctr"/>
+          <a:lstStyle/>
+          <a:p>
+            <a:pPr algn="ctr"/>
+          </a:p>
+        </p:txBody>
+      </p:sp>
+      <p:sp>
+        <p:nvSpPr>
+          <p:cNvPr id="9" name="Rectangle 8"/>
+          <p:cNvSpPr/>
+          <p:nvPr/>
+        </p:nvSpPr>
+        <p:spPr>
+          <a:xfrm>
+            <a:off x="1901952" y="2202845"/>
+            <a:ext cx="128016" cy="20320"/>
+          </a:xfrm>
+          <a:prstGeom prst="rect">
+            <a:avLst/>
+          </a:prstGeom>
+          <a:solidFill>
+            <a:srgbClr val="A84B2A"/>
+          </a:solidFill>
+          <a:ln>
+            <a:noFill/>
+          </a:ln>
+          <a:effectLst/>
+        </p:spPr>
+        <p:style>
+          <a:lnRef idx="1">
+            <a:schemeClr val="accent1"/>
+          </a:lnRef>
+          <a:fillRef idx="3">
+            <a:schemeClr val="accent1"/>
+          </a:fillRef>
+          <a:effectRef idx="2">
+            <a:schemeClr val="accent1"/>
+          </a:effectRef>
+          <a:fontRef idx="minor">
+            <a:schemeClr val="lt1"/>
+          </a:fontRef>
+        </p:style>
+        <p:txBody>
+          <a:bodyPr rtlCol="0" anchor="ctr"/>
+          <a:lstStyle/>
+          <a:p>
+            <a:pPr algn="ctr"/>
+          </a:p>
+        </p:txBody>
+      </p:sp>
+      <p:sp>
+        <p:nvSpPr>
+          <p:cNvPr id="10" name="Rectangle 9"/>
+          <p:cNvSpPr/>
+          <p:nvPr/>
+        </p:nvSpPr>
+        <p:spPr>
+          <a:xfrm>
+            <a:off x="2139696" y="2202845"/>
+            <a:ext cx="128016" cy="20320"/>
+          </a:xfrm>
+          <a:prstGeom prst="rect">
+            <a:avLst/>
+          </a:prstGeom>
+          <a:solidFill>
+            <a:srgbClr val="A84B2A"/>
+          </a:solidFill>
+          <a:ln>
+            <a:noFill/>
+          </a:ln>
+          <a:effectLst/>
+        </p:spPr>
+        <p:style>
+          <a:lnRef idx="1">
+            <a:schemeClr val="accent1"/>
+          </a:lnRef>
+          <a:fillRef idx="3">
+            <a:schemeClr val="accent1"/>
+          </a:fillRef>
+          <a:effectRef idx="2">
+            <a:schemeClr val="accent1"/>
+          </a:effectRef>
+          <a:fontRef idx="minor">
+            <a:schemeClr val="lt1"/>
+          </a:fontRef>
+        </p:style>
+        <p:txBody>
+          <a:bodyPr rtlCol="0" anchor="ctr"/>
+          <a:lstStyle/>
+          <a:p>
+            <a:pPr algn="ctr"/>
+          </a:p>
+        </p:txBody>
+      </p:sp>
+      <p:sp>
+        <p:nvSpPr>
+          <p:cNvPr id="11" name="Rectangle 10"/>
+          <p:cNvSpPr/>
+          <p:nvPr/>
+        </p:nvSpPr>
+        <p:spPr>
+          <a:xfrm>
+            <a:off x="2377440" y="2202845"/>
+            <a:ext cx="128016" cy="20320"/>
+          </a:xfrm>
+          <a:prstGeom prst="rect">
+            <a:avLst/>
+          </a:prstGeom>
+          <a:solidFill>
+            <a:srgbClr val="A84B2A"/>
+          </a:solidFill>
+          <a:ln>
+            <a:noFill/>
+          </a:ln>
+          <a:effectLst/>
+        </p:spPr>
+        <p:style>
+          <a:lnRef idx="1">
+            <a:schemeClr val="accent1"/>
+          </a:lnRef>
+          <a:fillRef idx="3">
+            <a:schemeClr val="accent1"/>
+          </a:fillRef>
+          <a:effectRef idx="2">
+            <a:schemeClr val="accent1"/>
+          </a:effectRef>
+          <a:fontRef idx="minor">
+            <a:schemeClr val="lt1"/>
+          </a:fontRef>
+        </p:style>
+        <p:txBody>
+          <a:bodyPr rtlCol="0" anchor="ctr"/>
+          <a:lstStyle/>
+          <a:p>
+            <a:pPr algn="ctr"/>
+          </a:p>
+        </p:txBody>
+      </p:sp>
+      <p:sp>
+        <p:nvSpPr>
+          <p:cNvPr id="12" name="Rectangle 11"/>
+          <p:cNvSpPr/>
+          <p:nvPr/>
+        </p:nvSpPr>
+        <p:spPr>
+          <a:xfrm>
+            <a:off x="2615184" y="2202845"/>
+            <a:ext cx="128016" cy="20320"/>
+          </a:xfrm>
+          <a:prstGeom prst="rect">
+            <a:avLst/>
+          </a:prstGeom>
+          <a:solidFill>
+            <a:srgbClr val="A84B2A"/>
+          </a:solidFill>
+          <a:ln>
+            <a:noFill/>
+          </a:ln>
+          <a:effectLst/>
+        </p:spPr>
+        <p:style>
+          <a:lnRef idx="1">
+            <a:schemeClr val="accent1"/>
+          </a:lnRef>
+          <a:fillRef idx="3">
+            <a:schemeClr val="accent1"/>
+          </a:fillRef>
+          <a:effectRef idx="2">
+            <a:schemeClr val="accent1"/>
+          </a:effectRef>
+          <a:fontRef idx="minor">
+            <a:schemeClr val="lt1"/>
+          </a:fontRef>
+        </p:style>
+        <p:txBody>
+          <a:bodyPr rtlCol="0" anchor="ctr"/>
+          <a:lstStyle/>
+          <a:p>
+            <a:pPr algn="ctr"/>
+          </a:p>
+        </p:txBody>
+      </p:sp>
+      <p:sp>
+        <p:nvSpPr>
+          <p:cNvPr id="13" name="Rectangle 12"/>
+          <p:cNvSpPr/>
+          <p:nvPr/>
+        </p:nvSpPr>
+        <p:spPr>
+          <a:xfrm>
+            <a:off x="2852928" y="2202845"/>
+            <a:ext cx="128016" cy="20320"/>
+          </a:xfrm>
+          <a:prstGeom prst="rect">
+            <a:avLst/>
+          </a:prstGeom>
+          <a:solidFill>
+            <a:srgbClr val="A84B2A"/>
+          </a:solidFill>
+          <a:ln>
+            <a:noFill/>
+          </a:ln>
+          <a:effectLst/>
+        </p:spPr>
+        <p:style>
+          <a:lnRef idx="1">
+            <a:schemeClr val="accent1"/>
+          </a:lnRef>
+          <a:fillRef idx="3">
+            <a:schemeClr val="accent1"/>
+          </a:fillRef>
+          <a:effectRef idx="2">
+            <a:schemeClr val="accent1"/>
+          </a:effectRef>
+          <a:fontRef idx="minor">
+            <a:schemeClr val="lt1"/>
+          </a:fontRef>
+        </p:style>
+        <p:txBody>
+          <a:bodyPr rtlCol="0" anchor="ctr"/>
+          <a:lstStyle/>
+          <a:p>
+            <a:pPr algn="ctr"/>
+          </a:p>
+        </p:txBody>
+      </p:sp>
+      <p:sp>
+        <p:nvSpPr>
+          <p:cNvPr id="14" name="Rectangle 13"/>
+          <p:cNvSpPr/>
+          <p:nvPr/>
+        </p:nvSpPr>
+        <p:spPr>
+          <a:xfrm>
+            <a:off x="3090672" y="2202845"/>
+            <a:ext cx="128016" cy="20320"/>
+          </a:xfrm>
+          <a:prstGeom prst="rect">
+            <a:avLst/>
+          </a:prstGeom>
+          <a:solidFill>
+            <a:srgbClr val="A84B2A"/>
+          </a:solidFill>
+          <a:ln>
+            <a:noFill/>
+          </a:ln>
+          <a:effectLst/>
+        </p:spPr>
+        <p:style>
+          <a:lnRef idx="1">
+            <a:schemeClr val="accent1"/>
+          </a:lnRef>
+          <a:fillRef idx="3">
+            <a:schemeClr val="accent1"/>
+          </a:fillRef>
+          <a:effectRef idx="2">
+            <a:schemeClr val="accent1"/>
+          </a:effectRef>
+          <a:fontRef idx="minor">
+            <a:schemeClr val="lt1"/>
+          </a:fontRef>
+        </p:style>
+        <p:txBody>
+          <a:bodyPr rtlCol="0" anchor="ctr"/>
+          <a:lstStyle/>
+          <a:p>
+            <a:pPr algn="ctr"/>
+          </a:p>
+        </p:txBody>
+      </p:sp>
+      <p:sp>
+        <p:nvSpPr>
+          <p:cNvPr id="15" name="Rectangle 14"/>
+          <p:cNvSpPr/>
+          <p:nvPr/>
+        </p:nvSpPr>
+        <p:spPr>
+          <a:xfrm>
+            <a:off x="3328416" y="2202845"/>
+            <a:ext cx="128016" cy="20320"/>
+          </a:xfrm>
+          <a:prstGeom prst="rect">
+            <a:avLst/>
+          </a:prstGeom>
+          <a:solidFill>
+            <a:srgbClr val="A84B2A"/>
+          </a:solidFill>
+          <a:ln>
+            <a:noFill/>
+          </a:ln>
+          <a:effectLst/>
+        </p:spPr>
+        <p:style>
+          <a:lnRef idx="1">
+            <a:schemeClr val="accent1"/>
+          </a:lnRef>
+          <a:fillRef idx="3">
+            <a:schemeClr val="accent1"/>
+          </a:fillRef>
+          <a:effectRef idx="2">
+            <a:schemeClr val="accent1"/>
+          </a:effectRef>
+          <a:fontRef idx="minor">
+            <a:schemeClr val="lt1"/>
+          </a:fontRef>
+        </p:style>
+        <p:txBody>
+          <a:bodyPr rtlCol="0" anchor="ctr"/>
+          <a:lstStyle/>
+          <a:p>
+            <a:pPr algn="ctr"/>
+          </a:p>
+        </p:txBody>
+      </p:sp>
+      <p:sp>
+        <p:nvSpPr>
+          <p:cNvPr id="16" name="Rectangle 15"/>
+          <p:cNvSpPr/>
+          <p:nvPr/>
+        </p:nvSpPr>
+        <p:spPr>
+          <a:xfrm>
+            <a:off x="3566160" y="2202845"/>
+            <a:ext cx="128016" cy="20320"/>
+          </a:xfrm>
+          <a:prstGeom prst="rect">
+            <a:avLst/>
+          </a:prstGeom>
+          <a:solidFill>
+            <a:srgbClr val="A84B2A"/>
+          </a:solidFill>
+          <a:ln>
+            <a:noFill/>
+          </a:ln>
+          <a:effectLst/>
+        </p:spPr>
+        <p:style>
+          <a:lnRef idx="1">
+            <a:schemeClr val="accent1"/>
+          </a:lnRef>
+          <a:fillRef idx="3">
+            <a:schemeClr val="accent1"/>
+          </a:fillRef>
+          <a:effectRef idx="2">
+            <a:schemeClr val="accent1"/>
+          </a:effectRef>
+          <a:fontRef idx="minor">
+            <a:schemeClr val="lt1"/>
+          </a:fontRef>
+        </p:style>
+        <p:txBody>
+          <a:bodyPr rtlCol="0" anchor="ctr"/>
+          <a:lstStyle/>
+          <a:p>
+            <a:pPr algn="ctr"/>
+          </a:p>
+        </p:txBody>
+      </p:sp>
+      <p:sp>
+        <p:nvSpPr>
+          <p:cNvPr id="17" name="Rectangle 16"/>
+          <p:cNvSpPr/>
+          <p:nvPr/>
+        </p:nvSpPr>
+        <p:spPr>
+          <a:xfrm>
+            <a:off x="3803904" y="2202845"/>
+            <a:ext cx="128016" cy="20320"/>
+          </a:xfrm>
+          <a:prstGeom prst="rect">
+            <a:avLst/>
+          </a:prstGeom>
+          <a:solidFill>
+            <a:srgbClr val="A84B2A"/>
+          </a:solidFill>
+          <a:ln>
+            <a:noFill/>
+          </a:ln>
+          <a:effectLst/>
+        </p:spPr>
+        <p:style>
+          <a:lnRef idx="1">
+            <a:schemeClr val="accent1"/>
+          </a:lnRef>
+          <a:fillRef idx="3">
+            <a:schemeClr val="accent1"/>
+          </a:fillRef>
+          <a:effectRef idx="2">
+            <a:schemeClr val="accent1"/>
+          </a:effectRef>
+          <a:fontRef idx="minor">
+            <a:schemeClr val="lt1"/>
+          </a:fontRef>
+        </p:style>
+        <p:txBody>
+          <a:bodyPr rtlCol="0" anchor="ctr"/>
+          <a:lstStyle/>
+          <a:p>
+            <a:pPr algn="ctr"/>
+          </a:p>
+        </p:txBody>
+      </p:sp>
+      <p:sp>
+        <p:nvSpPr>
+          <p:cNvPr id="18" name="Rectangle 17"/>
+          <p:cNvSpPr/>
+          <p:nvPr/>
+        </p:nvSpPr>
+        <p:spPr>
+          <a:xfrm>
+            <a:off x="4041648" y="2202845"/>
+            <a:ext cx="128016" cy="20320"/>
+          </a:xfrm>
+          <a:prstGeom prst="rect">
+            <a:avLst/>
+          </a:prstGeom>
+          <a:solidFill>
+            <a:srgbClr val="A84B2A"/>
+          </a:solidFill>
+          <a:ln>
+            <a:noFill/>
+          </a:ln>
+          <a:effectLst/>
+        </p:spPr>
+        <p:style>
+          <a:lnRef idx="1">
+            <a:schemeClr val="accent1"/>
+          </a:lnRef>
+          <a:fillRef idx="3">
+            <a:schemeClr val="accent1"/>
+          </a:fillRef>
+          <a:effectRef idx="2">
+            <a:schemeClr val="accent1"/>
+          </a:effectRef>
+          <a:fontRef idx="minor">
+            <a:schemeClr val="lt1"/>
+          </a:fontRef>
+        </p:style>
+        <p:txBody>
+          <a:bodyPr rtlCol="0" anchor="ctr"/>
+          <a:lstStyle/>
+          <a:p>
+            <a:pPr algn="ctr"/>
+          </a:p>
+        </p:txBody>
+      </p:sp>
+      <p:sp>
+        <p:nvSpPr>
+          <p:cNvPr id="19" name="Rectangle 18"/>
+          <p:cNvSpPr/>
+          <p:nvPr/>
+        </p:nvSpPr>
+        <p:spPr>
+          <a:xfrm>
+            <a:off x="4279392" y="2202845"/>
+            <a:ext cx="128016" cy="20320"/>
+          </a:xfrm>
+          <a:prstGeom prst="rect">
+            <a:avLst/>
+          </a:prstGeom>
+          <a:solidFill>
+            <a:srgbClr val="A84B2A"/>
+          </a:solidFill>
+          <a:ln>
+            <a:noFill/>
+          </a:ln>
+          <a:effectLst/>
+        </p:spPr>
+        <p:style>
+          <a:lnRef idx="1">
+            <a:schemeClr val="accent1"/>
+          </a:lnRef>
+          <a:fillRef idx="3">
+            <a:schemeClr val="accent1"/>
+          </a:fillRef>
+          <a:effectRef idx="2">
+            <a:schemeClr val="accent1"/>
+          </a:effectRef>
+          <a:fontRef idx="minor">
+            <a:schemeClr val="lt1"/>
+          </a:fontRef>
+        </p:style>
+        <p:txBody>
+          <a:bodyPr rtlCol="0" anchor="ctr"/>
+          <a:lstStyle/>
+          <a:p>
+            <a:pPr algn="ctr"/>
+          </a:p>
+        </p:txBody>
+      </p:sp>
+      <p:sp>
+        <p:nvSpPr>
+          <p:cNvPr id="20" name="Rectangle 19"/>
+          <p:cNvSpPr/>
+          <p:nvPr/>
+        </p:nvSpPr>
+        <p:spPr>
+          <a:xfrm>
+            <a:off x="4517136" y="2202845"/>
+            <a:ext cx="128016" cy="20320"/>
+          </a:xfrm>
+          <a:prstGeom prst="rect">
+            <a:avLst/>
+          </a:prstGeom>
+          <a:solidFill>
+            <a:srgbClr val="A84B2A"/>
+          </a:solidFill>
+          <a:ln>
+            <a:noFill/>
+          </a:ln>
+          <a:effectLst/>
+        </p:spPr>
+        <p:style>
+          <a:lnRef idx="1">
+            <a:schemeClr val="accent1"/>
+          </a:lnRef>
+          <a:fillRef idx="3">
+            <a:schemeClr val="accent1"/>
+          </a:fillRef>
+          <a:effectRef idx="2">
+            <a:schemeClr val="accent1"/>
+          </a:effectRef>
+          <a:fontRef idx="minor">
+            <a:schemeClr val="lt1"/>
+          </a:fontRef>
+        </p:style>
+        <p:txBody>
+          <a:bodyPr rtlCol="0" anchor="ctr"/>
+          <a:lstStyle/>
+          <a:p>
+            <a:pPr algn="ctr"/>
+          </a:p>
+        </p:txBody>
+      </p:sp>
+      <p:sp>
+        <p:nvSpPr>
+          <p:cNvPr id="21" name="Rectangle 20"/>
+          <p:cNvSpPr/>
+          <p:nvPr/>
+        </p:nvSpPr>
+        <p:spPr>
+          <a:xfrm>
+            <a:off x="4754880" y="2202845"/>
+            <a:ext cx="128016" cy="20320"/>
+          </a:xfrm>
+          <a:prstGeom prst="rect">
+            <a:avLst/>
+          </a:prstGeom>
+          <a:solidFill>
+            <a:srgbClr val="A84B2A"/>
+          </a:solidFill>
+          <a:ln>
+            <a:noFill/>
+          </a:ln>
+          <a:effectLst/>
+        </p:spPr>
+        <p:style>
+          <a:lnRef idx="1">
+            <a:schemeClr val="accent1"/>
+          </a:lnRef>
+          <a:fillRef idx="3">
+            <a:schemeClr val="accent1"/>
+          </a:fillRef>
+          <a:effectRef idx="2">
+            <a:schemeClr val="accent1"/>
+          </a:effectRef>
+          <a:fontRef idx="minor">
+            <a:schemeClr val="lt1"/>
+          </a:fontRef>
+        </p:style>
+        <p:txBody>
+          <a:bodyPr rtlCol="0" anchor="ctr"/>
+          <a:lstStyle/>
+          <a:p>
+            <a:pPr algn="ctr"/>
+          </a:p>
+        </p:txBody>
+      </p:sp>
+      <p:sp>
+        <p:nvSpPr>
+          <p:cNvPr id="22" name="Rectangle 21"/>
+          <p:cNvSpPr/>
+          <p:nvPr/>
+        </p:nvSpPr>
+        <p:spPr>
+          <a:xfrm>
+            <a:off x="4992624" y="2202845"/>
+            <a:ext cx="128016" cy="20320"/>
+          </a:xfrm>
+          <a:prstGeom prst="rect">
+            <a:avLst/>
+          </a:prstGeom>
+          <a:solidFill>
+            <a:srgbClr val="A84B2A"/>
+          </a:solidFill>
+          <a:ln>
+            <a:noFill/>
+          </a:ln>
+          <a:effectLst/>
+        </p:spPr>
+        <p:style>
+          <a:lnRef idx="1">
+            <a:schemeClr val="accent1"/>
+          </a:lnRef>
+          <a:fillRef idx="3">
+            <a:schemeClr val="accent1"/>
+          </a:fillRef>
+          <a:effectRef idx="2">
+            <a:schemeClr val="accent1"/>
+          </a:effectRef>
+          <a:fontRef idx="minor">
+            <a:schemeClr val="lt1"/>
+          </a:fontRef>
+        </p:style>
+        <p:txBody>
+          <a:bodyPr rtlCol="0" anchor="ctr"/>
+          <a:lstStyle/>
+          <a:p>
+            <a:pPr algn="ctr"/>
+          </a:p>
+        </p:txBody>
+      </p:sp>
+      <p:sp>
+        <p:nvSpPr>
+          <p:cNvPr id="23" name="Rectangle 22"/>
+          <p:cNvSpPr/>
+          <p:nvPr/>
+        </p:nvSpPr>
+        <p:spPr>
+          <a:xfrm>
+            <a:off x="5230368" y="2202845"/>
+            <a:ext cx="128016" cy="20320"/>
+          </a:xfrm>
+          <a:prstGeom prst="rect">
+            <a:avLst/>
+          </a:prstGeom>
+          <a:solidFill>
+            <a:srgbClr val="A84B2A"/>
+          </a:solidFill>
+          <a:ln>
+            <a:noFill/>
+          </a:ln>
+          <a:effectLst/>
+        </p:spPr>
+        <p:style>
+          <a:lnRef idx="1">
+            <a:schemeClr val="accent1"/>
+          </a:lnRef>
+          <a:fillRef idx="3">
+            <a:schemeClr val="accent1"/>
+          </a:fillRef>
+          <a:effectRef idx="2">
+            <a:schemeClr val="accent1"/>
+          </a:effectRef>
+          <a:fontRef idx="minor">
+            <a:schemeClr val="lt1"/>
+          </a:fontRef>
+        </p:style>
+        <p:txBody>
+          <a:bodyPr rtlCol="0" anchor="ctr"/>
+          <a:lstStyle/>
+          <a:p>
+            <a:pPr algn="ctr"/>
+          </a:p>
+        </p:txBody>
+      </p:sp>
+      <p:sp>
+        <p:nvSpPr>
+          <p:cNvPr id="24" name="Rectangle 23"/>
+          <p:cNvSpPr/>
+          <p:nvPr/>
+        </p:nvSpPr>
+        <p:spPr>
+          <a:xfrm>
+            <a:off x="5468112" y="2202845"/>
+            <a:ext cx="128016" cy="20320"/>
+          </a:xfrm>
+          <a:prstGeom prst="rect">
+            <a:avLst/>
+          </a:prstGeom>
+          <a:solidFill>
+            <a:srgbClr val="A84B2A"/>
+          </a:solidFill>
+          <a:ln>
+            <a:noFill/>
+          </a:ln>
+          <a:effectLst/>
+        </p:spPr>
+        <p:style>
+          <a:lnRef idx="1">
+            <a:schemeClr val="accent1"/>
+          </a:lnRef>
+          <a:fillRef idx="3">
+            <a:schemeClr val="accent1"/>
+          </a:fillRef>
+          <a:effectRef idx="2">
+            <a:schemeClr val="accent1"/>
+          </a:effectRef>
+          <a:fontRef idx="minor">
+            <a:schemeClr val="lt1"/>
+          </a:fontRef>
+        </p:style>
+        <p:txBody>
+          <a:bodyPr rtlCol="0" anchor="ctr"/>
+          <a:lstStyle/>
+          <a:p>
+            <a:pPr algn="ctr"/>
+          </a:p>
+        </p:txBody>
+      </p:sp>
+      <p:sp>
+        <p:nvSpPr>
+          <p:cNvPr id="25" name="Rectangle 24"/>
+          <p:cNvSpPr/>
+          <p:nvPr/>
+        </p:nvSpPr>
+        <p:spPr>
+          <a:xfrm>
+            <a:off x="5705856" y="2202845"/>
+            <a:ext cx="128016" cy="20320"/>
+          </a:xfrm>
+          <a:prstGeom prst="rect">
+            <a:avLst/>
+          </a:prstGeom>
+          <a:solidFill>
+            <a:srgbClr val="A84B2A"/>
+          </a:solidFill>
+          <a:ln>
+            <a:noFill/>
+          </a:ln>
+          <a:effectLst/>
+        </p:spPr>
+        <p:style>
+          <a:lnRef idx="1">
+            <a:schemeClr val="accent1"/>
+          </a:lnRef>
+          <a:fillRef idx="3">
+            <a:schemeClr val="accent1"/>
+          </a:fillRef>
+          <a:effectRef idx="2">
+            <a:schemeClr val="accent1"/>
+          </a:effectRef>
+          <a:fontRef idx="minor">
+            <a:schemeClr val="lt1"/>
+          </a:fontRef>
+        </p:style>
+        <p:txBody>
+          <a:bodyPr rtlCol="0" anchor="ctr"/>
+          <a:lstStyle/>
+          <a:p>
+            <a:pPr algn="ctr"/>
+          </a:p>
+        </p:txBody>
+      </p:sp>
+      <p:sp>
+        <p:nvSpPr>
+          <p:cNvPr id="26" name="Rectangle 25"/>
+          <p:cNvSpPr/>
+          <p:nvPr/>
+        </p:nvSpPr>
+        <p:spPr>
+          <a:xfrm>
+            <a:off x="5943600" y="2202845"/>
+            <a:ext cx="128016" cy="20320"/>
+          </a:xfrm>
+          <a:prstGeom prst="rect">
+            <a:avLst/>
+          </a:prstGeom>
+          <a:solidFill>
+            <a:srgbClr val="A84B2A"/>
+          </a:solidFill>
+          <a:ln>
+            <a:noFill/>
+          </a:ln>
+          <a:effectLst/>
+        </p:spPr>
+        <p:style>
+          <a:lnRef idx="1">
+            <a:schemeClr val="accent1"/>
+          </a:lnRef>
+          <a:fillRef idx="3">
+            <a:schemeClr val="accent1"/>
+          </a:fillRef>
+          <a:effectRef idx="2">
+            <a:schemeClr val="accent1"/>
+          </a:effectRef>
+          <a:fontRef idx="minor">
+            <a:schemeClr val="lt1"/>
+          </a:fontRef>
+        </p:style>
+        <p:txBody>
+          <a:bodyPr rtlCol="0" anchor="ctr"/>
+          <a:lstStyle/>
+          <a:p>
+            <a:pPr algn="ctr"/>
+          </a:p>
+        </p:txBody>
+      </p:sp>
+      <p:sp>
+        <p:nvSpPr>
+          <p:cNvPr id="27" name="Rectangle 26"/>
+          <p:cNvSpPr/>
+          <p:nvPr/>
+        </p:nvSpPr>
+        <p:spPr>
+          <a:xfrm>
+            <a:off x="6181344" y="2202845"/>
+            <a:ext cx="128016" cy="20320"/>
+          </a:xfrm>
+          <a:prstGeom prst="rect">
+            <a:avLst/>
+          </a:prstGeom>
+          <a:solidFill>
+            <a:srgbClr val="A84B2A"/>
+          </a:solidFill>
+          <a:ln>
+            <a:noFill/>
+          </a:ln>
+          <a:effectLst/>
+        </p:spPr>
+        <p:style>
+          <a:lnRef idx="1">
+            <a:schemeClr val="accent1"/>
+          </a:lnRef>
+          <a:fillRef idx="3">
+            <a:schemeClr val="accent1"/>
+          </a:fillRef>
+          <a:effectRef idx="2">
+            <a:schemeClr val="accent1"/>
+          </a:effectRef>
+          <a:fontRef idx="minor">
+            <a:schemeClr val="lt1"/>
+          </a:fontRef>
+        </p:style>
+        <p:txBody>
+          <a:bodyPr rtlCol="0" anchor="ctr"/>
+          <a:lstStyle/>
+          <a:p>
+            <a:pPr algn="ctr"/>
+          </a:p>
+        </p:txBody>
+      </p:sp>
+      <p:sp>
+        <p:nvSpPr>
+          <p:cNvPr id="28" name="TextBox 27"/>
+          <p:cNvSpPr txBox="1"/>
+          <p:nvPr/>
+        </p:nvSpPr>
+        <p:spPr>
+          <a:xfrm>
+            <a:off x="5074920" y="1910237"/>
+            <a:ext cx="2194560" cy="274320"/>
+          </a:xfrm>
+          <a:prstGeom prst="rect">
+            <a:avLst/>
+          </a:prstGeom>
+          <a:noFill/>
+        </p:spPr>
+        <p:txBody>
+          <a:bodyPr wrap="square">
+            <a:spAutoFit/>
+          </a:bodyPr>
+          <a:lstStyle/>
+          <a:p>
+            <a:pPr algn="l"/>
+            <a:r>
+              <a:rPr sz="1150" b="1" i="0">
+                <a:solidFill>
+                  <a:srgbClr val="A84B2A"/>
+                </a:solidFill>
+                <a:latin typeface="Segoe UI"/>
+              </a:rPr>
+              <a:t>perfect 2x  =  131,442</a:t>
+            </a:r>
+          </a:p>
+        </p:txBody>
+      </p:sp>
+      <p:sp>
+        <p:nvSpPr>
+          <p:cNvPr id="29" name="Rounded Rectangle 28"/>
+          <p:cNvSpPr/>
+          <p:nvPr/>
+        </p:nvSpPr>
+        <p:spPr>
+          <a:xfrm>
+            <a:off x="1600200" y="3670887"/>
+            <a:ext cx="1508760" cy="1468041"/>
+          </a:xfrm>
+          <a:prstGeom prst="roundRect">
+            <a:avLst/>
+          </a:prstGeom>
+          <a:solidFill>
+            <a:srgbClr val="9FC2D1"/>
+          </a:solidFill>
+          <a:ln>
+            <a:noFill/>
+          </a:ln>
+          <a:effectLst/>
+        </p:spPr>
+        <p:style>
+          <a:lnRef idx="1">
+            <a:schemeClr val="accent1"/>
+          </a:lnRef>
+          <a:fillRef idx="3">
+            <a:schemeClr val="accent1"/>
+          </a:fillRef>
+          <a:effectRef idx="2">
+            <a:schemeClr val="accent1"/>
+          </a:effectRef>
+          <a:fontRef idx="minor">
+            <a:schemeClr val="lt1"/>
+          </a:fontRef>
+        </p:style>
+        <p:txBody>
+          <a:bodyPr rtlCol="0" anchor="ctr"/>
+          <a:lstStyle/>
+          <a:p>
+            <a:pPr algn="ctr"/>
+          </a:p>
+        </p:txBody>
+      </p:sp>
+      <p:sp>
+        <p:nvSpPr>
+          <p:cNvPr id="30" name="TextBox 29"/>
+          <p:cNvSpPr txBox="1"/>
+          <p:nvPr/>
+        </p:nvSpPr>
+        <p:spPr>
+          <a:xfrm>
+            <a:off x="1280160" y="3250263"/>
+            <a:ext cx="2148840" cy="365760"/>
+          </a:xfrm>
+          <a:prstGeom prst="rect">
+            <a:avLst/>
+          </a:prstGeom>
+          <a:noFill/>
+        </p:spPr>
+        <p:txBody>
+          <a:bodyPr wrap="square">
+            <a:spAutoFit/>
+          </a:bodyPr>
+          <a:lstStyle/>
+          <a:p>
+            <a:pPr algn="ctr"/>
+            <a:r>
+              <a:rPr sz="1900" b="1" i="0">
+                <a:solidFill>
+                  <a:srgbClr val="14222E"/>
+                </a:solidFill>
+                <a:latin typeface="Segoe UI"/>
+              </a:rPr>
+              <a:t>65,721</a:t>
+            </a:r>
+          </a:p>
+        </p:txBody>
+      </p:sp>
+      <p:sp>
+        <p:nvSpPr>
+          <p:cNvPr id="31" name="TextBox 30"/>
+          <p:cNvSpPr txBox="1"/>
+          <p:nvPr/>
+        </p:nvSpPr>
+        <p:spPr>
+          <a:xfrm>
+            <a:off x="1280160" y="5230368"/>
+            <a:ext cx="2148840" cy="603504"/>
+          </a:xfrm>
+          <a:prstGeom prst="rect">
+            <a:avLst/>
+          </a:prstGeom>
+          <a:noFill/>
+        </p:spPr>
+        <p:txBody>
+          <a:bodyPr wrap="square">
+            <a:spAutoFit/>
+          </a:bodyPr>
+          <a:lstStyle/>
+          <a:p>
+            <a:pPr algn="ctr"/>
+            <a:r>
+              <a:rPr sz="1500" b="1" i="0">
+                <a:solidFill>
+                  <a:srgbClr val="14222E"/>
+                </a:solidFill>
+                <a:latin typeface="Segoe UI"/>
+              </a:rPr>
+              <a:t>2 units</a:t>
+            </a:r>
+          </a:p>
+          <a:p>
+            <a:pPr algn="ctr"/>
+            <a:r>
+              <a:rPr sz="1150" b="0" i="0">
+                <a:solidFill>
+                  <a:srgbClr val="6B7A87"/>
+                </a:solidFill>
+                <a:latin typeface="Segoe UI"/>
+              </a:rPr>
+              <a:t>2.00 of 2 cores used</a:t>
+            </a:r>
+          </a:p>
+        </p:txBody>
+      </p:sp>
+      <p:sp>
+        <p:nvSpPr>
+          <p:cNvPr id="32" name="Rounded Rectangle 31"/>
+          <p:cNvSpPr/>
+          <p:nvPr/>
+        </p:nvSpPr>
+        <p:spPr>
+          <a:xfrm>
+            <a:off x="3977639" y="2256142"/>
+            <a:ext cx="1508760" cy="2882786"/>
+          </a:xfrm>
+          <a:prstGeom prst="roundRect">
+            <a:avLst/>
+          </a:prstGeom>
+          <a:solidFill>
+            <a:srgbClr val="1B6B8A"/>
+          </a:solidFill>
+          <a:ln>
+            <a:noFill/>
+          </a:ln>
+          <a:effectLst/>
+        </p:spPr>
+        <p:style>
+          <a:lnRef idx="1">
+            <a:schemeClr val="accent1"/>
+          </a:lnRef>
+          <a:fillRef idx="3">
+            <a:schemeClr val="accent1"/>
+          </a:fillRef>
+          <a:effectRef idx="2">
+            <a:schemeClr val="accent1"/>
+          </a:effectRef>
+          <a:fontRef idx="minor">
+            <a:schemeClr val="lt1"/>
+          </a:fontRef>
+        </p:style>
+        <p:txBody>
+          <a:bodyPr rtlCol="0" anchor="ctr"/>
+          <a:lstStyle/>
+          <a:p>
+            <a:pPr algn="ctr"/>
+          </a:p>
+        </p:txBody>
+      </p:sp>
+      <p:sp>
+        <p:nvSpPr>
+          <p:cNvPr id="33" name="TextBox 32"/>
+          <p:cNvSpPr txBox="1"/>
+          <p:nvPr/>
+        </p:nvSpPr>
+        <p:spPr>
+          <a:xfrm>
+            <a:off x="3657599" y="1835518"/>
+            <a:ext cx="2148840" cy="365760"/>
+          </a:xfrm>
+          <a:prstGeom prst="rect">
+            <a:avLst/>
+          </a:prstGeom>
+          <a:noFill/>
+        </p:spPr>
+        <p:txBody>
+          <a:bodyPr wrap="square">
+            <a:spAutoFit/>
+          </a:bodyPr>
+          <a:lstStyle/>
+          <a:p>
+            <a:pPr algn="ctr"/>
+            <a:r>
+              <a:rPr sz="1900" b="1" i="0">
+                <a:solidFill>
+                  <a:srgbClr val="14222E"/>
+                </a:solidFill>
+                <a:latin typeface="Segoe UI"/>
+              </a:rPr>
+              <a:t>129,056</a:t>
+            </a:r>
+          </a:p>
+        </p:txBody>
+      </p:sp>
+      <p:sp>
+        <p:nvSpPr>
+          <p:cNvPr id="34" name="TextBox 33"/>
+          <p:cNvSpPr txBox="1"/>
+          <p:nvPr/>
+        </p:nvSpPr>
+        <p:spPr>
+          <a:xfrm>
+            <a:off x="3657599" y="5230368"/>
+            <a:ext cx="2148840" cy="603504"/>
+          </a:xfrm>
+          <a:prstGeom prst="rect">
+            <a:avLst/>
+          </a:prstGeom>
+          <a:noFill/>
+        </p:spPr>
+        <p:txBody>
+          <a:bodyPr wrap="square">
+            <a:spAutoFit/>
+          </a:bodyPr>
+          <a:lstStyle/>
+          <a:p>
+            <a:pPr algn="ctr"/>
+            <a:r>
+              <a:rPr sz="1500" b="1" i="0">
+                <a:solidFill>
+                  <a:srgbClr val="14222E"/>
+                </a:solidFill>
+                <a:latin typeface="Segoe UI"/>
+              </a:rPr>
+              <a:t>4 units</a:t>
+            </a:r>
+          </a:p>
+          <a:p>
+            <a:pPr algn="ctr"/>
+            <a:r>
+              <a:rPr sz="1150" b="0" i="0">
+                <a:solidFill>
+                  <a:srgbClr val="6B7A87"/>
+                </a:solidFill>
+                <a:latin typeface="Segoe UI"/>
+              </a:rPr>
+              <a:t>3.94 of 4 cores used</a:t>
+            </a:r>
+          </a:p>
+        </p:txBody>
+      </p:sp>
+      <p:sp>
+        <p:nvSpPr>
+          <p:cNvPr id="35" name="TextBox 34"/>
+          <p:cNvSpPr txBox="1"/>
+          <p:nvPr/>
+        </p:nvSpPr>
+        <p:spPr>
+          <a:xfrm>
+            <a:off x="2834640" y="3128555"/>
+            <a:ext cx="1371600" cy="731520"/>
+          </a:xfrm>
+          <a:prstGeom prst="rect">
+            <a:avLst/>
+          </a:prstGeom>
+          <a:noFill/>
+        </p:spPr>
+        <p:txBody>
+          <a:bodyPr wrap="square">
+            <a:spAutoFit/>
+          </a:bodyPr>
+          <a:lstStyle/>
+          <a:p>
+            <a:pPr algn="ctr"/>
+            <a:r>
+              <a:rPr sz="3000" b="1" i="0">
+                <a:solidFill>
+                  <a:srgbClr val="1B6B8A"/>
+                </a:solidFill>
+                <a:latin typeface="Segoe UI"/>
+              </a:rPr>
+              <a:t>1.96x</a:t>
+            </a:r>
+          </a:p>
+          <a:p>
+            <a:pPr algn="ctr"/>
+            <a:r>
+              <a:rPr sz="1100" b="0" i="0">
+                <a:solidFill>
+                  <a:srgbClr val="6B7A87"/>
+                </a:solidFill>
+                <a:latin typeface="Segoe UI"/>
+              </a:rPr>
+              <a:t>orders / sec</a:t>
+            </a:r>
+          </a:p>
+        </p:txBody>
+      </p:sp>
+      <p:sp>
+        <p:nvSpPr>
+          <p:cNvPr id="36" name="TextBox 35"/>
+          <p:cNvSpPr txBox="1"/>
+          <p:nvPr/>
+        </p:nvSpPr>
+        <p:spPr>
+          <a:xfrm>
+            <a:off x="7086600" y="2020824"/>
+            <a:ext cx="4480560" cy="3657600"/>
+          </a:xfrm>
+          <a:prstGeom prst="rect">
+            <a:avLst/>
+          </a:prstGeom>
+          <a:noFill/>
+        </p:spPr>
+        <p:txBody>
+          <a:bodyPr wrap="square">
+            <a:spAutoFit/>
+          </a:bodyPr>
+          <a:lstStyle/>
+          <a:p>
+            <a:pPr algn="l">
+              <a:spcAft>
+                <a:spcPts val="1500"/>
+              </a:spcAft>
+            </a:pPr>
+            <a:r>
+              <a:rPr sz="1500" b="1" i="0">
+                <a:solidFill>
+                  <a:srgbClr val="1B6B8A"/>
+                </a:solidFill>
+                <a:latin typeface="Segoe UI"/>
+              </a:rPr>
+              <a:t>▸   </a:t>
+            </a:r>
+            <a:r>
+              <a:rPr sz="1500" b="1" i="0">
+                <a:solidFill>
+                  <a:srgbClr val="14222E"/>
+                </a:solidFill>
+                <a:latin typeface="Segoe UI"/>
+              </a:rPr>
+              <a:t>A unit is one core and one degree of parallelism, bought together. </a:t>
+            </a:r>
+            <a:r>
+              <a:rPr sz="1500" b="0" i="0">
+                <a:solidFill>
+                  <a:srgbClr val="2E3D4A"/>
+                </a:solidFill>
+                <a:latin typeface="Segoe UI"/>
+              </a:rPr>
+              <a:t>That is what a KPU is in Managed Service for Apache Flink.</a:t>
+            </a:r>
+          </a:p>
+          <a:p>
+            <a:pPr>
+              <a:spcAft>
+                <a:spcPts val="1500"/>
+              </a:spcAft>
+            </a:pPr>
+            <a:r>
+              <a:rPr sz="1500" b="1" i="0">
+                <a:solidFill>
+                  <a:srgbClr val="1B6B8A"/>
+                </a:solidFill>
+                <a:latin typeface="Segoe UI"/>
+              </a:rPr>
+              <a:t>▸   </a:t>
+            </a:r>
+            <a:r>
+              <a:rPr sz="1500" b="1" i="0">
+                <a:solidFill>
+                  <a:srgbClr val="14222E"/>
+                </a:solidFill>
+                <a:latin typeface="Segoe UI"/>
+              </a:rPr>
+              <a:t>Flink used every core it was given — </a:t>
+            </a:r>
+            <a:r>
+              <a:rPr sz="1500" b="0" i="0">
+                <a:solidFill>
+                  <a:srgbClr val="2E3D4A"/>
+                </a:solidFill>
+                <a:latin typeface="Segoe UI"/>
+              </a:rPr>
+              <a:t>2.00 of 2, then 3.94 of 4. A unit bought is a unit worked.</a:t>
+            </a:r>
+          </a:p>
+          <a:p>
+            <a:pPr>
+              <a:spcAft>
+                <a:spcPts val="1500"/>
+              </a:spcAft>
+            </a:pPr>
+            <a:r>
+              <a:rPr sz="1500" b="1" i="0">
+                <a:solidFill>
+                  <a:srgbClr val="1B6B8A"/>
+                </a:solidFill>
+                <a:latin typeface="Segoe UI"/>
+              </a:rPr>
+              <a:t>▸   </a:t>
+            </a:r>
+            <a:r>
+              <a:rPr sz="1500" b="1" i="0">
+                <a:solidFill>
+                  <a:srgbClr val="14222E"/>
+                </a:solidFill>
+                <a:latin typeface="Segoe UI"/>
+              </a:rPr>
+              <a:t>The broker stayed under half a core. </a:t>
+            </a:r>
+            <a:r>
+              <a:rPr sz="1500" b="0" i="0">
+                <a:solidFill>
+                  <a:srgbClr val="2E3D4A"/>
+                </a:solidFill>
+                <a:latin typeface="Segoe UI"/>
+              </a:rPr>
+              <a:t>Flink was the constrained component, and you can only show that something scales when it is the thing that is constrained.</a:t>
+            </a:r>
+          </a:p>
+        </p:txBody>
+      </p:sp>
+    </p:spTree>
+  </p:cSld>
+  <p:clrMapOvr>
+    <a:masterClrMapping/>
+  </p:clrMapOvr>
+</p:sld>
+</file>
+
+<file path=ppt/slides/slide8.xml><?xml version="1.0" encoding="utf-8"?>
+<p:sld xmlns:a="http://schemas.openxmlformats.org/drawingml/2006/main" xmlns:p="http://schemas.openxmlformats.org/presentationml/2006/main" xmlns:r="http://schemas.openxmlformats.org/officeDocument/2006/relationships">
+  <p:cSld>
+    <p:spTree>
+      <p:nvGrpSpPr>
+        <p:cNvPr id="1" name=""/>
+        <p:cNvGrpSpPr/>
+        <p:nvPr/>
+      </p:nvGrpSpPr>
+      <p:grpSpPr/>
+      <p:sp>
+        <p:nvSpPr>
+          <p:cNvPr id="2" name="TextBox 1"/>
+          <p:cNvSpPr txBox="1"/>
+          <p:nvPr/>
+        </p:nvSpPr>
+        <p:spPr>
+          <a:xfrm>
+            <a:off x="640080" y="475488"/>
+            <a:ext cx="10972800" cy="274320"/>
+          </a:xfrm>
+          <a:prstGeom prst="rect">
+            <a:avLst/>
+          </a:prstGeom>
+          <a:noFill/>
+        </p:spPr>
+        <p:txBody>
+          <a:bodyPr wrap="square">
+            <a:spAutoFit/>
+          </a:bodyPr>
+          <a:lstStyle/>
+          <a:p>
+            <a:pPr algn="l"/>
+            <a:r>
+              <a:rPr sz="1150" b="1" i="0" spc="120">
+                <a:solidFill>
+                  <a:srgbClr val="1B6B8A"/>
+                </a:solidFill>
+                <a:latin typeface="Segoe UI"/>
+              </a:rPr>
+              <a:t>EXPLAIN IT</a:t>
+            </a:r>
+          </a:p>
+        </p:txBody>
+      </p:sp>
+      <p:sp>
+        <p:nvSpPr>
+          <p:cNvPr id="3" name="TextBox 2"/>
+          <p:cNvSpPr txBox="1"/>
+          <p:nvPr/>
+        </p:nvSpPr>
+        <p:spPr>
+          <a:xfrm>
+            <a:off x="640080" y="786384"/>
+            <a:ext cx="10972800" cy="731520"/>
+          </a:xfrm>
+          <a:prstGeom prst="rect">
+            <a:avLst/>
+          </a:prstGeom>
+          <a:noFill/>
+        </p:spPr>
+        <p:txBody>
+          <a:bodyPr wrap="square">
+            <a:spAutoFit/>
+          </a:bodyPr>
+          <a:lstStyle/>
+          <a:p>
+            <a:pPr algn="l"/>
+            <a:r>
+              <a:rPr sz="3000" b="1" i="0">
+                <a:solidFill>
+                  <a:srgbClr val="14222E"/>
+                </a:solidFill>
+                <a:latin typeface="Segoe UI"/>
+              </a:rPr>
+              <a:t>Every number on the screen has an answer</a:t>
+            </a:r>
+          </a:p>
+        </p:txBody>
+      </p:sp>
+      <p:sp>
+        <p:nvSpPr>
+          <p:cNvPr id="4" name="Rectangle 3"/>
+          <p:cNvSpPr/>
+          <p:nvPr/>
+        </p:nvSpPr>
+        <p:spPr>
+          <a:xfrm>
+            <a:off x="640080" y="1444752"/>
+            <a:ext cx="10908792" cy="12700"/>
+          </a:xfrm>
+          <a:prstGeom prst="rect">
+            <a:avLst/>
+          </a:prstGeom>
+          <a:solidFill>
+            <a:srgbClr val="D8DFE4"/>
+          </a:solidFill>
+          <a:ln>
+            <a:noFill/>
+          </a:ln>
+          <a:effectLst/>
+        </p:spPr>
+        <p:style>
+          <a:lnRef idx="1">
+            <a:schemeClr val="accent1"/>
+          </a:lnRef>
+          <a:fillRef idx="3">
+            <a:schemeClr val="accent1"/>
+          </a:fillRef>
+          <a:effectRef idx="2">
+            <a:schemeClr val="accent1"/>
+          </a:effectRef>
+          <a:fontRef idx="minor">
+            <a:schemeClr val="lt1"/>
+          </a:fontRef>
+        </p:style>
+        <p:txBody>
+          <a:bodyPr rtlCol="0" anchor="ctr"/>
+          <a:lstStyle/>
+          <a:p>
+            <a:pPr algn="ctr"/>
+          </a:p>
+        </p:txBody>
+      </p:sp>
       <p:sp>
         <p:nvSpPr>
           <p:cNvPr id="5" name="TextBox 4"/>
@@ -6356,7 +8647,7 @@
 </p:sld>
 </file>
 
-<file path=ppt/slides/slide7.xml><?xml version="1.0" encoding="utf-8"?>
+<file path=ppt/slides/slide9.xml><?xml version="1.0" encoding="utf-8"?>
 <p:sld xmlns:a="http://schemas.openxmlformats.org/drawingml/2006/main" xmlns:p="http://schemas.openxmlformats.org/presentationml/2006/main" xmlns:r="http://schemas.openxmlformats.org/officeDocument/2006/relationships">
   <p:cSld>
     <p:spTree>
@@ -7101,623 +9392,6 @@
                 <a:latin typeface="Segoe UI"/>
               </a:rPr>
               <a:t>A hundredfold on orders, twentyfold on prices — order latency unmoved in both.</a:t>
-            </a:r>
-          </a:p>
-        </p:txBody>
-      </p:sp>
-    </p:spTree>
-  </p:cSld>
-  <p:clrMapOvr>
-    <a:masterClrMapping/>
-  </p:clrMapOvr>
-</p:sld>
-</file>
-
-<file path=ppt/slides/slide8.xml><?xml version="1.0" encoding="utf-8"?>
-<p:sld xmlns:a="http://schemas.openxmlformats.org/drawingml/2006/main" xmlns:p="http://schemas.openxmlformats.org/presentationml/2006/main" xmlns:r="http://schemas.openxmlformats.org/officeDocument/2006/relationships">
-  <p:cSld>
-    <p:spTree>
-      <p:nvGrpSpPr>
-        <p:cNvPr id="1" name=""/>
-        <p:cNvGrpSpPr/>
-        <p:nvPr/>
-      </p:nvGrpSpPr>
-      <p:grpSpPr/>
-      <p:sp>
-        <p:nvSpPr>
-          <p:cNvPr id="2" name="TextBox 1"/>
-          <p:cNvSpPr txBox="1"/>
-          <p:nvPr/>
-        </p:nvSpPr>
-        <p:spPr>
-          <a:xfrm>
-            <a:off x="640080" y="475488"/>
-            <a:ext cx="10972800" cy="274320"/>
-          </a:xfrm>
-          <a:prstGeom prst="rect">
-            <a:avLst/>
-          </a:prstGeom>
-          <a:noFill/>
-        </p:spPr>
-        <p:txBody>
-          <a:bodyPr wrap="square">
-            <a:spAutoFit/>
-          </a:bodyPr>
-          <a:lstStyle/>
-          <a:p>
-            <a:pPr algn="l"/>
-            <a:r>
-              <a:rPr sz="1150" b="1" i="0" spc="120">
-                <a:solidFill>
-                  <a:srgbClr val="1B6B8A"/>
-                </a:solidFill>
-                <a:latin typeface="Segoe UI"/>
-              </a:rPr>
-              <a:t>SCALING</a:t>
-            </a:r>
-          </a:p>
-        </p:txBody>
-      </p:sp>
-      <p:sp>
-        <p:nvSpPr>
-          <p:cNvPr id="3" name="TextBox 2"/>
-          <p:cNvSpPr txBox="1"/>
-          <p:nvPr/>
-        </p:nvSpPr>
-        <p:spPr>
-          <a:xfrm>
-            <a:off x="640080" y="786384"/>
-            <a:ext cx="10972800" cy="731520"/>
-          </a:xfrm>
-          <a:prstGeom prst="rect">
-            <a:avLst/>
-          </a:prstGeom>
-          <a:noFill/>
-        </p:spPr>
-        <p:txBody>
-          <a:bodyPr wrap="square">
-            <a:spAutoFit/>
-          </a:bodyPr>
-          <a:lstStyle/>
-          <a:p>
-            <a:pPr algn="l"/>
-            <a:r>
-              <a:rPr sz="3000" b="1" i="0">
-                <a:solidFill>
-                  <a:srgbClr val="14222E"/>
-                </a:solidFill>
-                <a:latin typeface="Segoe UI"/>
-              </a:rPr>
-              <a:t>Double the units, double the throughput</a:t>
-            </a:r>
-          </a:p>
-        </p:txBody>
-      </p:sp>
-      <p:sp>
-        <p:nvSpPr>
-          <p:cNvPr id="4" name="Rectangle 3"/>
-          <p:cNvSpPr/>
-          <p:nvPr/>
-        </p:nvSpPr>
-        <p:spPr>
-          <a:xfrm>
-            <a:off x="640080" y="1444752"/>
-            <a:ext cx="10908792" cy="12700"/>
-          </a:xfrm>
-          <a:prstGeom prst="rect">
-            <a:avLst/>
-          </a:prstGeom>
-          <a:solidFill>
-            <a:srgbClr val="D8DFE4"/>
-          </a:solidFill>
-          <a:ln>
-            <a:noFill/>
-          </a:ln>
-          <a:effectLst/>
-        </p:spPr>
-        <p:style>
-          <a:lnRef idx="1">
-            <a:schemeClr val="accent1"/>
-          </a:lnRef>
-          <a:fillRef idx="3">
-            <a:schemeClr val="accent1"/>
-          </a:fillRef>
-          <a:effectRef idx="2">
-            <a:schemeClr val="accent1"/>
-          </a:effectRef>
-          <a:fontRef idx="minor">
-            <a:schemeClr val="lt1"/>
-          </a:fontRef>
-        </p:style>
-        <p:txBody>
-          <a:bodyPr rtlCol="0" anchor="ctr"/>
-          <a:lstStyle/>
-          <a:p>
-            <a:pPr algn="ctr"/>
-          </a:p>
-        </p:txBody>
-      </p:sp>
-      <p:graphicFrame>
-        <p:nvGraphicFramePr>
-          <p:cNvPr id="5" name="Table 4"/>
-          <p:cNvGraphicFramePr>
-            <a:graphicFrameLocks noGrp="1"/>
-          </p:cNvGraphicFramePr>
-          <p:nvPr/>
-        </p:nvGraphicFramePr>
-        <p:xfrm>
-          <a:off x="685800" y="1746504"/>
-          <a:ext cx="10607040" cy="1133856"/>
-        </p:xfrm>
-        <a:graphic>
-          <a:graphicData uri="http://schemas.openxmlformats.org/drawingml/2006/table">
-            <a:tbl>
-              <a:tblPr bandRow="1">
-                <a:tableStyleId>{5C22544A-7EE6-4342-B048-85BDC9FD1C3A}</a:tableStyleId>
-              </a:tblPr>
-              <a:tblGrid>
-                <a:gridCol w="1188720"/>
-                <a:gridCol w="1828800"/>
-                <a:gridCol w="1828800"/>
-                <a:gridCol w="1920240"/>
-                <a:gridCol w="1828800"/>
-                <a:gridCol w="2011680"/>
-              </a:tblGrid>
-              <a:tr h="402336">
-                <a:tc>
-                  <a:txBody>
-                    <a:bodyPr wrap="square"/>
-                    <a:lstStyle/>
-                    <a:p>
-                      <a:pPr algn="l"/>
-                      <a:r>
-                        <a:rPr sz="1400" b="1" i="0">
-                          <a:solidFill>
-                            <a:srgbClr val="FFFFFF"/>
-                          </a:solidFill>
-                          <a:latin typeface="Segoe UI"/>
-                        </a:rPr>
-                        <a:t>units</a:t>
-                      </a:r>
-                    </a:p>
-                  </a:txBody>
-                  <a:tcPr marL="109728" marR="109728" anchor="ctr">
-                    <a:solidFill>
-                      <a:srgbClr val="14222E"/>
-                    </a:solidFill>
-                  </a:tcPr>
-                </a:tc>
-                <a:tc>
-                  <a:txBody>
-                    <a:bodyPr wrap="square"/>
-                    <a:lstStyle/>
-                    <a:p>
-                      <a:pPr algn="r"/>
-                      <a:r>
-                        <a:rPr sz="1400" b="1" i="0">
-                          <a:solidFill>
-                            <a:srgbClr val="FFFFFF"/>
-                          </a:solidFill>
-                          <a:latin typeface="Segoe UI"/>
-                        </a:rPr>
-                        <a:t>orders/sec</a:t>
-                      </a:r>
-                    </a:p>
-                  </a:txBody>
-                  <a:tcPr marL="109728" marR="109728" anchor="ctr">
-                    <a:solidFill>
-                      <a:srgbClr val="14222E"/>
-                    </a:solidFill>
-                  </a:tcPr>
-                </a:tc>
-                <a:tc>
-                  <a:txBody>
-                    <a:bodyPr wrap="square"/>
-                    <a:lstStyle/>
-                    <a:p>
-                      <a:pPr algn="r"/>
-                      <a:r>
-                        <a:rPr sz="1400" b="1" i="0">
-                          <a:solidFill>
-                            <a:srgbClr val="FFFFFF"/>
-                          </a:solidFill>
-                          <a:latin typeface="Segoe UI"/>
-                        </a:rPr>
-                        <a:t>vs previous</a:t>
-                      </a:r>
-                    </a:p>
-                  </a:txBody>
-                  <a:tcPr marL="109728" marR="109728" anchor="ctr">
-                    <a:solidFill>
-                      <a:srgbClr val="14222E"/>
-                    </a:solidFill>
-                  </a:tcPr>
-                </a:tc>
-                <a:tc>
-                  <a:txBody>
-                    <a:bodyPr wrap="square"/>
-                    <a:lstStyle/>
-                    <a:p>
-                      <a:pPr algn="r"/>
-                      <a:r>
-                        <a:rPr sz="1400" b="1" i="0">
-                          <a:solidFill>
-                            <a:srgbClr val="FFFFFF"/>
-                          </a:solidFill>
-                          <a:latin typeface="Segoe UI"/>
-                        </a:rPr>
-                        <a:t>Flink cores</a:t>
-                      </a:r>
-                    </a:p>
-                  </a:txBody>
-                  <a:tcPr marL="109728" marR="109728" anchor="ctr">
-                    <a:solidFill>
-                      <a:srgbClr val="14222E"/>
-                    </a:solidFill>
-                  </a:tcPr>
-                </a:tc>
-                <a:tc>
-                  <a:txBody>
-                    <a:bodyPr wrap="square"/>
-                    <a:lstStyle/>
-                    <a:p>
-                      <a:pPr algn="r"/>
-                      <a:r>
-                        <a:rPr sz="1400" b="1" i="0">
-                          <a:solidFill>
-                            <a:srgbClr val="FFFFFF"/>
-                          </a:solidFill>
-                          <a:latin typeface="Segoe UI"/>
-                        </a:rPr>
-                        <a:t>broker cores</a:t>
-                      </a:r>
-                    </a:p>
-                  </a:txBody>
-                  <a:tcPr marL="109728" marR="109728" anchor="ctr">
-                    <a:solidFill>
-                      <a:srgbClr val="14222E"/>
-                    </a:solidFill>
-                  </a:tcPr>
-                </a:tc>
-                <a:tc>
-                  <a:txBody>
-                    <a:bodyPr wrap="square"/>
-                    <a:lstStyle/>
-                    <a:p>
-                      <a:pPr algn="r"/>
-                      <a:r>
-                        <a:rPr sz="1400" b="1" i="0">
-                          <a:solidFill>
-                            <a:srgbClr val="FFFFFF"/>
-                          </a:solidFill>
-                          <a:latin typeface="Segoe UI"/>
-                        </a:rPr>
-                        <a:t>back-pressure</a:t>
-                      </a:r>
-                    </a:p>
-                  </a:txBody>
-                  <a:tcPr marL="109728" marR="109728" anchor="ctr">
-                    <a:solidFill>
-                      <a:srgbClr val="14222E"/>
-                    </a:solidFill>
-                  </a:tcPr>
-                </a:tc>
-              </a:tr>
-              <a:tr h="365760">
-                <a:tc>
-                  <a:txBody>
-                    <a:bodyPr wrap="square"/>
-                    <a:lstStyle/>
-                    <a:p>
-                      <a:pPr algn="l"/>
-                      <a:r>
-                        <a:rPr sz="1400" b="0" i="0">
-                          <a:solidFill>
-                            <a:srgbClr val="2E3D4A"/>
-                          </a:solidFill>
-                          <a:latin typeface="Segoe UI"/>
-                        </a:rPr>
-                        <a:t>2</a:t>
-                      </a:r>
-                    </a:p>
-                  </a:txBody>
-                  <a:tcPr marL="109728" marR="109728" anchor="ctr">
-                    <a:solidFill>
-                      <a:srgbClr val="FFFFFF"/>
-                    </a:solidFill>
-                  </a:tcPr>
-                </a:tc>
-                <a:tc>
-                  <a:txBody>
-                    <a:bodyPr wrap="square"/>
-                    <a:lstStyle/>
-                    <a:p>
-                      <a:pPr algn="r"/>
-                      <a:r>
-                        <a:rPr sz="1400" b="0" i="0">
-                          <a:solidFill>
-                            <a:srgbClr val="2E3D4A"/>
-                          </a:solidFill>
-                          <a:latin typeface="Consolas"/>
-                        </a:rPr>
-                        <a:t>65 721</a:t>
-                      </a:r>
-                    </a:p>
-                  </a:txBody>
-                  <a:tcPr marL="109728" marR="109728" anchor="ctr">
-                    <a:solidFill>
-                      <a:srgbClr val="FFFFFF"/>
-                    </a:solidFill>
-                  </a:tcPr>
-                </a:tc>
-                <a:tc>
-                  <a:txBody>
-                    <a:bodyPr wrap="square"/>
-                    <a:lstStyle/>
-                    <a:p>
-                      <a:pPr algn="r"/>
-                      <a:r>
-                        <a:rPr sz="1400" b="0" i="0">
-                          <a:solidFill>
-                            <a:srgbClr val="2E3D4A"/>
-                          </a:solidFill>
-                          <a:latin typeface="Consolas"/>
-                        </a:rPr>
-                        <a:t>—</a:t>
-                      </a:r>
-                    </a:p>
-                  </a:txBody>
-                  <a:tcPr marL="109728" marR="109728" anchor="ctr">
-                    <a:solidFill>
-                      <a:srgbClr val="FFFFFF"/>
-                    </a:solidFill>
-                  </a:tcPr>
-                </a:tc>
-                <a:tc>
-                  <a:txBody>
-                    <a:bodyPr wrap="square"/>
-                    <a:lstStyle/>
-                    <a:p>
-                      <a:pPr algn="r"/>
-                      <a:r>
-                        <a:rPr sz="1400" b="0" i="0">
-                          <a:solidFill>
-                            <a:srgbClr val="2E3D4A"/>
-                          </a:solidFill>
-                          <a:latin typeface="Consolas"/>
-                        </a:rPr>
-                        <a:t>2.00 of 2</a:t>
-                      </a:r>
-                    </a:p>
-                  </a:txBody>
-                  <a:tcPr marL="109728" marR="109728" anchor="ctr">
-                    <a:solidFill>
-                      <a:srgbClr val="FFFFFF"/>
-                    </a:solidFill>
-                  </a:tcPr>
-                </a:tc>
-                <a:tc>
-                  <a:txBody>
-                    <a:bodyPr wrap="square"/>
-                    <a:lstStyle/>
-                    <a:p>
-                      <a:pPr algn="r"/>
-                      <a:r>
-                        <a:rPr sz="1400" b="0" i="0">
-                          <a:solidFill>
-                            <a:srgbClr val="2E3D4A"/>
-                          </a:solidFill>
-                          <a:latin typeface="Consolas"/>
-                        </a:rPr>
-                        <a:t>0.25</a:t>
-                      </a:r>
-                    </a:p>
-                  </a:txBody>
-                  <a:tcPr marL="109728" marR="109728" anchor="ctr">
-                    <a:solidFill>
-                      <a:srgbClr val="FFFFFF"/>
-                    </a:solidFill>
-                  </a:tcPr>
-                </a:tc>
-                <a:tc>
-                  <a:txBody>
-                    <a:bodyPr wrap="square"/>
-                    <a:lstStyle/>
-                    <a:p>
-                      <a:pPr algn="r"/>
-                      <a:r>
-                        <a:rPr sz="1400" b="0" i="0">
-                          <a:solidFill>
-                            <a:srgbClr val="2E3D4A"/>
-                          </a:solidFill>
-                          <a:latin typeface="Consolas"/>
-                        </a:rPr>
-                        <a:t>28.5%</a:t>
-                      </a:r>
-                    </a:p>
-                  </a:txBody>
-                  <a:tcPr marL="109728" marR="109728" anchor="ctr">
-                    <a:solidFill>
-                      <a:srgbClr val="FFFFFF"/>
-                    </a:solidFill>
-                  </a:tcPr>
-                </a:tc>
-              </a:tr>
-              <a:tr h="365760">
-                <a:tc>
-                  <a:txBody>
-                    <a:bodyPr wrap="square"/>
-                    <a:lstStyle/>
-                    <a:p>
-                      <a:pPr algn="l"/>
-                      <a:r>
-                        <a:rPr sz="1400" b="1" i="0">
-                          <a:solidFill>
-                            <a:srgbClr val="14222E"/>
-                          </a:solidFill>
-                          <a:latin typeface="Segoe UI"/>
-                        </a:rPr>
-                        <a:t>4</a:t>
-                      </a:r>
-                    </a:p>
-                  </a:txBody>
-                  <a:tcPr marL="109728" marR="109728" anchor="ctr">
-                    <a:solidFill>
-                      <a:srgbClr val="F2F5F7"/>
-                    </a:solidFill>
-                  </a:tcPr>
-                </a:tc>
-                <a:tc>
-                  <a:txBody>
-                    <a:bodyPr wrap="square"/>
-                    <a:lstStyle/>
-                    <a:p>
-                      <a:pPr algn="r"/>
-                      <a:r>
-                        <a:rPr sz="1400" b="1" i="0">
-                          <a:solidFill>
-                            <a:srgbClr val="14222E"/>
-                          </a:solidFill>
-                          <a:latin typeface="Consolas"/>
-                        </a:rPr>
-                        <a:t>129 056</a:t>
-                      </a:r>
-                    </a:p>
-                  </a:txBody>
-                  <a:tcPr marL="109728" marR="109728" anchor="ctr">
-                    <a:solidFill>
-                      <a:srgbClr val="F2F5F7"/>
-                    </a:solidFill>
-                  </a:tcPr>
-                </a:tc>
-                <a:tc>
-                  <a:txBody>
-                    <a:bodyPr wrap="square"/>
-                    <a:lstStyle/>
-                    <a:p>
-                      <a:pPr algn="r"/>
-                      <a:r>
-                        <a:rPr sz="1400" b="1" i="0">
-                          <a:solidFill>
-                            <a:srgbClr val="14222E"/>
-                          </a:solidFill>
-                          <a:latin typeface="Consolas"/>
-                        </a:rPr>
-                        <a:t>1.96×</a:t>
-                      </a:r>
-                    </a:p>
-                  </a:txBody>
-                  <a:tcPr marL="109728" marR="109728" anchor="ctr">
-                    <a:solidFill>
-                      <a:srgbClr val="F2F5F7"/>
-                    </a:solidFill>
-                  </a:tcPr>
-                </a:tc>
-                <a:tc>
-                  <a:txBody>
-                    <a:bodyPr wrap="square"/>
-                    <a:lstStyle/>
-                    <a:p>
-                      <a:pPr algn="r"/>
-                      <a:r>
-                        <a:rPr sz="1400" b="1" i="0">
-                          <a:solidFill>
-                            <a:srgbClr val="14222E"/>
-                          </a:solidFill>
-                          <a:latin typeface="Consolas"/>
-                        </a:rPr>
-                        <a:t>3.94 of 4</a:t>
-                      </a:r>
-                    </a:p>
-                  </a:txBody>
-                  <a:tcPr marL="109728" marR="109728" anchor="ctr">
-                    <a:solidFill>
-                      <a:srgbClr val="F2F5F7"/>
-                    </a:solidFill>
-                  </a:tcPr>
-                </a:tc>
-                <a:tc>
-                  <a:txBody>
-                    <a:bodyPr wrap="square"/>
-                    <a:lstStyle/>
-                    <a:p>
-                      <a:pPr algn="r"/>
-                      <a:r>
-                        <a:rPr sz="1400" b="1" i="0">
-                          <a:solidFill>
-                            <a:srgbClr val="14222E"/>
-                          </a:solidFill>
-                          <a:latin typeface="Consolas"/>
-                        </a:rPr>
-                        <a:t>0.39</a:t>
-                      </a:r>
-                    </a:p>
-                  </a:txBody>
-                  <a:tcPr marL="109728" marR="109728" anchor="ctr">
-                    <a:solidFill>
-                      <a:srgbClr val="F2F5F7"/>
-                    </a:solidFill>
-                  </a:tcPr>
-                </a:tc>
-                <a:tc>
-                  <a:txBody>
-                    <a:bodyPr wrap="square"/>
-                    <a:lstStyle/>
-                    <a:p>
-                      <a:pPr algn="r"/>
-                      <a:r>
-                        <a:rPr sz="1400" b="1" i="0">
-                          <a:solidFill>
-                            <a:srgbClr val="14222E"/>
-                          </a:solidFill>
-                          <a:latin typeface="Consolas"/>
-                        </a:rPr>
-                        <a:t>51.6%</a:t>
-                      </a:r>
-                    </a:p>
-                  </a:txBody>
-                  <a:tcPr marL="109728" marR="109728" anchor="ctr">
-                    <a:solidFill>
-                      <a:srgbClr val="F2F5F7"/>
-                    </a:solidFill>
-                  </a:tcPr>
-                </a:tc>
-              </a:tr>
-            </a:tbl>
-          </a:graphicData>
-        </a:graphic>
-      </p:graphicFrame>
-      <p:sp>
-        <p:nvSpPr>
-          <p:cNvPr id="6" name="TextBox 5"/>
-          <p:cNvSpPr txBox="1"/>
-          <p:nvPr/>
-        </p:nvSpPr>
-        <p:spPr>
-          <a:xfrm>
-            <a:off x="685800" y="3438144"/>
-            <a:ext cx="10881360" cy="822960"/>
-          </a:xfrm>
-          <a:prstGeom prst="rect">
-            <a:avLst/>
-          </a:prstGeom>
-          <a:noFill/>
-        </p:spPr>
-        <p:txBody>
-          <a:bodyPr wrap="square">
-            <a:spAutoFit/>
-          </a:bodyPr>
-          <a:lstStyle/>
-          <a:p>
-            <a:pPr algn="l"/>
-            <a:r>
-              <a:rPr sz="1600" b="0" i="0">
-                <a:solidFill>
-                  <a:srgbClr val="14222E"/>
-                </a:solidFill>
-                <a:latin typeface="Segoe UI"/>
-              </a:rPr>
-              <a:t>A unit is one core and one degree of parallelism, bought together — a KPU.  Flink used every core it was given; the broker stayed under half a core.</a:t>
             </a:r>
           </a:p>
         </p:txBody>

--- a/docs/deck/final-demo.pptx
+++ b/docs/deck/final-demo.pptx
@@ -580,7 +580,7 @@
           <a:lstStyle/>
           <a:p>
             <a:r>
-              <a:t>Numbered left to right, in the order the demo talks through them. Point at 1 and 2 as the inputs, 3-6 as the outputs to verify. If anyone reads '1 min' off the diagram, that is the specification -- the demo runs a 10s window.</a:t>
+              <a:t>Numbered left to right, in the order the demo talks through them. Point at 1 and 2 as the inputs, 3-6 as the outputs to verify.</a:t>
             </a:r>
           </a:p>
         </p:txBody>
@@ -720,7 +720,7 @@
           <a:lstStyle/>
           <a:p>
             <a:r>
-              <a:t>Say the numbers out loud BEFORE starting the generators. Then the dashboard either matches or it does not. If asked why the window is 10s and not a minute: only for the demo, so the sinks say something without a minute of waiting. The job defaults to the specified minute and the verification runs against both.</a:t>
+              <a:t>Say the numbers out loud BEFORE starting the generators. Then the dashboard either matches or it does not.</a:t>
             </a:r>
           </a:p>
         </p:txBody>
@@ -4688,7 +4688,7 @@
                 </a:solidFill>
                 <a:latin typeface="Segoe UI"/>
               </a:rPr>
-              <a:t>Every edge carries its partition key and value. The diagram states the specified one-minute window; the demo overrides it to ten seconds, and the calculation is identical either way.</a:t>
+              <a:t>Every edge carries its partition key and value.</a:t>
             </a:r>
           </a:p>
         </p:txBody>
@@ -5971,7 +5971,7 @@
                 </a:solidFill>
                 <a:latin typeface="Segoe UI"/>
               </a:rPr>
-              <a:t>  (specified: 1 min)     checkpoint interval </a:t>
+              <a:t>     checkpoint interval </a:t>
             </a:r>
             <a:r>
               <a:rPr sz="1500" b="1" i="0">
@@ -6033,7 +6033,7 @@
                 </a:solidFill>
                 <a:latin typeface="Segoe UI"/>
               </a:rPr>
-              <a:t>The window is 10 s so the market value sinks say something without a minute of waiting — the job defaults to the specified minute, and the calculation is identical either way. Committing to these numbers before the run is what makes the demo a verification rather than a tour; scripts/verify-topics.sh checks every one of them against the real topics, on every push.</a:t>
+              <a:t>Committing to these numbers before the run is what makes the demo a verification rather than a tour. scripts/verify-topics.sh checks every one of them against the real topics, at these settings, on every push.</a:t>
             </a:r>
           </a:p>
         </p:txBody>

--- a/docs/deck/final-demo.pptx
+++ b/docs/deck/final-demo.pptx
@@ -14,6 +14,8 @@
     <p:sldId id="262" r:id="rId14"/>
     <p:sldId id="263" r:id="rId15"/>
     <p:sldId id="264" r:id="rId16"/>
+    <p:sldId id="265" r:id="rId17"/>
+    <p:sldId id="266" r:id="rId18"/>
   </p:sldIdLst>
   <p:sldSz cx="12191695" cy="6858000" type="screen4x3"/>
   <p:notesSz cx="6858000" cy="9144000"/>
@@ -535,6 +537,146 @@
 </p:notes>
 </file>
 
+<file path=ppt/notesSlides/notesSlide10.xml><?xml version="1.0" encoding="utf-8"?>
+<p:notes xmlns:a="http://schemas.openxmlformats.org/drawingml/2006/main" xmlns:p="http://schemas.openxmlformats.org/presentationml/2006/main" xmlns:r="http://schemas.openxmlformats.org/officeDocument/2006/relationships">
+  <p:cSld>
+    <p:spTree>
+      <p:nvGrpSpPr>
+        <p:cNvPr id="1" name=""/>
+        <p:cNvGrpSpPr/>
+        <p:nvPr/>
+      </p:nvGrpSpPr>
+      <p:grpSpPr>
+        <a:xfrm>
+          <a:off x="0" y="0"/>
+          <a:ext cx="0" cy="0"/>
+          <a:chOff x="0" y="0"/>
+          <a:chExt cx="0" cy="0"/>
+        </a:xfrm>
+      </p:grpSpPr>
+      <p:sp>
+        <p:nvSpPr>
+          <p:cNvPr id="2" name="Slide Image Placeholder 1"/>
+          <p:cNvSpPr>
+            <a:spLocks noGrp="1"/>
+          </p:cNvSpPr>
+          <p:nvPr>
+            <p:ph type="sldImg" idx="2"/>
+          </p:nvPr>
+        </p:nvSpPr>
+        <p:spPr/>
+      </p:sp>
+      <p:sp>
+        <p:nvSpPr>
+          <p:cNvPr id="3" name="Notes Placeholder 2"/>
+          <p:cNvSpPr>
+            <a:spLocks noGrp="1"/>
+          </p:cNvSpPr>
+          <p:nvPr>
+            <p:ph type="body" idx="3" sz="quarter"/>
+          </p:nvPr>
+        </p:nvSpPr>
+        <p:spPr/>
+        <p:txBody>
+          <a:bodyPr/>
+          <a:lstStyle/>
+          <a:p>
+            <a:r>
+              <a:t>If you cannot answer something, say so and take it as an action item to change the logging. That is the instruction in the requirements, and it beats an explanation invented on the spot.</a:t>
+            </a:r>
+          </a:p>
+        </p:txBody>
+      </p:sp>
+      <p:sp>
+        <p:nvSpPr>
+          <p:cNvPr id="4" name="Slide Number Placeholder 3"/>
+          <p:cNvSpPr>
+            <a:spLocks noGrp="1"/>
+          </p:cNvSpPr>
+          <p:nvPr>
+            <p:ph type="sldNum" idx="5" sz="quarter"/>
+          </p:nvPr>
+        </p:nvSpPr>
+        <p:spPr/>
+      </p:sp>
+    </p:spTree>
+  </p:cSld>
+  <p:clrMapOvr>
+    <a:masterClrMapping/>
+  </p:clrMapOvr>
+</p:notes>
+</file>
+
+<file path=ppt/notesSlides/notesSlide11.xml><?xml version="1.0" encoding="utf-8"?>
+<p:notes xmlns:a="http://schemas.openxmlformats.org/drawingml/2006/main" xmlns:p="http://schemas.openxmlformats.org/presentationml/2006/main" xmlns:r="http://schemas.openxmlformats.org/officeDocument/2006/relationships">
+  <p:cSld>
+    <p:spTree>
+      <p:nvGrpSpPr>
+        <p:cNvPr id="1" name=""/>
+        <p:cNvGrpSpPr/>
+        <p:nvPr/>
+      </p:nvGrpSpPr>
+      <p:grpSpPr>
+        <a:xfrm>
+          <a:off x="0" y="0"/>
+          <a:ext cx="0" cy="0"/>
+          <a:chOff x="0" y="0"/>
+          <a:chExt cx="0" cy="0"/>
+        </a:xfrm>
+      </p:grpSpPr>
+      <p:sp>
+        <p:nvSpPr>
+          <p:cNvPr id="2" name="Slide Image Placeholder 1"/>
+          <p:cNvSpPr>
+            <a:spLocks noGrp="1"/>
+          </p:cNvSpPr>
+          <p:nvPr>
+            <p:ph type="sldImg" idx="2"/>
+          </p:nvPr>
+        </p:nvSpPr>
+        <p:spPr/>
+      </p:sp>
+      <p:sp>
+        <p:nvSpPr>
+          <p:cNvPr id="3" name="Notes Placeholder 2"/>
+          <p:cNvSpPr>
+            <a:spLocks noGrp="1"/>
+          </p:cNvSpPr>
+          <p:nvPr>
+            <p:ph type="body" idx="3" sz="quarter"/>
+          </p:nvPr>
+        </p:nvSpPr>
+        <p:spPr/>
+        <p:txBody>
+          <a:bodyPr/>
+          <a:lstStyle/>
+          <a:p>
+            <a:r>
+              <a:t>Case 2 is the one that settles the broadcast-prices question.</a:t>
+            </a:r>
+          </a:p>
+        </p:txBody>
+      </p:sp>
+      <p:sp>
+        <p:nvSpPr>
+          <p:cNvPr id="4" name="Slide Number Placeholder 3"/>
+          <p:cNvSpPr>
+            <a:spLocks noGrp="1"/>
+          </p:cNvSpPr>
+          <p:nvPr>
+            <p:ph type="sldNum" idx="5" sz="quarter"/>
+          </p:nvPr>
+        </p:nvSpPr>
+        <p:spPr/>
+      </p:sp>
+    </p:spTree>
+  </p:cSld>
+  <p:clrMapOvr>
+    <a:masterClrMapping/>
+  </p:clrMapOvr>
+</p:notes>
+</file>
+
 <file path=ppt/notesSlides/notesSlide2.xml><?xml version="1.0" encoding="utf-8"?>
 <p:notes xmlns:a="http://schemas.openxmlformats.org/drawingml/2006/main" xmlns:p="http://schemas.openxmlformats.org/presentationml/2006/main" xmlns:r="http://schemas.openxmlformats.org/officeDocument/2006/relationships">
   <p:cSld>
@@ -860,7 +1002,7 @@
           <a:lstStyle/>
           <a:p>
             <a:r>
-              <a:t>You can only show that something scales when it is the thing that is constrained. Step 10 got this wrong — it varied parallelism while Flink already had every core it could use, and the answer came back flat.</a:t>
+              <a:t>Two jobs because Part 2 consumes the published position topics rather than an in-process stream. Either part can be restarted or rescaled without the other, and Part 2 validates the topics that are themselves deliverables. Use this slide if the Flink UI is not reachable.</a:t>
             </a:r>
           </a:p>
         </p:txBody>
@@ -930,7 +1072,7 @@
           <a:lstStyle/>
           <a:p>
             <a:r>
-              <a:t>The dashed line is exactly 2x the first bar. The whole claim is whether the second bar reaches it -- 129,056 against 131,442, which is 98%. Step 10 got this wrong by varying parallelism while Flink already had every core it could use, and the answer came back flat.</a:t>
+              <a:t>These are rendered from the real measurement windows. If the live demo will not start, this slide and the Flink graph slide are the demo.</a:t>
             </a:r>
           </a:p>
         </p:txBody>
@@ -1000,7 +1142,7 @@
           <a:lstStyle/>
           <a:p>
             <a:r>
-              <a:t>If you cannot answer something, say so and take it as an action item to change the logging. That is the instruction in the requirements, and it beats an explanation invented on the spot.</a:t>
+              <a:t>You can only show that something scales when it is the thing that is constrained. Step 10 got this wrong — it varied parallelism while Flink already had every core it could use, and the answer came back flat.</a:t>
             </a:r>
           </a:p>
         </p:txBody>
@@ -1070,7 +1212,7 @@
           <a:lstStyle/>
           <a:p>
             <a:r>
-              <a:t>Case 2 is the one that settles the broadcast-prices question.</a:t>
+              <a:t>The dashed line is exactly 2x the first bar. The whole claim is whether the second bar reaches it -- 146,063 against 146,794, which is 99.5%. Step 10 got this wrong by varying parallelism while Flink already had every core it could use, and the answer came back flat.</a:t>
             </a:r>
           </a:p>
         </p:txBody>
@@ -4510,6 +4652,1020 @@
 </p:sld>
 </file>
 
+<file path=ppt/slides/slide10.xml><?xml version="1.0" encoding="utf-8"?>
+<p:sld xmlns:a="http://schemas.openxmlformats.org/drawingml/2006/main" xmlns:p="http://schemas.openxmlformats.org/presentationml/2006/main" xmlns:r="http://schemas.openxmlformats.org/officeDocument/2006/relationships">
+  <p:cSld>
+    <p:spTree>
+      <p:nvGrpSpPr>
+        <p:cNvPr id="1" name=""/>
+        <p:cNvGrpSpPr/>
+        <p:nvPr/>
+      </p:nvGrpSpPr>
+      <p:grpSpPr/>
+      <p:sp>
+        <p:nvSpPr>
+          <p:cNvPr id="2" name="TextBox 1"/>
+          <p:cNvSpPr txBox="1"/>
+          <p:nvPr/>
+        </p:nvSpPr>
+        <p:spPr>
+          <a:xfrm>
+            <a:off x="640080" y="475488"/>
+            <a:ext cx="10972800" cy="274320"/>
+          </a:xfrm>
+          <a:prstGeom prst="rect">
+            <a:avLst/>
+          </a:prstGeom>
+          <a:noFill/>
+        </p:spPr>
+        <p:txBody>
+          <a:bodyPr wrap="square">
+            <a:spAutoFit/>
+          </a:bodyPr>
+          <a:lstStyle/>
+          <a:p>
+            <a:pPr algn="l"/>
+            <a:r>
+              <a:rPr sz="1150" b="1" i="0" spc="120">
+                <a:solidFill>
+                  <a:srgbClr val="1B6B8A"/>
+                </a:solidFill>
+                <a:latin typeface="Segoe UI"/>
+              </a:rPr>
+              <a:t>EXPLAIN IT</a:t>
+            </a:r>
+          </a:p>
+        </p:txBody>
+      </p:sp>
+      <p:sp>
+        <p:nvSpPr>
+          <p:cNvPr id="3" name="TextBox 2"/>
+          <p:cNvSpPr txBox="1"/>
+          <p:nvPr/>
+        </p:nvSpPr>
+        <p:spPr>
+          <a:xfrm>
+            <a:off x="640080" y="786384"/>
+            <a:ext cx="10972800" cy="731520"/>
+          </a:xfrm>
+          <a:prstGeom prst="rect">
+            <a:avLst/>
+          </a:prstGeom>
+          <a:noFill/>
+        </p:spPr>
+        <p:txBody>
+          <a:bodyPr wrap="square">
+            <a:spAutoFit/>
+          </a:bodyPr>
+          <a:lstStyle/>
+          <a:p>
+            <a:pPr algn="l"/>
+            <a:r>
+              <a:rPr sz="3000" b="1" i="0">
+                <a:solidFill>
+                  <a:srgbClr val="14222E"/>
+                </a:solidFill>
+                <a:latin typeface="Segoe UI"/>
+              </a:rPr>
+              <a:t>Every number on the screen has an answer</a:t>
+            </a:r>
+          </a:p>
+        </p:txBody>
+      </p:sp>
+      <p:sp>
+        <p:nvSpPr>
+          <p:cNvPr id="4" name="Rectangle 3"/>
+          <p:cNvSpPr/>
+          <p:nvPr/>
+        </p:nvSpPr>
+        <p:spPr>
+          <a:xfrm>
+            <a:off x="640080" y="1444752"/>
+            <a:ext cx="10908792" cy="12700"/>
+          </a:xfrm>
+          <a:prstGeom prst="rect">
+            <a:avLst/>
+          </a:prstGeom>
+          <a:solidFill>
+            <a:srgbClr val="D8DFE4"/>
+          </a:solidFill>
+          <a:ln>
+            <a:noFill/>
+          </a:ln>
+          <a:effectLst/>
+        </p:spPr>
+        <p:style>
+          <a:lnRef idx="1">
+            <a:schemeClr val="accent1"/>
+          </a:lnRef>
+          <a:fillRef idx="3">
+            <a:schemeClr val="accent1"/>
+          </a:fillRef>
+          <a:effectRef idx="2">
+            <a:schemeClr val="accent1"/>
+          </a:effectRef>
+          <a:fontRef idx="minor">
+            <a:schemeClr val="lt1"/>
+          </a:fontRef>
+        </p:style>
+        <p:txBody>
+          <a:bodyPr rtlCol="0" anchor="ctr"/>
+          <a:lstStyle/>
+          <a:p>
+            <a:pPr algn="ctr"/>
+          </a:p>
+        </p:txBody>
+      </p:sp>
+      <p:sp>
+        <p:nvSpPr>
+          <p:cNvPr id="5" name="TextBox 4"/>
+          <p:cNvSpPr txBox="1"/>
+          <p:nvPr/>
+        </p:nvSpPr>
+        <p:spPr>
+          <a:xfrm>
+            <a:off x="685800" y="1746504"/>
+            <a:ext cx="10881360" cy="3840480"/>
+          </a:xfrm>
+          <a:prstGeom prst="rect">
+            <a:avLst/>
+          </a:prstGeom>
+          <a:noFill/>
+        </p:spPr>
+        <p:txBody>
+          <a:bodyPr wrap="square">
+            <a:spAutoFit/>
+          </a:bodyPr>
+          <a:lstStyle/>
+          <a:p>
+            <a:pPr algn="l">
+              <a:spcAft>
+                <a:spcPts val="1400"/>
+              </a:spcAft>
+            </a:pPr>
+            <a:r>
+              <a:rPr sz="1700" b="1" i="0">
+                <a:solidFill>
+                  <a:srgbClr val="1B6B8A"/>
+                </a:solidFill>
+                <a:latin typeface="Segoe UI"/>
+              </a:rPr>
+              <a:t>▸   </a:t>
+            </a:r>
+            <a:r>
+              <a:rPr sz="1700" b="1" i="0">
+                <a:solidFill>
+                  <a:srgbClr val="14222E"/>
+                </a:solidFill>
+                <a:latin typeface="Segoe UI"/>
+              </a:rPr>
+              <a:t>Why does sink 4 update four times as often as sink 3?  </a:t>
+            </a:r>
+            <a:r>
+              <a:rPr sz="1700" b="0" i="0">
+                <a:solidFill>
+                  <a:srgbClr val="2E3D4A"/>
+                </a:solidFill>
+                <a:latin typeface="Segoe UI"/>
+              </a:rPr>
+              <a:t>Every block trade splits across four accounts. The quantities reconcile; the counts differ by design.</a:t>
+            </a:r>
+          </a:p>
+          <a:p>
+            <a:pPr>
+              <a:spcAft>
+                <a:spcPts val="1400"/>
+              </a:spcAft>
+            </a:pPr>
+            <a:r>
+              <a:rPr sz="1700" b="1" i="0">
+                <a:solidFill>
+                  <a:srgbClr val="1B6B8A"/>
+                </a:solidFill>
+                <a:latin typeface="Segoe UI"/>
+              </a:rPr>
+              <a:t>▸   </a:t>
+            </a:r>
+            <a:r>
+              <a:rPr sz="1700" b="1" i="0">
+                <a:solidFill>
+                  <a:srgbClr val="14222E"/>
+                </a:solidFill>
+                <a:latin typeface="Segoe UI"/>
+              </a:rPr>
+              <a:t>Why do the market value sinks look like steps?  </a:t>
+            </a:r>
+            <a:r>
+              <a:rPr sz="1700" b="0" i="0">
+                <a:solidFill>
+                  <a:srgbClr val="2E3D4A"/>
+                </a:solidFill>
+                <a:latin typeface="Segoe UI"/>
+              </a:rPr>
+              <a:t>They emit once per key per window, not continuously.</a:t>
+            </a:r>
+          </a:p>
+          <a:p>
+            <a:pPr>
+              <a:spcAft>
+                <a:spcPts val="1400"/>
+              </a:spcAft>
+            </a:pPr>
+            <a:r>
+              <a:rPr sz="1700" b="1" i="0">
+                <a:solidFill>
+                  <a:srgbClr val="1B6B8A"/>
+                </a:solidFill>
+                <a:latin typeface="Segoe UI"/>
+              </a:rPr>
+              <a:t>▸   </a:t>
+            </a:r>
+            <a:r>
+              <a:rPr sz="1700" b="1" i="0">
+                <a:solidFill>
+                  <a:srgbClr val="14222E"/>
+                </a:solidFill>
+                <a:latin typeface="Segoe UI"/>
+              </a:rPr>
+              <a:t>Why is there one aborted checkpoint?  </a:t>
+            </a:r>
+            <a:r>
+              <a:rPr sz="1700" b="0" i="0">
+                <a:solidFill>
+                  <a:srgbClr val="2E3D4A"/>
+                </a:solidFill>
+                <a:latin typeface="Segoe UI"/>
+              </a:rPr>
+              <a:t>At startup the first checkpoint triggers before every task is running. Harmless, and the panel says so.</a:t>
+            </a:r>
+          </a:p>
+        </p:txBody>
+      </p:sp>
+    </p:spTree>
+  </p:cSld>
+  <p:clrMapOvr>
+    <a:masterClrMapping/>
+  </p:clrMapOvr>
+</p:sld>
+</file>
+
+<file path=ppt/slides/slide11.xml><?xml version="1.0" encoding="utf-8"?>
+<p:sld xmlns:a="http://schemas.openxmlformats.org/drawingml/2006/main" xmlns:p="http://schemas.openxmlformats.org/presentationml/2006/main" xmlns:r="http://schemas.openxmlformats.org/officeDocument/2006/relationships">
+  <p:cSld>
+    <p:spTree>
+      <p:nvGrpSpPr>
+        <p:cNvPr id="1" name=""/>
+        <p:cNvGrpSpPr/>
+        <p:nvPr/>
+      </p:nvGrpSpPr>
+      <p:grpSpPr/>
+      <p:sp>
+        <p:nvSpPr>
+          <p:cNvPr id="2" name="TextBox 1"/>
+          <p:cNvSpPr txBox="1"/>
+          <p:nvPr/>
+        </p:nvSpPr>
+        <p:spPr>
+          <a:xfrm>
+            <a:off x="640080" y="475488"/>
+            <a:ext cx="10972800" cy="274320"/>
+          </a:xfrm>
+          <a:prstGeom prst="rect">
+            <a:avLst/>
+          </a:prstGeom>
+          <a:noFill/>
+        </p:spPr>
+        <p:txBody>
+          <a:bodyPr wrap="square">
+            <a:spAutoFit/>
+          </a:bodyPr>
+          <a:lstStyle/>
+          <a:p>
+            <a:pPr algn="l"/>
+            <a:r>
+              <a:rPr sz="1150" b="1" i="0" spc="120">
+                <a:solidFill>
+                  <a:srgbClr val="1B6B8A"/>
+                </a:solidFill>
+                <a:latin typeface="Segoe UI"/>
+              </a:rPr>
+              <a:t>LOAD</a:t>
+            </a:r>
+          </a:p>
+        </p:txBody>
+      </p:sp>
+      <p:sp>
+        <p:nvSpPr>
+          <p:cNvPr id="3" name="TextBox 2"/>
+          <p:cNvSpPr txBox="1"/>
+          <p:nvPr/>
+        </p:nvSpPr>
+        <p:spPr>
+          <a:xfrm>
+            <a:off x="640080" y="786384"/>
+            <a:ext cx="10972800" cy="731520"/>
+          </a:xfrm>
+          <a:prstGeom prst="rect">
+            <a:avLst/>
+          </a:prstGeom>
+          <a:noFill/>
+        </p:spPr>
+        <p:txBody>
+          <a:bodyPr wrap="square">
+            <a:spAutoFit/>
+          </a:bodyPr>
+          <a:lstStyle/>
+          <a:p>
+            <a:pPr algn="l"/>
+            <a:r>
+              <a:rPr sz="3000" b="1" i="0">
+                <a:solidFill>
+                  <a:srgbClr val="14222E"/>
+                </a:solidFill>
+                <a:latin typeface="Segoe UI"/>
+              </a:rPr>
+              <a:t>Both required cases pass</a:t>
+            </a:r>
+          </a:p>
+        </p:txBody>
+      </p:sp>
+      <p:sp>
+        <p:nvSpPr>
+          <p:cNvPr id="4" name="Rectangle 3"/>
+          <p:cNvSpPr/>
+          <p:nvPr/>
+        </p:nvSpPr>
+        <p:spPr>
+          <a:xfrm>
+            <a:off x="640080" y="1444752"/>
+            <a:ext cx="10908792" cy="12700"/>
+          </a:xfrm>
+          <a:prstGeom prst="rect">
+            <a:avLst/>
+          </a:prstGeom>
+          <a:solidFill>
+            <a:srgbClr val="D8DFE4"/>
+          </a:solidFill>
+          <a:ln>
+            <a:noFill/>
+          </a:ln>
+          <a:effectLst/>
+        </p:spPr>
+        <p:style>
+          <a:lnRef idx="1">
+            <a:schemeClr val="accent1"/>
+          </a:lnRef>
+          <a:fillRef idx="3">
+            <a:schemeClr val="accent1"/>
+          </a:fillRef>
+          <a:effectRef idx="2">
+            <a:schemeClr val="accent1"/>
+          </a:effectRef>
+          <a:fontRef idx="minor">
+            <a:schemeClr val="lt1"/>
+          </a:fontRef>
+        </p:style>
+        <p:txBody>
+          <a:bodyPr rtlCol="0" anchor="ctr"/>
+          <a:lstStyle/>
+          <a:p>
+            <a:pPr algn="ctr"/>
+          </a:p>
+        </p:txBody>
+      </p:sp>
+      <p:graphicFrame>
+        <p:nvGraphicFramePr>
+          <p:cNvPr id="5" name="Table 4"/>
+          <p:cNvGraphicFramePr>
+            <a:graphicFrameLocks noGrp="1"/>
+          </p:cNvGraphicFramePr>
+          <p:nvPr/>
+        </p:nvGraphicFramePr>
+        <p:xfrm>
+          <a:off x="685800" y="1746504"/>
+          <a:ext cx="9509760" cy="1499616"/>
+        </p:xfrm>
+        <a:graphic>
+          <a:graphicData uri="http://schemas.openxmlformats.org/drawingml/2006/table">
+            <a:tbl>
+              <a:tblPr bandRow="1">
+                <a:tableStyleId>{5C22544A-7EE6-4342-B048-85BDC9FD1C3A}</a:tableStyleId>
+              </a:tblPr>
+              <a:tblGrid>
+                <a:gridCol w="1371600"/>
+                <a:gridCol w="2011680"/>
+                <a:gridCol w="1371600"/>
+                <a:gridCol w="1828800"/>
+                <a:gridCol w="1554480"/>
+                <a:gridCol w="1371600"/>
+              </a:tblGrid>
+              <a:tr h="402336">
+                <a:tc>
+                  <a:txBody>
+                    <a:bodyPr wrap="square"/>
+                    <a:lstStyle/>
+                    <a:p>
+                      <a:pPr algn="l"/>
+                      <a:r>
+                        <a:rPr sz="1350" b="1" i="0">
+                          <a:solidFill>
+                            <a:srgbClr val="FFFFFF"/>
+                          </a:solidFill>
+                          <a:latin typeface="Segoe UI"/>
+                        </a:rPr>
+                        <a:t/>
+                      </a:r>
+                    </a:p>
+                  </a:txBody>
+                  <a:tcPr marL="109728" marR="109728" anchor="ctr">
+                    <a:solidFill>
+                      <a:srgbClr val="14222E"/>
+                    </a:solidFill>
+                  </a:tcPr>
+                </a:tc>
+                <a:tc>
+                  <a:txBody>
+                    <a:bodyPr wrap="square"/>
+                    <a:lstStyle/>
+                    <a:p>
+                      <a:pPr algn="r"/>
+                      <a:r>
+                        <a:rPr sz="1350" b="1" i="0">
+                          <a:solidFill>
+                            <a:srgbClr val="FFFFFF"/>
+                          </a:solidFill>
+                          <a:latin typeface="Segoe UI"/>
+                        </a:rPr>
+                        <a:t>orders/s asked</a:t>
+                      </a:r>
+                    </a:p>
+                  </a:txBody>
+                  <a:tcPr marL="109728" marR="109728" anchor="ctr">
+                    <a:solidFill>
+                      <a:srgbClr val="14222E"/>
+                    </a:solidFill>
+                  </a:tcPr>
+                </a:tc>
+                <a:tc>
+                  <a:txBody>
+                    <a:bodyPr wrap="square"/>
+                    <a:lstStyle/>
+                    <a:p>
+                      <a:pPr algn="r"/>
+                      <a:r>
+                        <a:rPr sz="1350" b="1" i="0">
+                          <a:solidFill>
+                            <a:srgbClr val="FFFFFF"/>
+                          </a:solidFill>
+                          <a:latin typeface="Segoe UI"/>
+                        </a:rPr>
+                        <a:t>prices/s</a:t>
+                      </a:r>
+                    </a:p>
+                  </a:txBody>
+                  <a:tcPr marL="109728" marR="109728" anchor="ctr">
+                    <a:solidFill>
+                      <a:srgbClr val="14222E"/>
+                    </a:solidFill>
+                  </a:tcPr>
+                </a:tc>
+                <a:tc>
+                  <a:txBody>
+                    <a:bodyPr wrap="square"/>
+                    <a:lstStyle/>
+                    <a:p>
+                      <a:pPr algn="r"/>
+                      <a:r>
+                        <a:rPr sz="1350" b="1" i="0">
+                          <a:solidFill>
+                            <a:srgbClr val="FFFFFF"/>
+                          </a:solidFill>
+                          <a:latin typeface="Segoe UI"/>
+                        </a:rPr>
+                        <a:t>orders through</a:t>
+                      </a:r>
+                    </a:p>
+                  </a:txBody>
+                  <a:tcPr marL="109728" marR="109728" anchor="ctr">
+                    <a:solidFill>
+                      <a:srgbClr val="14222E"/>
+                    </a:solidFill>
+                  </a:tcPr>
+                </a:tc>
+                <a:tc>
+                  <a:txBody>
+                    <a:bodyPr wrap="square"/>
+                    <a:lstStyle/>
+                    <a:p>
+                      <a:pPr algn="r"/>
+                      <a:r>
+                        <a:rPr sz="1350" b="1" i="0">
+                          <a:solidFill>
+                            <a:srgbClr val="FFFFFF"/>
+                          </a:solidFill>
+                          <a:latin typeface="Segoe UI"/>
+                        </a:rPr>
+                        <a:t>allocations</a:t>
+                      </a:r>
+                    </a:p>
+                  </a:txBody>
+                  <a:tcPr marL="109728" marR="109728" anchor="ctr">
+                    <a:solidFill>
+                      <a:srgbClr val="14222E"/>
+                    </a:solidFill>
+                  </a:tcPr>
+                </a:tc>
+                <a:tc>
+                  <a:txBody>
+                    <a:bodyPr wrap="square"/>
+                    <a:lstStyle/>
+                    <a:p>
+                      <a:pPr algn="r"/>
+                      <a:r>
+                        <a:rPr sz="1350" b="1" i="0">
+                          <a:solidFill>
+                            <a:srgbClr val="FFFFFF"/>
+                          </a:solidFill>
+                          <a:latin typeface="Segoe UI"/>
+                        </a:rPr>
+                        <a:t>order p50</a:t>
+                      </a:r>
+                    </a:p>
+                  </a:txBody>
+                  <a:tcPr marL="109728" marR="109728" anchor="ctr">
+                    <a:solidFill>
+                      <a:srgbClr val="14222E"/>
+                    </a:solidFill>
+                  </a:tcPr>
+                </a:tc>
+              </a:tr>
+              <a:tr h="365760">
+                <a:tc>
+                  <a:txBody>
+                    <a:bodyPr wrap="square"/>
+                    <a:lstStyle/>
+                    <a:p>
+                      <a:pPr algn="l"/>
+                      <a:r>
+                        <a:rPr sz="1350" b="0" i="0">
+                          <a:solidFill>
+                            <a:srgbClr val="2E3D4A"/>
+                          </a:solidFill>
+                          <a:latin typeface="Segoe UI"/>
+                        </a:rPr>
+                        <a:t>baseline</a:t>
+                      </a:r>
+                    </a:p>
+                  </a:txBody>
+                  <a:tcPr marL="109728" marR="109728" anchor="ctr">
+                    <a:solidFill>
+                      <a:srgbClr val="FFFFFF"/>
+                    </a:solidFill>
+                  </a:tcPr>
+                </a:tc>
+                <a:tc>
+                  <a:txBody>
+                    <a:bodyPr wrap="square"/>
+                    <a:lstStyle/>
+                    <a:p>
+                      <a:pPr algn="r"/>
+                      <a:r>
+                        <a:rPr sz="1350" b="0" i="0">
+                          <a:solidFill>
+                            <a:srgbClr val="2E3D4A"/>
+                          </a:solidFill>
+                          <a:latin typeface="Consolas"/>
+                        </a:rPr>
+                        <a:t>10</a:t>
+                      </a:r>
+                    </a:p>
+                  </a:txBody>
+                  <a:tcPr marL="109728" marR="109728" anchor="ctr">
+                    <a:solidFill>
+                      <a:srgbClr val="FFFFFF"/>
+                    </a:solidFill>
+                  </a:tcPr>
+                </a:tc>
+                <a:tc>
+                  <a:txBody>
+                    <a:bodyPr wrap="square"/>
+                    <a:lstStyle/>
+                    <a:p>
+                      <a:pPr algn="r"/>
+                      <a:r>
+                        <a:rPr sz="1350" b="0" i="0">
+                          <a:solidFill>
+                            <a:srgbClr val="2E3D4A"/>
+                          </a:solidFill>
+                          <a:latin typeface="Consolas"/>
+                        </a:rPr>
+                        <a:t>1 000</a:t>
+                      </a:r>
+                    </a:p>
+                  </a:txBody>
+                  <a:tcPr marL="109728" marR="109728" anchor="ctr">
+                    <a:solidFill>
+                      <a:srgbClr val="FFFFFF"/>
+                    </a:solidFill>
+                  </a:tcPr>
+                </a:tc>
+                <a:tc>
+                  <a:txBody>
+                    <a:bodyPr wrap="square"/>
+                    <a:lstStyle/>
+                    <a:p>
+                      <a:pPr algn="r"/>
+                      <a:r>
+                        <a:rPr sz="1350" b="0" i="0">
+                          <a:solidFill>
+                            <a:srgbClr val="2E3D4A"/>
+                          </a:solidFill>
+                          <a:latin typeface="Consolas"/>
+                        </a:rPr>
+                        <a:t>8/s</a:t>
+                      </a:r>
+                    </a:p>
+                  </a:txBody>
+                  <a:tcPr marL="109728" marR="109728" anchor="ctr">
+                    <a:solidFill>
+                      <a:srgbClr val="FFFFFF"/>
+                    </a:solidFill>
+                  </a:tcPr>
+                </a:tc>
+                <a:tc>
+                  <a:txBody>
+                    <a:bodyPr wrap="square"/>
+                    <a:lstStyle/>
+                    <a:p>
+                      <a:pPr algn="r"/>
+                      <a:r>
+                        <a:rPr sz="1350" b="0" i="0">
+                          <a:solidFill>
+                            <a:srgbClr val="2E3D4A"/>
+                          </a:solidFill>
+                          <a:latin typeface="Consolas"/>
+                        </a:rPr>
+                        <a:t>33/s</a:t>
+                      </a:r>
+                    </a:p>
+                  </a:txBody>
+                  <a:tcPr marL="109728" marR="109728" anchor="ctr">
+                    <a:solidFill>
+                      <a:srgbClr val="FFFFFF"/>
+                    </a:solidFill>
+                  </a:tcPr>
+                </a:tc>
+                <a:tc>
+                  <a:txBody>
+                    <a:bodyPr wrap="square"/>
+                    <a:lstStyle/>
+                    <a:p>
+                      <a:pPr algn="r"/>
+                      <a:r>
+                        <a:rPr sz="1350" b="0" i="0">
+                          <a:solidFill>
+                            <a:srgbClr val="2E3D4A"/>
+                          </a:solidFill>
+                          <a:latin typeface="Consolas"/>
+                        </a:rPr>
+                        <a:t>519 ms</a:t>
+                      </a:r>
+                    </a:p>
+                  </a:txBody>
+                  <a:tcPr marL="109728" marR="109728" anchor="ctr">
+                    <a:solidFill>
+                      <a:srgbClr val="FFFFFF"/>
+                    </a:solidFill>
+                  </a:tcPr>
+                </a:tc>
+              </a:tr>
+              <a:tr h="365760">
+                <a:tc>
+                  <a:txBody>
+                    <a:bodyPr wrap="square"/>
+                    <a:lstStyle/>
+                    <a:p>
+                      <a:pPr algn="l"/>
+                      <a:r>
+                        <a:rPr sz="1350" b="1" i="0">
+                          <a:solidFill>
+                            <a:srgbClr val="14222E"/>
+                          </a:solidFill>
+                          <a:latin typeface="Segoe UI"/>
+                        </a:rPr>
+                        <a:t>case 1</a:t>
+                      </a:r>
+                    </a:p>
+                  </a:txBody>
+                  <a:tcPr marL="109728" marR="109728" anchor="ctr">
+                    <a:solidFill>
+                      <a:srgbClr val="F2F5F7"/>
+                    </a:solidFill>
+                  </a:tcPr>
+                </a:tc>
+                <a:tc>
+                  <a:txBody>
+                    <a:bodyPr wrap="square"/>
+                    <a:lstStyle/>
+                    <a:p>
+                      <a:pPr algn="r"/>
+                      <a:r>
+                        <a:rPr sz="1350" b="1" i="0">
+                          <a:solidFill>
+                            <a:srgbClr val="14222E"/>
+                          </a:solidFill>
+                          <a:latin typeface="Consolas"/>
+                        </a:rPr>
+                        <a:t>1 000</a:t>
+                      </a:r>
+                    </a:p>
+                  </a:txBody>
+                  <a:tcPr marL="109728" marR="109728" anchor="ctr">
+                    <a:solidFill>
+                      <a:srgbClr val="F2F5F7"/>
+                    </a:solidFill>
+                  </a:tcPr>
+                </a:tc>
+                <a:tc>
+                  <a:txBody>
+                    <a:bodyPr wrap="square"/>
+                    <a:lstStyle/>
+                    <a:p>
+                      <a:pPr algn="r"/>
+                      <a:r>
+                        <a:rPr sz="1350" b="1" i="0">
+                          <a:solidFill>
+                            <a:srgbClr val="14222E"/>
+                          </a:solidFill>
+                          <a:latin typeface="Consolas"/>
+                        </a:rPr>
+                        <a:t>1 000</a:t>
+                      </a:r>
+                    </a:p>
+                  </a:txBody>
+                  <a:tcPr marL="109728" marR="109728" anchor="ctr">
+                    <a:solidFill>
+                      <a:srgbClr val="F2F5F7"/>
+                    </a:solidFill>
+                  </a:tcPr>
+                </a:tc>
+                <a:tc>
+                  <a:txBody>
+                    <a:bodyPr wrap="square"/>
+                    <a:lstStyle/>
+                    <a:p>
+                      <a:pPr algn="r"/>
+                      <a:r>
+                        <a:rPr sz="1350" b="1" i="0">
+                          <a:solidFill>
+                            <a:srgbClr val="14222E"/>
+                          </a:solidFill>
+                          <a:latin typeface="Consolas"/>
+                        </a:rPr>
+                        <a:t>816/s</a:t>
+                      </a:r>
+                    </a:p>
+                  </a:txBody>
+                  <a:tcPr marL="109728" marR="109728" anchor="ctr">
+                    <a:solidFill>
+                      <a:srgbClr val="F2F5F7"/>
+                    </a:solidFill>
+                  </a:tcPr>
+                </a:tc>
+                <a:tc>
+                  <a:txBody>
+                    <a:bodyPr wrap="square"/>
+                    <a:lstStyle/>
+                    <a:p>
+                      <a:pPr algn="r"/>
+                      <a:r>
+                        <a:rPr sz="1350" b="1" i="0">
+                          <a:solidFill>
+                            <a:srgbClr val="14222E"/>
+                          </a:solidFill>
+                          <a:latin typeface="Consolas"/>
+                        </a:rPr>
+                        <a:t>3 269/s</a:t>
+                      </a:r>
+                    </a:p>
+                  </a:txBody>
+                  <a:tcPr marL="109728" marR="109728" anchor="ctr">
+                    <a:solidFill>
+                      <a:srgbClr val="F2F5F7"/>
+                    </a:solidFill>
+                  </a:tcPr>
+                </a:tc>
+                <a:tc>
+                  <a:txBody>
+                    <a:bodyPr wrap="square"/>
+                    <a:lstStyle/>
+                    <a:p>
+                      <a:pPr algn="r"/>
+                      <a:r>
+                        <a:rPr sz="1350" b="1" i="0">
+                          <a:solidFill>
+                            <a:srgbClr val="14222E"/>
+                          </a:solidFill>
+                          <a:latin typeface="Consolas"/>
+                        </a:rPr>
+                        <a:t>522 ms</a:t>
+                      </a:r>
+                    </a:p>
+                  </a:txBody>
+                  <a:tcPr marL="109728" marR="109728" anchor="ctr">
+                    <a:solidFill>
+                      <a:srgbClr val="F2F5F7"/>
+                    </a:solidFill>
+                  </a:tcPr>
+                </a:tc>
+              </a:tr>
+              <a:tr h="365760">
+                <a:tc>
+                  <a:txBody>
+                    <a:bodyPr wrap="square"/>
+                    <a:lstStyle/>
+                    <a:p>
+                      <a:pPr algn="l"/>
+                      <a:r>
+                        <a:rPr sz="1350" b="1" i="0">
+                          <a:solidFill>
+                            <a:srgbClr val="14222E"/>
+                          </a:solidFill>
+                          <a:latin typeface="Segoe UI"/>
+                        </a:rPr>
+                        <a:t>case 2</a:t>
+                      </a:r>
+                    </a:p>
+                  </a:txBody>
+                  <a:tcPr marL="109728" marR="109728" anchor="ctr">
+                    <a:solidFill>
+                      <a:srgbClr val="F2F5F7"/>
+                    </a:solidFill>
+                  </a:tcPr>
+                </a:tc>
+                <a:tc>
+                  <a:txBody>
+                    <a:bodyPr wrap="square"/>
+                    <a:lstStyle/>
+                    <a:p>
+                      <a:pPr algn="r"/>
+                      <a:r>
+                        <a:rPr sz="1350" b="1" i="0">
+                          <a:solidFill>
+                            <a:srgbClr val="14222E"/>
+                          </a:solidFill>
+                          <a:latin typeface="Consolas"/>
+                        </a:rPr>
+                        <a:t>10</a:t>
+                      </a:r>
+                    </a:p>
+                  </a:txBody>
+                  <a:tcPr marL="109728" marR="109728" anchor="ctr">
+                    <a:solidFill>
+                      <a:srgbClr val="F2F5F7"/>
+                    </a:solidFill>
+                  </a:tcPr>
+                </a:tc>
+                <a:tc>
+                  <a:txBody>
+                    <a:bodyPr wrap="square"/>
+                    <a:lstStyle/>
+                    <a:p>
+                      <a:pPr algn="r"/>
+                      <a:r>
+                        <a:rPr sz="1350" b="1" i="0">
+                          <a:solidFill>
+                            <a:srgbClr val="14222E"/>
+                          </a:solidFill>
+                          <a:latin typeface="Consolas"/>
+                        </a:rPr>
+                        <a:t>20 000</a:t>
+                      </a:r>
+                    </a:p>
+                  </a:txBody>
+                  <a:tcPr marL="109728" marR="109728" anchor="ctr">
+                    <a:solidFill>
+                      <a:srgbClr val="F2F5F7"/>
+                    </a:solidFill>
+                  </a:tcPr>
+                </a:tc>
+                <a:tc>
+                  <a:txBody>
+                    <a:bodyPr wrap="square"/>
+                    <a:lstStyle/>
+                    <a:p>
+                      <a:pPr algn="r"/>
+                      <a:r>
+                        <a:rPr sz="1350" b="1" i="0">
+                          <a:solidFill>
+                            <a:srgbClr val="14222E"/>
+                          </a:solidFill>
+                          <a:latin typeface="Consolas"/>
+                        </a:rPr>
+                        <a:t>8/s</a:t>
+                      </a:r>
+                    </a:p>
+                  </a:txBody>
+                  <a:tcPr marL="109728" marR="109728" anchor="ctr">
+                    <a:solidFill>
+                      <a:srgbClr val="F2F5F7"/>
+                    </a:solidFill>
+                  </a:tcPr>
+                </a:tc>
+                <a:tc>
+                  <a:txBody>
+                    <a:bodyPr wrap="square"/>
+                    <a:lstStyle/>
+                    <a:p>
+                      <a:pPr algn="r"/>
+                      <a:r>
+                        <a:rPr sz="1350" b="1" i="0">
+                          <a:solidFill>
+                            <a:srgbClr val="14222E"/>
+                          </a:solidFill>
+                          <a:latin typeface="Consolas"/>
+                        </a:rPr>
+                        <a:t>33/s</a:t>
+                      </a:r>
+                    </a:p>
+                  </a:txBody>
+                  <a:tcPr marL="109728" marR="109728" anchor="ctr">
+                    <a:solidFill>
+                      <a:srgbClr val="F2F5F7"/>
+                    </a:solidFill>
+                  </a:tcPr>
+                </a:tc>
+                <a:tc>
+                  <a:txBody>
+                    <a:bodyPr wrap="square"/>
+                    <a:lstStyle/>
+                    <a:p>
+                      <a:pPr algn="r"/>
+                      <a:r>
+                        <a:rPr sz="1350" b="1" i="0">
+                          <a:solidFill>
+                            <a:srgbClr val="14222E"/>
+                          </a:solidFill>
+                          <a:latin typeface="Consolas"/>
+                        </a:rPr>
+                        <a:t>513 ms</a:t>
+                      </a:r>
+                    </a:p>
+                  </a:txBody>
+                  <a:tcPr marL="109728" marR="109728" anchor="ctr">
+                    <a:solidFill>
+                      <a:srgbClr val="F2F5F7"/>
+                    </a:solidFill>
+                  </a:tcPr>
+                </a:tc>
+              </a:tr>
+            </a:tbl>
+          </a:graphicData>
+        </a:graphic>
+      </p:graphicFrame>
+      <p:sp>
+        <p:nvSpPr>
+          <p:cNvPr id="6" name="TextBox 5"/>
+          <p:cNvSpPr txBox="1"/>
+          <p:nvPr/>
+        </p:nvSpPr>
+        <p:spPr>
+          <a:xfrm>
+            <a:off x="685800" y="3712464"/>
+            <a:ext cx="10881360" cy="822960"/>
+          </a:xfrm>
+          <a:prstGeom prst="rect">
+            <a:avLst/>
+          </a:prstGeom>
+          <a:noFill/>
+        </p:spPr>
+        <p:txBody>
+          <a:bodyPr wrap="square">
+            <a:spAutoFit/>
+          </a:bodyPr>
+          <a:lstStyle/>
+          <a:p>
+            <a:pPr algn="l"/>
+            <a:r>
+              <a:rPr sz="1600" b="0" i="0">
+                <a:solidFill>
+                  <a:srgbClr val="14222E"/>
+                </a:solidFill>
+                <a:latin typeface="Segoe UI"/>
+              </a:rPr>
+              <a:t>A hundredfold on orders, twentyfold on prices — order latency unmoved in both.</a:t>
+            </a:r>
+          </a:p>
+        </p:txBody>
+      </p:sp>
+    </p:spTree>
+  </p:cSld>
+  <p:clrMapOvr>
+    <a:masterClrMapping/>
+  </p:clrMapOvr>
+</p:sld>
+</file>
+
 <file path=ppt/slides/slide2.xml><?xml version="1.0" encoding="utf-8"?>
 <p:sld xmlns:a="http://schemas.openxmlformats.org/drawingml/2006/main" xmlns:p="http://schemas.openxmlformats.org/presentationml/2006/main" xmlns:r="http://schemas.openxmlformats.org/officeDocument/2006/relationships">
   <p:cSld>
@@ -4650,8 +5806,8 @@
         </p:blipFill>
         <p:spPr>
           <a:xfrm>
-            <a:off x="521207" y="2002536"/>
-            <a:ext cx="11155680" cy="4172586"/>
+            <a:off x="841248" y="1965960"/>
+            <a:ext cx="10515600" cy="3933175"/>
           </a:xfrm>
           <a:prstGeom prst="rect">
             <a:avLst/>
@@ -4666,8 +5822,8 @@
         </p:nvSpPr>
         <p:spPr>
           <a:xfrm>
-            <a:off x="685800" y="6303138"/>
-            <a:ext cx="10881360" cy="822960"/>
+            <a:off x="841248" y="6008863"/>
+            <a:ext cx="10515600" cy="365760"/>
           </a:xfrm>
           <a:prstGeom prst="rect">
             <a:avLst/>
@@ -6210,6 +7366,849 @@
                 </a:solidFill>
                 <a:latin typeface="Segoe UI"/>
               </a:rPr>
+              <a:t>THE RUNNING PIPELINE</a:t>
+            </a:r>
+          </a:p>
+        </p:txBody>
+      </p:sp>
+      <p:sp>
+        <p:nvSpPr>
+          <p:cNvPr id="3" name="TextBox 2"/>
+          <p:cNvSpPr txBox="1"/>
+          <p:nvPr/>
+        </p:nvSpPr>
+        <p:spPr>
+          <a:xfrm>
+            <a:off x="640080" y="786384"/>
+            <a:ext cx="10972800" cy="731520"/>
+          </a:xfrm>
+          <a:prstGeom prst="rect">
+            <a:avLst/>
+          </a:prstGeom>
+          <a:noFill/>
+        </p:spPr>
+        <p:txBody>
+          <a:bodyPr wrap="square">
+            <a:spAutoFit/>
+          </a:bodyPr>
+          <a:lstStyle/>
+          <a:p>
+            <a:pPr algn="l"/>
+            <a:r>
+              <a:rPr sz="3000" b="1" i="0">
+                <a:solidFill>
+                  <a:srgbClr val="14222E"/>
+                </a:solidFill>
+                <a:latin typeface="Segoe UI"/>
+              </a:rPr>
+              <a:t>What Flink shows: two jobs, six operators</a:t>
+            </a:r>
+          </a:p>
+        </p:txBody>
+      </p:sp>
+      <p:sp>
+        <p:nvSpPr>
+          <p:cNvPr id="4" name="Rectangle 3"/>
+          <p:cNvSpPr/>
+          <p:nvPr/>
+        </p:nvSpPr>
+        <p:spPr>
+          <a:xfrm>
+            <a:off x="640080" y="1444752"/>
+            <a:ext cx="10908792" cy="12700"/>
+          </a:xfrm>
+          <a:prstGeom prst="rect">
+            <a:avLst/>
+          </a:prstGeom>
+          <a:solidFill>
+            <a:srgbClr val="D8DFE4"/>
+          </a:solidFill>
+          <a:ln>
+            <a:noFill/>
+          </a:ln>
+          <a:effectLst/>
+        </p:spPr>
+        <p:style>
+          <a:lnRef idx="1">
+            <a:schemeClr val="accent1"/>
+          </a:lnRef>
+          <a:fillRef idx="3">
+            <a:schemeClr val="accent1"/>
+          </a:fillRef>
+          <a:effectRef idx="2">
+            <a:schemeClr val="accent1"/>
+          </a:effectRef>
+          <a:fontRef idx="minor">
+            <a:schemeClr val="lt1"/>
+          </a:fontRef>
+        </p:style>
+        <p:txBody>
+          <a:bodyPr rtlCol="0" anchor="ctr"/>
+          <a:lstStyle/>
+          <a:p>
+            <a:pPr algn="ctr"/>
+          </a:p>
+        </p:txBody>
+      </p:sp>
+      <p:sp>
+        <p:nvSpPr>
+          <p:cNvPr id="5" name="TextBox 4"/>
+          <p:cNvSpPr txBox="1"/>
+          <p:nvPr/>
+        </p:nvSpPr>
+        <p:spPr>
+          <a:xfrm>
+            <a:off x="566928" y="1801368"/>
+            <a:ext cx="5266944" cy="310896"/>
+          </a:xfrm>
+          <a:prstGeom prst="rect">
+            <a:avLst/>
+          </a:prstGeom>
+          <a:noFill/>
+        </p:spPr>
+        <p:txBody>
+          <a:bodyPr wrap="square">
+            <a:spAutoFit/>
+          </a:bodyPr>
+          <a:lstStyle/>
+          <a:p>
+            <a:pPr algn="l"/>
+            <a:r>
+              <a:rPr sz="1500" b="1" i="0">
+                <a:solidFill>
+                  <a:srgbClr val="14222E"/>
+                </a:solidFill>
+                <a:latin typeface="Segoe UI"/>
+              </a:rPr>
+              <a:t>Part 1 — positions</a:t>
+            </a:r>
+          </a:p>
+        </p:txBody>
+      </p:sp>
+      <p:pic>
+        <p:nvPicPr>
+          <p:cNvPr id="6" name="Picture 5" descr="flink-part1.png"/>
+          <p:cNvPicPr>
+            <a:picLocks noChangeAspect="1"/>
+          </p:cNvPicPr>
+          <p:nvPr/>
+        </p:nvPicPr>
+        <p:blipFill>
+          <a:blip r:embed="rId2"/>
+          <a:stretch>
+            <a:fillRect/>
+          </a:stretch>
+        </p:blipFill>
+        <p:spPr>
+          <a:xfrm>
+            <a:off x="566928" y="2167128"/>
+            <a:ext cx="5266944" cy="3924389"/>
+          </a:xfrm>
+          <a:prstGeom prst="rect">
+            <a:avLst/>
+          </a:prstGeom>
+        </p:spPr>
+      </p:pic>
+      <p:sp>
+        <p:nvSpPr>
+          <p:cNvPr id="7" name="Rectangle 6"/>
+          <p:cNvSpPr/>
+          <p:nvPr/>
+        </p:nvSpPr>
+        <p:spPr>
+          <a:xfrm>
+            <a:off x="566928" y="2167128"/>
+            <a:ext cx="5266944" cy="3924389"/>
+          </a:xfrm>
+          <a:prstGeom prst="rect">
+            <a:avLst/>
+          </a:prstGeom>
+          <a:noFill/>
+          <a:ln w="12700">
+            <a:solidFill>
+              <a:srgbClr val="D8DFE4"/>
+            </a:solidFill>
+          </a:ln>
+          <a:effectLst/>
+        </p:spPr>
+        <p:style>
+          <a:lnRef idx="1">
+            <a:schemeClr val="accent1"/>
+          </a:lnRef>
+          <a:fillRef idx="3">
+            <a:schemeClr val="accent1"/>
+          </a:fillRef>
+          <a:effectRef idx="2">
+            <a:schemeClr val="accent1"/>
+          </a:effectRef>
+          <a:fontRef idx="minor">
+            <a:schemeClr val="lt1"/>
+          </a:fontRef>
+        </p:style>
+        <p:txBody>
+          <a:bodyPr rtlCol="0" anchor="ctr"/>
+          <a:lstStyle/>
+          <a:p>
+            <a:pPr algn="ctr"/>
+          </a:p>
+        </p:txBody>
+      </p:sp>
+      <p:sp>
+        <p:nvSpPr>
+          <p:cNvPr id="8" name="TextBox 7"/>
+          <p:cNvSpPr txBox="1"/>
+          <p:nvPr/>
+        </p:nvSpPr>
+        <p:spPr>
+          <a:xfrm>
+            <a:off x="566928" y="6182957"/>
+            <a:ext cx="5266944" cy="548640"/>
+          </a:xfrm>
+          <a:prstGeom prst="rect">
+            <a:avLst/>
+          </a:prstGeom>
+          <a:noFill/>
+        </p:spPr>
+        <p:txBody>
+          <a:bodyPr wrap="square">
+            <a:spAutoFit/>
+          </a:bodyPr>
+          <a:lstStyle/>
+          <a:p>
+            <a:pPr algn="l"/>
+            <a:r>
+              <a:rPr sz="1200" b="0" i="0">
+                <a:solidFill>
+                  <a:srgbClr val="6B7A87"/>
+                </a:solidFill>
+                <a:latin typeface="Segoe UI"/>
+              </a:rPr>
+              <a:t>orders  →  split by allocation  →  two keyed aggregates, each with its own sink</a:t>
+            </a:r>
+          </a:p>
+        </p:txBody>
+      </p:sp>
+      <p:sp>
+        <p:nvSpPr>
+          <p:cNvPr id="9" name="TextBox 8"/>
+          <p:cNvSpPr txBox="1"/>
+          <p:nvPr/>
+        </p:nvSpPr>
+        <p:spPr>
+          <a:xfrm>
+            <a:off x="6355080" y="1801368"/>
+            <a:ext cx="5266944" cy="310896"/>
+          </a:xfrm>
+          <a:prstGeom prst="rect">
+            <a:avLst/>
+          </a:prstGeom>
+          <a:noFill/>
+        </p:spPr>
+        <p:txBody>
+          <a:bodyPr wrap="square">
+            <a:spAutoFit/>
+          </a:bodyPr>
+          <a:lstStyle/>
+          <a:p>
+            <a:pPr algn="l"/>
+            <a:r>
+              <a:rPr sz="1500" b="1" i="0">
+                <a:solidFill>
+                  <a:srgbClr val="14222E"/>
+                </a:solidFill>
+                <a:latin typeface="Segoe UI"/>
+              </a:rPr>
+              <a:t>Part 2 — market value</a:t>
+            </a:r>
+          </a:p>
+        </p:txBody>
+      </p:sp>
+      <p:pic>
+        <p:nvPicPr>
+          <p:cNvPr id="10" name="Picture 9" descr="flink-part2.png"/>
+          <p:cNvPicPr>
+            <a:picLocks noChangeAspect="1"/>
+          </p:cNvPicPr>
+          <p:nvPr/>
+        </p:nvPicPr>
+        <p:blipFill>
+          <a:blip r:embed="rId3"/>
+          <a:stretch>
+            <a:fillRect/>
+          </a:stretch>
+        </p:blipFill>
+        <p:spPr>
+          <a:xfrm>
+            <a:off x="6355080" y="2167128"/>
+            <a:ext cx="5266944" cy="3604619"/>
+          </a:xfrm>
+          <a:prstGeom prst="rect">
+            <a:avLst/>
+          </a:prstGeom>
+        </p:spPr>
+      </p:pic>
+      <p:sp>
+        <p:nvSpPr>
+          <p:cNvPr id="11" name="Rectangle 10"/>
+          <p:cNvSpPr/>
+          <p:nvPr/>
+        </p:nvSpPr>
+        <p:spPr>
+          <a:xfrm>
+            <a:off x="6355080" y="2167128"/>
+            <a:ext cx="5266944" cy="3604619"/>
+          </a:xfrm>
+          <a:prstGeom prst="rect">
+            <a:avLst/>
+          </a:prstGeom>
+          <a:noFill/>
+          <a:ln w="12700">
+            <a:solidFill>
+              <a:srgbClr val="D8DFE4"/>
+            </a:solidFill>
+          </a:ln>
+          <a:effectLst/>
+        </p:spPr>
+        <p:style>
+          <a:lnRef idx="1">
+            <a:schemeClr val="accent1"/>
+          </a:lnRef>
+          <a:fillRef idx="3">
+            <a:schemeClr val="accent1"/>
+          </a:fillRef>
+          <a:effectRef idx="2">
+            <a:schemeClr val="accent1"/>
+          </a:effectRef>
+          <a:fontRef idx="minor">
+            <a:schemeClr val="lt1"/>
+          </a:fontRef>
+        </p:style>
+        <p:txBody>
+          <a:bodyPr rtlCol="0" anchor="ctr"/>
+          <a:lstStyle/>
+          <a:p>
+            <a:pPr algn="ctr"/>
+          </a:p>
+        </p:txBody>
+      </p:sp>
+      <p:sp>
+        <p:nvSpPr>
+          <p:cNvPr id="12" name="TextBox 11"/>
+          <p:cNvSpPr txBox="1"/>
+          <p:nvPr/>
+        </p:nvSpPr>
+        <p:spPr>
+          <a:xfrm>
+            <a:off x="6355080" y="5863187"/>
+            <a:ext cx="5266944" cy="548640"/>
+          </a:xfrm>
+          <a:prstGeom prst="rect">
+            <a:avLst/>
+          </a:prstGeom>
+          <a:noFill/>
+        </p:spPr>
+        <p:txBody>
+          <a:bodyPr wrap="square">
+            <a:spAutoFit/>
+          </a:bodyPr>
+          <a:lstStyle/>
+          <a:p>
+            <a:pPr algn="l"/>
+            <a:r>
+              <a:rPr sz="1200" b="0" i="0">
+                <a:solidFill>
+                  <a:srgbClr val="6B7A87"/>
+                </a:solidFill>
+                <a:latin typeface="Segoe UI"/>
+              </a:rPr>
+              <a:t>prices broadcast to both joins; positions read back from topics 3 and 4</a:t>
+            </a:r>
+          </a:p>
+        </p:txBody>
+      </p:sp>
+      <p:sp>
+        <p:nvSpPr>
+          <p:cNvPr id="13" name="TextBox 12"/>
+          <p:cNvSpPr txBox="1"/>
+          <p:nvPr/>
+        </p:nvSpPr>
+        <p:spPr>
+          <a:xfrm>
+            <a:off x="685800" y="5577840"/>
+            <a:ext cx="10881360" cy="822960"/>
+          </a:xfrm>
+          <a:prstGeom prst="rect">
+            <a:avLst/>
+          </a:prstGeom>
+          <a:noFill/>
+        </p:spPr>
+        <p:txBody>
+          <a:bodyPr wrap="square">
+            <a:spAutoFit/>
+          </a:bodyPr>
+          <a:lstStyle/>
+          <a:p>
+            <a:pPr algn="l"/>
+            <a:r>
+              <a:rPr sz="1350" b="0" i="1">
+                <a:solidFill>
+                  <a:srgbClr val="6B7A87"/>
+                </a:solidFill>
+                <a:latin typeface="Segoe UI"/>
+              </a:rPr>
+              <a:t>Part 2 reads sinks 3 and 4 back out of Kafka rather than taking the streams in-process, so it consumes exactly what any other consumer would — which is why Flink draws two graphs and not one.</a:t>
+            </a:r>
+          </a:p>
+        </p:txBody>
+      </p:sp>
+    </p:spTree>
+  </p:cSld>
+  <p:clrMapOvr>
+    <a:masterClrMapping/>
+  </p:clrMapOvr>
+</p:sld>
+</file>
+
+<file path=ppt/slides/slide7.xml><?xml version="1.0" encoding="utf-8"?>
+<p:sld xmlns:a="http://schemas.openxmlformats.org/drawingml/2006/main" xmlns:p="http://schemas.openxmlformats.org/presentationml/2006/main" xmlns:r="http://schemas.openxmlformats.org/officeDocument/2006/relationships">
+  <p:cSld>
+    <p:spTree>
+      <p:nvGrpSpPr>
+        <p:cNvPr id="1" name=""/>
+        <p:cNvGrpSpPr/>
+        <p:nvPr/>
+      </p:nvGrpSpPr>
+      <p:grpSpPr/>
+      <p:sp>
+        <p:nvSpPr>
+          <p:cNvPr id="2" name="TextBox 1"/>
+          <p:cNvSpPr txBox="1"/>
+          <p:nvPr/>
+        </p:nvSpPr>
+        <p:spPr>
+          <a:xfrm>
+            <a:off x="640080" y="475488"/>
+            <a:ext cx="10972800" cy="274320"/>
+          </a:xfrm>
+          <a:prstGeom prst="rect">
+            <a:avLst/>
+          </a:prstGeom>
+          <a:noFill/>
+        </p:spPr>
+        <p:txBody>
+          <a:bodyPr wrap="square">
+            <a:spAutoFit/>
+          </a:bodyPr>
+          <a:lstStyle/>
+          <a:p>
+            <a:pPr algn="l"/>
+            <a:r>
+              <a:rPr sz="1150" b="1" i="0" spc="120">
+                <a:solidFill>
+                  <a:srgbClr val="1B6B8A"/>
+                </a:solidFill>
+                <a:latin typeface="Segoe UI"/>
+              </a:rPr>
+              <a:t>WHAT IT LOOKED LIKE</a:t>
+            </a:r>
+          </a:p>
+        </p:txBody>
+      </p:sp>
+      <p:sp>
+        <p:nvSpPr>
+          <p:cNvPr id="3" name="TextBox 2"/>
+          <p:cNvSpPr txBox="1"/>
+          <p:nvPr/>
+        </p:nvSpPr>
+        <p:spPr>
+          <a:xfrm>
+            <a:off x="640080" y="786384"/>
+            <a:ext cx="10972800" cy="731520"/>
+          </a:xfrm>
+          <a:prstGeom prst="rect">
+            <a:avLst/>
+          </a:prstGeom>
+          <a:noFill/>
+        </p:spPr>
+        <p:txBody>
+          <a:bodyPr wrap="square">
+            <a:spAutoFit/>
+          </a:bodyPr>
+          <a:lstStyle/>
+          <a:p>
+            <a:pPr algn="l"/>
+            <a:r>
+              <a:rPr sz="3000" b="1" i="0">
+                <a:solidFill>
+                  <a:srgbClr val="14222E"/>
+                </a:solidFill>
+                <a:latin typeface="Segoe UI"/>
+              </a:rPr>
+              <a:t>The same pipeline at two units, then four</a:t>
+            </a:r>
+          </a:p>
+        </p:txBody>
+      </p:sp>
+      <p:sp>
+        <p:nvSpPr>
+          <p:cNvPr id="4" name="Rectangle 3"/>
+          <p:cNvSpPr/>
+          <p:nvPr/>
+        </p:nvSpPr>
+        <p:spPr>
+          <a:xfrm>
+            <a:off x="640080" y="1444752"/>
+            <a:ext cx="10908792" cy="12700"/>
+          </a:xfrm>
+          <a:prstGeom prst="rect">
+            <a:avLst/>
+          </a:prstGeom>
+          <a:solidFill>
+            <a:srgbClr val="D8DFE4"/>
+          </a:solidFill>
+          <a:ln>
+            <a:noFill/>
+          </a:ln>
+          <a:effectLst/>
+        </p:spPr>
+        <p:style>
+          <a:lnRef idx="1">
+            <a:schemeClr val="accent1"/>
+          </a:lnRef>
+          <a:fillRef idx="3">
+            <a:schemeClr val="accent1"/>
+          </a:fillRef>
+          <a:effectRef idx="2">
+            <a:schemeClr val="accent1"/>
+          </a:effectRef>
+          <a:fontRef idx="minor">
+            <a:schemeClr val="lt1"/>
+          </a:fontRef>
+        </p:style>
+        <p:txBody>
+          <a:bodyPr rtlCol="0" anchor="ctr"/>
+          <a:lstStyle/>
+          <a:p>
+            <a:pPr algn="ctr"/>
+          </a:p>
+        </p:txBody>
+      </p:sp>
+      <p:sp>
+        <p:nvSpPr>
+          <p:cNvPr id="5" name="TextBox 4"/>
+          <p:cNvSpPr txBox="1"/>
+          <p:nvPr/>
+        </p:nvSpPr>
+        <p:spPr>
+          <a:xfrm>
+            <a:off x="566928" y="1801368"/>
+            <a:ext cx="5266944" cy="310896"/>
+          </a:xfrm>
+          <a:prstGeom prst="rect">
+            <a:avLst/>
+          </a:prstGeom>
+          <a:noFill/>
+        </p:spPr>
+        <p:txBody>
+          <a:bodyPr wrap="square">
+            <a:spAutoFit/>
+          </a:bodyPr>
+          <a:lstStyle/>
+          <a:p>
+            <a:pPr algn="l"/>
+            <a:r>
+              <a:rPr sz="1500" b="1" i="0">
+                <a:solidFill>
+                  <a:srgbClr val="14222E"/>
+                </a:solidFill>
+                <a:latin typeface="Segoe UI"/>
+              </a:rPr>
+              <a:t>2 units   </a:t>
+            </a:r>
+            <a:r>
+              <a:rPr sz="1500" b="1" i="0">
+                <a:solidFill>
+                  <a:srgbClr val="1B6B8A"/>
+                </a:solidFill>
+                <a:latin typeface="Segoe UI"/>
+              </a:rPr>
+              <a:t>73,397 orders/sec</a:t>
+            </a:r>
+          </a:p>
+        </p:txBody>
+      </p:sp>
+      <p:pic>
+        <p:nvPicPr>
+          <p:cNvPr id="6" name="Picture 5" descr="grafana-2units.png"/>
+          <p:cNvPicPr>
+            <a:picLocks noChangeAspect="1"/>
+          </p:cNvPicPr>
+          <p:nvPr/>
+        </p:nvPicPr>
+        <p:blipFill>
+          <a:blip r:embed="rId2"/>
+          <a:stretch>
+            <a:fillRect/>
+          </a:stretch>
+        </p:blipFill>
+        <p:spPr>
+          <a:xfrm>
+            <a:off x="566928" y="2167128"/>
+            <a:ext cx="5266944" cy="2062886"/>
+          </a:xfrm>
+          <a:prstGeom prst="rect">
+            <a:avLst/>
+          </a:prstGeom>
+        </p:spPr>
+      </p:pic>
+      <p:sp>
+        <p:nvSpPr>
+          <p:cNvPr id="7" name="Rectangle 6"/>
+          <p:cNvSpPr/>
+          <p:nvPr/>
+        </p:nvSpPr>
+        <p:spPr>
+          <a:xfrm>
+            <a:off x="566928" y="2167128"/>
+            <a:ext cx="5266944" cy="2062886"/>
+          </a:xfrm>
+          <a:prstGeom prst="rect">
+            <a:avLst/>
+          </a:prstGeom>
+          <a:noFill/>
+          <a:ln w="12700">
+            <a:solidFill>
+              <a:srgbClr val="D8DFE4"/>
+            </a:solidFill>
+          </a:ln>
+          <a:effectLst/>
+        </p:spPr>
+        <p:style>
+          <a:lnRef idx="1">
+            <a:schemeClr val="accent1"/>
+          </a:lnRef>
+          <a:fillRef idx="3">
+            <a:schemeClr val="accent1"/>
+          </a:fillRef>
+          <a:effectRef idx="2">
+            <a:schemeClr val="accent1"/>
+          </a:effectRef>
+          <a:fontRef idx="minor">
+            <a:schemeClr val="lt1"/>
+          </a:fontRef>
+        </p:style>
+        <p:txBody>
+          <a:bodyPr rtlCol="0" anchor="ctr"/>
+          <a:lstStyle/>
+          <a:p>
+            <a:pPr algn="ctr"/>
+          </a:p>
+        </p:txBody>
+      </p:sp>
+      <p:sp>
+        <p:nvSpPr>
+          <p:cNvPr id="8" name="TextBox 7"/>
+          <p:cNvSpPr txBox="1"/>
+          <p:nvPr/>
+        </p:nvSpPr>
+        <p:spPr>
+          <a:xfrm>
+            <a:off x="6355080" y="1801368"/>
+            <a:ext cx="5266944" cy="310896"/>
+          </a:xfrm>
+          <a:prstGeom prst="rect">
+            <a:avLst/>
+          </a:prstGeom>
+          <a:noFill/>
+        </p:spPr>
+        <p:txBody>
+          <a:bodyPr wrap="square">
+            <a:spAutoFit/>
+          </a:bodyPr>
+          <a:lstStyle/>
+          <a:p>
+            <a:pPr algn="l"/>
+            <a:r>
+              <a:rPr sz="1500" b="1" i="0">
+                <a:solidFill>
+                  <a:srgbClr val="14222E"/>
+                </a:solidFill>
+                <a:latin typeface="Segoe UI"/>
+              </a:rPr>
+              <a:t>4 units   </a:t>
+            </a:r>
+            <a:r>
+              <a:rPr sz="1500" b="1" i="0">
+                <a:solidFill>
+                  <a:srgbClr val="1B6B8A"/>
+                </a:solidFill>
+                <a:latin typeface="Segoe UI"/>
+              </a:rPr>
+              <a:t>146,063 orders/sec</a:t>
+            </a:r>
+          </a:p>
+        </p:txBody>
+      </p:sp>
+      <p:pic>
+        <p:nvPicPr>
+          <p:cNvPr id="9" name="Picture 8" descr="grafana-4units.png"/>
+          <p:cNvPicPr>
+            <a:picLocks noChangeAspect="1"/>
+          </p:cNvPicPr>
+          <p:nvPr/>
+        </p:nvPicPr>
+        <p:blipFill>
+          <a:blip r:embed="rId3"/>
+          <a:stretch>
+            <a:fillRect/>
+          </a:stretch>
+        </p:blipFill>
+        <p:spPr>
+          <a:xfrm>
+            <a:off x="6355080" y="2167128"/>
+            <a:ext cx="5266944" cy="2062886"/>
+          </a:xfrm>
+          <a:prstGeom prst="rect">
+            <a:avLst/>
+          </a:prstGeom>
+        </p:spPr>
+      </p:pic>
+      <p:sp>
+        <p:nvSpPr>
+          <p:cNvPr id="10" name="Rectangle 9"/>
+          <p:cNvSpPr/>
+          <p:nvPr/>
+        </p:nvSpPr>
+        <p:spPr>
+          <a:xfrm>
+            <a:off x="6355080" y="2167128"/>
+            <a:ext cx="5266944" cy="2062886"/>
+          </a:xfrm>
+          <a:prstGeom prst="rect">
+            <a:avLst/>
+          </a:prstGeom>
+          <a:noFill/>
+          <a:ln w="12700">
+            <a:solidFill>
+              <a:srgbClr val="D8DFE4"/>
+            </a:solidFill>
+          </a:ln>
+          <a:effectLst/>
+        </p:spPr>
+        <p:style>
+          <a:lnRef idx="1">
+            <a:schemeClr val="accent1"/>
+          </a:lnRef>
+          <a:fillRef idx="3">
+            <a:schemeClr val="accent1"/>
+          </a:fillRef>
+          <a:effectRef idx="2">
+            <a:schemeClr val="accent1"/>
+          </a:effectRef>
+          <a:fontRef idx="minor">
+            <a:schemeClr val="lt1"/>
+          </a:fontRef>
+        </p:style>
+        <p:txBody>
+          <a:bodyPr rtlCol="0" anchor="ctr"/>
+          <a:lstStyle/>
+          <a:p>
+            <a:pPr algn="ctr"/>
+          </a:p>
+        </p:txBody>
+      </p:sp>
+      <p:sp>
+        <p:nvSpPr>
+          <p:cNvPr id="11" name="TextBox 10"/>
+          <p:cNvSpPr txBox="1"/>
+          <p:nvPr/>
+        </p:nvSpPr>
+        <p:spPr>
+          <a:xfrm>
+            <a:off x="566928" y="4433764"/>
+            <a:ext cx="11064240" cy="1280160"/>
+          </a:xfrm>
+          <a:prstGeom prst="rect">
+            <a:avLst/>
+          </a:prstGeom>
+          <a:noFill/>
+        </p:spPr>
+        <p:txBody>
+          <a:bodyPr wrap="square">
+            <a:spAutoFit/>
+          </a:bodyPr>
+          <a:lstStyle/>
+          <a:p>
+            <a:pPr algn="l"/>
+            <a:r>
+              <a:rPr sz="1600" b="1" i="0">
+                <a:solidFill>
+                  <a:srgbClr val="14222E"/>
+                </a:solidFill>
+                <a:latin typeface="Segoe UI"/>
+              </a:rPr>
+              <a:t>Same panels, same axes, twice the units.  </a:t>
+            </a:r>
+            <a:r>
+              <a:rPr sz="1600" b="0" i="0">
+                <a:solidFill>
+                  <a:srgbClr val="2E3D4A"/>
+                </a:solidFill>
+                <a:latin typeface="Segoe UI"/>
+              </a:rPr>
+              <a:t>Orders in and positions-by-account both roughly double; the account side runs at four times the order rate throughout, because every trade splits across four accounts.</a:t>
+            </a:r>
+          </a:p>
+        </p:txBody>
+      </p:sp>
+    </p:spTree>
+  </p:cSld>
+  <p:clrMapOvr>
+    <a:masterClrMapping/>
+  </p:clrMapOvr>
+</p:sld>
+</file>
+
+<file path=ppt/slides/slide8.xml><?xml version="1.0" encoding="utf-8"?>
+<p:sld xmlns:a="http://schemas.openxmlformats.org/drawingml/2006/main" xmlns:p="http://schemas.openxmlformats.org/presentationml/2006/main" xmlns:r="http://schemas.openxmlformats.org/officeDocument/2006/relationships">
+  <p:cSld>
+    <p:spTree>
+      <p:nvGrpSpPr>
+        <p:cNvPr id="1" name=""/>
+        <p:cNvGrpSpPr/>
+        <p:nvPr/>
+      </p:nvGrpSpPr>
+      <p:grpSpPr/>
+      <p:sp>
+        <p:nvSpPr>
+          <p:cNvPr id="2" name="TextBox 1"/>
+          <p:cNvSpPr txBox="1"/>
+          <p:nvPr/>
+        </p:nvSpPr>
+        <p:spPr>
+          <a:xfrm>
+            <a:off x="640080" y="475488"/>
+            <a:ext cx="10972800" cy="274320"/>
+          </a:xfrm>
+          <a:prstGeom prst="rect">
+            <a:avLst/>
+          </a:prstGeom>
+          <a:noFill/>
+        </p:spPr>
+        <p:txBody>
+          <a:bodyPr wrap="square">
+            <a:spAutoFit/>
+          </a:bodyPr>
+          <a:lstStyle/>
+          <a:p>
+            <a:pPr algn="l"/>
+            <a:r>
+              <a:rPr sz="1150" b="1" i="0" spc="120">
+                <a:solidFill>
+                  <a:srgbClr val="1B6B8A"/>
+                </a:solidFill>
+                <a:latin typeface="Segoe UI"/>
+              </a:rPr>
               <a:t>SCALING</a:t>
             </a:r>
           </a:p>
@@ -6497,7 +8496,7 @@
                           </a:solidFill>
                           <a:latin typeface="Consolas"/>
                         </a:rPr>
-                        <a:t>65 721</a:t>
+                        <a:t>73 397</a:t>
                       </a:r>
                     </a:p>
                   </a:txBody>
@@ -6543,7 +8542,7 @@
                           </a:solidFill>
                           <a:latin typeface="Consolas"/>
                         </a:rPr>
-                        <a:t>2.00 of 2</a:t>
+                        <a:t>1.99 of 2</a:t>
                       </a:r>
                     </a:p>
                   </a:txBody>
@@ -6566,7 +8565,7 @@
                           </a:solidFill>
                           <a:latin typeface="Consolas"/>
                         </a:rPr>
-                        <a:t>0.25</a:t>
+                        <a:t>0.39</a:t>
                       </a:r>
                     </a:p>
                   </a:txBody>
@@ -6589,7 +8588,7 @@
                           </a:solidFill>
                           <a:latin typeface="Consolas"/>
                         </a:rPr>
-                        <a:t>28.5%</a:t>
+                        <a:t>26.5%</a:t>
                       </a:r>
                     </a:p>
                   </a:txBody>
@@ -6637,7 +8636,7 @@
                           </a:solidFill>
                           <a:latin typeface="Consolas"/>
                         </a:rPr>
-                        <a:t>129 056</a:t>
+                        <a:t>146 063</a:t>
                       </a:r>
                     </a:p>
                   </a:txBody>
@@ -6660,7 +8659,7 @@
                           </a:solidFill>
                           <a:latin typeface="Consolas"/>
                         </a:rPr>
-                        <a:t>1.96×</a:t>
+                        <a:t>1.99×</a:t>
                       </a:r>
                     </a:p>
                   </a:txBody>
@@ -6683,7 +8682,7 @@
                           </a:solidFill>
                           <a:latin typeface="Consolas"/>
                         </a:rPr>
-                        <a:t>3.94 of 4</a:t>
+                        <a:t>3.89 of 4</a:t>
                       </a:r>
                     </a:p>
                   </a:txBody>
@@ -6706,7 +8705,7 @@
                           </a:solidFill>
                           <a:latin typeface="Consolas"/>
                         </a:rPr>
-                        <a:t>0.39</a:t>
+                        <a:t>0.78</a:t>
                       </a:r>
                     </a:p>
                   </a:txBody>
@@ -6729,7 +8728,7 @@
                           </a:solidFill>
                           <a:latin typeface="Consolas"/>
                         </a:rPr>
-                        <a:t>51.6%</a:t>
+                        <a:t>47.3%</a:t>
                       </a:r>
                     </a:p>
                   </a:txBody>
@@ -6775,1866 +8774,6 @@
                 <a:latin typeface="Segoe UI"/>
               </a:rPr>
               <a:t>A unit is one core and one degree of parallelism, bought together — a KPU.  Flink used every core it was given; the broker stayed under half a core.</a:t>
-            </a:r>
-          </a:p>
-        </p:txBody>
-      </p:sp>
-    </p:spTree>
-  </p:cSld>
-  <p:clrMapOvr>
-    <a:masterClrMapping/>
-  </p:clrMapOvr>
-</p:sld>
-</file>
-
-<file path=ppt/slides/slide7.xml><?xml version="1.0" encoding="utf-8"?>
-<p:sld xmlns:a="http://schemas.openxmlformats.org/drawingml/2006/main" xmlns:p="http://schemas.openxmlformats.org/presentationml/2006/main" xmlns:r="http://schemas.openxmlformats.org/officeDocument/2006/relationships">
-  <p:cSld>
-    <p:spTree>
-      <p:nvGrpSpPr>
-        <p:cNvPr id="1" name=""/>
-        <p:cNvGrpSpPr/>
-        <p:nvPr/>
-      </p:nvGrpSpPr>
-      <p:grpSpPr/>
-      <p:sp>
-        <p:nvSpPr>
-          <p:cNvPr id="2" name="TextBox 1"/>
-          <p:cNvSpPr txBox="1"/>
-          <p:nvPr/>
-        </p:nvSpPr>
-        <p:spPr>
-          <a:xfrm>
-            <a:off x="640080" y="475488"/>
-            <a:ext cx="10972800" cy="274320"/>
-          </a:xfrm>
-          <a:prstGeom prst="rect">
-            <a:avLst/>
-          </a:prstGeom>
-          <a:noFill/>
-        </p:spPr>
-        <p:txBody>
-          <a:bodyPr wrap="square">
-            <a:spAutoFit/>
-          </a:bodyPr>
-          <a:lstStyle/>
-          <a:p>
-            <a:pPr algn="l"/>
-            <a:r>
-              <a:rPr sz="1150" b="1" i="0" spc="120">
-                <a:solidFill>
-                  <a:srgbClr val="1B6B8A"/>
-                </a:solidFill>
-                <a:latin typeface="Segoe UI"/>
-              </a:rPr>
-              <a:t>SCALING</a:t>
-            </a:r>
-          </a:p>
-        </p:txBody>
-      </p:sp>
-      <p:sp>
-        <p:nvSpPr>
-          <p:cNvPr id="3" name="TextBox 2"/>
-          <p:cNvSpPr txBox="1"/>
-          <p:nvPr/>
-        </p:nvSpPr>
-        <p:spPr>
-          <a:xfrm>
-            <a:off x="640080" y="786384"/>
-            <a:ext cx="10972800" cy="731520"/>
-          </a:xfrm>
-          <a:prstGeom prst="rect">
-            <a:avLst/>
-          </a:prstGeom>
-          <a:noFill/>
-        </p:spPr>
-        <p:txBody>
-          <a:bodyPr wrap="square">
-            <a:spAutoFit/>
-          </a:bodyPr>
-          <a:lstStyle/>
-          <a:p>
-            <a:pPr algn="l"/>
-            <a:r>
-              <a:rPr sz="3000" b="1" i="0">
-                <a:solidFill>
-                  <a:srgbClr val="14222E"/>
-                </a:solidFill>
-                <a:latin typeface="Segoe UI"/>
-              </a:rPr>
-              <a:t>Two units, then four — against a perfect 2x</a:t>
-            </a:r>
-          </a:p>
-        </p:txBody>
-      </p:sp>
-      <p:sp>
-        <p:nvSpPr>
-          <p:cNvPr id="4" name="Rectangle 3"/>
-          <p:cNvSpPr/>
-          <p:nvPr/>
-        </p:nvSpPr>
-        <p:spPr>
-          <a:xfrm>
-            <a:off x="640080" y="1444752"/>
-            <a:ext cx="10908792" cy="12700"/>
-          </a:xfrm>
-          <a:prstGeom prst="rect">
-            <a:avLst/>
-          </a:prstGeom>
-          <a:solidFill>
-            <a:srgbClr val="D8DFE4"/>
-          </a:solidFill>
-          <a:ln>
-            <a:noFill/>
-          </a:ln>
-          <a:effectLst/>
-        </p:spPr>
-        <p:style>
-          <a:lnRef idx="1">
-            <a:schemeClr val="accent1"/>
-          </a:lnRef>
-          <a:fillRef idx="3">
-            <a:schemeClr val="accent1"/>
-          </a:fillRef>
-          <a:effectRef idx="2">
-            <a:schemeClr val="accent1"/>
-          </a:effectRef>
-          <a:fontRef idx="minor">
-            <a:schemeClr val="lt1"/>
-          </a:fontRef>
-        </p:style>
-        <p:txBody>
-          <a:bodyPr rtlCol="0" anchor="ctr"/>
-          <a:lstStyle/>
-          <a:p>
-            <a:pPr algn="ctr"/>
-          </a:p>
-        </p:txBody>
-      </p:sp>
-      <p:sp>
-        <p:nvSpPr>
-          <p:cNvPr id="5" name="Rectangle 4"/>
-          <p:cNvSpPr/>
-          <p:nvPr/>
-        </p:nvSpPr>
-        <p:spPr>
-          <a:xfrm>
-            <a:off x="1051560" y="5138928"/>
-            <a:ext cx="5394960" cy="15875"/>
-          </a:xfrm>
-          <a:prstGeom prst="rect">
-            <a:avLst/>
-          </a:prstGeom>
-          <a:solidFill>
-            <a:srgbClr val="D8DFE4"/>
-          </a:solidFill>
-          <a:ln>
-            <a:noFill/>
-          </a:ln>
-          <a:effectLst/>
-        </p:spPr>
-        <p:style>
-          <a:lnRef idx="1">
-            <a:schemeClr val="accent1"/>
-          </a:lnRef>
-          <a:fillRef idx="3">
-            <a:schemeClr val="accent1"/>
-          </a:fillRef>
-          <a:effectRef idx="2">
-            <a:schemeClr val="accent1"/>
-          </a:effectRef>
-          <a:fontRef idx="minor">
-            <a:schemeClr val="lt1"/>
-          </a:fontRef>
-        </p:style>
-        <p:txBody>
-          <a:bodyPr rtlCol="0" anchor="ctr"/>
-          <a:lstStyle/>
-          <a:p>
-            <a:pPr algn="ctr"/>
-          </a:p>
-        </p:txBody>
-      </p:sp>
-      <p:sp>
-        <p:nvSpPr>
-          <p:cNvPr id="6" name="Rectangle 5"/>
-          <p:cNvSpPr/>
-          <p:nvPr/>
-        </p:nvSpPr>
-        <p:spPr>
-          <a:xfrm>
-            <a:off x="1188720" y="2202845"/>
-            <a:ext cx="128016" cy="20320"/>
-          </a:xfrm>
-          <a:prstGeom prst="rect">
-            <a:avLst/>
-          </a:prstGeom>
-          <a:solidFill>
-            <a:srgbClr val="A84B2A"/>
-          </a:solidFill>
-          <a:ln>
-            <a:noFill/>
-          </a:ln>
-          <a:effectLst/>
-        </p:spPr>
-        <p:style>
-          <a:lnRef idx="1">
-            <a:schemeClr val="accent1"/>
-          </a:lnRef>
-          <a:fillRef idx="3">
-            <a:schemeClr val="accent1"/>
-          </a:fillRef>
-          <a:effectRef idx="2">
-            <a:schemeClr val="accent1"/>
-          </a:effectRef>
-          <a:fontRef idx="minor">
-            <a:schemeClr val="lt1"/>
-          </a:fontRef>
-        </p:style>
-        <p:txBody>
-          <a:bodyPr rtlCol="0" anchor="ctr"/>
-          <a:lstStyle/>
-          <a:p>
-            <a:pPr algn="ctr"/>
-          </a:p>
-        </p:txBody>
-      </p:sp>
-      <p:sp>
-        <p:nvSpPr>
-          <p:cNvPr id="7" name="Rectangle 6"/>
-          <p:cNvSpPr/>
-          <p:nvPr/>
-        </p:nvSpPr>
-        <p:spPr>
-          <a:xfrm>
-            <a:off x="1426464" y="2202845"/>
-            <a:ext cx="128016" cy="20320"/>
-          </a:xfrm>
-          <a:prstGeom prst="rect">
-            <a:avLst/>
-          </a:prstGeom>
-          <a:solidFill>
-            <a:srgbClr val="A84B2A"/>
-          </a:solidFill>
-          <a:ln>
-            <a:noFill/>
-          </a:ln>
-          <a:effectLst/>
-        </p:spPr>
-        <p:style>
-          <a:lnRef idx="1">
-            <a:schemeClr val="accent1"/>
-          </a:lnRef>
-          <a:fillRef idx="3">
-            <a:schemeClr val="accent1"/>
-          </a:fillRef>
-          <a:effectRef idx="2">
-            <a:schemeClr val="accent1"/>
-          </a:effectRef>
-          <a:fontRef idx="minor">
-            <a:schemeClr val="lt1"/>
-          </a:fontRef>
-        </p:style>
-        <p:txBody>
-          <a:bodyPr rtlCol="0" anchor="ctr"/>
-          <a:lstStyle/>
-          <a:p>
-            <a:pPr algn="ctr"/>
-          </a:p>
-        </p:txBody>
-      </p:sp>
-      <p:sp>
-        <p:nvSpPr>
-          <p:cNvPr id="8" name="Rectangle 7"/>
-          <p:cNvSpPr/>
-          <p:nvPr/>
-        </p:nvSpPr>
-        <p:spPr>
-          <a:xfrm>
-            <a:off x="1664208" y="2202845"/>
-            <a:ext cx="128016" cy="20320"/>
-          </a:xfrm>
-          <a:prstGeom prst="rect">
-            <a:avLst/>
-          </a:prstGeom>
-          <a:solidFill>
-            <a:srgbClr val="A84B2A"/>
-          </a:solidFill>
-          <a:ln>
-            <a:noFill/>
-          </a:ln>
-          <a:effectLst/>
-        </p:spPr>
-        <p:style>
-          <a:lnRef idx="1">
-            <a:schemeClr val="accent1"/>
-          </a:lnRef>
-          <a:fillRef idx="3">
-            <a:schemeClr val="accent1"/>
-          </a:fillRef>
-          <a:effectRef idx="2">
-            <a:schemeClr val="accent1"/>
-          </a:effectRef>
-          <a:fontRef idx="minor">
-            <a:schemeClr val="lt1"/>
-          </a:fontRef>
-        </p:style>
-        <p:txBody>
-          <a:bodyPr rtlCol="0" anchor="ctr"/>
-          <a:lstStyle/>
-          <a:p>
-            <a:pPr algn="ctr"/>
-          </a:p>
-        </p:txBody>
-      </p:sp>
-      <p:sp>
-        <p:nvSpPr>
-          <p:cNvPr id="9" name="Rectangle 8"/>
-          <p:cNvSpPr/>
-          <p:nvPr/>
-        </p:nvSpPr>
-        <p:spPr>
-          <a:xfrm>
-            <a:off x="1901952" y="2202845"/>
-            <a:ext cx="128016" cy="20320"/>
-          </a:xfrm>
-          <a:prstGeom prst="rect">
-            <a:avLst/>
-          </a:prstGeom>
-          <a:solidFill>
-            <a:srgbClr val="A84B2A"/>
-          </a:solidFill>
-          <a:ln>
-            <a:noFill/>
-          </a:ln>
-          <a:effectLst/>
-        </p:spPr>
-        <p:style>
-          <a:lnRef idx="1">
-            <a:schemeClr val="accent1"/>
-          </a:lnRef>
-          <a:fillRef idx="3">
-            <a:schemeClr val="accent1"/>
-          </a:fillRef>
-          <a:effectRef idx="2">
-            <a:schemeClr val="accent1"/>
-          </a:effectRef>
-          <a:fontRef idx="minor">
-            <a:schemeClr val="lt1"/>
-          </a:fontRef>
-        </p:style>
-        <p:txBody>
-          <a:bodyPr rtlCol="0" anchor="ctr"/>
-          <a:lstStyle/>
-          <a:p>
-            <a:pPr algn="ctr"/>
-          </a:p>
-        </p:txBody>
-      </p:sp>
-      <p:sp>
-        <p:nvSpPr>
-          <p:cNvPr id="10" name="Rectangle 9"/>
-          <p:cNvSpPr/>
-          <p:nvPr/>
-        </p:nvSpPr>
-        <p:spPr>
-          <a:xfrm>
-            <a:off x="2139696" y="2202845"/>
-            <a:ext cx="128016" cy="20320"/>
-          </a:xfrm>
-          <a:prstGeom prst="rect">
-            <a:avLst/>
-          </a:prstGeom>
-          <a:solidFill>
-            <a:srgbClr val="A84B2A"/>
-          </a:solidFill>
-          <a:ln>
-            <a:noFill/>
-          </a:ln>
-          <a:effectLst/>
-        </p:spPr>
-        <p:style>
-          <a:lnRef idx="1">
-            <a:schemeClr val="accent1"/>
-          </a:lnRef>
-          <a:fillRef idx="3">
-            <a:schemeClr val="accent1"/>
-          </a:fillRef>
-          <a:effectRef idx="2">
-            <a:schemeClr val="accent1"/>
-          </a:effectRef>
-          <a:fontRef idx="minor">
-            <a:schemeClr val="lt1"/>
-          </a:fontRef>
-        </p:style>
-        <p:txBody>
-          <a:bodyPr rtlCol="0" anchor="ctr"/>
-          <a:lstStyle/>
-          <a:p>
-            <a:pPr algn="ctr"/>
-          </a:p>
-        </p:txBody>
-      </p:sp>
-      <p:sp>
-        <p:nvSpPr>
-          <p:cNvPr id="11" name="Rectangle 10"/>
-          <p:cNvSpPr/>
-          <p:nvPr/>
-        </p:nvSpPr>
-        <p:spPr>
-          <a:xfrm>
-            <a:off x="2377440" y="2202845"/>
-            <a:ext cx="128016" cy="20320"/>
-          </a:xfrm>
-          <a:prstGeom prst="rect">
-            <a:avLst/>
-          </a:prstGeom>
-          <a:solidFill>
-            <a:srgbClr val="A84B2A"/>
-          </a:solidFill>
-          <a:ln>
-            <a:noFill/>
-          </a:ln>
-          <a:effectLst/>
-        </p:spPr>
-        <p:style>
-          <a:lnRef idx="1">
-            <a:schemeClr val="accent1"/>
-          </a:lnRef>
-          <a:fillRef idx="3">
-            <a:schemeClr val="accent1"/>
-          </a:fillRef>
-          <a:effectRef idx="2">
-            <a:schemeClr val="accent1"/>
-          </a:effectRef>
-          <a:fontRef idx="minor">
-            <a:schemeClr val="lt1"/>
-          </a:fontRef>
-        </p:style>
-        <p:txBody>
-          <a:bodyPr rtlCol="0" anchor="ctr"/>
-          <a:lstStyle/>
-          <a:p>
-            <a:pPr algn="ctr"/>
-          </a:p>
-        </p:txBody>
-      </p:sp>
-      <p:sp>
-        <p:nvSpPr>
-          <p:cNvPr id="12" name="Rectangle 11"/>
-          <p:cNvSpPr/>
-          <p:nvPr/>
-        </p:nvSpPr>
-        <p:spPr>
-          <a:xfrm>
-            <a:off x="2615184" y="2202845"/>
-            <a:ext cx="128016" cy="20320"/>
-          </a:xfrm>
-          <a:prstGeom prst="rect">
-            <a:avLst/>
-          </a:prstGeom>
-          <a:solidFill>
-            <a:srgbClr val="A84B2A"/>
-          </a:solidFill>
-          <a:ln>
-            <a:noFill/>
-          </a:ln>
-          <a:effectLst/>
-        </p:spPr>
-        <p:style>
-          <a:lnRef idx="1">
-            <a:schemeClr val="accent1"/>
-          </a:lnRef>
-          <a:fillRef idx="3">
-            <a:schemeClr val="accent1"/>
-          </a:fillRef>
-          <a:effectRef idx="2">
-            <a:schemeClr val="accent1"/>
-          </a:effectRef>
-          <a:fontRef idx="minor">
-            <a:schemeClr val="lt1"/>
-          </a:fontRef>
-        </p:style>
-        <p:txBody>
-          <a:bodyPr rtlCol="0" anchor="ctr"/>
-          <a:lstStyle/>
-          <a:p>
-            <a:pPr algn="ctr"/>
-          </a:p>
-        </p:txBody>
-      </p:sp>
-      <p:sp>
-        <p:nvSpPr>
-          <p:cNvPr id="13" name="Rectangle 12"/>
-          <p:cNvSpPr/>
-          <p:nvPr/>
-        </p:nvSpPr>
-        <p:spPr>
-          <a:xfrm>
-            <a:off x="2852928" y="2202845"/>
-            <a:ext cx="128016" cy="20320"/>
-          </a:xfrm>
-          <a:prstGeom prst="rect">
-            <a:avLst/>
-          </a:prstGeom>
-          <a:solidFill>
-            <a:srgbClr val="A84B2A"/>
-          </a:solidFill>
-          <a:ln>
-            <a:noFill/>
-          </a:ln>
-          <a:effectLst/>
-        </p:spPr>
-        <p:style>
-          <a:lnRef idx="1">
-            <a:schemeClr val="accent1"/>
-          </a:lnRef>
-          <a:fillRef idx="3">
-            <a:schemeClr val="accent1"/>
-          </a:fillRef>
-          <a:effectRef idx="2">
-            <a:schemeClr val="accent1"/>
-          </a:effectRef>
-          <a:fontRef idx="minor">
-            <a:schemeClr val="lt1"/>
-          </a:fontRef>
-        </p:style>
-        <p:txBody>
-          <a:bodyPr rtlCol="0" anchor="ctr"/>
-          <a:lstStyle/>
-          <a:p>
-            <a:pPr algn="ctr"/>
-          </a:p>
-        </p:txBody>
-      </p:sp>
-      <p:sp>
-        <p:nvSpPr>
-          <p:cNvPr id="14" name="Rectangle 13"/>
-          <p:cNvSpPr/>
-          <p:nvPr/>
-        </p:nvSpPr>
-        <p:spPr>
-          <a:xfrm>
-            <a:off x="3090672" y="2202845"/>
-            <a:ext cx="128016" cy="20320"/>
-          </a:xfrm>
-          <a:prstGeom prst="rect">
-            <a:avLst/>
-          </a:prstGeom>
-          <a:solidFill>
-            <a:srgbClr val="A84B2A"/>
-          </a:solidFill>
-          <a:ln>
-            <a:noFill/>
-          </a:ln>
-          <a:effectLst/>
-        </p:spPr>
-        <p:style>
-          <a:lnRef idx="1">
-            <a:schemeClr val="accent1"/>
-          </a:lnRef>
-          <a:fillRef idx="3">
-            <a:schemeClr val="accent1"/>
-          </a:fillRef>
-          <a:effectRef idx="2">
-            <a:schemeClr val="accent1"/>
-          </a:effectRef>
-          <a:fontRef idx="minor">
-            <a:schemeClr val="lt1"/>
-          </a:fontRef>
-        </p:style>
-        <p:txBody>
-          <a:bodyPr rtlCol="0" anchor="ctr"/>
-          <a:lstStyle/>
-          <a:p>
-            <a:pPr algn="ctr"/>
-          </a:p>
-        </p:txBody>
-      </p:sp>
-      <p:sp>
-        <p:nvSpPr>
-          <p:cNvPr id="15" name="Rectangle 14"/>
-          <p:cNvSpPr/>
-          <p:nvPr/>
-        </p:nvSpPr>
-        <p:spPr>
-          <a:xfrm>
-            <a:off x="3328416" y="2202845"/>
-            <a:ext cx="128016" cy="20320"/>
-          </a:xfrm>
-          <a:prstGeom prst="rect">
-            <a:avLst/>
-          </a:prstGeom>
-          <a:solidFill>
-            <a:srgbClr val="A84B2A"/>
-          </a:solidFill>
-          <a:ln>
-            <a:noFill/>
-          </a:ln>
-          <a:effectLst/>
-        </p:spPr>
-        <p:style>
-          <a:lnRef idx="1">
-            <a:schemeClr val="accent1"/>
-          </a:lnRef>
-          <a:fillRef idx="3">
-            <a:schemeClr val="accent1"/>
-          </a:fillRef>
-          <a:effectRef idx="2">
-            <a:schemeClr val="accent1"/>
-          </a:effectRef>
-          <a:fontRef idx="minor">
-            <a:schemeClr val="lt1"/>
-          </a:fontRef>
-        </p:style>
-        <p:txBody>
-          <a:bodyPr rtlCol="0" anchor="ctr"/>
-          <a:lstStyle/>
-          <a:p>
-            <a:pPr algn="ctr"/>
-          </a:p>
-        </p:txBody>
-      </p:sp>
-      <p:sp>
-        <p:nvSpPr>
-          <p:cNvPr id="16" name="Rectangle 15"/>
-          <p:cNvSpPr/>
-          <p:nvPr/>
-        </p:nvSpPr>
-        <p:spPr>
-          <a:xfrm>
-            <a:off x="3566160" y="2202845"/>
-            <a:ext cx="128016" cy="20320"/>
-          </a:xfrm>
-          <a:prstGeom prst="rect">
-            <a:avLst/>
-          </a:prstGeom>
-          <a:solidFill>
-            <a:srgbClr val="A84B2A"/>
-          </a:solidFill>
-          <a:ln>
-            <a:noFill/>
-          </a:ln>
-          <a:effectLst/>
-        </p:spPr>
-        <p:style>
-          <a:lnRef idx="1">
-            <a:schemeClr val="accent1"/>
-          </a:lnRef>
-          <a:fillRef idx="3">
-            <a:schemeClr val="accent1"/>
-          </a:fillRef>
-          <a:effectRef idx="2">
-            <a:schemeClr val="accent1"/>
-          </a:effectRef>
-          <a:fontRef idx="minor">
-            <a:schemeClr val="lt1"/>
-          </a:fontRef>
-        </p:style>
-        <p:txBody>
-          <a:bodyPr rtlCol="0" anchor="ctr"/>
-          <a:lstStyle/>
-          <a:p>
-            <a:pPr algn="ctr"/>
-          </a:p>
-        </p:txBody>
-      </p:sp>
-      <p:sp>
-        <p:nvSpPr>
-          <p:cNvPr id="17" name="Rectangle 16"/>
-          <p:cNvSpPr/>
-          <p:nvPr/>
-        </p:nvSpPr>
-        <p:spPr>
-          <a:xfrm>
-            <a:off x="3803904" y="2202845"/>
-            <a:ext cx="128016" cy="20320"/>
-          </a:xfrm>
-          <a:prstGeom prst="rect">
-            <a:avLst/>
-          </a:prstGeom>
-          <a:solidFill>
-            <a:srgbClr val="A84B2A"/>
-          </a:solidFill>
-          <a:ln>
-            <a:noFill/>
-          </a:ln>
-          <a:effectLst/>
-        </p:spPr>
-        <p:style>
-          <a:lnRef idx="1">
-            <a:schemeClr val="accent1"/>
-          </a:lnRef>
-          <a:fillRef idx="3">
-            <a:schemeClr val="accent1"/>
-          </a:fillRef>
-          <a:effectRef idx="2">
-            <a:schemeClr val="accent1"/>
-          </a:effectRef>
-          <a:fontRef idx="minor">
-            <a:schemeClr val="lt1"/>
-          </a:fontRef>
-        </p:style>
-        <p:txBody>
-          <a:bodyPr rtlCol="0" anchor="ctr"/>
-          <a:lstStyle/>
-          <a:p>
-            <a:pPr algn="ctr"/>
-          </a:p>
-        </p:txBody>
-      </p:sp>
-      <p:sp>
-        <p:nvSpPr>
-          <p:cNvPr id="18" name="Rectangle 17"/>
-          <p:cNvSpPr/>
-          <p:nvPr/>
-        </p:nvSpPr>
-        <p:spPr>
-          <a:xfrm>
-            <a:off x="4041648" y="2202845"/>
-            <a:ext cx="128016" cy="20320"/>
-          </a:xfrm>
-          <a:prstGeom prst="rect">
-            <a:avLst/>
-          </a:prstGeom>
-          <a:solidFill>
-            <a:srgbClr val="A84B2A"/>
-          </a:solidFill>
-          <a:ln>
-            <a:noFill/>
-          </a:ln>
-          <a:effectLst/>
-        </p:spPr>
-        <p:style>
-          <a:lnRef idx="1">
-            <a:schemeClr val="accent1"/>
-          </a:lnRef>
-          <a:fillRef idx="3">
-            <a:schemeClr val="accent1"/>
-          </a:fillRef>
-          <a:effectRef idx="2">
-            <a:schemeClr val="accent1"/>
-          </a:effectRef>
-          <a:fontRef idx="minor">
-            <a:schemeClr val="lt1"/>
-          </a:fontRef>
-        </p:style>
-        <p:txBody>
-          <a:bodyPr rtlCol="0" anchor="ctr"/>
-          <a:lstStyle/>
-          <a:p>
-            <a:pPr algn="ctr"/>
-          </a:p>
-        </p:txBody>
-      </p:sp>
-      <p:sp>
-        <p:nvSpPr>
-          <p:cNvPr id="19" name="Rectangle 18"/>
-          <p:cNvSpPr/>
-          <p:nvPr/>
-        </p:nvSpPr>
-        <p:spPr>
-          <a:xfrm>
-            <a:off x="4279392" y="2202845"/>
-            <a:ext cx="128016" cy="20320"/>
-          </a:xfrm>
-          <a:prstGeom prst="rect">
-            <a:avLst/>
-          </a:prstGeom>
-          <a:solidFill>
-            <a:srgbClr val="A84B2A"/>
-          </a:solidFill>
-          <a:ln>
-            <a:noFill/>
-          </a:ln>
-          <a:effectLst/>
-        </p:spPr>
-        <p:style>
-          <a:lnRef idx="1">
-            <a:schemeClr val="accent1"/>
-          </a:lnRef>
-          <a:fillRef idx="3">
-            <a:schemeClr val="accent1"/>
-          </a:fillRef>
-          <a:effectRef idx="2">
-            <a:schemeClr val="accent1"/>
-          </a:effectRef>
-          <a:fontRef idx="minor">
-            <a:schemeClr val="lt1"/>
-          </a:fontRef>
-        </p:style>
-        <p:txBody>
-          <a:bodyPr rtlCol="0" anchor="ctr"/>
-          <a:lstStyle/>
-          <a:p>
-            <a:pPr algn="ctr"/>
-          </a:p>
-        </p:txBody>
-      </p:sp>
-      <p:sp>
-        <p:nvSpPr>
-          <p:cNvPr id="20" name="Rectangle 19"/>
-          <p:cNvSpPr/>
-          <p:nvPr/>
-        </p:nvSpPr>
-        <p:spPr>
-          <a:xfrm>
-            <a:off x="4517136" y="2202845"/>
-            <a:ext cx="128016" cy="20320"/>
-          </a:xfrm>
-          <a:prstGeom prst="rect">
-            <a:avLst/>
-          </a:prstGeom>
-          <a:solidFill>
-            <a:srgbClr val="A84B2A"/>
-          </a:solidFill>
-          <a:ln>
-            <a:noFill/>
-          </a:ln>
-          <a:effectLst/>
-        </p:spPr>
-        <p:style>
-          <a:lnRef idx="1">
-            <a:schemeClr val="accent1"/>
-          </a:lnRef>
-          <a:fillRef idx="3">
-            <a:schemeClr val="accent1"/>
-          </a:fillRef>
-          <a:effectRef idx="2">
-            <a:schemeClr val="accent1"/>
-          </a:effectRef>
-          <a:fontRef idx="minor">
-            <a:schemeClr val="lt1"/>
-          </a:fontRef>
-        </p:style>
-        <p:txBody>
-          <a:bodyPr rtlCol="0" anchor="ctr"/>
-          <a:lstStyle/>
-          <a:p>
-            <a:pPr algn="ctr"/>
-          </a:p>
-        </p:txBody>
-      </p:sp>
-      <p:sp>
-        <p:nvSpPr>
-          <p:cNvPr id="21" name="Rectangle 20"/>
-          <p:cNvSpPr/>
-          <p:nvPr/>
-        </p:nvSpPr>
-        <p:spPr>
-          <a:xfrm>
-            <a:off x="4754880" y="2202845"/>
-            <a:ext cx="128016" cy="20320"/>
-          </a:xfrm>
-          <a:prstGeom prst="rect">
-            <a:avLst/>
-          </a:prstGeom>
-          <a:solidFill>
-            <a:srgbClr val="A84B2A"/>
-          </a:solidFill>
-          <a:ln>
-            <a:noFill/>
-          </a:ln>
-          <a:effectLst/>
-        </p:spPr>
-        <p:style>
-          <a:lnRef idx="1">
-            <a:schemeClr val="accent1"/>
-          </a:lnRef>
-          <a:fillRef idx="3">
-            <a:schemeClr val="accent1"/>
-          </a:fillRef>
-          <a:effectRef idx="2">
-            <a:schemeClr val="accent1"/>
-          </a:effectRef>
-          <a:fontRef idx="minor">
-            <a:schemeClr val="lt1"/>
-          </a:fontRef>
-        </p:style>
-        <p:txBody>
-          <a:bodyPr rtlCol="0" anchor="ctr"/>
-          <a:lstStyle/>
-          <a:p>
-            <a:pPr algn="ctr"/>
-          </a:p>
-        </p:txBody>
-      </p:sp>
-      <p:sp>
-        <p:nvSpPr>
-          <p:cNvPr id="22" name="Rectangle 21"/>
-          <p:cNvSpPr/>
-          <p:nvPr/>
-        </p:nvSpPr>
-        <p:spPr>
-          <a:xfrm>
-            <a:off x="4992624" y="2202845"/>
-            <a:ext cx="128016" cy="20320"/>
-          </a:xfrm>
-          <a:prstGeom prst="rect">
-            <a:avLst/>
-          </a:prstGeom>
-          <a:solidFill>
-            <a:srgbClr val="A84B2A"/>
-          </a:solidFill>
-          <a:ln>
-            <a:noFill/>
-          </a:ln>
-          <a:effectLst/>
-        </p:spPr>
-        <p:style>
-          <a:lnRef idx="1">
-            <a:schemeClr val="accent1"/>
-          </a:lnRef>
-          <a:fillRef idx="3">
-            <a:schemeClr val="accent1"/>
-          </a:fillRef>
-          <a:effectRef idx="2">
-            <a:schemeClr val="accent1"/>
-          </a:effectRef>
-          <a:fontRef idx="minor">
-            <a:schemeClr val="lt1"/>
-          </a:fontRef>
-        </p:style>
-        <p:txBody>
-          <a:bodyPr rtlCol="0" anchor="ctr"/>
-          <a:lstStyle/>
-          <a:p>
-            <a:pPr algn="ctr"/>
-          </a:p>
-        </p:txBody>
-      </p:sp>
-      <p:sp>
-        <p:nvSpPr>
-          <p:cNvPr id="23" name="Rectangle 22"/>
-          <p:cNvSpPr/>
-          <p:nvPr/>
-        </p:nvSpPr>
-        <p:spPr>
-          <a:xfrm>
-            <a:off x="5230368" y="2202845"/>
-            <a:ext cx="128016" cy="20320"/>
-          </a:xfrm>
-          <a:prstGeom prst="rect">
-            <a:avLst/>
-          </a:prstGeom>
-          <a:solidFill>
-            <a:srgbClr val="A84B2A"/>
-          </a:solidFill>
-          <a:ln>
-            <a:noFill/>
-          </a:ln>
-          <a:effectLst/>
-        </p:spPr>
-        <p:style>
-          <a:lnRef idx="1">
-            <a:schemeClr val="accent1"/>
-          </a:lnRef>
-          <a:fillRef idx="3">
-            <a:schemeClr val="accent1"/>
-          </a:fillRef>
-          <a:effectRef idx="2">
-            <a:schemeClr val="accent1"/>
-          </a:effectRef>
-          <a:fontRef idx="minor">
-            <a:schemeClr val="lt1"/>
-          </a:fontRef>
-        </p:style>
-        <p:txBody>
-          <a:bodyPr rtlCol="0" anchor="ctr"/>
-          <a:lstStyle/>
-          <a:p>
-            <a:pPr algn="ctr"/>
-          </a:p>
-        </p:txBody>
-      </p:sp>
-      <p:sp>
-        <p:nvSpPr>
-          <p:cNvPr id="24" name="Rectangle 23"/>
-          <p:cNvSpPr/>
-          <p:nvPr/>
-        </p:nvSpPr>
-        <p:spPr>
-          <a:xfrm>
-            <a:off x="5468112" y="2202845"/>
-            <a:ext cx="128016" cy="20320"/>
-          </a:xfrm>
-          <a:prstGeom prst="rect">
-            <a:avLst/>
-          </a:prstGeom>
-          <a:solidFill>
-            <a:srgbClr val="A84B2A"/>
-          </a:solidFill>
-          <a:ln>
-            <a:noFill/>
-          </a:ln>
-          <a:effectLst/>
-        </p:spPr>
-        <p:style>
-          <a:lnRef idx="1">
-            <a:schemeClr val="accent1"/>
-          </a:lnRef>
-          <a:fillRef idx="3">
-            <a:schemeClr val="accent1"/>
-          </a:fillRef>
-          <a:effectRef idx="2">
-            <a:schemeClr val="accent1"/>
-          </a:effectRef>
-          <a:fontRef idx="minor">
-            <a:schemeClr val="lt1"/>
-          </a:fontRef>
-        </p:style>
-        <p:txBody>
-          <a:bodyPr rtlCol="0" anchor="ctr"/>
-          <a:lstStyle/>
-          <a:p>
-            <a:pPr algn="ctr"/>
-          </a:p>
-        </p:txBody>
-      </p:sp>
-      <p:sp>
-        <p:nvSpPr>
-          <p:cNvPr id="25" name="Rectangle 24"/>
-          <p:cNvSpPr/>
-          <p:nvPr/>
-        </p:nvSpPr>
-        <p:spPr>
-          <a:xfrm>
-            <a:off x="5705856" y="2202845"/>
-            <a:ext cx="128016" cy="20320"/>
-          </a:xfrm>
-          <a:prstGeom prst="rect">
-            <a:avLst/>
-          </a:prstGeom>
-          <a:solidFill>
-            <a:srgbClr val="A84B2A"/>
-          </a:solidFill>
-          <a:ln>
-            <a:noFill/>
-          </a:ln>
-          <a:effectLst/>
-        </p:spPr>
-        <p:style>
-          <a:lnRef idx="1">
-            <a:schemeClr val="accent1"/>
-          </a:lnRef>
-          <a:fillRef idx="3">
-            <a:schemeClr val="accent1"/>
-          </a:fillRef>
-          <a:effectRef idx="2">
-            <a:schemeClr val="accent1"/>
-          </a:effectRef>
-          <a:fontRef idx="minor">
-            <a:schemeClr val="lt1"/>
-          </a:fontRef>
-        </p:style>
-        <p:txBody>
-          <a:bodyPr rtlCol="0" anchor="ctr"/>
-          <a:lstStyle/>
-          <a:p>
-            <a:pPr algn="ctr"/>
-          </a:p>
-        </p:txBody>
-      </p:sp>
-      <p:sp>
-        <p:nvSpPr>
-          <p:cNvPr id="26" name="Rectangle 25"/>
-          <p:cNvSpPr/>
-          <p:nvPr/>
-        </p:nvSpPr>
-        <p:spPr>
-          <a:xfrm>
-            <a:off x="5943600" y="2202845"/>
-            <a:ext cx="128016" cy="20320"/>
-          </a:xfrm>
-          <a:prstGeom prst="rect">
-            <a:avLst/>
-          </a:prstGeom>
-          <a:solidFill>
-            <a:srgbClr val="A84B2A"/>
-          </a:solidFill>
-          <a:ln>
-            <a:noFill/>
-          </a:ln>
-          <a:effectLst/>
-        </p:spPr>
-        <p:style>
-          <a:lnRef idx="1">
-            <a:schemeClr val="accent1"/>
-          </a:lnRef>
-          <a:fillRef idx="3">
-            <a:schemeClr val="accent1"/>
-          </a:fillRef>
-          <a:effectRef idx="2">
-            <a:schemeClr val="accent1"/>
-          </a:effectRef>
-          <a:fontRef idx="minor">
-            <a:schemeClr val="lt1"/>
-          </a:fontRef>
-        </p:style>
-        <p:txBody>
-          <a:bodyPr rtlCol="0" anchor="ctr"/>
-          <a:lstStyle/>
-          <a:p>
-            <a:pPr algn="ctr"/>
-          </a:p>
-        </p:txBody>
-      </p:sp>
-      <p:sp>
-        <p:nvSpPr>
-          <p:cNvPr id="27" name="Rectangle 26"/>
-          <p:cNvSpPr/>
-          <p:nvPr/>
-        </p:nvSpPr>
-        <p:spPr>
-          <a:xfrm>
-            <a:off x="6181344" y="2202845"/>
-            <a:ext cx="128016" cy="20320"/>
-          </a:xfrm>
-          <a:prstGeom prst="rect">
-            <a:avLst/>
-          </a:prstGeom>
-          <a:solidFill>
-            <a:srgbClr val="A84B2A"/>
-          </a:solidFill>
-          <a:ln>
-            <a:noFill/>
-          </a:ln>
-          <a:effectLst/>
-        </p:spPr>
-        <p:style>
-          <a:lnRef idx="1">
-            <a:schemeClr val="accent1"/>
-          </a:lnRef>
-          <a:fillRef idx="3">
-            <a:schemeClr val="accent1"/>
-          </a:fillRef>
-          <a:effectRef idx="2">
-            <a:schemeClr val="accent1"/>
-          </a:effectRef>
-          <a:fontRef idx="minor">
-            <a:schemeClr val="lt1"/>
-          </a:fontRef>
-        </p:style>
-        <p:txBody>
-          <a:bodyPr rtlCol="0" anchor="ctr"/>
-          <a:lstStyle/>
-          <a:p>
-            <a:pPr algn="ctr"/>
-          </a:p>
-        </p:txBody>
-      </p:sp>
-      <p:sp>
-        <p:nvSpPr>
-          <p:cNvPr id="28" name="TextBox 27"/>
-          <p:cNvSpPr txBox="1"/>
-          <p:nvPr/>
-        </p:nvSpPr>
-        <p:spPr>
-          <a:xfrm>
-            <a:off x="5074920" y="1910237"/>
-            <a:ext cx="2194560" cy="274320"/>
-          </a:xfrm>
-          <a:prstGeom prst="rect">
-            <a:avLst/>
-          </a:prstGeom>
-          <a:noFill/>
-        </p:spPr>
-        <p:txBody>
-          <a:bodyPr wrap="square">
-            <a:spAutoFit/>
-          </a:bodyPr>
-          <a:lstStyle/>
-          <a:p>
-            <a:pPr algn="l"/>
-            <a:r>
-              <a:rPr sz="1150" b="1" i="0">
-                <a:solidFill>
-                  <a:srgbClr val="A84B2A"/>
-                </a:solidFill>
-                <a:latin typeface="Segoe UI"/>
-              </a:rPr>
-              <a:t>perfect 2x  =  131,442</a:t>
-            </a:r>
-          </a:p>
-        </p:txBody>
-      </p:sp>
-      <p:sp>
-        <p:nvSpPr>
-          <p:cNvPr id="29" name="Rounded Rectangle 28"/>
-          <p:cNvSpPr/>
-          <p:nvPr/>
-        </p:nvSpPr>
-        <p:spPr>
-          <a:xfrm>
-            <a:off x="1600200" y="3670887"/>
-            <a:ext cx="1508760" cy="1468041"/>
-          </a:xfrm>
-          <a:prstGeom prst="roundRect">
-            <a:avLst/>
-          </a:prstGeom>
-          <a:solidFill>
-            <a:srgbClr val="9FC2D1"/>
-          </a:solidFill>
-          <a:ln>
-            <a:noFill/>
-          </a:ln>
-          <a:effectLst/>
-        </p:spPr>
-        <p:style>
-          <a:lnRef idx="1">
-            <a:schemeClr val="accent1"/>
-          </a:lnRef>
-          <a:fillRef idx="3">
-            <a:schemeClr val="accent1"/>
-          </a:fillRef>
-          <a:effectRef idx="2">
-            <a:schemeClr val="accent1"/>
-          </a:effectRef>
-          <a:fontRef idx="minor">
-            <a:schemeClr val="lt1"/>
-          </a:fontRef>
-        </p:style>
-        <p:txBody>
-          <a:bodyPr rtlCol="0" anchor="ctr"/>
-          <a:lstStyle/>
-          <a:p>
-            <a:pPr algn="ctr"/>
-          </a:p>
-        </p:txBody>
-      </p:sp>
-      <p:sp>
-        <p:nvSpPr>
-          <p:cNvPr id="30" name="TextBox 29"/>
-          <p:cNvSpPr txBox="1"/>
-          <p:nvPr/>
-        </p:nvSpPr>
-        <p:spPr>
-          <a:xfrm>
-            <a:off x="1280160" y="3250263"/>
-            <a:ext cx="2148840" cy="365760"/>
-          </a:xfrm>
-          <a:prstGeom prst="rect">
-            <a:avLst/>
-          </a:prstGeom>
-          <a:noFill/>
-        </p:spPr>
-        <p:txBody>
-          <a:bodyPr wrap="square">
-            <a:spAutoFit/>
-          </a:bodyPr>
-          <a:lstStyle/>
-          <a:p>
-            <a:pPr algn="ctr"/>
-            <a:r>
-              <a:rPr sz="1900" b="1" i="0">
-                <a:solidFill>
-                  <a:srgbClr val="14222E"/>
-                </a:solidFill>
-                <a:latin typeface="Segoe UI"/>
-              </a:rPr>
-              <a:t>65,721</a:t>
-            </a:r>
-          </a:p>
-        </p:txBody>
-      </p:sp>
-      <p:sp>
-        <p:nvSpPr>
-          <p:cNvPr id="31" name="TextBox 30"/>
-          <p:cNvSpPr txBox="1"/>
-          <p:nvPr/>
-        </p:nvSpPr>
-        <p:spPr>
-          <a:xfrm>
-            <a:off x="1280160" y="5230368"/>
-            <a:ext cx="2148840" cy="603504"/>
-          </a:xfrm>
-          <a:prstGeom prst="rect">
-            <a:avLst/>
-          </a:prstGeom>
-          <a:noFill/>
-        </p:spPr>
-        <p:txBody>
-          <a:bodyPr wrap="square">
-            <a:spAutoFit/>
-          </a:bodyPr>
-          <a:lstStyle/>
-          <a:p>
-            <a:pPr algn="ctr"/>
-            <a:r>
-              <a:rPr sz="1500" b="1" i="0">
-                <a:solidFill>
-                  <a:srgbClr val="14222E"/>
-                </a:solidFill>
-                <a:latin typeface="Segoe UI"/>
-              </a:rPr>
-              <a:t>2 units</a:t>
-            </a:r>
-          </a:p>
-          <a:p>
-            <a:pPr algn="ctr"/>
-            <a:r>
-              <a:rPr sz="1150" b="0" i="0">
-                <a:solidFill>
-                  <a:srgbClr val="6B7A87"/>
-                </a:solidFill>
-                <a:latin typeface="Segoe UI"/>
-              </a:rPr>
-              <a:t>2.00 of 2 cores used</a:t>
-            </a:r>
-          </a:p>
-        </p:txBody>
-      </p:sp>
-      <p:sp>
-        <p:nvSpPr>
-          <p:cNvPr id="32" name="Rounded Rectangle 31"/>
-          <p:cNvSpPr/>
-          <p:nvPr/>
-        </p:nvSpPr>
-        <p:spPr>
-          <a:xfrm>
-            <a:off x="3977639" y="2256142"/>
-            <a:ext cx="1508760" cy="2882786"/>
-          </a:xfrm>
-          <a:prstGeom prst="roundRect">
-            <a:avLst/>
-          </a:prstGeom>
-          <a:solidFill>
-            <a:srgbClr val="1B6B8A"/>
-          </a:solidFill>
-          <a:ln>
-            <a:noFill/>
-          </a:ln>
-          <a:effectLst/>
-        </p:spPr>
-        <p:style>
-          <a:lnRef idx="1">
-            <a:schemeClr val="accent1"/>
-          </a:lnRef>
-          <a:fillRef idx="3">
-            <a:schemeClr val="accent1"/>
-          </a:fillRef>
-          <a:effectRef idx="2">
-            <a:schemeClr val="accent1"/>
-          </a:effectRef>
-          <a:fontRef idx="minor">
-            <a:schemeClr val="lt1"/>
-          </a:fontRef>
-        </p:style>
-        <p:txBody>
-          <a:bodyPr rtlCol="0" anchor="ctr"/>
-          <a:lstStyle/>
-          <a:p>
-            <a:pPr algn="ctr"/>
-          </a:p>
-        </p:txBody>
-      </p:sp>
-      <p:sp>
-        <p:nvSpPr>
-          <p:cNvPr id="33" name="TextBox 32"/>
-          <p:cNvSpPr txBox="1"/>
-          <p:nvPr/>
-        </p:nvSpPr>
-        <p:spPr>
-          <a:xfrm>
-            <a:off x="3657599" y="1835518"/>
-            <a:ext cx="2148840" cy="365760"/>
-          </a:xfrm>
-          <a:prstGeom prst="rect">
-            <a:avLst/>
-          </a:prstGeom>
-          <a:noFill/>
-        </p:spPr>
-        <p:txBody>
-          <a:bodyPr wrap="square">
-            <a:spAutoFit/>
-          </a:bodyPr>
-          <a:lstStyle/>
-          <a:p>
-            <a:pPr algn="ctr"/>
-            <a:r>
-              <a:rPr sz="1900" b="1" i="0">
-                <a:solidFill>
-                  <a:srgbClr val="14222E"/>
-                </a:solidFill>
-                <a:latin typeface="Segoe UI"/>
-              </a:rPr>
-              <a:t>129,056</a:t>
-            </a:r>
-          </a:p>
-        </p:txBody>
-      </p:sp>
-      <p:sp>
-        <p:nvSpPr>
-          <p:cNvPr id="34" name="TextBox 33"/>
-          <p:cNvSpPr txBox="1"/>
-          <p:nvPr/>
-        </p:nvSpPr>
-        <p:spPr>
-          <a:xfrm>
-            <a:off x="3657599" y="5230368"/>
-            <a:ext cx="2148840" cy="603504"/>
-          </a:xfrm>
-          <a:prstGeom prst="rect">
-            <a:avLst/>
-          </a:prstGeom>
-          <a:noFill/>
-        </p:spPr>
-        <p:txBody>
-          <a:bodyPr wrap="square">
-            <a:spAutoFit/>
-          </a:bodyPr>
-          <a:lstStyle/>
-          <a:p>
-            <a:pPr algn="ctr"/>
-            <a:r>
-              <a:rPr sz="1500" b="1" i="0">
-                <a:solidFill>
-                  <a:srgbClr val="14222E"/>
-                </a:solidFill>
-                <a:latin typeface="Segoe UI"/>
-              </a:rPr>
-              <a:t>4 units</a:t>
-            </a:r>
-          </a:p>
-          <a:p>
-            <a:pPr algn="ctr"/>
-            <a:r>
-              <a:rPr sz="1150" b="0" i="0">
-                <a:solidFill>
-                  <a:srgbClr val="6B7A87"/>
-                </a:solidFill>
-                <a:latin typeface="Segoe UI"/>
-              </a:rPr>
-              <a:t>3.94 of 4 cores used</a:t>
-            </a:r>
-          </a:p>
-        </p:txBody>
-      </p:sp>
-      <p:sp>
-        <p:nvSpPr>
-          <p:cNvPr id="35" name="TextBox 34"/>
-          <p:cNvSpPr txBox="1"/>
-          <p:nvPr/>
-        </p:nvSpPr>
-        <p:spPr>
-          <a:xfrm>
-            <a:off x="2834640" y="3128555"/>
-            <a:ext cx="1371600" cy="731520"/>
-          </a:xfrm>
-          <a:prstGeom prst="rect">
-            <a:avLst/>
-          </a:prstGeom>
-          <a:noFill/>
-        </p:spPr>
-        <p:txBody>
-          <a:bodyPr wrap="square">
-            <a:spAutoFit/>
-          </a:bodyPr>
-          <a:lstStyle/>
-          <a:p>
-            <a:pPr algn="ctr"/>
-            <a:r>
-              <a:rPr sz="3000" b="1" i="0">
-                <a:solidFill>
-                  <a:srgbClr val="1B6B8A"/>
-                </a:solidFill>
-                <a:latin typeface="Segoe UI"/>
-              </a:rPr>
-              <a:t>1.96x</a:t>
-            </a:r>
-          </a:p>
-          <a:p>
-            <a:pPr algn="ctr"/>
-            <a:r>
-              <a:rPr sz="1100" b="0" i="0">
-                <a:solidFill>
-                  <a:srgbClr val="6B7A87"/>
-                </a:solidFill>
-                <a:latin typeface="Segoe UI"/>
-              </a:rPr>
-              <a:t>orders / sec</a:t>
-            </a:r>
-          </a:p>
-        </p:txBody>
-      </p:sp>
-      <p:sp>
-        <p:nvSpPr>
-          <p:cNvPr id="36" name="TextBox 35"/>
-          <p:cNvSpPr txBox="1"/>
-          <p:nvPr/>
-        </p:nvSpPr>
-        <p:spPr>
-          <a:xfrm>
-            <a:off x="7086600" y="2020824"/>
-            <a:ext cx="4480560" cy="3657600"/>
-          </a:xfrm>
-          <a:prstGeom prst="rect">
-            <a:avLst/>
-          </a:prstGeom>
-          <a:noFill/>
-        </p:spPr>
-        <p:txBody>
-          <a:bodyPr wrap="square">
-            <a:spAutoFit/>
-          </a:bodyPr>
-          <a:lstStyle/>
-          <a:p>
-            <a:pPr algn="l">
-              <a:spcAft>
-                <a:spcPts val="1500"/>
-              </a:spcAft>
-            </a:pPr>
-            <a:r>
-              <a:rPr sz="1500" b="1" i="0">
-                <a:solidFill>
-                  <a:srgbClr val="1B6B8A"/>
-                </a:solidFill>
-                <a:latin typeface="Segoe UI"/>
-              </a:rPr>
-              <a:t>▸   </a:t>
-            </a:r>
-            <a:r>
-              <a:rPr sz="1500" b="1" i="0">
-                <a:solidFill>
-                  <a:srgbClr val="14222E"/>
-                </a:solidFill>
-                <a:latin typeface="Segoe UI"/>
-              </a:rPr>
-              <a:t>A unit is one core and one degree of parallelism, bought together. </a:t>
-            </a:r>
-            <a:r>
-              <a:rPr sz="1500" b="0" i="0">
-                <a:solidFill>
-                  <a:srgbClr val="2E3D4A"/>
-                </a:solidFill>
-                <a:latin typeface="Segoe UI"/>
-              </a:rPr>
-              <a:t>That is what a KPU is in Managed Service for Apache Flink.</a:t>
-            </a:r>
-          </a:p>
-          <a:p>
-            <a:pPr>
-              <a:spcAft>
-                <a:spcPts val="1500"/>
-              </a:spcAft>
-            </a:pPr>
-            <a:r>
-              <a:rPr sz="1500" b="1" i="0">
-                <a:solidFill>
-                  <a:srgbClr val="1B6B8A"/>
-                </a:solidFill>
-                <a:latin typeface="Segoe UI"/>
-              </a:rPr>
-              <a:t>▸   </a:t>
-            </a:r>
-            <a:r>
-              <a:rPr sz="1500" b="1" i="0">
-                <a:solidFill>
-                  <a:srgbClr val="14222E"/>
-                </a:solidFill>
-                <a:latin typeface="Segoe UI"/>
-              </a:rPr>
-              <a:t>Flink used every core it was given — </a:t>
-            </a:r>
-            <a:r>
-              <a:rPr sz="1500" b="0" i="0">
-                <a:solidFill>
-                  <a:srgbClr val="2E3D4A"/>
-                </a:solidFill>
-                <a:latin typeface="Segoe UI"/>
-              </a:rPr>
-              <a:t>2.00 of 2, then 3.94 of 4. A unit bought is a unit worked.</a:t>
-            </a:r>
-          </a:p>
-          <a:p>
-            <a:pPr>
-              <a:spcAft>
-                <a:spcPts val="1500"/>
-              </a:spcAft>
-            </a:pPr>
-            <a:r>
-              <a:rPr sz="1500" b="1" i="0">
-                <a:solidFill>
-                  <a:srgbClr val="1B6B8A"/>
-                </a:solidFill>
-                <a:latin typeface="Segoe UI"/>
-              </a:rPr>
-              <a:t>▸   </a:t>
-            </a:r>
-            <a:r>
-              <a:rPr sz="1500" b="1" i="0">
-                <a:solidFill>
-                  <a:srgbClr val="14222E"/>
-                </a:solidFill>
-                <a:latin typeface="Segoe UI"/>
-              </a:rPr>
-              <a:t>The broker stayed under half a core. </a:t>
-            </a:r>
-            <a:r>
-              <a:rPr sz="1500" b="0" i="0">
-                <a:solidFill>
-                  <a:srgbClr val="2E3D4A"/>
-                </a:solidFill>
-                <a:latin typeface="Segoe UI"/>
-              </a:rPr>
-              <a:t>Flink was the constrained component, and you can only show that something scales when it is the thing that is constrained.</a:t>
-            </a:r>
-          </a:p>
-        </p:txBody>
-      </p:sp>
-    </p:spTree>
-  </p:cSld>
-  <p:clrMapOvr>
-    <a:masterClrMapping/>
-  </p:clrMapOvr>
-</p:sld>
-</file>
-
-<file path=ppt/slides/slide8.xml><?xml version="1.0" encoding="utf-8"?>
-<p:sld xmlns:a="http://schemas.openxmlformats.org/drawingml/2006/main" xmlns:p="http://schemas.openxmlformats.org/presentationml/2006/main" xmlns:r="http://schemas.openxmlformats.org/officeDocument/2006/relationships">
-  <p:cSld>
-    <p:spTree>
-      <p:nvGrpSpPr>
-        <p:cNvPr id="1" name=""/>
-        <p:cNvGrpSpPr/>
-        <p:nvPr/>
-      </p:nvGrpSpPr>
-      <p:grpSpPr/>
-      <p:sp>
-        <p:nvSpPr>
-          <p:cNvPr id="2" name="TextBox 1"/>
-          <p:cNvSpPr txBox="1"/>
-          <p:nvPr/>
-        </p:nvSpPr>
-        <p:spPr>
-          <a:xfrm>
-            <a:off x="640080" y="475488"/>
-            <a:ext cx="10972800" cy="274320"/>
-          </a:xfrm>
-          <a:prstGeom prst="rect">
-            <a:avLst/>
-          </a:prstGeom>
-          <a:noFill/>
-        </p:spPr>
-        <p:txBody>
-          <a:bodyPr wrap="square">
-            <a:spAutoFit/>
-          </a:bodyPr>
-          <a:lstStyle/>
-          <a:p>
-            <a:pPr algn="l"/>
-            <a:r>
-              <a:rPr sz="1150" b="1" i="0" spc="120">
-                <a:solidFill>
-                  <a:srgbClr val="1B6B8A"/>
-                </a:solidFill>
-                <a:latin typeface="Segoe UI"/>
-              </a:rPr>
-              <a:t>EXPLAIN IT</a:t>
-            </a:r>
-          </a:p>
-        </p:txBody>
-      </p:sp>
-      <p:sp>
-        <p:nvSpPr>
-          <p:cNvPr id="3" name="TextBox 2"/>
-          <p:cNvSpPr txBox="1"/>
-          <p:nvPr/>
-        </p:nvSpPr>
-        <p:spPr>
-          <a:xfrm>
-            <a:off x="640080" y="786384"/>
-            <a:ext cx="10972800" cy="731520"/>
-          </a:xfrm>
-          <a:prstGeom prst="rect">
-            <a:avLst/>
-          </a:prstGeom>
-          <a:noFill/>
-        </p:spPr>
-        <p:txBody>
-          <a:bodyPr wrap="square">
-            <a:spAutoFit/>
-          </a:bodyPr>
-          <a:lstStyle/>
-          <a:p>
-            <a:pPr algn="l"/>
-            <a:r>
-              <a:rPr sz="3000" b="1" i="0">
-                <a:solidFill>
-                  <a:srgbClr val="14222E"/>
-                </a:solidFill>
-                <a:latin typeface="Segoe UI"/>
-              </a:rPr>
-              <a:t>Every number on the screen has an answer</a:t>
-            </a:r>
-          </a:p>
-        </p:txBody>
-      </p:sp>
-      <p:sp>
-        <p:nvSpPr>
-          <p:cNvPr id="4" name="Rectangle 3"/>
-          <p:cNvSpPr/>
-          <p:nvPr/>
-        </p:nvSpPr>
-        <p:spPr>
-          <a:xfrm>
-            <a:off x="640080" y="1444752"/>
-            <a:ext cx="10908792" cy="12700"/>
-          </a:xfrm>
-          <a:prstGeom prst="rect">
-            <a:avLst/>
-          </a:prstGeom>
-          <a:solidFill>
-            <a:srgbClr val="D8DFE4"/>
-          </a:solidFill>
-          <a:ln>
-            <a:noFill/>
-          </a:ln>
-          <a:effectLst/>
-        </p:spPr>
-        <p:style>
-          <a:lnRef idx="1">
-            <a:schemeClr val="accent1"/>
-          </a:lnRef>
-          <a:fillRef idx="3">
-            <a:schemeClr val="accent1"/>
-          </a:fillRef>
-          <a:effectRef idx="2">
-            <a:schemeClr val="accent1"/>
-          </a:effectRef>
-          <a:fontRef idx="minor">
-            <a:schemeClr val="lt1"/>
-          </a:fontRef>
-        </p:style>
-        <p:txBody>
-          <a:bodyPr rtlCol="0" anchor="ctr"/>
-          <a:lstStyle/>
-          <a:p>
-            <a:pPr algn="ctr"/>
-          </a:p>
-        </p:txBody>
-      </p:sp>
-      <p:sp>
-        <p:nvSpPr>
-          <p:cNvPr id="5" name="TextBox 4"/>
-          <p:cNvSpPr txBox="1"/>
-          <p:nvPr/>
-        </p:nvSpPr>
-        <p:spPr>
-          <a:xfrm>
-            <a:off x="685800" y="1746504"/>
-            <a:ext cx="10881360" cy="3840480"/>
-          </a:xfrm>
-          <a:prstGeom prst="rect">
-            <a:avLst/>
-          </a:prstGeom>
-          <a:noFill/>
-        </p:spPr>
-        <p:txBody>
-          <a:bodyPr wrap="square">
-            <a:spAutoFit/>
-          </a:bodyPr>
-          <a:lstStyle/>
-          <a:p>
-            <a:pPr algn="l">
-              <a:spcAft>
-                <a:spcPts val="1400"/>
-              </a:spcAft>
-            </a:pPr>
-            <a:r>
-              <a:rPr sz="1700" b="1" i="0">
-                <a:solidFill>
-                  <a:srgbClr val="1B6B8A"/>
-                </a:solidFill>
-                <a:latin typeface="Segoe UI"/>
-              </a:rPr>
-              <a:t>▸   </a:t>
-            </a:r>
-            <a:r>
-              <a:rPr sz="1700" b="1" i="0">
-                <a:solidFill>
-                  <a:srgbClr val="14222E"/>
-                </a:solidFill>
-                <a:latin typeface="Segoe UI"/>
-              </a:rPr>
-              <a:t>Why does sink 4 update four times as often as sink 3?  </a:t>
-            </a:r>
-            <a:r>
-              <a:rPr sz="1700" b="0" i="0">
-                <a:solidFill>
-                  <a:srgbClr val="2E3D4A"/>
-                </a:solidFill>
-                <a:latin typeface="Segoe UI"/>
-              </a:rPr>
-              <a:t>Every block trade splits across four accounts. The quantities reconcile; the counts differ by design.</a:t>
-            </a:r>
-          </a:p>
-          <a:p>
-            <a:pPr>
-              <a:spcAft>
-                <a:spcPts val="1400"/>
-              </a:spcAft>
-            </a:pPr>
-            <a:r>
-              <a:rPr sz="1700" b="1" i="0">
-                <a:solidFill>
-                  <a:srgbClr val="1B6B8A"/>
-                </a:solidFill>
-                <a:latin typeface="Segoe UI"/>
-              </a:rPr>
-              <a:t>▸   </a:t>
-            </a:r>
-            <a:r>
-              <a:rPr sz="1700" b="1" i="0">
-                <a:solidFill>
-                  <a:srgbClr val="14222E"/>
-                </a:solidFill>
-                <a:latin typeface="Segoe UI"/>
-              </a:rPr>
-              <a:t>Why do the market value sinks look like steps?  </a:t>
-            </a:r>
-            <a:r>
-              <a:rPr sz="1700" b="0" i="0">
-                <a:solidFill>
-                  <a:srgbClr val="2E3D4A"/>
-                </a:solidFill>
-                <a:latin typeface="Segoe UI"/>
-              </a:rPr>
-              <a:t>They emit once per key per window, not continuously.</a:t>
-            </a:r>
-          </a:p>
-          <a:p>
-            <a:pPr>
-              <a:spcAft>
-                <a:spcPts val="1400"/>
-              </a:spcAft>
-            </a:pPr>
-            <a:r>
-              <a:rPr sz="1700" b="1" i="0">
-                <a:solidFill>
-                  <a:srgbClr val="1B6B8A"/>
-                </a:solidFill>
-                <a:latin typeface="Segoe UI"/>
-              </a:rPr>
-              <a:t>▸   </a:t>
-            </a:r>
-            <a:r>
-              <a:rPr sz="1700" b="1" i="0">
-                <a:solidFill>
-                  <a:srgbClr val="14222E"/>
-                </a:solidFill>
-                <a:latin typeface="Segoe UI"/>
-              </a:rPr>
-              <a:t>Why is there one aborted checkpoint?  </a:t>
-            </a:r>
-            <a:r>
-              <a:rPr sz="1700" b="0" i="0">
-                <a:solidFill>
-                  <a:srgbClr val="2E3D4A"/>
-                </a:solidFill>
-                <a:latin typeface="Segoe UI"/>
-              </a:rPr>
-              <a:t>At startup the first checkpoint triggers before every task is running. Harmless, and the panel says so.</a:t>
             </a:r>
           </a:p>
         </p:txBody>
@@ -8687,7 +8826,7 @@
                 </a:solidFill>
                 <a:latin typeface="Segoe UI"/>
               </a:rPr>
-              <a:t>LOAD</a:t>
+              <a:t>SCALING</a:t>
             </a:r>
           </a:p>
         </p:txBody>
@@ -8722,7 +8861,7 @@
                 </a:solidFill>
                 <a:latin typeface="Segoe UI"/>
               </a:rPr>
-              <a:t>Both required cases pass</a:t>
+              <a:t>Two units, then four — against a perfect 2x</a:t>
             </a:r>
           </a:p>
         </p:txBody>
@@ -8771,606 +8910,1028 @@
           </a:p>
         </p:txBody>
       </p:sp>
-      <p:graphicFrame>
-        <p:nvGraphicFramePr>
-          <p:cNvPr id="5" name="Table 4"/>
-          <p:cNvGraphicFramePr>
-            <a:graphicFrameLocks noGrp="1"/>
-          </p:cNvGraphicFramePr>
+      <p:sp>
+        <p:nvSpPr>
+          <p:cNvPr id="5" name="Rectangle 4"/>
+          <p:cNvSpPr/>
           <p:nvPr/>
-        </p:nvGraphicFramePr>
-        <p:xfrm>
-          <a:off x="685800" y="1746504"/>
-          <a:ext cx="9509760" cy="1499616"/>
-        </p:xfrm>
-        <a:graphic>
-          <a:graphicData uri="http://schemas.openxmlformats.org/drawingml/2006/table">
-            <a:tbl>
-              <a:tblPr bandRow="1">
-                <a:tableStyleId>{5C22544A-7EE6-4342-B048-85BDC9FD1C3A}</a:tableStyleId>
-              </a:tblPr>
-              <a:tblGrid>
-                <a:gridCol w="1371600"/>
-                <a:gridCol w="2011680"/>
-                <a:gridCol w="1371600"/>
-                <a:gridCol w="1828800"/>
-                <a:gridCol w="1554480"/>
-                <a:gridCol w="1371600"/>
-              </a:tblGrid>
-              <a:tr h="402336">
-                <a:tc>
-                  <a:txBody>
-                    <a:bodyPr wrap="square"/>
-                    <a:lstStyle/>
-                    <a:p>
-                      <a:pPr algn="l"/>
-                      <a:r>
-                        <a:rPr sz="1350" b="1" i="0">
-                          <a:solidFill>
-                            <a:srgbClr val="FFFFFF"/>
-                          </a:solidFill>
-                          <a:latin typeface="Segoe UI"/>
-                        </a:rPr>
-                        <a:t/>
-                      </a:r>
-                    </a:p>
-                  </a:txBody>
-                  <a:tcPr marL="109728" marR="109728" anchor="ctr">
-                    <a:solidFill>
-                      <a:srgbClr val="14222E"/>
-                    </a:solidFill>
-                  </a:tcPr>
-                </a:tc>
-                <a:tc>
-                  <a:txBody>
-                    <a:bodyPr wrap="square"/>
-                    <a:lstStyle/>
-                    <a:p>
-                      <a:pPr algn="r"/>
-                      <a:r>
-                        <a:rPr sz="1350" b="1" i="0">
-                          <a:solidFill>
-                            <a:srgbClr val="FFFFFF"/>
-                          </a:solidFill>
-                          <a:latin typeface="Segoe UI"/>
-                        </a:rPr>
-                        <a:t>orders/s asked</a:t>
-                      </a:r>
-                    </a:p>
-                  </a:txBody>
-                  <a:tcPr marL="109728" marR="109728" anchor="ctr">
-                    <a:solidFill>
-                      <a:srgbClr val="14222E"/>
-                    </a:solidFill>
-                  </a:tcPr>
-                </a:tc>
-                <a:tc>
-                  <a:txBody>
-                    <a:bodyPr wrap="square"/>
-                    <a:lstStyle/>
-                    <a:p>
-                      <a:pPr algn="r"/>
-                      <a:r>
-                        <a:rPr sz="1350" b="1" i="0">
-                          <a:solidFill>
-                            <a:srgbClr val="FFFFFF"/>
-                          </a:solidFill>
-                          <a:latin typeface="Segoe UI"/>
-                        </a:rPr>
-                        <a:t>prices/s</a:t>
-                      </a:r>
-                    </a:p>
-                  </a:txBody>
-                  <a:tcPr marL="109728" marR="109728" anchor="ctr">
-                    <a:solidFill>
-                      <a:srgbClr val="14222E"/>
-                    </a:solidFill>
-                  </a:tcPr>
-                </a:tc>
-                <a:tc>
-                  <a:txBody>
-                    <a:bodyPr wrap="square"/>
-                    <a:lstStyle/>
-                    <a:p>
-                      <a:pPr algn="r"/>
-                      <a:r>
-                        <a:rPr sz="1350" b="1" i="0">
-                          <a:solidFill>
-                            <a:srgbClr val="FFFFFF"/>
-                          </a:solidFill>
-                          <a:latin typeface="Segoe UI"/>
-                        </a:rPr>
-                        <a:t>orders through</a:t>
-                      </a:r>
-                    </a:p>
-                  </a:txBody>
-                  <a:tcPr marL="109728" marR="109728" anchor="ctr">
-                    <a:solidFill>
-                      <a:srgbClr val="14222E"/>
-                    </a:solidFill>
-                  </a:tcPr>
-                </a:tc>
-                <a:tc>
-                  <a:txBody>
-                    <a:bodyPr wrap="square"/>
-                    <a:lstStyle/>
-                    <a:p>
-                      <a:pPr algn="r"/>
-                      <a:r>
-                        <a:rPr sz="1350" b="1" i="0">
-                          <a:solidFill>
-                            <a:srgbClr val="FFFFFF"/>
-                          </a:solidFill>
-                          <a:latin typeface="Segoe UI"/>
-                        </a:rPr>
-                        <a:t>allocations</a:t>
-                      </a:r>
-                    </a:p>
-                  </a:txBody>
-                  <a:tcPr marL="109728" marR="109728" anchor="ctr">
-                    <a:solidFill>
-                      <a:srgbClr val="14222E"/>
-                    </a:solidFill>
-                  </a:tcPr>
-                </a:tc>
-                <a:tc>
-                  <a:txBody>
-                    <a:bodyPr wrap="square"/>
-                    <a:lstStyle/>
-                    <a:p>
-                      <a:pPr algn="r"/>
-                      <a:r>
-                        <a:rPr sz="1350" b="1" i="0">
-                          <a:solidFill>
-                            <a:srgbClr val="FFFFFF"/>
-                          </a:solidFill>
-                          <a:latin typeface="Segoe UI"/>
-                        </a:rPr>
-                        <a:t>order p50</a:t>
-                      </a:r>
-                    </a:p>
-                  </a:txBody>
-                  <a:tcPr marL="109728" marR="109728" anchor="ctr">
-                    <a:solidFill>
-                      <a:srgbClr val="14222E"/>
-                    </a:solidFill>
-                  </a:tcPr>
-                </a:tc>
-              </a:tr>
-              <a:tr h="365760">
-                <a:tc>
-                  <a:txBody>
-                    <a:bodyPr wrap="square"/>
-                    <a:lstStyle/>
-                    <a:p>
-                      <a:pPr algn="l"/>
-                      <a:r>
-                        <a:rPr sz="1350" b="0" i="0">
-                          <a:solidFill>
-                            <a:srgbClr val="2E3D4A"/>
-                          </a:solidFill>
-                          <a:latin typeface="Segoe UI"/>
-                        </a:rPr>
-                        <a:t>baseline</a:t>
-                      </a:r>
-                    </a:p>
-                  </a:txBody>
-                  <a:tcPr marL="109728" marR="109728" anchor="ctr">
-                    <a:solidFill>
-                      <a:srgbClr val="FFFFFF"/>
-                    </a:solidFill>
-                  </a:tcPr>
-                </a:tc>
-                <a:tc>
-                  <a:txBody>
-                    <a:bodyPr wrap="square"/>
-                    <a:lstStyle/>
-                    <a:p>
-                      <a:pPr algn="r"/>
-                      <a:r>
-                        <a:rPr sz="1350" b="0" i="0">
-                          <a:solidFill>
-                            <a:srgbClr val="2E3D4A"/>
-                          </a:solidFill>
-                          <a:latin typeface="Consolas"/>
-                        </a:rPr>
-                        <a:t>10</a:t>
-                      </a:r>
-                    </a:p>
-                  </a:txBody>
-                  <a:tcPr marL="109728" marR="109728" anchor="ctr">
-                    <a:solidFill>
-                      <a:srgbClr val="FFFFFF"/>
-                    </a:solidFill>
-                  </a:tcPr>
-                </a:tc>
-                <a:tc>
-                  <a:txBody>
-                    <a:bodyPr wrap="square"/>
-                    <a:lstStyle/>
-                    <a:p>
-                      <a:pPr algn="r"/>
-                      <a:r>
-                        <a:rPr sz="1350" b="0" i="0">
-                          <a:solidFill>
-                            <a:srgbClr val="2E3D4A"/>
-                          </a:solidFill>
-                          <a:latin typeface="Consolas"/>
-                        </a:rPr>
-                        <a:t>1 000</a:t>
-                      </a:r>
-                    </a:p>
-                  </a:txBody>
-                  <a:tcPr marL="109728" marR="109728" anchor="ctr">
-                    <a:solidFill>
-                      <a:srgbClr val="FFFFFF"/>
-                    </a:solidFill>
-                  </a:tcPr>
-                </a:tc>
-                <a:tc>
-                  <a:txBody>
-                    <a:bodyPr wrap="square"/>
-                    <a:lstStyle/>
-                    <a:p>
-                      <a:pPr algn="r"/>
-                      <a:r>
-                        <a:rPr sz="1350" b="0" i="0">
-                          <a:solidFill>
-                            <a:srgbClr val="2E3D4A"/>
-                          </a:solidFill>
-                          <a:latin typeface="Consolas"/>
-                        </a:rPr>
-                        <a:t>8/s</a:t>
-                      </a:r>
-                    </a:p>
-                  </a:txBody>
-                  <a:tcPr marL="109728" marR="109728" anchor="ctr">
-                    <a:solidFill>
-                      <a:srgbClr val="FFFFFF"/>
-                    </a:solidFill>
-                  </a:tcPr>
-                </a:tc>
-                <a:tc>
-                  <a:txBody>
-                    <a:bodyPr wrap="square"/>
-                    <a:lstStyle/>
-                    <a:p>
-                      <a:pPr algn="r"/>
-                      <a:r>
-                        <a:rPr sz="1350" b="0" i="0">
-                          <a:solidFill>
-                            <a:srgbClr val="2E3D4A"/>
-                          </a:solidFill>
-                          <a:latin typeface="Consolas"/>
-                        </a:rPr>
-                        <a:t>33/s</a:t>
-                      </a:r>
-                    </a:p>
-                  </a:txBody>
-                  <a:tcPr marL="109728" marR="109728" anchor="ctr">
-                    <a:solidFill>
-                      <a:srgbClr val="FFFFFF"/>
-                    </a:solidFill>
-                  </a:tcPr>
-                </a:tc>
-                <a:tc>
-                  <a:txBody>
-                    <a:bodyPr wrap="square"/>
-                    <a:lstStyle/>
-                    <a:p>
-                      <a:pPr algn="r"/>
-                      <a:r>
-                        <a:rPr sz="1350" b="0" i="0">
-                          <a:solidFill>
-                            <a:srgbClr val="2E3D4A"/>
-                          </a:solidFill>
-                          <a:latin typeface="Consolas"/>
-                        </a:rPr>
-                        <a:t>519 ms</a:t>
-                      </a:r>
-                    </a:p>
-                  </a:txBody>
-                  <a:tcPr marL="109728" marR="109728" anchor="ctr">
-                    <a:solidFill>
-                      <a:srgbClr val="FFFFFF"/>
-                    </a:solidFill>
-                  </a:tcPr>
-                </a:tc>
-              </a:tr>
-              <a:tr h="365760">
-                <a:tc>
-                  <a:txBody>
-                    <a:bodyPr wrap="square"/>
-                    <a:lstStyle/>
-                    <a:p>
-                      <a:pPr algn="l"/>
-                      <a:r>
-                        <a:rPr sz="1350" b="1" i="0">
-                          <a:solidFill>
-                            <a:srgbClr val="14222E"/>
-                          </a:solidFill>
-                          <a:latin typeface="Segoe UI"/>
-                        </a:rPr>
-                        <a:t>case 1</a:t>
-                      </a:r>
-                    </a:p>
-                  </a:txBody>
-                  <a:tcPr marL="109728" marR="109728" anchor="ctr">
-                    <a:solidFill>
-                      <a:srgbClr val="F2F5F7"/>
-                    </a:solidFill>
-                  </a:tcPr>
-                </a:tc>
-                <a:tc>
-                  <a:txBody>
-                    <a:bodyPr wrap="square"/>
-                    <a:lstStyle/>
-                    <a:p>
-                      <a:pPr algn="r"/>
-                      <a:r>
-                        <a:rPr sz="1350" b="1" i="0">
-                          <a:solidFill>
-                            <a:srgbClr val="14222E"/>
-                          </a:solidFill>
-                          <a:latin typeface="Consolas"/>
-                        </a:rPr>
-                        <a:t>1 000</a:t>
-                      </a:r>
-                    </a:p>
-                  </a:txBody>
-                  <a:tcPr marL="109728" marR="109728" anchor="ctr">
-                    <a:solidFill>
-                      <a:srgbClr val="F2F5F7"/>
-                    </a:solidFill>
-                  </a:tcPr>
-                </a:tc>
-                <a:tc>
-                  <a:txBody>
-                    <a:bodyPr wrap="square"/>
-                    <a:lstStyle/>
-                    <a:p>
-                      <a:pPr algn="r"/>
-                      <a:r>
-                        <a:rPr sz="1350" b="1" i="0">
-                          <a:solidFill>
-                            <a:srgbClr val="14222E"/>
-                          </a:solidFill>
-                          <a:latin typeface="Consolas"/>
-                        </a:rPr>
-                        <a:t>1 000</a:t>
-                      </a:r>
-                    </a:p>
-                  </a:txBody>
-                  <a:tcPr marL="109728" marR="109728" anchor="ctr">
-                    <a:solidFill>
-                      <a:srgbClr val="F2F5F7"/>
-                    </a:solidFill>
-                  </a:tcPr>
-                </a:tc>
-                <a:tc>
-                  <a:txBody>
-                    <a:bodyPr wrap="square"/>
-                    <a:lstStyle/>
-                    <a:p>
-                      <a:pPr algn="r"/>
-                      <a:r>
-                        <a:rPr sz="1350" b="1" i="0">
-                          <a:solidFill>
-                            <a:srgbClr val="14222E"/>
-                          </a:solidFill>
-                          <a:latin typeface="Consolas"/>
-                        </a:rPr>
-                        <a:t>816/s</a:t>
-                      </a:r>
-                    </a:p>
-                  </a:txBody>
-                  <a:tcPr marL="109728" marR="109728" anchor="ctr">
-                    <a:solidFill>
-                      <a:srgbClr val="F2F5F7"/>
-                    </a:solidFill>
-                  </a:tcPr>
-                </a:tc>
-                <a:tc>
-                  <a:txBody>
-                    <a:bodyPr wrap="square"/>
-                    <a:lstStyle/>
-                    <a:p>
-                      <a:pPr algn="r"/>
-                      <a:r>
-                        <a:rPr sz="1350" b="1" i="0">
-                          <a:solidFill>
-                            <a:srgbClr val="14222E"/>
-                          </a:solidFill>
-                          <a:latin typeface="Consolas"/>
-                        </a:rPr>
-                        <a:t>3 269/s</a:t>
-                      </a:r>
-                    </a:p>
-                  </a:txBody>
-                  <a:tcPr marL="109728" marR="109728" anchor="ctr">
-                    <a:solidFill>
-                      <a:srgbClr val="F2F5F7"/>
-                    </a:solidFill>
-                  </a:tcPr>
-                </a:tc>
-                <a:tc>
-                  <a:txBody>
-                    <a:bodyPr wrap="square"/>
-                    <a:lstStyle/>
-                    <a:p>
-                      <a:pPr algn="r"/>
-                      <a:r>
-                        <a:rPr sz="1350" b="1" i="0">
-                          <a:solidFill>
-                            <a:srgbClr val="14222E"/>
-                          </a:solidFill>
-                          <a:latin typeface="Consolas"/>
-                        </a:rPr>
-                        <a:t>522 ms</a:t>
-                      </a:r>
-                    </a:p>
-                  </a:txBody>
-                  <a:tcPr marL="109728" marR="109728" anchor="ctr">
-                    <a:solidFill>
-                      <a:srgbClr val="F2F5F7"/>
-                    </a:solidFill>
-                  </a:tcPr>
-                </a:tc>
-              </a:tr>
-              <a:tr h="365760">
-                <a:tc>
-                  <a:txBody>
-                    <a:bodyPr wrap="square"/>
-                    <a:lstStyle/>
-                    <a:p>
-                      <a:pPr algn="l"/>
-                      <a:r>
-                        <a:rPr sz="1350" b="1" i="0">
-                          <a:solidFill>
-                            <a:srgbClr val="14222E"/>
-                          </a:solidFill>
-                          <a:latin typeface="Segoe UI"/>
-                        </a:rPr>
-                        <a:t>case 2</a:t>
-                      </a:r>
-                    </a:p>
-                  </a:txBody>
-                  <a:tcPr marL="109728" marR="109728" anchor="ctr">
-                    <a:solidFill>
-                      <a:srgbClr val="F2F5F7"/>
-                    </a:solidFill>
-                  </a:tcPr>
-                </a:tc>
-                <a:tc>
-                  <a:txBody>
-                    <a:bodyPr wrap="square"/>
-                    <a:lstStyle/>
-                    <a:p>
-                      <a:pPr algn="r"/>
-                      <a:r>
-                        <a:rPr sz="1350" b="1" i="0">
-                          <a:solidFill>
-                            <a:srgbClr val="14222E"/>
-                          </a:solidFill>
-                          <a:latin typeface="Consolas"/>
-                        </a:rPr>
-                        <a:t>10</a:t>
-                      </a:r>
-                    </a:p>
-                  </a:txBody>
-                  <a:tcPr marL="109728" marR="109728" anchor="ctr">
-                    <a:solidFill>
-                      <a:srgbClr val="F2F5F7"/>
-                    </a:solidFill>
-                  </a:tcPr>
-                </a:tc>
-                <a:tc>
-                  <a:txBody>
-                    <a:bodyPr wrap="square"/>
-                    <a:lstStyle/>
-                    <a:p>
-                      <a:pPr algn="r"/>
-                      <a:r>
-                        <a:rPr sz="1350" b="1" i="0">
-                          <a:solidFill>
-                            <a:srgbClr val="14222E"/>
-                          </a:solidFill>
-                          <a:latin typeface="Consolas"/>
-                        </a:rPr>
-                        <a:t>20 000</a:t>
-                      </a:r>
-                    </a:p>
-                  </a:txBody>
-                  <a:tcPr marL="109728" marR="109728" anchor="ctr">
-                    <a:solidFill>
-                      <a:srgbClr val="F2F5F7"/>
-                    </a:solidFill>
-                  </a:tcPr>
-                </a:tc>
-                <a:tc>
-                  <a:txBody>
-                    <a:bodyPr wrap="square"/>
-                    <a:lstStyle/>
-                    <a:p>
-                      <a:pPr algn="r"/>
-                      <a:r>
-                        <a:rPr sz="1350" b="1" i="0">
-                          <a:solidFill>
-                            <a:srgbClr val="14222E"/>
-                          </a:solidFill>
-                          <a:latin typeface="Consolas"/>
-                        </a:rPr>
-                        <a:t>8/s</a:t>
-                      </a:r>
-                    </a:p>
-                  </a:txBody>
-                  <a:tcPr marL="109728" marR="109728" anchor="ctr">
-                    <a:solidFill>
-                      <a:srgbClr val="F2F5F7"/>
-                    </a:solidFill>
-                  </a:tcPr>
-                </a:tc>
-                <a:tc>
-                  <a:txBody>
-                    <a:bodyPr wrap="square"/>
-                    <a:lstStyle/>
-                    <a:p>
-                      <a:pPr algn="r"/>
-                      <a:r>
-                        <a:rPr sz="1350" b="1" i="0">
-                          <a:solidFill>
-                            <a:srgbClr val="14222E"/>
-                          </a:solidFill>
-                          <a:latin typeface="Consolas"/>
-                        </a:rPr>
-                        <a:t>33/s</a:t>
-                      </a:r>
-                    </a:p>
-                  </a:txBody>
-                  <a:tcPr marL="109728" marR="109728" anchor="ctr">
-                    <a:solidFill>
-                      <a:srgbClr val="F2F5F7"/>
-                    </a:solidFill>
-                  </a:tcPr>
-                </a:tc>
-                <a:tc>
-                  <a:txBody>
-                    <a:bodyPr wrap="square"/>
-                    <a:lstStyle/>
-                    <a:p>
-                      <a:pPr algn="r"/>
-                      <a:r>
-                        <a:rPr sz="1350" b="1" i="0">
-                          <a:solidFill>
-                            <a:srgbClr val="14222E"/>
-                          </a:solidFill>
-                          <a:latin typeface="Consolas"/>
-                        </a:rPr>
-                        <a:t>513 ms</a:t>
-                      </a:r>
-                    </a:p>
-                  </a:txBody>
-                  <a:tcPr marL="109728" marR="109728" anchor="ctr">
-                    <a:solidFill>
-                      <a:srgbClr val="F2F5F7"/>
-                    </a:solidFill>
-                  </a:tcPr>
-                </a:tc>
-              </a:tr>
-            </a:tbl>
-          </a:graphicData>
-        </a:graphic>
-      </p:graphicFrame>
-      <p:sp>
-        <p:nvSpPr>
-          <p:cNvPr id="6" name="TextBox 5"/>
+        </p:nvSpPr>
+        <p:spPr>
+          <a:xfrm>
+            <a:off x="1051560" y="5138928"/>
+            <a:ext cx="5394960" cy="15875"/>
+          </a:xfrm>
+          <a:prstGeom prst="rect">
+            <a:avLst/>
+          </a:prstGeom>
+          <a:solidFill>
+            <a:srgbClr val="D8DFE4"/>
+          </a:solidFill>
+          <a:ln>
+            <a:noFill/>
+          </a:ln>
+          <a:effectLst/>
+        </p:spPr>
+        <p:style>
+          <a:lnRef idx="1">
+            <a:schemeClr val="accent1"/>
+          </a:lnRef>
+          <a:fillRef idx="3">
+            <a:schemeClr val="accent1"/>
+          </a:fillRef>
+          <a:effectRef idx="2">
+            <a:schemeClr val="accent1"/>
+          </a:effectRef>
+          <a:fontRef idx="minor">
+            <a:schemeClr val="lt1"/>
+          </a:fontRef>
+        </p:style>
+        <p:txBody>
+          <a:bodyPr rtlCol="0" anchor="ctr"/>
+          <a:lstStyle/>
+          <a:p>
+            <a:pPr algn="ctr"/>
+          </a:p>
+        </p:txBody>
+      </p:sp>
+      <p:sp>
+        <p:nvSpPr>
+          <p:cNvPr id="6" name="Rectangle 5"/>
+          <p:cNvSpPr/>
+          <p:nvPr/>
+        </p:nvSpPr>
+        <p:spPr>
+          <a:xfrm>
+            <a:off x="1188720" y="2233478"/>
+            <a:ext cx="128016" cy="20320"/>
+          </a:xfrm>
+          <a:prstGeom prst="rect">
+            <a:avLst/>
+          </a:prstGeom>
+          <a:solidFill>
+            <a:srgbClr val="A84B2A"/>
+          </a:solidFill>
+          <a:ln>
+            <a:noFill/>
+          </a:ln>
+          <a:effectLst/>
+        </p:spPr>
+        <p:style>
+          <a:lnRef idx="1">
+            <a:schemeClr val="accent1"/>
+          </a:lnRef>
+          <a:fillRef idx="3">
+            <a:schemeClr val="accent1"/>
+          </a:fillRef>
+          <a:effectRef idx="2">
+            <a:schemeClr val="accent1"/>
+          </a:effectRef>
+          <a:fontRef idx="minor">
+            <a:schemeClr val="lt1"/>
+          </a:fontRef>
+        </p:style>
+        <p:txBody>
+          <a:bodyPr rtlCol="0" anchor="ctr"/>
+          <a:lstStyle/>
+          <a:p>
+            <a:pPr algn="ctr"/>
+          </a:p>
+        </p:txBody>
+      </p:sp>
+      <p:sp>
+        <p:nvSpPr>
+          <p:cNvPr id="7" name="Rectangle 6"/>
+          <p:cNvSpPr/>
+          <p:nvPr/>
+        </p:nvSpPr>
+        <p:spPr>
+          <a:xfrm>
+            <a:off x="1426464" y="2233478"/>
+            <a:ext cx="128016" cy="20320"/>
+          </a:xfrm>
+          <a:prstGeom prst="rect">
+            <a:avLst/>
+          </a:prstGeom>
+          <a:solidFill>
+            <a:srgbClr val="A84B2A"/>
+          </a:solidFill>
+          <a:ln>
+            <a:noFill/>
+          </a:ln>
+          <a:effectLst/>
+        </p:spPr>
+        <p:style>
+          <a:lnRef idx="1">
+            <a:schemeClr val="accent1"/>
+          </a:lnRef>
+          <a:fillRef idx="3">
+            <a:schemeClr val="accent1"/>
+          </a:fillRef>
+          <a:effectRef idx="2">
+            <a:schemeClr val="accent1"/>
+          </a:effectRef>
+          <a:fontRef idx="minor">
+            <a:schemeClr val="lt1"/>
+          </a:fontRef>
+        </p:style>
+        <p:txBody>
+          <a:bodyPr rtlCol="0" anchor="ctr"/>
+          <a:lstStyle/>
+          <a:p>
+            <a:pPr algn="ctr"/>
+          </a:p>
+        </p:txBody>
+      </p:sp>
+      <p:sp>
+        <p:nvSpPr>
+          <p:cNvPr id="8" name="Rectangle 7"/>
+          <p:cNvSpPr/>
+          <p:nvPr/>
+        </p:nvSpPr>
+        <p:spPr>
+          <a:xfrm>
+            <a:off x="1664208" y="2233478"/>
+            <a:ext cx="128016" cy="20320"/>
+          </a:xfrm>
+          <a:prstGeom prst="rect">
+            <a:avLst/>
+          </a:prstGeom>
+          <a:solidFill>
+            <a:srgbClr val="A84B2A"/>
+          </a:solidFill>
+          <a:ln>
+            <a:noFill/>
+          </a:ln>
+          <a:effectLst/>
+        </p:spPr>
+        <p:style>
+          <a:lnRef idx="1">
+            <a:schemeClr val="accent1"/>
+          </a:lnRef>
+          <a:fillRef idx="3">
+            <a:schemeClr val="accent1"/>
+          </a:fillRef>
+          <a:effectRef idx="2">
+            <a:schemeClr val="accent1"/>
+          </a:effectRef>
+          <a:fontRef idx="minor">
+            <a:schemeClr val="lt1"/>
+          </a:fontRef>
+        </p:style>
+        <p:txBody>
+          <a:bodyPr rtlCol="0" anchor="ctr"/>
+          <a:lstStyle/>
+          <a:p>
+            <a:pPr algn="ctr"/>
+          </a:p>
+        </p:txBody>
+      </p:sp>
+      <p:sp>
+        <p:nvSpPr>
+          <p:cNvPr id="9" name="Rectangle 8"/>
+          <p:cNvSpPr/>
+          <p:nvPr/>
+        </p:nvSpPr>
+        <p:spPr>
+          <a:xfrm>
+            <a:off x="1901952" y="2233478"/>
+            <a:ext cx="128016" cy="20320"/>
+          </a:xfrm>
+          <a:prstGeom prst="rect">
+            <a:avLst/>
+          </a:prstGeom>
+          <a:solidFill>
+            <a:srgbClr val="A84B2A"/>
+          </a:solidFill>
+          <a:ln>
+            <a:noFill/>
+          </a:ln>
+          <a:effectLst/>
+        </p:spPr>
+        <p:style>
+          <a:lnRef idx="1">
+            <a:schemeClr val="accent1"/>
+          </a:lnRef>
+          <a:fillRef idx="3">
+            <a:schemeClr val="accent1"/>
+          </a:fillRef>
+          <a:effectRef idx="2">
+            <a:schemeClr val="accent1"/>
+          </a:effectRef>
+          <a:fontRef idx="minor">
+            <a:schemeClr val="lt1"/>
+          </a:fontRef>
+        </p:style>
+        <p:txBody>
+          <a:bodyPr rtlCol="0" anchor="ctr"/>
+          <a:lstStyle/>
+          <a:p>
+            <a:pPr algn="ctr"/>
+          </a:p>
+        </p:txBody>
+      </p:sp>
+      <p:sp>
+        <p:nvSpPr>
+          <p:cNvPr id="10" name="Rectangle 9"/>
+          <p:cNvSpPr/>
+          <p:nvPr/>
+        </p:nvSpPr>
+        <p:spPr>
+          <a:xfrm>
+            <a:off x="2139696" y="2233478"/>
+            <a:ext cx="128016" cy="20320"/>
+          </a:xfrm>
+          <a:prstGeom prst="rect">
+            <a:avLst/>
+          </a:prstGeom>
+          <a:solidFill>
+            <a:srgbClr val="A84B2A"/>
+          </a:solidFill>
+          <a:ln>
+            <a:noFill/>
+          </a:ln>
+          <a:effectLst/>
+        </p:spPr>
+        <p:style>
+          <a:lnRef idx="1">
+            <a:schemeClr val="accent1"/>
+          </a:lnRef>
+          <a:fillRef idx="3">
+            <a:schemeClr val="accent1"/>
+          </a:fillRef>
+          <a:effectRef idx="2">
+            <a:schemeClr val="accent1"/>
+          </a:effectRef>
+          <a:fontRef idx="minor">
+            <a:schemeClr val="lt1"/>
+          </a:fontRef>
+        </p:style>
+        <p:txBody>
+          <a:bodyPr rtlCol="0" anchor="ctr"/>
+          <a:lstStyle/>
+          <a:p>
+            <a:pPr algn="ctr"/>
+          </a:p>
+        </p:txBody>
+      </p:sp>
+      <p:sp>
+        <p:nvSpPr>
+          <p:cNvPr id="11" name="Rectangle 10"/>
+          <p:cNvSpPr/>
+          <p:nvPr/>
+        </p:nvSpPr>
+        <p:spPr>
+          <a:xfrm>
+            <a:off x="2377440" y="2233478"/>
+            <a:ext cx="128016" cy="20320"/>
+          </a:xfrm>
+          <a:prstGeom prst="rect">
+            <a:avLst/>
+          </a:prstGeom>
+          <a:solidFill>
+            <a:srgbClr val="A84B2A"/>
+          </a:solidFill>
+          <a:ln>
+            <a:noFill/>
+          </a:ln>
+          <a:effectLst/>
+        </p:spPr>
+        <p:style>
+          <a:lnRef idx="1">
+            <a:schemeClr val="accent1"/>
+          </a:lnRef>
+          <a:fillRef idx="3">
+            <a:schemeClr val="accent1"/>
+          </a:fillRef>
+          <a:effectRef idx="2">
+            <a:schemeClr val="accent1"/>
+          </a:effectRef>
+          <a:fontRef idx="minor">
+            <a:schemeClr val="lt1"/>
+          </a:fontRef>
+        </p:style>
+        <p:txBody>
+          <a:bodyPr rtlCol="0" anchor="ctr"/>
+          <a:lstStyle/>
+          <a:p>
+            <a:pPr algn="ctr"/>
+          </a:p>
+        </p:txBody>
+      </p:sp>
+      <p:sp>
+        <p:nvSpPr>
+          <p:cNvPr id="12" name="Rectangle 11"/>
+          <p:cNvSpPr/>
+          <p:nvPr/>
+        </p:nvSpPr>
+        <p:spPr>
+          <a:xfrm>
+            <a:off x="2615184" y="2233478"/>
+            <a:ext cx="128016" cy="20320"/>
+          </a:xfrm>
+          <a:prstGeom prst="rect">
+            <a:avLst/>
+          </a:prstGeom>
+          <a:solidFill>
+            <a:srgbClr val="A84B2A"/>
+          </a:solidFill>
+          <a:ln>
+            <a:noFill/>
+          </a:ln>
+          <a:effectLst/>
+        </p:spPr>
+        <p:style>
+          <a:lnRef idx="1">
+            <a:schemeClr val="accent1"/>
+          </a:lnRef>
+          <a:fillRef idx="3">
+            <a:schemeClr val="accent1"/>
+          </a:fillRef>
+          <a:effectRef idx="2">
+            <a:schemeClr val="accent1"/>
+          </a:effectRef>
+          <a:fontRef idx="minor">
+            <a:schemeClr val="lt1"/>
+          </a:fontRef>
+        </p:style>
+        <p:txBody>
+          <a:bodyPr rtlCol="0" anchor="ctr"/>
+          <a:lstStyle/>
+          <a:p>
+            <a:pPr algn="ctr"/>
+          </a:p>
+        </p:txBody>
+      </p:sp>
+      <p:sp>
+        <p:nvSpPr>
+          <p:cNvPr id="13" name="Rectangle 12"/>
+          <p:cNvSpPr/>
+          <p:nvPr/>
+        </p:nvSpPr>
+        <p:spPr>
+          <a:xfrm>
+            <a:off x="2852928" y="2233478"/>
+            <a:ext cx="128016" cy="20320"/>
+          </a:xfrm>
+          <a:prstGeom prst="rect">
+            <a:avLst/>
+          </a:prstGeom>
+          <a:solidFill>
+            <a:srgbClr val="A84B2A"/>
+          </a:solidFill>
+          <a:ln>
+            <a:noFill/>
+          </a:ln>
+          <a:effectLst/>
+        </p:spPr>
+        <p:style>
+          <a:lnRef idx="1">
+            <a:schemeClr val="accent1"/>
+          </a:lnRef>
+          <a:fillRef idx="3">
+            <a:schemeClr val="accent1"/>
+          </a:fillRef>
+          <a:effectRef idx="2">
+            <a:schemeClr val="accent1"/>
+          </a:effectRef>
+          <a:fontRef idx="minor">
+            <a:schemeClr val="lt1"/>
+          </a:fontRef>
+        </p:style>
+        <p:txBody>
+          <a:bodyPr rtlCol="0" anchor="ctr"/>
+          <a:lstStyle/>
+          <a:p>
+            <a:pPr algn="ctr"/>
+          </a:p>
+        </p:txBody>
+      </p:sp>
+      <p:sp>
+        <p:nvSpPr>
+          <p:cNvPr id="14" name="Rectangle 13"/>
+          <p:cNvSpPr/>
+          <p:nvPr/>
+        </p:nvSpPr>
+        <p:spPr>
+          <a:xfrm>
+            <a:off x="3090672" y="2233478"/>
+            <a:ext cx="128016" cy="20320"/>
+          </a:xfrm>
+          <a:prstGeom prst="rect">
+            <a:avLst/>
+          </a:prstGeom>
+          <a:solidFill>
+            <a:srgbClr val="A84B2A"/>
+          </a:solidFill>
+          <a:ln>
+            <a:noFill/>
+          </a:ln>
+          <a:effectLst/>
+        </p:spPr>
+        <p:style>
+          <a:lnRef idx="1">
+            <a:schemeClr val="accent1"/>
+          </a:lnRef>
+          <a:fillRef idx="3">
+            <a:schemeClr val="accent1"/>
+          </a:fillRef>
+          <a:effectRef idx="2">
+            <a:schemeClr val="accent1"/>
+          </a:effectRef>
+          <a:fontRef idx="minor">
+            <a:schemeClr val="lt1"/>
+          </a:fontRef>
+        </p:style>
+        <p:txBody>
+          <a:bodyPr rtlCol="0" anchor="ctr"/>
+          <a:lstStyle/>
+          <a:p>
+            <a:pPr algn="ctr"/>
+          </a:p>
+        </p:txBody>
+      </p:sp>
+      <p:sp>
+        <p:nvSpPr>
+          <p:cNvPr id="15" name="Rectangle 14"/>
+          <p:cNvSpPr/>
+          <p:nvPr/>
+        </p:nvSpPr>
+        <p:spPr>
+          <a:xfrm>
+            <a:off x="3328416" y="2233478"/>
+            <a:ext cx="128016" cy="20320"/>
+          </a:xfrm>
+          <a:prstGeom prst="rect">
+            <a:avLst/>
+          </a:prstGeom>
+          <a:solidFill>
+            <a:srgbClr val="A84B2A"/>
+          </a:solidFill>
+          <a:ln>
+            <a:noFill/>
+          </a:ln>
+          <a:effectLst/>
+        </p:spPr>
+        <p:style>
+          <a:lnRef idx="1">
+            <a:schemeClr val="accent1"/>
+          </a:lnRef>
+          <a:fillRef idx="3">
+            <a:schemeClr val="accent1"/>
+          </a:fillRef>
+          <a:effectRef idx="2">
+            <a:schemeClr val="accent1"/>
+          </a:effectRef>
+          <a:fontRef idx="minor">
+            <a:schemeClr val="lt1"/>
+          </a:fontRef>
+        </p:style>
+        <p:txBody>
+          <a:bodyPr rtlCol="0" anchor="ctr"/>
+          <a:lstStyle/>
+          <a:p>
+            <a:pPr algn="ctr"/>
+          </a:p>
+        </p:txBody>
+      </p:sp>
+      <p:sp>
+        <p:nvSpPr>
+          <p:cNvPr id="16" name="Rectangle 15"/>
+          <p:cNvSpPr/>
+          <p:nvPr/>
+        </p:nvSpPr>
+        <p:spPr>
+          <a:xfrm>
+            <a:off x="3566160" y="2233478"/>
+            <a:ext cx="128016" cy="20320"/>
+          </a:xfrm>
+          <a:prstGeom prst="rect">
+            <a:avLst/>
+          </a:prstGeom>
+          <a:solidFill>
+            <a:srgbClr val="A84B2A"/>
+          </a:solidFill>
+          <a:ln>
+            <a:noFill/>
+          </a:ln>
+          <a:effectLst/>
+        </p:spPr>
+        <p:style>
+          <a:lnRef idx="1">
+            <a:schemeClr val="accent1"/>
+          </a:lnRef>
+          <a:fillRef idx="3">
+            <a:schemeClr val="accent1"/>
+          </a:fillRef>
+          <a:effectRef idx="2">
+            <a:schemeClr val="accent1"/>
+          </a:effectRef>
+          <a:fontRef idx="minor">
+            <a:schemeClr val="lt1"/>
+          </a:fontRef>
+        </p:style>
+        <p:txBody>
+          <a:bodyPr rtlCol="0" anchor="ctr"/>
+          <a:lstStyle/>
+          <a:p>
+            <a:pPr algn="ctr"/>
+          </a:p>
+        </p:txBody>
+      </p:sp>
+      <p:sp>
+        <p:nvSpPr>
+          <p:cNvPr id="17" name="Rectangle 16"/>
+          <p:cNvSpPr/>
+          <p:nvPr/>
+        </p:nvSpPr>
+        <p:spPr>
+          <a:xfrm>
+            <a:off x="3803904" y="2233478"/>
+            <a:ext cx="128016" cy="20320"/>
+          </a:xfrm>
+          <a:prstGeom prst="rect">
+            <a:avLst/>
+          </a:prstGeom>
+          <a:solidFill>
+            <a:srgbClr val="A84B2A"/>
+          </a:solidFill>
+          <a:ln>
+            <a:noFill/>
+          </a:ln>
+          <a:effectLst/>
+        </p:spPr>
+        <p:style>
+          <a:lnRef idx="1">
+            <a:schemeClr val="accent1"/>
+          </a:lnRef>
+          <a:fillRef idx="3">
+            <a:schemeClr val="accent1"/>
+          </a:fillRef>
+          <a:effectRef idx="2">
+            <a:schemeClr val="accent1"/>
+          </a:effectRef>
+          <a:fontRef idx="minor">
+            <a:schemeClr val="lt1"/>
+          </a:fontRef>
+        </p:style>
+        <p:txBody>
+          <a:bodyPr rtlCol="0" anchor="ctr"/>
+          <a:lstStyle/>
+          <a:p>
+            <a:pPr algn="ctr"/>
+          </a:p>
+        </p:txBody>
+      </p:sp>
+      <p:sp>
+        <p:nvSpPr>
+          <p:cNvPr id="18" name="Rectangle 17"/>
+          <p:cNvSpPr/>
+          <p:nvPr/>
+        </p:nvSpPr>
+        <p:spPr>
+          <a:xfrm>
+            <a:off x="4041648" y="2233478"/>
+            <a:ext cx="128016" cy="20320"/>
+          </a:xfrm>
+          <a:prstGeom prst="rect">
+            <a:avLst/>
+          </a:prstGeom>
+          <a:solidFill>
+            <a:srgbClr val="A84B2A"/>
+          </a:solidFill>
+          <a:ln>
+            <a:noFill/>
+          </a:ln>
+          <a:effectLst/>
+        </p:spPr>
+        <p:style>
+          <a:lnRef idx="1">
+            <a:schemeClr val="accent1"/>
+          </a:lnRef>
+          <a:fillRef idx="3">
+            <a:schemeClr val="accent1"/>
+          </a:fillRef>
+          <a:effectRef idx="2">
+            <a:schemeClr val="accent1"/>
+          </a:effectRef>
+          <a:fontRef idx="minor">
+            <a:schemeClr val="lt1"/>
+          </a:fontRef>
+        </p:style>
+        <p:txBody>
+          <a:bodyPr rtlCol="0" anchor="ctr"/>
+          <a:lstStyle/>
+          <a:p>
+            <a:pPr algn="ctr"/>
+          </a:p>
+        </p:txBody>
+      </p:sp>
+      <p:sp>
+        <p:nvSpPr>
+          <p:cNvPr id="19" name="Rectangle 18"/>
+          <p:cNvSpPr/>
+          <p:nvPr/>
+        </p:nvSpPr>
+        <p:spPr>
+          <a:xfrm>
+            <a:off x="4279392" y="2233478"/>
+            <a:ext cx="128016" cy="20320"/>
+          </a:xfrm>
+          <a:prstGeom prst="rect">
+            <a:avLst/>
+          </a:prstGeom>
+          <a:solidFill>
+            <a:srgbClr val="A84B2A"/>
+          </a:solidFill>
+          <a:ln>
+            <a:noFill/>
+          </a:ln>
+          <a:effectLst/>
+        </p:spPr>
+        <p:style>
+          <a:lnRef idx="1">
+            <a:schemeClr val="accent1"/>
+          </a:lnRef>
+          <a:fillRef idx="3">
+            <a:schemeClr val="accent1"/>
+          </a:fillRef>
+          <a:effectRef idx="2">
+            <a:schemeClr val="accent1"/>
+          </a:effectRef>
+          <a:fontRef idx="minor">
+            <a:schemeClr val="lt1"/>
+          </a:fontRef>
+        </p:style>
+        <p:txBody>
+          <a:bodyPr rtlCol="0" anchor="ctr"/>
+          <a:lstStyle/>
+          <a:p>
+            <a:pPr algn="ctr"/>
+          </a:p>
+        </p:txBody>
+      </p:sp>
+      <p:sp>
+        <p:nvSpPr>
+          <p:cNvPr id="20" name="Rectangle 19"/>
+          <p:cNvSpPr/>
+          <p:nvPr/>
+        </p:nvSpPr>
+        <p:spPr>
+          <a:xfrm>
+            <a:off x="4517136" y="2233478"/>
+            <a:ext cx="128016" cy="20320"/>
+          </a:xfrm>
+          <a:prstGeom prst="rect">
+            <a:avLst/>
+          </a:prstGeom>
+          <a:solidFill>
+            <a:srgbClr val="A84B2A"/>
+          </a:solidFill>
+          <a:ln>
+            <a:noFill/>
+          </a:ln>
+          <a:effectLst/>
+        </p:spPr>
+        <p:style>
+          <a:lnRef idx="1">
+            <a:schemeClr val="accent1"/>
+          </a:lnRef>
+          <a:fillRef idx="3">
+            <a:schemeClr val="accent1"/>
+          </a:fillRef>
+          <a:effectRef idx="2">
+            <a:schemeClr val="accent1"/>
+          </a:effectRef>
+          <a:fontRef idx="minor">
+            <a:schemeClr val="lt1"/>
+          </a:fontRef>
+        </p:style>
+        <p:txBody>
+          <a:bodyPr rtlCol="0" anchor="ctr"/>
+          <a:lstStyle/>
+          <a:p>
+            <a:pPr algn="ctr"/>
+          </a:p>
+        </p:txBody>
+      </p:sp>
+      <p:sp>
+        <p:nvSpPr>
+          <p:cNvPr id="21" name="Rectangle 20"/>
+          <p:cNvSpPr/>
+          <p:nvPr/>
+        </p:nvSpPr>
+        <p:spPr>
+          <a:xfrm>
+            <a:off x="4754880" y="2233478"/>
+            <a:ext cx="128016" cy="20320"/>
+          </a:xfrm>
+          <a:prstGeom prst="rect">
+            <a:avLst/>
+          </a:prstGeom>
+          <a:solidFill>
+            <a:srgbClr val="A84B2A"/>
+          </a:solidFill>
+          <a:ln>
+            <a:noFill/>
+          </a:ln>
+          <a:effectLst/>
+        </p:spPr>
+        <p:style>
+          <a:lnRef idx="1">
+            <a:schemeClr val="accent1"/>
+          </a:lnRef>
+          <a:fillRef idx="3">
+            <a:schemeClr val="accent1"/>
+          </a:fillRef>
+          <a:effectRef idx="2">
+            <a:schemeClr val="accent1"/>
+          </a:effectRef>
+          <a:fontRef idx="minor">
+            <a:schemeClr val="lt1"/>
+          </a:fontRef>
+        </p:style>
+        <p:txBody>
+          <a:bodyPr rtlCol="0" anchor="ctr"/>
+          <a:lstStyle/>
+          <a:p>
+            <a:pPr algn="ctr"/>
+          </a:p>
+        </p:txBody>
+      </p:sp>
+      <p:sp>
+        <p:nvSpPr>
+          <p:cNvPr id="22" name="Rectangle 21"/>
+          <p:cNvSpPr/>
+          <p:nvPr/>
+        </p:nvSpPr>
+        <p:spPr>
+          <a:xfrm>
+            <a:off x="4992624" y="2233478"/>
+            <a:ext cx="128016" cy="20320"/>
+          </a:xfrm>
+          <a:prstGeom prst="rect">
+            <a:avLst/>
+          </a:prstGeom>
+          <a:solidFill>
+            <a:srgbClr val="A84B2A"/>
+          </a:solidFill>
+          <a:ln>
+            <a:noFill/>
+          </a:ln>
+          <a:effectLst/>
+        </p:spPr>
+        <p:style>
+          <a:lnRef idx="1">
+            <a:schemeClr val="accent1"/>
+          </a:lnRef>
+          <a:fillRef idx="3">
+            <a:schemeClr val="accent1"/>
+          </a:fillRef>
+          <a:effectRef idx="2">
+            <a:schemeClr val="accent1"/>
+          </a:effectRef>
+          <a:fontRef idx="minor">
+            <a:schemeClr val="lt1"/>
+          </a:fontRef>
+        </p:style>
+        <p:txBody>
+          <a:bodyPr rtlCol="0" anchor="ctr"/>
+          <a:lstStyle/>
+          <a:p>
+            <a:pPr algn="ctr"/>
+          </a:p>
+        </p:txBody>
+      </p:sp>
+      <p:sp>
+        <p:nvSpPr>
+          <p:cNvPr id="23" name="Rectangle 22"/>
+          <p:cNvSpPr/>
+          <p:nvPr/>
+        </p:nvSpPr>
+        <p:spPr>
+          <a:xfrm>
+            <a:off x="5230368" y="2233478"/>
+            <a:ext cx="128016" cy="20320"/>
+          </a:xfrm>
+          <a:prstGeom prst="rect">
+            <a:avLst/>
+          </a:prstGeom>
+          <a:solidFill>
+            <a:srgbClr val="A84B2A"/>
+          </a:solidFill>
+          <a:ln>
+            <a:noFill/>
+          </a:ln>
+          <a:effectLst/>
+        </p:spPr>
+        <p:style>
+          <a:lnRef idx="1">
+            <a:schemeClr val="accent1"/>
+          </a:lnRef>
+          <a:fillRef idx="3">
+            <a:schemeClr val="accent1"/>
+          </a:fillRef>
+          <a:effectRef idx="2">
+            <a:schemeClr val="accent1"/>
+          </a:effectRef>
+          <a:fontRef idx="minor">
+            <a:schemeClr val="lt1"/>
+          </a:fontRef>
+        </p:style>
+        <p:txBody>
+          <a:bodyPr rtlCol="0" anchor="ctr"/>
+          <a:lstStyle/>
+          <a:p>
+            <a:pPr algn="ctr"/>
+          </a:p>
+        </p:txBody>
+      </p:sp>
+      <p:sp>
+        <p:nvSpPr>
+          <p:cNvPr id="24" name="Rectangle 23"/>
+          <p:cNvSpPr/>
+          <p:nvPr/>
+        </p:nvSpPr>
+        <p:spPr>
+          <a:xfrm>
+            <a:off x="5468112" y="2233478"/>
+            <a:ext cx="128016" cy="20320"/>
+          </a:xfrm>
+          <a:prstGeom prst="rect">
+            <a:avLst/>
+          </a:prstGeom>
+          <a:solidFill>
+            <a:srgbClr val="A84B2A"/>
+          </a:solidFill>
+          <a:ln>
+            <a:noFill/>
+          </a:ln>
+          <a:effectLst/>
+        </p:spPr>
+        <p:style>
+          <a:lnRef idx="1">
+            <a:schemeClr val="accent1"/>
+          </a:lnRef>
+          <a:fillRef idx="3">
+            <a:schemeClr val="accent1"/>
+          </a:fillRef>
+          <a:effectRef idx="2">
+            <a:schemeClr val="accent1"/>
+          </a:effectRef>
+          <a:fontRef idx="minor">
+            <a:schemeClr val="lt1"/>
+          </a:fontRef>
+        </p:style>
+        <p:txBody>
+          <a:bodyPr rtlCol="0" anchor="ctr"/>
+          <a:lstStyle/>
+          <a:p>
+            <a:pPr algn="ctr"/>
+          </a:p>
+        </p:txBody>
+      </p:sp>
+      <p:sp>
+        <p:nvSpPr>
+          <p:cNvPr id="25" name="Rectangle 24"/>
+          <p:cNvSpPr/>
+          <p:nvPr/>
+        </p:nvSpPr>
+        <p:spPr>
+          <a:xfrm>
+            <a:off x="5705856" y="2233478"/>
+            <a:ext cx="128016" cy="20320"/>
+          </a:xfrm>
+          <a:prstGeom prst="rect">
+            <a:avLst/>
+          </a:prstGeom>
+          <a:solidFill>
+            <a:srgbClr val="A84B2A"/>
+          </a:solidFill>
+          <a:ln>
+            <a:noFill/>
+          </a:ln>
+          <a:effectLst/>
+        </p:spPr>
+        <p:style>
+          <a:lnRef idx="1">
+            <a:schemeClr val="accent1"/>
+          </a:lnRef>
+          <a:fillRef idx="3">
+            <a:schemeClr val="accent1"/>
+          </a:fillRef>
+          <a:effectRef idx="2">
+            <a:schemeClr val="accent1"/>
+          </a:effectRef>
+          <a:fontRef idx="minor">
+            <a:schemeClr val="lt1"/>
+          </a:fontRef>
+        </p:style>
+        <p:txBody>
+          <a:bodyPr rtlCol="0" anchor="ctr"/>
+          <a:lstStyle/>
+          <a:p>
+            <a:pPr algn="ctr"/>
+          </a:p>
+        </p:txBody>
+      </p:sp>
+      <p:sp>
+        <p:nvSpPr>
+          <p:cNvPr id="26" name="Rectangle 25"/>
+          <p:cNvSpPr/>
+          <p:nvPr/>
+        </p:nvSpPr>
+        <p:spPr>
+          <a:xfrm>
+            <a:off x="5943600" y="2233478"/>
+            <a:ext cx="128016" cy="20320"/>
+          </a:xfrm>
+          <a:prstGeom prst="rect">
+            <a:avLst/>
+          </a:prstGeom>
+          <a:solidFill>
+            <a:srgbClr val="A84B2A"/>
+          </a:solidFill>
+          <a:ln>
+            <a:noFill/>
+          </a:ln>
+          <a:effectLst/>
+        </p:spPr>
+        <p:style>
+          <a:lnRef idx="1">
+            <a:schemeClr val="accent1"/>
+          </a:lnRef>
+          <a:fillRef idx="3">
+            <a:schemeClr val="accent1"/>
+          </a:fillRef>
+          <a:effectRef idx="2">
+            <a:schemeClr val="accent1"/>
+          </a:effectRef>
+          <a:fontRef idx="minor">
+            <a:schemeClr val="lt1"/>
+          </a:fontRef>
+        </p:style>
+        <p:txBody>
+          <a:bodyPr rtlCol="0" anchor="ctr"/>
+          <a:lstStyle/>
+          <a:p>
+            <a:pPr algn="ctr"/>
+          </a:p>
+        </p:txBody>
+      </p:sp>
+      <p:sp>
+        <p:nvSpPr>
+          <p:cNvPr id="27" name="Rectangle 26"/>
+          <p:cNvSpPr/>
+          <p:nvPr/>
+        </p:nvSpPr>
+        <p:spPr>
+          <a:xfrm>
+            <a:off x="6181344" y="2233478"/>
+            <a:ext cx="128016" cy="20320"/>
+          </a:xfrm>
+          <a:prstGeom prst="rect">
+            <a:avLst/>
+          </a:prstGeom>
+          <a:solidFill>
+            <a:srgbClr val="A84B2A"/>
+          </a:solidFill>
+          <a:ln>
+            <a:noFill/>
+          </a:ln>
+          <a:effectLst/>
+        </p:spPr>
+        <p:style>
+          <a:lnRef idx="1">
+            <a:schemeClr val="accent1"/>
+          </a:lnRef>
+          <a:fillRef idx="3">
+            <a:schemeClr val="accent1"/>
+          </a:fillRef>
+          <a:effectRef idx="2">
+            <a:schemeClr val="accent1"/>
+          </a:effectRef>
+          <a:fontRef idx="minor">
+            <a:schemeClr val="lt1"/>
+          </a:fontRef>
+        </p:style>
+        <p:txBody>
+          <a:bodyPr rtlCol="0" anchor="ctr"/>
+          <a:lstStyle/>
+          <a:p>
+            <a:pPr algn="ctr"/>
+          </a:p>
+        </p:txBody>
+      </p:sp>
+      <p:sp>
+        <p:nvSpPr>
+          <p:cNvPr id="28" name="TextBox 27"/>
           <p:cNvSpPr txBox="1"/>
           <p:nvPr/>
         </p:nvSpPr>
         <p:spPr>
           <a:xfrm>
-            <a:off x="685800" y="3712464"/>
-            <a:ext cx="10881360" cy="822960"/>
+            <a:off x="5074920" y="1940870"/>
+            <a:ext cx="2194560" cy="274320"/>
           </a:xfrm>
           <a:prstGeom prst="rect">
             <a:avLst/>
@@ -9385,13 +9946,437 @@
           <a:p>
             <a:pPr algn="l"/>
             <a:r>
-              <a:rPr sz="1600" b="0" i="0">
+              <a:rPr sz="1150" b="1" i="0">
+                <a:solidFill>
+                  <a:srgbClr val="A84B2A"/>
+                </a:solidFill>
+                <a:latin typeface="Segoe UI"/>
+              </a:rPr>
+              <a:t>perfect 2x  =  146,794</a:t>
+            </a:r>
+          </a:p>
+        </p:txBody>
+      </p:sp>
+      <p:sp>
+        <p:nvSpPr>
+          <p:cNvPr id="29" name="Rounded Rectangle 28"/>
+          <p:cNvSpPr/>
+          <p:nvPr/>
+        </p:nvSpPr>
+        <p:spPr>
+          <a:xfrm>
+            <a:off x="1600200" y="3686203"/>
+            <a:ext cx="1508760" cy="1452725"/>
+          </a:xfrm>
+          <a:prstGeom prst="roundRect">
+            <a:avLst/>
+          </a:prstGeom>
+          <a:solidFill>
+            <a:srgbClr val="9FC2D1"/>
+          </a:solidFill>
+          <a:ln>
+            <a:noFill/>
+          </a:ln>
+          <a:effectLst/>
+        </p:spPr>
+        <p:style>
+          <a:lnRef idx="1">
+            <a:schemeClr val="accent1"/>
+          </a:lnRef>
+          <a:fillRef idx="3">
+            <a:schemeClr val="accent1"/>
+          </a:fillRef>
+          <a:effectRef idx="2">
+            <a:schemeClr val="accent1"/>
+          </a:effectRef>
+          <a:fontRef idx="minor">
+            <a:schemeClr val="lt1"/>
+          </a:fontRef>
+        </p:style>
+        <p:txBody>
+          <a:bodyPr rtlCol="0" anchor="ctr"/>
+          <a:lstStyle/>
+          <a:p>
+            <a:pPr algn="ctr"/>
+          </a:p>
+        </p:txBody>
+      </p:sp>
+      <p:sp>
+        <p:nvSpPr>
+          <p:cNvPr id="30" name="TextBox 29"/>
+          <p:cNvSpPr txBox="1"/>
+          <p:nvPr/>
+        </p:nvSpPr>
+        <p:spPr>
+          <a:xfrm>
+            <a:off x="1280160" y="3265579"/>
+            <a:ext cx="2148840" cy="365760"/>
+          </a:xfrm>
+          <a:prstGeom prst="rect">
+            <a:avLst/>
+          </a:prstGeom>
+          <a:noFill/>
+        </p:spPr>
+        <p:txBody>
+          <a:bodyPr wrap="square">
+            <a:spAutoFit/>
+          </a:bodyPr>
+          <a:lstStyle/>
+          <a:p>
+            <a:pPr algn="ctr"/>
+            <a:r>
+              <a:rPr sz="1900" b="1" i="0">
                 <a:solidFill>
                   <a:srgbClr val="14222E"/>
                 </a:solidFill>
                 <a:latin typeface="Segoe UI"/>
               </a:rPr>
-              <a:t>A hundredfold on orders, twentyfold on prices — order latency unmoved in both.</a:t>
+              <a:t>73,397</a:t>
+            </a:r>
+          </a:p>
+        </p:txBody>
+      </p:sp>
+      <p:sp>
+        <p:nvSpPr>
+          <p:cNvPr id="31" name="TextBox 30"/>
+          <p:cNvSpPr txBox="1"/>
+          <p:nvPr/>
+        </p:nvSpPr>
+        <p:spPr>
+          <a:xfrm>
+            <a:off x="1280160" y="5230368"/>
+            <a:ext cx="2148840" cy="603504"/>
+          </a:xfrm>
+          <a:prstGeom prst="rect">
+            <a:avLst/>
+          </a:prstGeom>
+          <a:noFill/>
+        </p:spPr>
+        <p:txBody>
+          <a:bodyPr wrap="square">
+            <a:spAutoFit/>
+          </a:bodyPr>
+          <a:lstStyle/>
+          <a:p>
+            <a:pPr algn="ctr"/>
+            <a:r>
+              <a:rPr sz="1500" b="1" i="0">
+                <a:solidFill>
+                  <a:srgbClr val="14222E"/>
+                </a:solidFill>
+                <a:latin typeface="Segoe UI"/>
+              </a:rPr>
+              <a:t>2 units</a:t>
+            </a:r>
+          </a:p>
+          <a:p>
+            <a:pPr algn="ctr"/>
+            <a:r>
+              <a:rPr sz="1150" b="0" i="0">
+                <a:solidFill>
+                  <a:srgbClr val="6B7A87"/>
+                </a:solidFill>
+                <a:latin typeface="Segoe UI"/>
+              </a:rPr>
+              <a:t>1.99 of 2 cores used</a:t>
+            </a:r>
+          </a:p>
+        </p:txBody>
+      </p:sp>
+      <p:sp>
+        <p:nvSpPr>
+          <p:cNvPr id="32" name="Rounded Rectangle 31"/>
+          <p:cNvSpPr/>
+          <p:nvPr/>
+        </p:nvSpPr>
+        <p:spPr>
+          <a:xfrm>
+            <a:off x="3977639" y="2247946"/>
+            <a:ext cx="1508760" cy="2890982"/>
+          </a:xfrm>
+          <a:prstGeom prst="roundRect">
+            <a:avLst/>
+          </a:prstGeom>
+          <a:solidFill>
+            <a:srgbClr val="1B6B8A"/>
+          </a:solidFill>
+          <a:ln>
+            <a:noFill/>
+          </a:ln>
+          <a:effectLst/>
+        </p:spPr>
+        <p:style>
+          <a:lnRef idx="1">
+            <a:schemeClr val="accent1"/>
+          </a:lnRef>
+          <a:fillRef idx="3">
+            <a:schemeClr val="accent1"/>
+          </a:fillRef>
+          <a:effectRef idx="2">
+            <a:schemeClr val="accent1"/>
+          </a:effectRef>
+          <a:fontRef idx="minor">
+            <a:schemeClr val="lt1"/>
+          </a:fontRef>
+        </p:style>
+        <p:txBody>
+          <a:bodyPr rtlCol="0" anchor="ctr"/>
+          <a:lstStyle/>
+          <a:p>
+            <a:pPr algn="ctr"/>
+          </a:p>
+        </p:txBody>
+      </p:sp>
+      <p:sp>
+        <p:nvSpPr>
+          <p:cNvPr id="33" name="TextBox 32"/>
+          <p:cNvSpPr txBox="1"/>
+          <p:nvPr/>
+        </p:nvSpPr>
+        <p:spPr>
+          <a:xfrm>
+            <a:off x="3657599" y="1827322"/>
+            <a:ext cx="2148840" cy="365760"/>
+          </a:xfrm>
+          <a:prstGeom prst="rect">
+            <a:avLst/>
+          </a:prstGeom>
+          <a:noFill/>
+        </p:spPr>
+        <p:txBody>
+          <a:bodyPr wrap="square">
+            <a:spAutoFit/>
+          </a:bodyPr>
+          <a:lstStyle/>
+          <a:p>
+            <a:pPr algn="ctr"/>
+            <a:r>
+              <a:rPr sz="1900" b="1" i="0">
+                <a:solidFill>
+                  <a:srgbClr val="14222E"/>
+                </a:solidFill>
+                <a:latin typeface="Segoe UI"/>
+              </a:rPr>
+              <a:t>146,063</a:t>
+            </a:r>
+          </a:p>
+        </p:txBody>
+      </p:sp>
+      <p:sp>
+        <p:nvSpPr>
+          <p:cNvPr id="34" name="TextBox 33"/>
+          <p:cNvSpPr txBox="1"/>
+          <p:nvPr/>
+        </p:nvSpPr>
+        <p:spPr>
+          <a:xfrm>
+            <a:off x="3657599" y="5230368"/>
+            <a:ext cx="2148840" cy="603504"/>
+          </a:xfrm>
+          <a:prstGeom prst="rect">
+            <a:avLst/>
+          </a:prstGeom>
+          <a:noFill/>
+        </p:spPr>
+        <p:txBody>
+          <a:bodyPr wrap="square">
+            <a:spAutoFit/>
+          </a:bodyPr>
+          <a:lstStyle/>
+          <a:p>
+            <a:pPr algn="ctr"/>
+            <a:r>
+              <a:rPr sz="1500" b="1" i="0">
+                <a:solidFill>
+                  <a:srgbClr val="14222E"/>
+                </a:solidFill>
+                <a:latin typeface="Segoe UI"/>
+              </a:rPr>
+              <a:t>4 units</a:t>
+            </a:r>
+          </a:p>
+          <a:p>
+            <a:pPr algn="ctr"/>
+            <a:r>
+              <a:rPr sz="1150" b="0" i="0">
+                <a:solidFill>
+                  <a:srgbClr val="6B7A87"/>
+                </a:solidFill>
+                <a:latin typeface="Segoe UI"/>
+              </a:rPr>
+              <a:t>3.89 of 4 cores used</a:t>
+            </a:r>
+          </a:p>
+        </p:txBody>
+      </p:sp>
+      <p:sp>
+        <p:nvSpPr>
+          <p:cNvPr id="35" name="TextBox 34"/>
+          <p:cNvSpPr txBox="1"/>
+          <p:nvPr/>
+        </p:nvSpPr>
+        <p:spPr>
+          <a:xfrm>
+            <a:off x="2834640" y="3357585"/>
+            <a:ext cx="1371600" cy="731520"/>
+          </a:xfrm>
+          <a:prstGeom prst="rect">
+            <a:avLst/>
+          </a:prstGeom>
+          <a:noFill/>
+        </p:spPr>
+        <p:txBody>
+          <a:bodyPr wrap="square">
+            <a:spAutoFit/>
+          </a:bodyPr>
+          <a:lstStyle/>
+          <a:p>
+            <a:pPr algn="ctr"/>
+            <a:r>
+              <a:rPr sz="3000" b="1" i="0">
+                <a:solidFill>
+                  <a:srgbClr val="1B6B8A"/>
+                </a:solidFill>
+                <a:latin typeface="Segoe UI"/>
+              </a:rPr>
+              <a:t>1.99x</a:t>
+            </a:r>
+          </a:p>
+          <a:p>
+            <a:pPr algn="ctr"/>
+            <a:r>
+              <a:rPr sz="1100" b="0" i="0">
+                <a:solidFill>
+                  <a:srgbClr val="6B7A87"/>
+                </a:solidFill>
+                <a:latin typeface="Segoe UI"/>
+              </a:rPr>
+              <a:t>orders / sec</a:t>
+            </a:r>
+          </a:p>
+        </p:txBody>
+      </p:sp>
+      <p:sp>
+        <p:nvSpPr>
+          <p:cNvPr id="36" name="TextBox 35"/>
+          <p:cNvSpPr txBox="1"/>
+          <p:nvPr/>
+        </p:nvSpPr>
+        <p:spPr>
+          <a:xfrm>
+            <a:off x="7086600" y="2020824"/>
+            <a:ext cx="4480560" cy="3657600"/>
+          </a:xfrm>
+          <a:prstGeom prst="rect">
+            <a:avLst/>
+          </a:prstGeom>
+          <a:noFill/>
+        </p:spPr>
+        <p:txBody>
+          <a:bodyPr wrap="square">
+            <a:spAutoFit/>
+          </a:bodyPr>
+          <a:lstStyle/>
+          <a:p>
+            <a:pPr algn="l">
+              <a:spcAft>
+                <a:spcPts val="1500"/>
+              </a:spcAft>
+            </a:pPr>
+            <a:r>
+              <a:rPr sz="1500" b="1" i="0">
+                <a:solidFill>
+                  <a:srgbClr val="1B6B8A"/>
+                </a:solidFill>
+                <a:latin typeface="Segoe UI"/>
+              </a:rPr>
+              <a:t>▸   </a:t>
+            </a:r>
+            <a:r>
+              <a:rPr sz="1500" b="1" i="0">
+                <a:solidFill>
+                  <a:srgbClr val="14222E"/>
+                </a:solidFill>
+                <a:latin typeface="Segoe UI"/>
+              </a:rPr>
+              <a:t>A unit is one core and one degree of parallelism, bought together. </a:t>
+            </a:r>
+            <a:r>
+              <a:rPr sz="1500" b="0" i="0">
+                <a:solidFill>
+                  <a:srgbClr val="2E3D4A"/>
+                </a:solidFill>
+                <a:latin typeface="Segoe UI"/>
+              </a:rPr>
+              <a:t>That is what a KPU is in Managed Service for Apache Flink.</a:t>
+            </a:r>
+          </a:p>
+          <a:p>
+            <a:pPr>
+              <a:spcAft>
+                <a:spcPts val="1500"/>
+              </a:spcAft>
+            </a:pPr>
+            <a:r>
+              <a:rPr sz="1500" b="1" i="0">
+                <a:solidFill>
+                  <a:srgbClr val="1B6B8A"/>
+                </a:solidFill>
+                <a:latin typeface="Segoe UI"/>
+              </a:rPr>
+              <a:t>▸   </a:t>
+            </a:r>
+            <a:r>
+              <a:rPr sz="1500" b="1" i="0">
+                <a:solidFill>
+                  <a:srgbClr val="14222E"/>
+                </a:solidFill>
+                <a:latin typeface="Segoe UI"/>
+              </a:rPr>
+              <a:t>Flink used every core it was given — </a:t>
+            </a:r>
+            <a:r>
+              <a:rPr sz="1500" b="0" i="0">
+                <a:solidFill>
+                  <a:srgbClr val="2E3D4A"/>
+                </a:solidFill>
+                <a:latin typeface="Segoe UI"/>
+              </a:rPr>
+              <a:t>1.99 of 2, then 3.89 of 4. A unit bought is a unit worked.</a:t>
+            </a:r>
+          </a:p>
+          <a:p>
+            <a:pPr>
+              <a:spcAft>
+                <a:spcPts val="1500"/>
+              </a:spcAft>
+            </a:pPr>
+            <a:r>
+              <a:rPr sz="1500" b="1" i="0">
+                <a:solidFill>
+                  <a:srgbClr val="1B6B8A"/>
+                </a:solidFill>
+                <a:latin typeface="Segoe UI"/>
+              </a:rPr>
+              <a:t>▸   </a:t>
+            </a:r>
+            <a:r>
+              <a:rPr sz="1500" b="1" i="0">
+                <a:solidFill>
+                  <a:srgbClr val="14222E"/>
+                </a:solidFill>
+                <a:latin typeface="Segoe UI"/>
+              </a:rPr>
+              <a:t>The broker stayed under half a core. </a:t>
+            </a:r>
+            <a:r>
+              <a:rPr sz="1500" b="0" i="0">
+                <a:solidFill>
+                  <a:srgbClr val="2E3D4A"/>
+                </a:solidFill>
+                <a:latin typeface="Segoe UI"/>
+              </a:rPr>
+              <a:t>Flink was the constrained component, and you can only show that something scales when it is the thing that is constrained.</a:t>
             </a:r>
           </a:p>
         </p:txBody>

--- a/docs/deck/final-demo.pptx
+++ b/docs/deck/final-demo.pptx
@@ -1072,7 +1072,7 @@
           <a:lstStyle/>
           <a:p>
             <a:r>
-              <a:t>These are rendered from the real measurement windows. If the live demo will not start, this slide and the Flink graph slide are the demo.</a:t>
+              <a:t>Rendered from the real measurement windows of the same run the next two slides quote -- 8 partitions, 5s checkpoint, 50M queued orders. If the live demo will not start, this slide and the Flink graph slide are the demo.</a:t>
             </a:r>
           </a:p>
         </p:txBody>
@@ -7154,7 +7154,7 @@
                 </a:solidFill>
                 <a:latin typeface="Consolas"/>
               </a:rPr>
-              <a:t>8</a:t>
+              <a:t>4</a:t>
             </a:r>
           </a:p>
         </p:txBody>
@@ -8751,7 +8751,42 @@
         </p:nvSpPr>
         <p:spPr>
           <a:xfrm>
-            <a:off x="685800" y="3438144"/>
+            <a:off x="685800" y="3008376"/>
+            <a:ext cx="10881360" cy="822960"/>
+          </a:xfrm>
+          <a:prstGeom prst="rect">
+            <a:avLst/>
+          </a:prstGeom>
+          <a:noFill/>
+        </p:spPr>
+        <p:txBody>
+          <a:bodyPr wrap="square">
+            <a:spAutoFit/>
+          </a:bodyPr>
+          <a:lstStyle/>
+          <a:p>
+            <a:pPr algn="l"/>
+            <a:r>
+              <a:rPr sz="1300" b="0" i="1">
+                <a:solidFill>
+                  <a:srgbClr val="6B7A87"/>
+                </a:solidFill>
+                <a:latin typeface="Segoe UI"/>
+              </a:rPr>
+              <a:t>50,000,000 queued orders drained with the producer stopped, 8 partitions and a 5 s checkpoint interval held constant across both cases — so nothing varies but the units. These are the harness's settings, not the demo's.</a:t>
+            </a:r>
+          </a:p>
+        </p:txBody>
+      </p:sp>
+      <p:sp>
+        <p:nvSpPr>
+          <p:cNvPr id="7" name="TextBox 6"/>
+          <p:cNvSpPr txBox="1"/>
+          <p:nvPr/>
+        </p:nvSpPr>
+        <p:spPr>
+          <a:xfrm>
+            <a:off x="685800" y="3849624"/>
             <a:ext cx="10881360" cy="822960"/>
           </a:xfrm>
           <a:prstGeom prst="rect">
@@ -8773,7 +8808,7 @@
                 </a:solidFill>
                 <a:latin typeface="Segoe UI"/>
               </a:rPr>
-              <a:t>A unit is one core and one degree of parallelism, bought together — a KPU.  Flink used every core it was given; the broker stayed under half a core.</a:t>
+              <a:t>A unit is one core and one degree of parallelism, bought together — a KPU.  Flink used every core it was given; the broker never passed 0.78 of one.</a:t>
             </a:r>
           </a:p>
         </p:txBody>
@@ -10367,7 +10402,7 @@
                 </a:solidFill>
                 <a:latin typeface="Segoe UI"/>
               </a:rPr>
-              <a:t>The broker stayed under half a core. </a:t>
+              <a:t>The broker never passed 0.78 of a core. </a:t>
             </a:r>
             <a:r>
               <a:rPr sz="1500" b="0" i="0">

--- a/docs/deck/final-demo.pptx
+++ b/docs/deck/final-demo.pptx
@@ -7459,7 +7459,7 @@
         <p:spPr>
           <a:xfrm>
             <a:off x="566928" y="1801368"/>
-            <a:ext cx="5266944" cy="310896"/>
+            <a:ext cx="4663440" cy="310896"/>
           </a:xfrm>
           <a:prstGeom prst="rect">
             <a:avLst/>
@@ -7502,7 +7502,7 @@
         <p:spPr>
           <a:xfrm>
             <a:off x="566928" y="2167128"/>
-            <a:ext cx="5266944" cy="3924389"/>
+            <a:ext cx="4663440" cy="3474720"/>
           </a:xfrm>
           <a:prstGeom prst="rect">
             <a:avLst/>
@@ -7518,7 +7518,7 @@
         <p:spPr>
           <a:xfrm>
             <a:off x="566928" y="2167128"/>
-            <a:ext cx="5266944" cy="3924389"/>
+            <a:ext cx="4663440" cy="3474720"/>
           </a:xfrm>
           <a:prstGeom prst="rect">
             <a:avLst/>
@@ -7561,8 +7561,8 @@
         </p:nvSpPr>
         <p:spPr>
           <a:xfrm>
-            <a:off x="566928" y="6182957"/>
-            <a:ext cx="5266944" cy="548640"/>
+            <a:off x="566928" y="5742432"/>
+            <a:ext cx="4663440" cy="457200"/>
           </a:xfrm>
           <a:prstGeom prst="rect">
             <a:avLst/>
@@ -7597,7 +7597,7 @@
         <p:spPr>
           <a:xfrm>
             <a:off x="6355080" y="1801368"/>
-            <a:ext cx="5266944" cy="310896"/>
+            <a:ext cx="4663440" cy="310896"/>
           </a:xfrm>
           <a:prstGeom prst="rect">
             <a:avLst/>
@@ -7640,7 +7640,7 @@
         <p:spPr>
           <a:xfrm>
             <a:off x="6355080" y="2167128"/>
-            <a:ext cx="5266944" cy="3604619"/>
+            <a:ext cx="4663440" cy="3191590"/>
           </a:xfrm>
           <a:prstGeom prst="rect">
             <a:avLst/>
@@ -7656,7 +7656,7 @@
         <p:spPr>
           <a:xfrm>
             <a:off x="6355080" y="2167128"/>
-            <a:ext cx="5266944" cy="3604619"/>
+            <a:ext cx="4663440" cy="3191590"/>
           </a:xfrm>
           <a:prstGeom prst="rect">
             <a:avLst/>
@@ -7699,8 +7699,8 @@
         </p:nvSpPr>
         <p:spPr>
           <a:xfrm>
-            <a:off x="6355080" y="5863187"/>
-            <a:ext cx="5266944" cy="548640"/>
+            <a:off x="6355080" y="5742432"/>
+            <a:ext cx="4663440" cy="457200"/>
           </a:xfrm>
           <a:prstGeom prst="rect">
             <a:avLst/>
@@ -7734,7 +7734,7 @@
         </p:nvSpPr>
         <p:spPr>
           <a:xfrm>
-            <a:off x="685800" y="5577840"/>
+            <a:off x="685800" y="6254496"/>
             <a:ext cx="10881360" cy="822960"/>
           </a:xfrm>
           <a:prstGeom prst="rect">
@@ -9965,8 +9965,8 @@
         </p:nvSpPr>
         <p:spPr>
           <a:xfrm>
-            <a:off x="5074920" y="1940870"/>
-            <a:ext cx="2194560" cy="274320"/>
+            <a:off x="1188720" y="1904294"/>
+            <a:ext cx="2560320" cy="274320"/>
           </a:xfrm>
           <a:prstGeom prst="rect">
             <a:avLst/>
@@ -10252,8 +10252,8 @@
         </p:nvSpPr>
         <p:spPr>
           <a:xfrm>
-            <a:off x="2834640" y="3357585"/>
-            <a:ext cx="1371600" cy="731520"/>
+            <a:off x="2898648" y="3357585"/>
+            <a:ext cx="1280160" cy="731520"/>
           </a:xfrm>
           <a:prstGeom prst="rect">
             <a:avLst/>
@@ -10268,7 +10268,7 @@
           <a:p>
             <a:pPr algn="ctr"/>
             <a:r>
-              <a:rPr sz="3000" b="1" i="0">
+              <a:rPr sz="2200" b="1" i="0">
                 <a:solidFill>
                   <a:srgbClr val="1B6B8A"/>
                 </a:solidFill>
